--- a/docs/OfficePilot-作品介绍.pptx
+++ b/docs/OfficePilot-作品介绍.pptx
@@ -2040,6 +2040,45 @@
         </p:nvSpPr>
         <p:spPr>
           <a:xfrm>
+            <a:off x="822960" y="5705856"/>
+            <a:ext cx="7315200" cy="237744"/>
+          </a:xfrm>
+          <a:prstGeom prst="rect">
+            <a:avLst/>
+          </a:prstGeom>
+          <a:noFill/>
+          <a:ln/>
+        </p:spPr>
+        <p:txBody>
+          <a:bodyPr wrap="square" lIns="0" tIns="0" rIns="0" bIns="0" rtlCol="0" anchor="ctr"/>
+          <a:lstStyle/>
+          <a:p>
+            <a:pPr indent="0" marL="0">
+              <a:buNone/>
+            </a:pPr>
+            <a:r>
+              <a:rPr lang="en-US" sz="900" dirty="0">
+                <a:solidFill>
+                  <a:srgbClr val="7A7468"/>
+                </a:solidFill>
+                <a:latin typeface="Microsoft YaHei" pitchFamily="34" charset="0"/>
+                <a:ea typeface="Microsoft YaHei" pitchFamily="34" charset="-122"/>
+                <a:cs typeface="Microsoft YaHei" pitchFamily="34" charset="-120"/>
+              </a:rPr>
+              <a:t>团队信息：单人项目 · 姓名：________</a:t>
+            </a:r>
+            <a:endParaRPr lang="en-US" sz="900" dirty="0"/>
+          </a:p>
+        </p:txBody>
+      </p:sp>
+      <p:sp>
+        <p:nvSpPr>
+          <p:cNvPr id="19" name="Text 17"/>
+          <p:cNvSpPr/>
+          <p:nvPr/>
+        </p:nvSpPr>
+        <p:spPr>
+          <a:xfrm>
             <a:off x="822960" y="6053328"/>
             <a:ext cx="9601200" cy="237744"/>
           </a:xfrm>
@@ -2073,7 +2112,7 @@
       </p:sp>
       <p:sp>
         <p:nvSpPr>
-          <p:cNvPr id="19" name="Text 17"/>
+          <p:cNvPr id="20" name="Text 18"/>
           <p:cNvSpPr/>
           <p:nvPr/>
         </p:nvSpPr>
@@ -2101,7 +2140,7 @@
       </p:sp>
       <p:sp>
         <p:nvSpPr>
-          <p:cNvPr id="20" name="Text 18"/>
+          <p:cNvPr id="21" name="Text 19"/>
           <p:cNvSpPr/>
           <p:nvPr/>
         </p:nvSpPr>
@@ -11959,7 +11998,7 @@
                 <a:ea typeface="Microsoft YaHei" pitchFamily="34" charset="-122"/>
                 <a:cs typeface="Microsoft YaHei" pitchFamily="34" charset="-120"/>
               </a:rPr>
-              <a:t>AI-CODING-LOG · 76 个提交与缺陷记录</a:t>
+              <a:t>AI-CODING-LOG · 82 个提交与缺陷记录</a:t>
             </a:r>
             <a:endParaRPr lang="en-US" sz="950" dirty="0"/>
           </a:p>
@@ -12727,7 +12766,7 @@
                 <a:ea typeface="Microsoft YaHei" pitchFamily="34" charset="-122"/>
                 <a:cs typeface="Microsoft YaHei" pitchFamily="34" charset="-120"/>
               </a:rPr>
-              <a:t>演示录屏与现场彩排未完成</a:t>
+              <a:t>现场彩排：E2E 6/6 覆盖主流程；录屏未录制（可选）</a:t>
             </a:r>
             <a:endParaRPr lang="en-US" sz="900" dirty="0"/>
           </a:p>

--- a/docs/OfficePilot-作品介绍.pptx
+++ b/docs/OfficePilot-作品介绍.pptx
@@ -1,24 +1,24 @@
 
 <file path=ppt/presentation.xml><?xml version="1.0" encoding="utf-8"?>
-<p:presentation xmlns:a="http://schemas.openxmlformats.org/drawingml/2006/main" xmlns:r="http://schemas.openxmlformats.org/officeDocument/2006/relationships" xmlns:p="http://schemas.openxmlformats.org/presentationml/2006/main" saveSubsetFonts="1" autoCompressPictures="0">
+<p:presentation xmlns:a="http://schemas.openxmlformats.org/drawingml/2006/main" xmlns:r="http://schemas.openxmlformats.org/officeDocument/2006/relationships" xmlns:p="http://schemas.openxmlformats.org/presentationml/2006/main" autoCompressPictures="0">
   <p:sldMasterIdLst>
     <p:sldMasterId id="2147483648" r:id="rId1"/>
   </p:sldMasterIdLst>
+  <p:notesMasterIdLst>
+    <p:notesMasterId r:id="rId4"/>
+  </p:notesMasterIdLst>
   <p:sldIdLst>
-    <p:sldId id="256" r:id="rId2"/>
-    <p:sldId id="257" r:id="rId3"/>
-    <p:sldId id="258" r:id="rId4"/>
-    <p:sldId id="259" r:id="rId5"/>
-    <p:sldId id="260" r:id="rId6"/>
-    <p:sldId id="261" r:id="rId7"/>
-    <p:sldId id="262" r:id="rId8"/>
-    <p:sldId id="263" r:id="rId9"/>
+    <p:sldId id="256" r:id="rId3"/>
+    <p:sldId id="257" r:id="rId5"/>
+    <p:sldId id="258" r:id="rId6"/>
+    <p:sldId id="259" r:id="rId7"/>
+    <p:sldId id="260" r:id="rId8"/>
+    <p:sldId id="261" r:id="rId9"/>
+    <p:sldId id="262" r:id="rId10"/>
+    <p:sldId id="263" r:id="rId11"/>
   </p:sldIdLst>
-  <p:notesMasterIdLst>
-    <p:notesMasterId r:id="rId10"/>
-  </p:notesMasterIdLst>
-  <p:sldSz cx="12191695" cy="6858000"/>
-  <p:notesSz cx="6858000" cy="12191695"/>
+  <p:sldSz cx="12191365" cy="6858000"/>
+  <p:notesSz cx="6858000" cy="12191365"/>
   <p:defaultTextStyle>
     <a:lvl1pPr marL="0" algn="l" defTabSz="914400" rtl="0" eaLnBrk="1" latinLnBrk="0" hangingPunct="1">
       <a:defRPr sz="1800" kern="1200">
@@ -196,7 +196,6 @@
           <a:p>
             <a:fld id="{5282F153-3F37-0F45-9E97-73ACFA13230C}" type="datetimeFigureOut">
               <a:rPr lang="en-US"/>
-              <a:t>7/23/19</a:t>
             </a:fld>
             <a:endParaRPr lang="en-US"/>
           </a:p>
@@ -263,6 +262,7 @@
               <a:rPr lang="en-US"/>
               <a:t>Click to edit Master text styles</a:t>
             </a:r>
+            <a:endParaRPr lang="en-US"/>
           </a:p>
           <a:p>
             <a:pPr lvl="1"/>
@@ -270,6 +270,7 @@
               <a:rPr lang="en-US"/>
               <a:t>Second level</a:t>
             </a:r>
+            <a:endParaRPr lang="en-US"/>
           </a:p>
           <a:p>
             <a:pPr lvl="2"/>
@@ -277,6 +278,7 @@
               <a:rPr lang="en-US"/>
               <a:t>Third level</a:t>
             </a:r>
+            <a:endParaRPr lang="en-US"/>
           </a:p>
           <a:p>
             <a:pPr lvl="3"/>
@@ -284,6 +286,7 @@
               <a:rPr lang="en-US"/>
               <a:t>Fourth level</a:t>
             </a:r>
+            <a:endParaRPr lang="en-US"/>
           </a:p>
           <a:p>
             <a:pPr lvl="4"/>
@@ -291,6 +294,7 @@
               <a:rPr lang="en-US"/>
               <a:t>Fifth level</a:t>
             </a:r>
+            <a:endParaRPr lang="en-US"/>
           </a:p>
         </p:txBody>
       </p:sp>
@@ -354,18 +358,12 @@
           <a:p>
             <a:fld id="{CE5E9CC1-C706-0F49-92D6-E571CC5EEA8F}" type="slidenum">
               <a:rPr lang="en-US"/>
-              <a:t>‹#›</a:t>
             </a:fld>
             <a:endParaRPr lang="en-US"/>
           </a:p>
         </p:txBody>
       </p:sp>
     </p:spTree>
-    <p:extLst>
-      <p:ext uri="{BB962C8B-B14F-4D97-AF65-F5344CB8AC3E}">
-        <p14:creationId xmlns:p14="http://schemas.microsoft.com/office/powerpoint/2010/main" val="1024086991"/>
-      </p:ext>
-    </p:extLst>
   </p:cSld>
   <p:clrMap bg1="lt1" tx1="dk1" bg2="lt2" tx2="dk2" accent1="accent1" accent2="accent2" accent3="accent3" accent4="accent4" accent5="accent5" accent6="accent6" hlink="hlink" folHlink="folHlink"/>
   <p:notesStyle>
@@ -507,10 +505,6 @@
           <a:bodyPr/>
           <a:lstStyle/>
           <a:p>
-            <a:r>
-              <a:rPr lang="en-US" dirty="0"/>
-              <a:t/>
-            </a:r>
             <a:endParaRPr lang="en-US" dirty="0"/>
           </a:p>
         </p:txBody>
@@ -532,18 +526,12 @@
           <a:p>
             <a:fld id="{F7021451-1387-4CA6-816F-3879F97B5CBC}" type="slidenum">
               <a:rPr lang="en-US"/>
-              <a:t>1</a:t>
             </a:fld>
             <a:endParaRPr lang="en-US"/>
           </a:p>
         </p:txBody>
       </p:sp>
     </p:spTree>
-    <p:extLst>
-      <p:ext uri="{BB962C8B-B14F-4D97-AF65-F5344CB8AC3E}">
-        <p14:creationId xmlns:p14="http://schemas.microsoft.com/office/powerpoint/2010/main" val="1024086991"/>
-      </p:ext>
-    </p:extLst>
   </p:cSld>
   <p:clrMapOvr>
     <a:masterClrMapping/>
@@ -595,10 +583,6 @@
           <a:bodyPr/>
           <a:lstStyle/>
           <a:p>
-            <a:r>
-              <a:rPr lang="en-US" dirty="0"/>
-              <a:t/>
-            </a:r>
             <a:endParaRPr lang="en-US" dirty="0"/>
           </a:p>
         </p:txBody>
@@ -620,18 +604,12 @@
           <a:p>
             <a:fld id="{F7021451-1387-4CA6-816F-3879F97B5CBC}" type="slidenum">
               <a:rPr lang="en-US"/>
-              <a:t>2</a:t>
             </a:fld>
             <a:endParaRPr lang="en-US"/>
           </a:p>
         </p:txBody>
       </p:sp>
     </p:spTree>
-    <p:extLst>
-      <p:ext uri="{BB962C8B-B14F-4D97-AF65-F5344CB8AC3E}">
-        <p14:creationId xmlns:p14="http://schemas.microsoft.com/office/powerpoint/2010/main" val="1024086991"/>
-      </p:ext>
-    </p:extLst>
   </p:cSld>
   <p:clrMapOvr>
     <a:masterClrMapping/>
@@ -683,10 +661,6 @@
           <a:bodyPr/>
           <a:lstStyle/>
           <a:p>
-            <a:r>
-              <a:rPr lang="en-US" dirty="0"/>
-              <a:t/>
-            </a:r>
             <a:endParaRPr lang="en-US" dirty="0"/>
           </a:p>
         </p:txBody>
@@ -708,18 +682,12 @@
           <a:p>
             <a:fld id="{F7021451-1387-4CA6-816F-3879F97B5CBC}" type="slidenum">
               <a:rPr lang="en-US"/>
-              <a:t>3</a:t>
             </a:fld>
             <a:endParaRPr lang="en-US"/>
           </a:p>
         </p:txBody>
       </p:sp>
     </p:spTree>
-    <p:extLst>
-      <p:ext uri="{BB962C8B-B14F-4D97-AF65-F5344CB8AC3E}">
-        <p14:creationId xmlns:p14="http://schemas.microsoft.com/office/powerpoint/2010/main" val="1024086991"/>
-      </p:ext>
-    </p:extLst>
   </p:cSld>
   <p:clrMapOvr>
     <a:masterClrMapping/>
@@ -771,10 +739,6 @@
           <a:bodyPr/>
           <a:lstStyle/>
           <a:p>
-            <a:r>
-              <a:rPr lang="en-US" dirty="0"/>
-              <a:t/>
-            </a:r>
             <a:endParaRPr lang="en-US" dirty="0"/>
           </a:p>
         </p:txBody>
@@ -796,18 +760,12 @@
           <a:p>
             <a:fld id="{F7021451-1387-4CA6-816F-3879F97B5CBC}" type="slidenum">
               <a:rPr lang="en-US"/>
-              <a:t>4</a:t>
             </a:fld>
             <a:endParaRPr lang="en-US"/>
           </a:p>
         </p:txBody>
       </p:sp>
     </p:spTree>
-    <p:extLst>
-      <p:ext uri="{BB962C8B-B14F-4D97-AF65-F5344CB8AC3E}">
-        <p14:creationId xmlns:p14="http://schemas.microsoft.com/office/powerpoint/2010/main" val="1024086991"/>
-      </p:ext>
-    </p:extLst>
   </p:cSld>
   <p:clrMapOvr>
     <a:masterClrMapping/>
@@ -859,10 +817,6 @@
           <a:bodyPr/>
           <a:lstStyle/>
           <a:p>
-            <a:r>
-              <a:rPr lang="en-US" dirty="0"/>
-              <a:t/>
-            </a:r>
             <a:endParaRPr lang="en-US" dirty="0"/>
           </a:p>
         </p:txBody>
@@ -884,18 +838,12 @@
           <a:p>
             <a:fld id="{F7021451-1387-4CA6-816F-3879F97B5CBC}" type="slidenum">
               <a:rPr lang="en-US"/>
-              <a:t>5</a:t>
             </a:fld>
             <a:endParaRPr lang="en-US"/>
           </a:p>
         </p:txBody>
       </p:sp>
     </p:spTree>
-    <p:extLst>
-      <p:ext uri="{BB962C8B-B14F-4D97-AF65-F5344CB8AC3E}">
-        <p14:creationId xmlns:p14="http://schemas.microsoft.com/office/powerpoint/2010/main" val="1024086991"/>
-      </p:ext>
-    </p:extLst>
   </p:cSld>
   <p:clrMapOvr>
     <a:masterClrMapping/>
@@ -947,10 +895,6 @@
           <a:bodyPr/>
           <a:lstStyle/>
           <a:p>
-            <a:r>
-              <a:rPr lang="en-US" dirty="0"/>
-              <a:t/>
-            </a:r>
             <a:endParaRPr lang="en-US" dirty="0"/>
           </a:p>
         </p:txBody>
@@ -972,18 +916,12 @@
           <a:p>
             <a:fld id="{F7021451-1387-4CA6-816F-3879F97B5CBC}" type="slidenum">
               <a:rPr lang="en-US"/>
-              <a:t>6</a:t>
             </a:fld>
             <a:endParaRPr lang="en-US"/>
           </a:p>
         </p:txBody>
       </p:sp>
     </p:spTree>
-    <p:extLst>
-      <p:ext uri="{BB962C8B-B14F-4D97-AF65-F5344CB8AC3E}">
-        <p14:creationId xmlns:p14="http://schemas.microsoft.com/office/powerpoint/2010/main" val="1024086991"/>
-      </p:ext>
-    </p:extLst>
   </p:cSld>
   <p:clrMapOvr>
     <a:masterClrMapping/>
@@ -1035,10 +973,6 @@
           <a:bodyPr/>
           <a:lstStyle/>
           <a:p>
-            <a:r>
-              <a:rPr lang="en-US" dirty="0"/>
-              <a:t/>
-            </a:r>
             <a:endParaRPr lang="en-US" dirty="0"/>
           </a:p>
         </p:txBody>
@@ -1060,18 +994,12 @@
           <a:p>
             <a:fld id="{F7021451-1387-4CA6-816F-3879F97B5CBC}" type="slidenum">
               <a:rPr lang="en-US"/>
-              <a:t>7</a:t>
             </a:fld>
             <a:endParaRPr lang="en-US"/>
           </a:p>
         </p:txBody>
       </p:sp>
     </p:spTree>
-    <p:extLst>
-      <p:ext uri="{BB962C8B-B14F-4D97-AF65-F5344CB8AC3E}">
-        <p14:creationId xmlns:p14="http://schemas.microsoft.com/office/powerpoint/2010/main" val="1024086991"/>
-      </p:ext>
-    </p:extLst>
   </p:cSld>
   <p:clrMapOvr>
     <a:masterClrMapping/>
@@ -1123,10 +1051,6 @@
           <a:bodyPr/>
           <a:lstStyle/>
           <a:p>
-            <a:r>
-              <a:rPr lang="en-US" dirty="0"/>
-              <a:t/>
-            </a:r>
             <a:endParaRPr lang="en-US" dirty="0"/>
           </a:p>
         </p:txBody>
@@ -1148,18 +1072,12 @@
           <a:p>
             <a:fld id="{F7021451-1387-4CA6-816F-3879F97B5CBC}" type="slidenum">
               <a:rPr lang="en-US"/>
-              <a:t>8</a:t>
             </a:fld>
             <a:endParaRPr lang="en-US"/>
           </a:p>
         </p:txBody>
       </p:sp>
     </p:spTree>
-    <p:extLst>
-      <p:ext uri="{BB962C8B-B14F-4D97-AF65-F5344CB8AC3E}">
-        <p14:creationId xmlns:p14="http://schemas.microsoft.com/office/powerpoint/2010/main" val="1024086991"/>
-      </p:ext>
-    </p:extLst>
   </p:cSld>
   <p:clrMapOvr>
     <a:masterClrMapping/>
@@ -1200,6 +1118,11 @@
 <file path=ppt/slideMasters/slideMaster1.xml><?xml version="1.0" encoding="utf-8"?>
 <p:sldMaster xmlns:a="http://schemas.openxmlformats.org/drawingml/2006/main" xmlns:r="http://schemas.openxmlformats.org/officeDocument/2006/relationships" xmlns:p="http://schemas.openxmlformats.org/presentationml/2006/main">
   <p:cSld>
+    <p:bg>
+      <p:bgRef idx="1001">
+        <a:schemeClr val="bg1"/>
+      </p:bgRef>
+    </p:bg>
     <p:spTree>
       <p:nvGrpSpPr>
         <p:cNvPr id="1" name=""/>
@@ -1243,7 +1166,7 @@
         <a:spcBef>
           <a:spcPct val="20000"/>
         </a:spcBef>
-        <a:buFont typeface="Arial" pitchFamily="34" charset="0"/>
+        <a:buFont typeface="Arial" panose="020B0604020202020204" pitchFamily="34" charset="0"/>
         <a:buChar char="•"/>
         <a:defRPr sz="3200" kern="1200">
           <a:solidFill>
@@ -1258,7 +1181,7 @@
         <a:spcBef>
           <a:spcPct val="20000"/>
         </a:spcBef>
-        <a:buFont typeface="Arial" pitchFamily="34" charset="0"/>
+        <a:buFont typeface="Arial" panose="020B0604020202020204" pitchFamily="34" charset="0"/>
         <a:buChar char="–"/>
         <a:defRPr sz="2800" kern="1200">
           <a:solidFill>
@@ -1273,7 +1196,7 @@
         <a:spcBef>
           <a:spcPct val="20000"/>
         </a:spcBef>
-        <a:buFont typeface="Arial" pitchFamily="34" charset="0"/>
+        <a:buFont typeface="Arial" panose="020B0604020202020204" pitchFamily="34" charset="0"/>
         <a:buChar char="•"/>
         <a:defRPr sz="2400" kern="1200">
           <a:solidFill>
@@ -1288,7 +1211,7 @@
         <a:spcBef>
           <a:spcPct val="20000"/>
         </a:spcBef>
-        <a:buFont typeface="Arial" pitchFamily="34" charset="0"/>
+        <a:buFont typeface="Arial" panose="020B0604020202020204" pitchFamily="34" charset="0"/>
         <a:buChar char="–"/>
         <a:defRPr sz="2000" kern="1200">
           <a:solidFill>
@@ -1303,7 +1226,7 @@
         <a:spcBef>
           <a:spcPct val="20000"/>
         </a:spcBef>
-        <a:buFont typeface="Arial" pitchFamily="34" charset="0"/>
+        <a:buFont typeface="Arial" panose="020B0604020202020204" pitchFamily="34" charset="0"/>
         <a:buChar char="»"/>
         <a:defRPr sz="2000" kern="1200">
           <a:solidFill>
@@ -1318,7 +1241,7 @@
         <a:spcBef>
           <a:spcPct val="20000"/>
         </a:spcBef>
-        <a:buFont typeface="Arial" pitchFamily="34" charset="0"/>
+        <a:buFont typeface="Arial" panose="020B0604020202020204" pitchFamily="34" charset="0"/>
         <a:buChar char="•"/>
         <a:defRPr sz="2000" kern="1200">
           <a:solidFill>
@@ -1333,7 +1256,7 @@
         <a:spcBef>
           <a:spcPct val="20000"/>
         </a:spcBef>
-        <a:buFont typeface="Arial" pitchFamily="34" charset="0"/>
+        <a:buFont typeface="Arial" panose="020B0604020202020204" pitchFamily="34" charset="0"/>
         <a:buChar char="•"/>
         <a:defRPr sz="2000" kern="1200">
           <a:solidFill>
@@ -1348,7 +1271,7 @@
         <a:spcBef>
           <a:spcPct val="20000"/>
         </a:spcBef>
-        <a:buFont typeface="Arial" pitchFamily="34" charset="0"/>
+        <a:buFont typeface="Arial" panose="020B0604020202020204" pitchFamily="34" charset="0"/>
         <a:buChar char="•"/>
         <a:defRPr sz="2000" kern="1200">
           <a:solidFill>
@@ -1363,7 +1286,7 @@
         <a:spcBef>
           <a:spcPct val="20000"/>
         </a:spcBef>
-        <a:buFont typeface="Arial" pitchFamily="34" charset="0"/>
+        <a:buFont typeface="Arial" panose="020B0604020202020204" pitchFamily="34" charset="0"/>
         <a:buChar char="•"/>
         <a:defRPr sz="2000" kern="1200">
           <a:solidFill>
@@ -1476,12 +1399,13 @@
 
 <file path=ppt/slides/slide1.xml><?xml version="1.0" encoding="utf-8"?>
 <p:sld xmlns:a="http://schemas.openxmlformats.org/drawingml/2006/main" xmlns:r="http://schemas.openxmlformats.org/officeDocument/2006/relationships" xmlns:p="http://schemas.openxmlformats.org/presentationml/2006/main">
-  <p:cSld name="Slide 1">
+  <p:cSld>
     <p:bg>
       <p:bgPr>
         <a:solidFill>
           <a:srgbClr val="F4F1EA"/>
         </a:solidFill>
+        <a:effectLst/>
       </p:bgPr>
     </p:bg>
     <p:spTree>
@@ -1538,23 +1462,22 @@
             <a:avLst/>
           </a:prstGeom>
           <a:noFill/>
-          <a:ln/>
-        </p:spPr>
-        <p:txBody>
-          <a:bodyPr wrap="square" lIns="0" tIns="0" rIns="0" bIns="0" rtlCol="0" anchor="ctr"/>
-          <a:lstStyle/>
-          <a:p>
-            <a:pPr indent="0" marL="0">
-              <a:buNone/>
-            </a:pPr>
-            <a:r>
-              <a:rPr lang="en-US" sz="1000" spc="60" kern="0" dirty="0">
+        </p:spPr>
+        <p:txBody>
+          <a:bodyPr wrap="square" lIns="0" tIns="0" rIns="0" bIns="0" rtlCol="0" anchor="ctr"/>
+          <a:lstStyle/>
+          <a:p>
+            <a:pPr marL="0" indent="0">
+              <a:buNone/>
+            </a:pPr>
+            <a:r>
+              <a:rPr lang="en-US" sz="1000" kern="0" spc="60" dirty="0">
                 <a:solidFill>
                   <a:srgbClr val="7A7468"/>
                 </a:solidFill>
-                <a:latin typeface="Microsoft YaHei" pitchFamily="34" charset="0"/>
-                <a:ea typeface="Microsoft YaHei" pitchFamily="34" charset="-122"/>
-                <a:cs typeface="Microsoft YaHei" pitchFamily="34" charset="-120"/>
+                <a:latin typeface="微软雅黑" panose="020B0503020204020204" pitchFamily="34" charset="-122"/>
+                <a:ea typeface="微软雅黑" panose="020B0503020204020204" pitchFamily="34" charset="-122"/>
+                <a:cs typeface="微软雅黑" panose="020B0503020204020204" pitchFamily="34" charset="-120"/>
               </a:rPr>
               <a:t>腾讯 AI CODING 课程作业 · 方向二 AI 应用创新 · 场景 4 智能办公</a:t>
             </a:r>
@@ -1577,13 +1500,12 @@
             <a:avLst/>
           </a:prstGeom>
           <a:noFill/>
-          <a:ln/>
-        </p:spPr>
-        <p:txBody>
-          <a:bodyPr wrap="square" lIns="0" tIns="0" rIns="0" bIns="0" rtlCol="0" anchor="ctr"/>
-          <a:lstStyle/>
-          <a:p>
-            <a:pPr indent="0" marL="0">
+        </p:spPr>
+        <p:txBody>
+          <a:bodyPr wrap="square" lIns="0" tIns="0" rIns="0" bIns="0" rtlCol="0" anchor="ctr"/>
+          <a:lstStyle/>
+          <a:p>
+            <a:pPr marL="0" indent="0">
               <a:buNone/>
             </a:pPr>
             <a:r>
@@ -1591,9 +1513,9 @@
                 <a:solidFill>
                   <a:srgbClr val="1B1A17"/>
                 </a:solidFill>
-                <a:latin typeface="Georgia" pitchFamily="34" charset="0"/>
-                <a:ea typeface="Georgia" pitchFamily="34" charset="-122"/>
-                <a:cs typeface="Georgia" pitchFamily="34" charset="-120"/>
+                <a:latin typeface="Georgia" panose="02040502050405020303" pitchFamily="34" charset="0"/>
+                <a:ea typeface="Georgia" panose="02040502050405020303" pitchFamily="34" charset="-122"/>
+                <a:cs typeface="Georgia" panose="02040502050405020303" pitchFamily="34" charset="-120"/>
               </a:rPr>
               <a:t>OfficePilot</a:t>
             </a:r>
@@ -1641,13 +1563,12 @@
             <a:avLst/>
           </a:prstGeom>
           <a:noFill/>
-          <a:ln/>
-        </p:spPr>
-        <p:txBody>
-          <a:bodyPr wrap="square" lIns="0" tIns="0" rIns="0" bIns="0" rtlCol="0" anchor="ctr"/>
-          <a:lstStyle/>
-          <a:p>
-            <a:pPr indent="0" marL="0">
+        </p:spPr>
+        <p:txBody>
+          <a:bodyPr wrap="square" lIns="0" tIns="0" rIns="0" bIns="0" rtlCol="0" anchor="ctr"/>
+          <a:lstStyle/>
+          <a:p>
+            <a:pPr marL="0" indent="0">
               <a:buNone/>
             </a:pPr>
             <a:r>
@@ -1655,9 +1576,9 @@
                 <a:solidFill>
                   <a:srgbClr val="1B1A17"/>
                 </a:solidFill>
-                <a:latin typeface="Microsoft YaHei" pitchFamily="34" charset="0"/>
-                <a:ea typeface="Microsoft YaHei" pitchFamily="34" charset="-122"/>
-                <a:cs typeface="Microsoft YaHei" pitchFamily="34" charset="-120"/>
+                <a:latin typeface="微软雅黑" panose="020B0503020204020204" pitchFamily="34" charset="-122"/>
+                <a:ea typeface="微软雅黑" panose="020B0503020204020204" pitchFamily="34" charset="-122"/>
+                <a:cs typeface="微软雅黑" panose="020B0503020204020204" pitchFamily="34" charset="-120"/>
               </a:rPr>
               <a:t>本地优先的智能办公文档工作台</a:t>
             </a:r>
@@ -1680,13 +1601,12 @@
             <a:avLst/>
           </a:prstGeom>
           <a:noFill/>
-          <a:ln/>
-        </p:spPr>
-        <p:txBody>
-          <a:bodyPr wrap="square" lIns="0" tIns="0" rIns="0" bIns="0" rtlCol="0" anchor="ctr"/>
-          <a:lstStyle/>
-          <a:p>
-            <a:pPr indent="0" marL="0">
+        </p:spPr>
+        <p:txBody>
+          <a:bodyPr wrap="square" lIns="0" tIns="0" rIns="0" bIns="0" rtlCol="0" anchor="ctr"/>
+          <a:lstStyle/>
+          <a:p>
+            <a:pPr marL="0" indent="0">
               <a:buNone/>
             </a:pPr>
             <a:r>
@@ -1694,9 +1614,9 @@
                 <a:solidFill>
                   <a:srgbClr val="7A7468"/>
                 </a:solidFill>
-                <a:latin typeface="Microsoft YaHei" pitchFamily="34" charset="0"/>
-                <a:ea typeface="Microsoft YaHei" pitchFamily="34" charset="-122"/>
-                <a:cs typeface="Microsoft YaHei" pitchFamily="34" charset="-120"/>
+                <a:latin typeface="微软雅黑" panose="020B0503020204020204" pitchFamily="34" charset="-122"/>
+                <a:ea typeface="微软雅黑" panose="020B0503020204020204" pitchFamily="34" charset="-122"/>
+                <a:cs typeface="微软雅黑" panose="020B0503020204020204" pitchFamily="34" charset="-120"/>
               </a:rPr>
               <a:t>把制度、会议纪要、表格和合同，变成可引用、可校验、可导出的办公结果。</a:t>
             </a:r>
@@ -1744,13 +1664,12 @@
             <a:avLst/>
           </a:prstGeom>
           <a:noFill/>
-          <a:ln/>
-        </p:spPr>
-        <p:txBody>
-          <a:bodyPr wrap="square" lIns="0" tIns="0" rIns="0" bIns="0" rtlCol="0" anchor="ctr"/>
-          <a:lstStyle/>
-          <a:p>
-            <a:pPr algn="ctr" indent="0" marL="0">
+        </p:spPr>
+        <p:txBody>
+          <a:bodyPr wrap="square" lIns="0" tIns="0" rIns="0" bIns="0" rtlCol="0" anchor="ctr"/>
+          <a:lstStyle/>
+          <a:p>
+            <a:pPr marL="0" indent="0" algn="ctr">
               <a:buNone/>
             </a:pPr>
             <a:r>
@@ -1758,9 +1677,9 @@
                 <a:solidFill>
                   <a:srgbClr val="1B1A17"/>
                 </a:solidFill>
-                <a:latin typeface="Georgia" pitchFamily="34" charset="0"/>
-                <a:ea typeface="Georgia" pitchFamily="34" charset="-122"/>
-                <a:cs typeface="Georgia" pitchFamily="34" charset="-120"/>
+                <a:latin typeface="Georgia" panose="02040502050405020303" pitchFamily="34" charset="0"/>
+                <a:ea typeface="Georgia" panose="02040502050405020303" pitchFamily="34" charset="-122"/>
+                <a:cs typeface="Georgia" panose="02040502050405020303" pitchFamily="34" charset="-120"/>
               </a:rPr>
               <a:t>OP</a:t>
             </a:r>
@@ -1810,13 +1729,12 @@
             <a:avLst/>
           </a:prstGeom>
           <a:noFill/>
-          <a:ln/>
-        </p:spPr>
-        <p:txBody>
-          <a:bodyPr wrap="square" lIns="0" tIns="0" rIns="0" bIns="0" rtlCol="0" anchor="ctr"/>
-          <a:lstStyle/>
-          <a:p>
-            <a:pPr algn="ctr" indent="0" marL="0">
+        </p:spPr>
+        <p:txBody>
+          <a:bodyPr wrap="square" lIns="0" tIns="0" rIns="0" bIns="0" rtlCol="0" anchor="ctr"/>
+          <a:lstStyle/>
+          <a:p>
+            <a:pPr marL="0" indent="0" algn="ctr">
               <a:buNone/>
             </a:pPr>
             <a:r>
@@ -1824,9 +1742,9 @@
                 <a:solidFill>
                   <a:srgbClr val="F4F1EA"/>
                 </a:solidFill>
-                <a:latin typeface="Microsoft YaHei" pitchFamily="34" charset="0"/>
-                <a:ea typeface="Microsoft YaHei" pitchFamily="34" charset="-122"/>
-                <a:cs typeface="Microsoft YaHei" pitchFamily="34" charset="-120"/>
+                <a:latin typeface="微软雅黑" panose="020B0503020204020204" pitchFamily="34" charset="-122"/>
+                <a:ea typeface="微软雅黑" panose="020B0503020204020204" pitchFamily="34" charset="-122"/>
+                <a:cs typeface="微软雅黑" panose="020B0503020204020204" pitchFamily="34" charset="-120"/>
               </a:rPr>
               <a:t>本地优先</a:t>
             </a:r>
@@ -1876,13 +1794,12 @@
             <a:avLst/>
           </a:prstGeom>
           <a:noFill/>
-          <a:ln/>
-        </p:spPr>
-        <p:txBody>
-          <a:bodyPr wrap="square" lIns="0" tIns="0" rIns="0" bIns="0" rtlCol="0" anchor="ctr"/>
-          <a:lstStyle/>
-          <a:p>
-            <a:pPr algn="ctr" indent="0" marL="0">
+        </p:spPr>
+        <p:txBody>
+          <a:bodyPr wrap="square" lIns="0" tIns="0" rIns="0" bIns="0" rtlCol="0" anchor="ctr"/>
+          <a:lstStyle/>
+          <a:p>
+            <a:pPr marL="0" indent="0" algn="ctr">
               <a:buNone/>
             </a:pPr>
             <a:r>
@@ -1890,9 +1807,9 @@
                 <a:solidFill>
                   <a:srgbClr val="1B1A17"/>
                 </a:solidFill>
-                <a:latin typeface="Microsoft YaHei" pitchFamily="34" charset="0"/>
-                <a:ea typeface="Microsoft YaHei" pitchFamily="34" charset="-122"/>
-                <a:cs typeface="Microsoft YaHei" pitchFamily="34" charset="-120"/>
+                <a:latin typeface="微软雅黑" panose="020B0503020204020204" pitchFamily="34" charset="-122"/>
+                <a:ea typeface="微软雅黑" panose="020B0503020204020204" pitchFamily="34" charset="-122"/>
+                <a:cs typeface="微软雅黑" panose="020B0503020204020204" pitchFamily="34" charset="-120"/>
               </a:rPr>
               <a:t>可引用</a:t>
             </a:r>
@@ -1942,13 +1859,12 @@
             <a:avLst/>
           </a:prstGeom>
           <a:noFill/>
-          <a:ln/>
-        </p:spPr>
-        <p:txBody>
-          <a:bodyPr wrap="square" lIns="0" tIns="0" rIns="0" bIns="0" rtlCol="0" anchor="ctr"/>
-          <a:lstStyle/>
-          <a:p>
-            <a:pPr algn="ctr" indent="0" marL="0">
+        </p:spPr>
+        <p:txBody>
+          <a:bodyPr wrap="square" lIns="0" tIns="0" rIns="0" bIns="0" rtlCol="0" anchor="ctr"/>
+          <a:lstStyle/>
+          <a:p>
+            <a:pPr marL="0" indent="0" algn="ctr">
               <a:buNone/>
             </a:pPr>
             <a:r>
@@ -1956,9 +1872,9 @@
                 <a:solidFill>
                   <a:srgbClr val="1B1A17"/>
                 </a:solidFill>
-                <a:latin typeface="Microsoft YaHei" pitchFamily="34" charset="0"/>
-                <a:ea typeface="Microsoft YaHei" pitchFamily="34" charset="-122"/>
-                <a:cs typeface="Microsoft YaHei" pitchFamily="34" charset="-120"/>
+                <a:latin typeface="微软雅黑" panose="020B0503020204020204" pitchFamily="34" charset="-122"/>
+                <a:ea typeface="微软雅黑" panose="020B0503020204020204" pitchFamily="34" charset="-122"/>
+                <a:cs typeface="微软雅黑" panose="020B0503020204020204" pitchFamily="34" charset="-120"/>
               </a:rPr>
               <a:t>可校验</a:t>
             </a:r>
@@ -2008,13 +1924,12 @@
             <a:avLst/>
           </a:prstGeom>
           <a:noFill/>
-          <a:ln/>
-        </p:spPr>
-        <p:txBody>
-          <a:bodyPr wrap="square" lIns="0" tIns="0" rIns="0" bIns="0" rtlCol="0" anchor="ctr"/>
-          <a:lstStyle/>
-          <a:p>
-            <a:pPr algn="ctr" indent="0" marL="0">
+        </p:spPr>
+        <p:txBody>
+          <a:bodyPr wrap="square" lIns="0" tIns="0" rIns="0" bIns="0" rtlCol="0" anchor="ctr"/>
+          <a:lstStyle/>
+          <a:p>
+            <a:pPr marL="0" indent="0" algn="ctr">
               <a:buNone/>
             </a:pPr>
             <a:r>
@@ -2022,9 +1937,9 @@
                 <a:solidFill>
                   <a:srgbClr val="1B1A17"/>
                 </a:solidFill>
-                <a:latin typeface="Microsoft YaHei" pitchFamily="34" charset="0"/>
-                <a:ea typeface="Microsoft YaHei" pitchFamily="34" charset="-122"/>
-                <a:cs typeface="Microsoft YaHei" pitchFamily="34" charset="-120"/>
+                <a:latin typeface="微软雅黑" panose="020B0503020204020204" pitchFamily="34" charset="-122"/>
+                <a:ea typeface="微软雅黑" panose="020B0503020204020204" pitchFamily="34" charset="-122"/>
+                <a:cs typeface="微软雅黑" panose="020B0503020204020204" pitchFamily="34" charset="-120"/>
               </a:rPr>
               <a:t>可导出</a:t>
             </a:r>
@@ -2047,13 +1962,12 @@
             <a:avLst/>
           </a:prstGeom>
           <a:noFill/>
-          <a:ln/>
-        </p:spPr>
-        <p:txBody>
-          <a:bodyPr wrap="square" lIns="0" tIns="0" rIns="0" bIns="0" rtlCol="0" anchor="ctr"/>
-          <a:lstStyle/>
-          <a:p>
-            <a:pPr indent="0" marL="0">
+        </p:spPr>
+        <p:txBody>
+          <a:bodyPr wrap="square" lIns="0" tIns="0" rIns="0" bIns="0" rtlCol="0" anchor="ctr"/>
+          <a:lstStyle/>
+          <a:p>
+            <a:pPr marL="0" indent="0">
               <a:buNone/>
             </a:pPr>
             <a:r>
@@ -2061,11 +1975,22 @@
                 <a:solidFill>
                   <a:srgbClr val="7A7468"/>
                 </a:solidFill>
-                <a:latin typeface="Microsoft YaHei" pitchFamily="34" charset="0"/>
-                <a:ea typeface="Microsoft YaHei" pitchFamily="34" charset="-122"/>
-                <a:cs typeface="Microsoft YaHei" pitchFamily="34" charset="-120"/>
-              </a:rPr>
-              <a:t>团队信息：单人项目 · 姓名：________</a:t>
+                <a:latin typeface="微软雅黑" panose="020B0503020204020204" pitchFamily="34" charset="-122"/>
+                <a:ea typeface="微软雅黑" panose="020B0503020204020204" pitchFamily="34" charset="-122"/>
+                <a:cs typeface="微软雅黑" panose="020B0503020204020204" pitchFamily="34" charset="-120"/>
+              </a:rPr>
+              <a:t>团队信息：单人项目 · 姓名：</a:t>
+            </a:r>
+            <a:r>
+              <a:rPr lang="zh-CN" altLang="en-US" sz="900" dirty="0">
+                <a:solidFill>
+                  <a:srgbClr val="7A7468"/>
+                </a:solidFill>
+                <a:latin typeface="微软雅黑" panose="020B0503020204020204" pitchFamily="34" charset="-122"/>
+                <a:ea typeface="微软雅黑" panose="020B0503020204020204" pitchFamily="34" charset="-122"/>
+                <a:cs typeface="微软雅黑" panose="020B0503020204020204" pitchFamily="34" charset="-120"/>
+              </a:rPr>
+              <a:t>肖俊坚</a:t>
             </a:r>
             <a:endParaRPr lang="en-US" sz="900" dirty="0"/>
           </a:p>
@@ -2086,13 +2011,12 @@
             <a:avLst/>
           </a:prstGeom>
           <a:noFill/>
-          <a:ln/>
-        </p:spPr>
-        <p:txBody>
-          <a:bodyPr wrap="square" lIns="0" tIns="0" rIns="0" bIns="0" rtlCol="0" anchor="ctr"/>
-          <a:lstStyle/>
-          <a:p>
-            <a:pPr indent="0" marL="0">
+        </p:spPr>
+        <p:txBody>
+          <a:bodyPr wrap="square" lIns="0" tIns="0" rIns="0" bIns="0" rtlCol="0" anchor="ctr"/>
+          <a:lstStyle/>
+          <a:p>
+            <a:pPr marL="0" indent="0">
               <a:buNone/>
             </a:pPr>
             <a:r>
@@ -2100,9 +2024,9 @@
                 <a:solidFill>
                   <a:srgbClr val="7A7468"/>
                 </a:solidFill>
-                <a:latin typeface="Microsoft YaHei" pitchFamily="34" charset="0"/>
-                <a:ea typeface="Microsoft YaHei" pitchFamily="34" charset="-122"/>
-                <a:cs typeface="Microsoft YaHei" pitchFamily="34" charset="-120"/>
+                <a:latin typeface="微软雅黑" panose="020B0503020204020204" pitchFamily="34" charset="-122"/>
+                <a:ea typeface="微软雅黑" panose="020B0503020204020204" pitchFamily="34" charset="-122"/>
+                <a:cs typeface="微软雅黑" panose="020B0503020204020204" pitchFamily="34" charset="-120"/>
               </a:rPr>
               <a:t>2026-10-25 · feat/officepilot · Node 24 / Fastify 5 / React 19 / LangGraph</a:t>
             </a:r>
@@ -2125,13 +2049,12 @@
             <a:avLst/>
           </a:prstGeom>
           <a:noFill/>
-          <a:ln/>
-        </p:spPr>
-        <p:txBody>
-          <a:bodyPr wrap="square" lIns="0" tIns="0" rIns="0" bIns="0" rtlCol="0" anchor="ctr"/>
-          <a:lstStyle/>
-          <a:p>
-            <a:pPr indent="0" marL="0">
+        </p:spPr>
+        <p:txBody>
+          <a:bodyPr wrap="square" lIns="0" tIns="0" rIns="0" bIns="0" rtlCol="0" anchor="ctr"/>
+          <a:lstStyle/>
+          <a:p>
+            <a:pPr marL="0" indent="0">
               <a:buNone/>
             </a:pPr>
             <a:endParaRPr lang="en-US" sz="800" dirty="0"/>
@@ -2153,13 +2076,12 @@
             <a:avLst/>
           </a:prstGeom>
           <a:noFill/>
-          <a:ln/>
-        </p:spPr>
-        <p:txBody>
-          <a:bodyPr wrap="square" lIns="0" tIns="0" rIns="0" bIns="0" rtlCol="0" anchor="ctr"/>
-          <a:lstStyle/>
-          <a:p>
-            <a:pPr algn="r" indent="0" marL="0">
+        </p:spPr>
+        <p:txBody>
+          <a:bodyPr wrap="square" lIns="0" tIns="0" rIns="0" bIns="0" rtlCol="0" anchor="ctr"/>
+          <a:lstStyle/>
+          <a:p>
+            <a:pPr marL="0" indent="0" algn="r">
               <a:buNone/>
             </a:pPr>
             <a:r>
@@ -2167,9 +2089,9 @@
                 <a:solidFill>
                   <a:srgbClr val="7A7468"/>
                 </a:solidFill>
-                <a:latin typeface="Georgia" pitchFamily="34" charset="0"/>
-                <a:ea typeface="Georgia" pitchFamily="34" charset="-122"/>
-                <a:cs typeface="Georgia" pitchFamily="34" charset="-120"/>
+                <a:latin typeface="Georgia" panose="02040502050405020303" pitchFamily="34" charset="0"/>
+                <a:ea typeface="Georgia" panose="02040502050405020303" pitchFamily="34" charset="-122"/>
+                <a:cs typeface="Georgia" panose="02040502050405020303" pitchFamily="34" charset="-120"/>
               </a:rPr>
               <a:t>01</a:t>
             </a:r>
@@ -2187,12 +2109,13 @@
 
 <file path=ppt/slides/slide2.xml><?xml version="1.0" encoding="utf-8"?>
 <p:sld xmlns:a="http://schemas.openxmlformats.org/drawingml/2006/main" xmlns:r="http://schemas.openxmlformats.org/officeDocument/2006/relationships" xmlns:p="http://schemas.openxmlformats.org/presentationml/2006/main">
-  <p:cSld name="Slide 2">
+  <p:cSld>
     <p:bg>
       <p:bgPr>
         <a:solidFill>
           <a:srgbClr val="F4F1EA"/>
         </a:solidFill>
+        <a:effectLst/>
       </p:bgPr>
     </p:bg>
     <p:spTree>
@@ -2224,23 +2147,22 @@
             <a:avLst/>
           </a:prstGeom>
           <a:noFill/>
-          <a:ln/>
-        </p:spPr>
-        <p:txBody>
-          <a:bodyPr wrap="square" lIns="0" tIns="0" rIns="0" bIns="0" rtlCol="0" anchor="ctr"/>
-          <a:lstStyle/>
-          <a:p>
-            <a:pPr indent="0" marL="0">
-              <a:buNone/>
-            </a:pPr>
-            <a:r>
-              <a:rPr lang="en-US" sz="900" b="1" spc="120" kern="0" dirty="0">
+        </p:spPr>
+        <p:txBody>
+          <a:bodyPr wrap="square" lIns="0" tIns="0" rIns="0" bIns="0" rtlCol="0" anchor="ctr"/>
+          <a:lstStyle/>
+          <a:p>
+            <a:pPr marL="0" indent="0">
+              <a:buNone/>
+            </a:pPr>
+            <a:r>
+              <a:rPr lang="en-US" sz="900" b="1" kern="0" spc="120" dirty="0">
                 <a:solidFill>
                   <a:srgbClr val="B8421D"/>
                 </a:solidFill>
-                <a:latin typeface="Microsoft YaHei" pitchFamily="34" charset="0"/>
-                <a:ea typeface="Microsoft YaHei" pitchFamily="34" charset="-122"/>
-                <a:cs typeface="Microsoft YaHei" pitchFamily="34" charset="-120"/>
+                <a:latin typeface="微软雅黑" panose="020B0503020204020204" pitchFamily="34" charset="-122"/>
+                <a:ea typeface="微软雅黑" panose="020B0503020204020204" pitchFamily="34" charset="-122"/>
+                <a:cs typeface="微软雅黑" panose="020B0503020204020204" pitchFamily="34" charset="-120"/>
               </a:rPr>
               <a:t>01 / WHY</a:t>
             </a:r>
@@ -2263,13 +2185,12 @@
             <a:avLst/>
           </a:prstGeom>
           <a:noFill/>
-          <a:ln/>
-        </p:spPr>
-        <p:txBody>
-          <a:bodyPr wrap="square" lIns="0" tIns="0" rIns="0" bIns="0" rtlCol="0" anchor="ctr"/>
-          <a:lstStyle/>
-          <a:p>
-            <a:pPr indent="0" marL="0">
+        </p:spPr>
+        <p:txBody>
+          <a:bodyPr wrap="square" lIns="0" tIns="0" rIns="0" bIns="0" rtlCol="0" anchor="ctr"/>
+          <a:lstStyle/>
+          <a:p>
+            <a:pPr marL="0" indent="0">
               <a:buNone/>
             </a:pPr>
             <a:r>
@@ -2277,9 +2198,9 @@
                 <a:solidFill>
                   <a:srgbClr val="1B1A17"/>
                 </a:solidFill>
-                <a:latin typeface="Microsoft YaHei" pitchFamily="34" charset="0"/>
-                <a:ea typeface="Microsoft YaHei" pitchFamily="34" charset="-122"/>
-                <a:cs typeface="Microsoft YaHei" pitchFamily="34" charset="-120"/>
+                <a:latin typeface="微软雅黑" panose="020B0503020204020204" pitchFamily="34" charset="-122"/>
+                <a:ea typeface="微软雅黑" panose="020B0503020204020204" pitchFamily="34" charset="-122"/>
+                <a:cs typeface="微软雅黑" panose="020B0503020204020204" pitchFamily="34" charset="-120"/>
               </a:rPr>
               <a:t>场景与痛点：文档很多，结果很少</a:t>
             </a:r>
@@ -2354,13 +2275,12 @@
             <a:avLst/>
           </a:prstGeom>
           <a:noFill/>
-          <a:ln/>
-        </p:spPr>
-        <p:txBody>
-          <a:bodyPr wrap="square" lIns="0" tIns="0" rIns="0" bIns="0" rtlCol="0" anchor="ctr"/>
-          <a:lstStyle/>
-          <a:p>
-            <a:pPr indent="0" marL="0">
+        </p:spPr>
+        <p:txBody>
+          <a:bodyPr wrap="square" lIns="0" tIns="0" rIns="0" bIns="0" rtlCol="0" anchor="ctr"/>
+          <a:lstStyle/>
+          <a:p>
+            <a:pPr marL="0" indent="0">
               <a:buNone/>
             </a:pPr>
             <a:r>
@@ -2368,9 +2288,9 @@
                 <a:solidFill>
                   <a:srgbClr val="1B1A17"/>
                 </a:solidFill>
-                <a:latin typeface="Microsoft YaHei" pitchFamily="34" charset="0"/>
-                <a:ea typeface="Microsoft YaHei" pitchFamily="34" charset="-122"/>
-                <a:cs typeface="Microsoft YaHei" pitchFamily="34" charset="-120"/>
+                <a:latin typeface="微软雅黑" panose="020B0503020204020204" pitchFamily="34" charset="-122"/>
+                <a:ea typeface="微软雅黑" panose="020B0503020204020204" pitchFamily="34" charset="-122"/>
+                <a:cs typeface="微软雅黑" panose="020B0503020204020204" pitchFamily="34" charset="-120"/>
               </a:rPr>
               <a:t>星海科技 · 行政 / 项目团队</a:t>
             </a:r>
@@ -2393,13 +2313,12 @@
             <a:avLst/>
           </a:prstGeom>
           <a:noFill/>
-          <a:ln/>
-        </p:spPr>
-        <p:txBody>
-          <a:bodyPr wrap="square" lIns="0" tIns="0" rIns="0" bIns="0" rtlCol="0" anchor="ctr"/>
-          <a:lstStyle/>
-          <a:p>
-            <a:pPr indent="0" marL="0">
+        </p:spPr>
+        <p:txBody>
+          <a:bodyPr wrap="square" lIns="0" tIns="0" rIns="0" bIns="0" rtlCol="0" anchor="ctr"/>
+          <a:lstStyle/>
+          <a:p>
+            <a:pPr marL="0" indent="0">
               <a:buNone/>
             </a:pPr>
             <a:r>
@@ -2407,9 +2326,9 @@
                 <a:solidFill>
                   <a:srgbClr val="7A7468"/>
                 </a:solidFill>
-                <a:latin typeface="Microsoft YaHei" pitchFamily="34" charset="0"/>
-                <a:ea typeface="Microsoft YaHei" pitchFamily="34" charset="-122"/>
-                <a:cs typeface="Microsoft YaHei" pitchFamily="34" charset="-120"/>
+                <a:latin typeface="微软雅黑" panose="020B0503020204020204" pitchFamily="34" charset="-122"/>
+                <a:ea typeface="微软雅黑" panose="020B0503020204020204" pitchFamily="34" charset="-122"/>
+                <a:cs typeface="微软雅黑" panose="020B0503020204020204" pitchFamily="34" charset="-120"/>
               </a:rPr>
               <a:t>7 份制度、会议、表格与合同，散落在不同格式里。</a:t>
             </a:r>
@@ -2432,13 +2351,12 @@
             <a:avLst/>
           </a:prstGeom>
           <a:noFill/>
-          <a:ln/>
-        </p:spPr>
-        <p:txBody>
-          <a:bodyPr wrap="square" lIns="0" tIns="0" rIns="0" bIns="0" rtlCol="0" anchor="ctr"/>
-          <a:lstStyle/>
-          <a:p>
-            <a:pPr indent="0" marL="0">
+        </p:spPr>
+        <p:txBody>
+          <a:bodyPr wrap="square" lIns="0" tIns="0" rIns="0" bIns="0" rtlCol="0" anchor="ctr"/>
+          <a:lstStyle/>
+          <a:p>
+            <a:pPr marL="0" indent="0">
               <a:buNone/>
             </a:pPr>
             <a:r>
@@ -2446,9 +2364,9 @@
                 <a:solidFill>
                   <a:srgbClr val="B8421D"/>
                 </a:solidFill>
-                <a:latin typeface="Georgia" pitchFamily="34" charset="0"/>
-                <a:ea typeface="Georgia" pitchFamily="34" charset="-122"/>
-                <a:cs typeface="Georgia" pitchFamily="34" charset="-120"/>
+                <a:latin typeface="Georgia" panose="02040502050405020303" pitchFamily="34" charset="0"/>
+                <a:ea typeface="Georgia" panose="02040502050405020303" pitchFamily="34" charset="-122"/>
+                <a:cs typeface="Georgia" panose="02040502050405020303" pitchFamily="34" charset="-120"/>
               </a:rPr>
               <a:t>01</a:t>
             </a:r>
@@ -2471,13 +2389,12 @@
             <a:avLst/>
           </a:prstGeom>
           <a:noFill/>
-          <a:ln/>
-        </p:spPr>
-        <p:txBody>
-          <a:bodyPr wrap="square" lIns="0" tIns="0" rIns="0" bIns="0" rtlCol="0" anchor="ctr"/>
-          <a:lstStyle/>
-          <a:p>
-            <a:pPr indent="0" marL="0">
+        </p:spPr>
+        <p:txBody>
+          <a:bodyPr wrap="square" lIns="0" tIns="0" rIns="0" bIns="0" rtlCol="0" anchor="ctr"/>
+          <a:lstStyle/>
+          <a:p>
+            <a:pPr marL="0" indent="0">
               <a:buNone/>
             </a:pPr>
             <a:r>
@@ -2485,9 +2402,9 @@
                 <a:solidFill>
                   <a:srgbClr val="1B1A17"/>
                 </a:solidFill>
-                <a:latin typeface="Microsoft YaHei" pitchFamily="34" charset="0"/>
-                <a:ea typeface="Microsoft YaHei" pitchFamily="34" charset="-122"/>
-                <a:cs typeface="Microsoft YaHei" pitchFamily="34" charset="-120"/>
+                <a:latin typeface="微软雅黑" panose="020B0503020204020204" pitchFamily="34" charset="-122"/>
+                <a:ea typeface="微软雅黑" panose="020B0503020204020204" pitchFamily="34" charset="-122"/>
+                <a:cs typeface="微软雅黑" panose="020B0503020204020204" pitchFamily="34" charset="-120"/>
               </a:rPr>
               <a:t>找不到</a:t>
             </a:r>
@@ -2510,13 +2427,12 @@
             <a:avLst/>
           </a:prstGeom>
           <a:noFill/>
-          <a:ln/>
         </p:spPr>
         <p:txBody>
           <a:bodyPr wrap="square" lIns="0" tIns="0" rIns="0" bIns="0" rtlCol="0" anchor="t"/>
           <a:lstStyle/>
           <a:p>
-            <a:pPr indent="0" marL="0">
+            <a:pPr marL="0" indent="0">
               <a:buNone/>
             </a:pPr>
             <a:r>
@@ -2524,9 +2440,9 @@
                 <a:solidFill>
                   <a:srgbClr val="7A7468"/>
                 </a:solidFill>
-                <a:latin typeface="Microsoft YaHei" pitchFamily="34" charset="0"/>
-                <a:ea typeface="Microsoft YaHei" pitchFamily="34" charset="-122"/>
-                <a:cs typeface="Microsoft YaHei" pitchFamily="34" charset="-120"/>
+                <a:latin typeface="微软雅黑" panose="020B0503020204020204" pitchFamily="34" charset="-122"/>
+                <a:ea typeface="微软雅黑" panose="020B0503020204020204" pitchFamily="34" charset="-122"/>
+                <a:cs typeface="微软雅黑" panose="020B0503020204020204" pitchFamily="34" charset="-120"/>
               </a:rPr>
               <a:t>制度散落在 PDF / DOCX / 表格里，关键词搜不全，页码记不住。</a:t>
             </a:r>
@@ -2549,13 +2465,12 @@
             <a:avLst/>
           </a:prstGeom>
           <a:noFill/>
-          <a:ln/>
-        </p:spPr>
-        <p:txBody>
-          <a:bodyPr wrap="square" lIns="0" tIns="0" rIns="0" bIns="0" rtlCol="0" anchor="ctr"/>
-          <a:lstStyle/>
-          <a:p>
-            <a:pPr indent="0" marL="0">
+        </p:spPr>
+        <p:txBody>
+          <a:bodyPr wrap="square" lIns="0" tIns="0" rIns="0" bIns="0" rtlCol="0" anchor="ctr"/>
+          <a:lstStyle/>
+          <a:p>
+            <a:pPr marL="0" indent="0">
               <a:buNone/>
             </a:pPr>
             <a:r>
@@ -2563,9 +2478,9 @@
                 <a:solidFill>
                   <a:srgbClr val="B8421D"/>
                 </a:solidFill>
-                <a:latin typeface="Georgia" pitchFamily="34" charset="0"/>
-                <a:ea typeface="Georgia" pitchFamily="34" charset="-122"/>
-                <a:cs typeface="Georgia" pitchFamily="34" charset="-120"/>
+                <a:latin typeface="Georgia" panose="02040502050405020303" pitchFamily="34" charset="0"/>
+                <a:ea typeface="Georgia" panose="02040502050405020303" pitchFamily="34" charset="-122"/>
+                <a:cs typeface="Georgia" panose="02040502050405020303" pitchFamily="34" charset="-120"/>
               </a:rPr>
               <a:t>02</a:t>
             </a:r>
@@ -2588,13 +2503,12 @@
             <a:avLst/>
           </a:prstGeom>
           <a:noFill/>
-          <a:ln/>
-        </p:spPr>
-        <p:txBody>
-          <a:bodyPr wrap="square" lIns="0" tIns="0" rIns="0" bIns="0" rtlCol="0" anchor="ctr"/>
-          <a:lstStyle/>
-          <a:p>
-            <a:pPr indent="0" marL="0">
+        </p:spPr>
+        <p:txBody>
+          <a:bodyPr wrap="square" lIns="0" tIns="0" rIns="0" bIns="0" rtlCol="0" anchor="ctr"/>
+          <a:lstStyle/>
+          <a:p>
+            <a:pPr marL="0" indent="0">
               <a:buNone/>
             </a:pPr>
             <a:r>
@@ -2602,9 +2516,9 @@
                 <a:solidFill>
                   <a:srgbClr val="1B1A17"/>
                 </a:solidFill>
-                <a:latin typeface="Microsoft YaHei" pitchFamily="34" charset="0"/>
-                <a:ea typeface="Microsoft YaHei" pitchFamily="34" charset="-122"/>
-                <a:cs typeface="Microsoft YaHei" pitchFamily="34" charset="-120"/>
+                <a:latin typeface="微软雅黑" panose="020B0503020204020204" pitchFamily="34" charset="-122"/>
+                <a:ea typeface="微软雅黑" panose="020B0503020204020204" pitchFamily="34" charset="-122"/>
+                <a:cs typeface="微软雅黑" panose="020B0503020204020204" pitchFamily="34" charset="-120"/>
               </a:rPr>
               <a:t>不放心</a:t>
             </a:r>
@@ -2627,13 +2541,12 @@
             <a:avLst/>
           </a:prstGeom>
           <a:noFill/>
-          <a:ln/>
         </p:spPr>
         <p:txBody>
           <a:bodyPr wrap="square" lIns="0" tIns="0" rIns="0" bIns="0" rtlCol="0" anchor="t"/>
           <a:lstStyle/>
           <a:p>
-            <a:pPr indent="0" marL="0">
+            <a:pPr marL="0" indent="0">
               <a:buNone/>
             </a:pPr>
             <a:r>
@@ -2641,9 +2554,9 @@
                 <a:solidFill>
                   <a:srgbClr val="7A7468"/>
                 </a:solidFill>
-                <a:latin typeface="Microsoft YaHei" pitchFamily="34" charset="0"/>
-                <a:ea typeface="Microsoft YaHei" pitchFamily="34" charset="-122"/>
-                <a:cs typeface="Microsoft YaHei" pitchFamily="34" charset="-120"/>
+                <a:latin typeface="微软雅黑" panose="020B0503020204020204" pitchFamily="34" charset="-122"/>
+                <a:ea typeface="微软雅黑" panose="020B0503020204020204" pitchFamily="34" charset="-122"/>
+                <a:cs typeface="微软雅黑" panose="020B0503020204020204" pitchFamily="34" charset="-120"/>
               </a:rPr>
               <a:t>通用聊天模型答得很像，但给不出原文依据，错了也看不出来。</a:t>
             </a:r>
@@ -2666,13 +2579,12 @@
             <a:avLst/>
           </a:prstGeom>
           <a:noFill/>
-          <a:ln/>
-        </p:spPr>
-        <p:txBody>
-          <a:bodyPr wrap="square" lIns="0" tIns="0" rIns="0" bIns="0" rtlCol="0" anchor="ctr"/>
-          <a:lstStyle/>
-          <a:p>
-            <a:pPr indent="0" marL="0">
+        </p:spPr>
+        <p:txBody>
+          <a:bodyPr wrap="square" lIns="0" tIns="0" rIns="0" bIns="0" rtlCol="0" anchor="ctr"/>
+          <a:lstStyle/>
+          <a:p>
+            <a:pPr marL="0" indent="0">
               <a:buNone/>
             </a:pPr>
             <a:r>
@@ -2680,9 +2592,9 @@
                 <a:solidFill>
                   <a:srgbClr val="B8421D"/>
                 </a:solidFill>
-                <a:latin typeface="Georgia" pitchFamily="34" charset="0"/>
-                <a:ea typeface="Georgia" pitchFamily="34" charset="-122"/>
-                <a:cs typeface="Georgia" pitchFamily="34" charset="-120"/>
+                <a:latin typeface="Georgia" panose="02040502050405020303" pitchFamily="34" charset="0"/>
+                <a:ea typeface="Georgia" panose="02040502050405020303" pitchFamily="34" charset="-122"/>
+                <a:cs typeface="Georgia" panose="02040502050405020303" pitchFamily="34" charset="-120"/>
               </a:rPr>
               <a:t>03</a:t>
             </a:r>
@@ -2705,13 +2617,12 @@
             <a:avLst/>
           </a:prstGeom>
           <a:noFill/>
-          <a:ln/>
-        </p:spPr>
-        <p:txBody>
-          <a:bodyPr wrap="square" lIns="0" tIns="0" rIns="0" bIns="0" rtlCol="0" anchor="ctr"/>
-          <a:lstStyle/>
-          <a:p>
-            <a:pPr indent="0" marL="0">
+        </p:spPr>
+        <p:txBody>
+          <a:bodyPr wrap="square" lIns="0" tIns="0" rIns="0" bIns="0" rtlCol="0" anchor="ctr"/>
+          <a:lstStyle/>
+          <a:p>
+            <a:pPr marL="0" indent="0">
               <a:buNone/>
             </a:pPr>
             <a:r>
@@ -2719,9 +2630,9 @@
                 <a:solidFill>
                   <a:srgbClr val="1B1A17"/>
                 </a:solidFill>
-                <a:latin typeface="Microsoft YaHei" pitchFamily="34" charset="0"/>
-                <a:ea typeface="Microsoft YaHei" pitchFamily="34" charset="-122"/>
-                <a:cs typeface="Microsoft YaHei" pitchFamily="34" charset="-120"/>
+                <a:latin typeface="微软雅黑" panose="020B0503020204020204" pitchFamily="34" charset="-122"/>
+                <a:ea typeface="微软雅黑" panose="020B0503020204020204" pitchFamily="34" charset="-122"/>
+                <a:cs typeface="微软雅黑" panose="020B0503020204020204" pitchFamily="34" charset="-120"/>
               </a:rPr>
               <a:t>交不出</a:t>
             </a:r>
@@ -2744,13 +2655,12 @@
             <a:avLst/>
           </a:prstGeom>
           <a:noFill/>
-          <a:ln/>
         </p:spPr>
         <p:txBody>
           <a:bodyPr wrap="square" lIns="0" tIns="0" rIns="0" bIns="0" rtlCol="0" anchor="t"/>
           <a:lstStyle/>
           <a:p>
-            <a:pPr indent="0" marL="0">
+            <a:pPr marL="0" indent="0">
               <a:buNone/>
             </a:pPr>
             <a:r>
@@ -2758,9 +2668,9 @@
                 <a:solidFill>
                   <a:srgbClr val="7A7468"/>
                 </a:solidFill>
-                <a:latin typeface="Microsoft YaHei" pitchFamily="34" charset="0"/>
-                <a:ea typeface="Microsoft YaHei" pitchFamily="34" charset="-122"/>
-                <a:cs typeface="Microsoft YaHei" pitchFamily="34" charset="-120"/>
+                <a:latin typeface="微软雅黑" panose="020B0503020204020204" pitchFamily="34" charset="-122"/>
+                <a:ea typeface="微软雅黑" panose="020B0503020204020204" pitchFamily="34" charset="-122"/>
+                <a:cs typeface="微软雅黑" panose="020B0503020204020204" pitchFamily="34" charset="-120"/>
               </a:rPr>
               <a:t>会议行动项、周报、抽取结果还要手工整理，格式不统一。</a:t>
             </a:r>
@@ -2835,13 +2745,12 @@
             <a:avLst/>
           </a:prstGeom>
           <a:noFill/>
-          <a:ln/>
-        </p:spPr>
-        <p:txBody>
-          <a:bodyPr wrap="square" lIns="0" tIns="0" rIns="0" bIns="0" rtlCol="0" anchor="ctr"/>
-          <a:lstStyle/>
-          <a:p>
-            <a:pPr indent="0" marL="0">
+        </p:spPr>
+        <p:txBody>
+          <a:bodyPr wrap="square" lIns="0" tIns="0" rIns="0" bIns="0" rtlCol="0" anchor="ctr"/>
+          <a:lstStyle/>
+          <a:p>
+            <a:pPr marL="0" indent="0">
               <a:buNone/>
             </a:pPr>
             <a:r>
@@ -2849,9 +2758,9 @@
                 <a:solidFill>
                   <a:srgbClr val="1B1A17"/>
                 </a:solidFill>
-                <a:latin typeface="Microsoft YaHei" pitchFamily="34" charset="0"/>
-                <a:ea typeface="Microsoft YaHei" pitchFamily="34" charset="-122"/>
-                <a:cs typeface="Microsoft YaHei" pitchFamily="34" charset="-120"/>
+                <a:latin typeface="微软雅黑" panose="020B0503020204020204" pitchFamily="34" charset="-122"/>
+                <a:ea typeface="微软雅黑" panose="020B0503020204020204" pitchFamily="34" charset="-122"/>
+                <a:cs typeface="微软雅黑" panose="020B0503020204020204" pitchFamily="34" charset="-120"/>
               </a:rPr>
               <a:t>找得到</a:t>
             </a:r>
@@ -2874,13 +2783,12 @@
             <a:avLst/>
           </a:prstGeom>
           <a:noFill/>
-          <a:ln/>
-        </p:spPr>
-        <p:txBody>
-          <a:bodyPr wrap="square" lIns="0" tIns="0" rIns="0" bIns="0" rtlCol="0" anchor="ctr"/>
-          <a:lstStyle/>
-          <a:p>
-            <a:pPr indent="0" marL="0">
+        </p:spPr>
+        <p:txBody>
+          <a:bodyPr wrap="square" lIns="0" tIns="0" rIns="0" bIns="0" rtlCol="0" anchor="ctr"/>
+          <a:lstStyle/>
+          <a:p>
+            <a:pPr marL="0" indent="0">
               <a:buNone/>
             </a:pPr>
             <a:r>
@@ -2888,9 +2796,9 @@
                 <a:solidFill>
                   <a:srgbClr val="7A7468"/>
                 </a:solidFill>
-                <a:latin typeface="Microsoft YaHei" pitchFamily="34" charset="0"/>
-                <a:ea typeface="Microsoft YaHei" pitchFamily="34" charset="-122"/>
-                <a:cs typeface="Microsoft YaHei" pitchFamily="34" charset="-120"/>
+                <a:latin typeface="微软雅黑" panose="020B0503020204020204" pitchFamily="34" charset="-122"/>
+                <a:ea typeface="微软雅黑" panose="020B0503020204020204" pitchFamily="34" charset="-122"/>
+                <a:cs typeface="微软雅黑" panose="020B0503020204020204" pitchFamily="34" charset="-120"/>
               </a:rPr>
               <a:t>向量 + FTS5 混合检索，命中原文片段，附页码与相似度。</a:t>
             </a:r>
@@ -2940,13 +2848,12 @@
             <a:avLst/>
           </a:prstGeom>
           <a:noFill/>
-          <a:ln/>
-        </p:spPr>
-        <p:txBody>
-          <a:bodyPr wrap="square" lIns="0" tIns="0" rIns="0" bIns="0" rtlCol="0" anchor="ctr"/>
-          <a:lstStyle/>
-          <a:p>
-            <a:pPr indent="0" marL="0">
+        </p:spPr>
+        <p:txBody>
+          <a:bodyPr wrap="square" lIns="0" tIns="0" rIns="0" bIns="0" rtlCol="0" anchor="ctr"/>
+          <a:lstStyle/>
+          <a:p>
+            <a:pPr marL="0" indent="0">
               <a:buNone/>
             </a:pPr>
             <a:r>
@@ -2954,9 +2861,9 @@
                 <a:solidFill>
                   <a:srgbClr val="1B1A17"/>
                 </a:solidFill>
-                <a:latin typeface="Microsoft YaHei" pitchFamily="34" charset="0"/>
-                <a:ea typeface="Microsoft YaHei" pitchFamily="34" charset="-122"/>
-                <a:cs typeface="Microsoft YaHei" pitchFamily="34" charset="-120"/>
+                <a:latin typeface="微软雅黑" panose="020B0503020204020204" pitchFamily="34" charset="-122"/>
+                <a:ea typeface="微软雅黑" panose="020B0503020204020204" pitchFamily="34" charset="-122"/>
+                <a:cs typeface="微软雅黑" panose="020B0503020204020204" pitchFamily="34" charset="-120"/>
               </a:rPr>
               <a:t>说得准</a:t>
             </a:r>
@@ -2979,13 +2886,12 @@
             <a:avLst/>
           </a:prstGeom>
           <a:noFill/>
-          <a:ln/>
-        </p:spPr>
-        <p:txBody>
-          <a:bodyPr wrap="square" lIns="0" tIns="0" rIns="0" bIns="0" rtlCol="0" anchor="ctr"/>
-          <a:lstStyle/>
-          <a:p>
-            <a:pPr indent="0" marL="0">
+        </p:spPr>
+        <p:txBody>
+          <a:bodyPr wrap="square" lIns="0" tIns="0" rIns="0" bIns="0" rtlCol="0" anchor="ctr"/>
+          <a:lstStyle/>
+          <a:p>
+            <a:pPr marL="0" indent="0">
               <a:buNone/>
             </a:pPr>
             <a:r>
@@ -2993,9 +2899,9 @@
                 <a:solidFill>
                   <a:srgbClr val="7A7468"/>
                 </a:solidFill>
-                <a:latin typeface="Microsoft YaHei" pitchFamily="34" charset="0"/>
-                <a:ea typeface="Microsoft YaHei" pitchFamily="34" charset="-122"/>
-                <a:cs typeface="Microsoft YaHei" pitchFamily="34" charset="-120"/>
+                <a:latin typeface="微软雅黑" panose="020B0503020204020204" pitchFamily="34" charset="-122"/>
+                <a:ea typeface="微软雅黑" panose="020B0503020204020204" pitchFamily="34" charset="-122"/>
+                <a:cs typeface="微软雅黑" panose="020B0503020204020204" pitchFamily="34" charset="-120"/>
               </a:rPr>
               <a:t>阈值过滤 + 引用校验 + 无依据拒答；回答中的 [n] 可回到原文。</a:t>
             </a:r>
@@ -3045,13 +2951,12 @@
             <a:avLst/>
           </a:prstGeom>
           <a:noFill/>
-          <a:ln/>
-        </p:spPr>
-        <p:txBody>
-          <a:bodyPr wrap="square" lIns="0" tIns="0" rIns="0" bIns="0" rtlCol="0" anchor="ctr"/>
-          <a:lstStyle/>
-          <a:p>
-            <a:pPr indent="0" marL="0">
+        </p:spPr>
+        <p:txBody>
+          <a:bodyPr wrap="square" lIns="0" tIns="0" rIns="0" bIns="0" rtlCol="0" anchor="ctr"/>
+          <a:lstStyle/>
+          <a:p>
+            <a:pPr marL="0" indent="0">
               <a:buNone/>
             </a:pPr>
             <a:r>
@@ -3059,9 +2964,9 @@
                 <a:solidFill>
                   <a:srgbClr val="1B1A17"/>
                 </a:solidFill>
-                <a:latin typeface="Microsoft YaHei" pitchFamily="34" charset="0"/>
-                <a:ea typeface="Microsoft YaHei" pitchFamily="34" charset="-122"/>
-                <a:cs typeface="Microsoft YaHei" pitchFamily="34" charset="-120"/>
+                <a:latin typeface="微软雅黑" panose="020B0503020204020204" pitchFamily="34" charset="-122"/>
+                <a:ea typeface="微软雅黑" panose="020B0503020204020204" pitchFamily="34" charset="-122"/>
+                <a:cs typeface="微软雅黑" panose="020B0503020204020204" pitchFamily="34" charset="-120"/>
               </a:rPr>
               <a:t>交得出</a:t>
             </a:r>
@@ -3084,13 +2989,12 @@
             <a:avLst/>
           </a:prstGeom>
           <a:noFill/>
-          <a:ln/>
-        </p:spPr>
-        <p:txBody>
-          <a:bodyPr wrap="square" lIns="0" tIns="0" rIns="0" bIns="0" rtlCol="0" anchor="ctr"/>
-          <a:lstStyle/>
-          <a:p>
-            <a:pPr indent="0" marL="0">
+        </p:spPr>
+        <p:txBody>
+          <a:bodyPr wrap="square" lIns="0" tIns="0" rIns="0" bIns="0" rtlCol="0" anchor="ctr"/>
+          <a:lstStyle/>
+          <a:p>
+            <a:pPr marL="0" indent="0">
               <a:buNone/>
             </a:pPr>
             <a:r>
@@ -3098,9 +3002,9 @@
                 <a:solidFill>
                   <a:srgbClr val="7A7468"/>
                 </a:solidFill>
-                <a:latin typeface="Microsoft YaHei" pitchFamily="34" charset="0"/>
-                <a:ea typeface="Microsoft YaHei" pitchFamily="34" charset="-122"/>
-                <a:cs typeface="Microsoft YaHei" pitchFamily="34" charset="-120"/>
+                <a:latin typeface="微软雅黑" panose="020B0503020204020204" pitchFamily="34" charset="-122"/>
+                <a:ea typeface="微软雅黑" panose="020B0503020204020204" pitchFamily="34" charset="-122"/>
+                <a:cs typeface="微软雅黑" panose="020B0503020204020204" pitchFamily="34" charset="-120"/>
               </a:rPr>
               <a:t>结构化抽取 5 行表格 + 四段式周报，CSV / Markdown 直接导出。</a:t>
             </a:r>
@@ -3123,13 +3027,12 @@
             <a:avLst/>
           </a:prstGeom>
           <a:noFill/>
-          <a:ln/>
-        </p:spPr>
-        <p:txBody>
-          <a:bodyPr wrap="square" lIns="0" tIns="0" rIns="0" bIns="0" rtlCol="0" anchor="ctr"/>
-          <a:lstStyle/>
-          <a:p>
-            <a:pPr indent="0" marL="0">
+        </p:spPr>
+        <p:txBody>
+          <a:bodyPr wrap="square" lIns="0" tIns="0" rIns="0" bIns="0" rtlCol="0" anchor="ctr"/>
+          <a:lstStyle/>
+          <a:p>
+            <a:pPr marL="0" indent="0">
               <a:buNone/>
             </a:pPr>
             <a:r>
@@ -3137,9 +3040,9 @@
                 <a:solidFill>
                   <a:srgbClr val="B8421D"/>
                 </a:solidFill>
-                <a:latin typeface="Microsoft YaHei" pitchFamily="34" charset="0"/>
-                <a:ea typeface="Microsoft YaHei" pitchFamily="34" charset="-122"/>
-                <a:cs typeface="Microsoft YaHei" pitchFamily="34" charset="-120"/>
+                <a:latin typeface="微软雅黑" panose="020B0503020204020204" pitchFamily="34" charset="-122"/>
+                <a:ea typeface="微软雅黑" panose="020B0503020204020204" pitchFamily="34" charset="-122"/>
+                <a:cs typeface="微软雅黑" panose="020B0503020204020204" pitchFamily="34" charset="-120"/>
               </a:rPr>
               <a:t>不是再做一个聊天框，而是把文档变成可验收的办公结果。</a:t>
             </a:r>
@@ -3162,13 +3065,12 @@
             <a:avLst/>
           </a:prstGeom>
           <a:noFill/>
-          <a:ln/>
-        </p:spPr>
-        <p:txBody>
-          <a:bodyPr wrap="square" lIns="0" tIns="0" rIns="0" bIns="0" rtlCol="0" anchor="ctr"/>
-          <a:lstStyle/>
-          <a:p>
-            <a:pPr indent="0" marL="0">
+        </p:spPr>
+        <p:txBody>
+          <a:bodyPr wrap="square" lIns="0" tIns="0" rIns="0" bIns="0" rtlCol="0" anchor="ctr"/>
+          <a:lstStyle/>
+          <a:p>
+            <a:pPr marL="0" indent="0">
               <a:buNone/>
             </a:pPr>
             <a:r>
@@ -3176,9 +3078,9 @@
                 <a:solidFill>
                   <a:srgbClr val="7A7468"/>
                 </a:solidFill>
-                <a:latin typeface="Microsoft YaHei" pitchFamily="34" charset="0"/>
-                <a:ea typeface="Microsoft YaHei" pitchFamily="34" charset="-122"/>
-                <a:cs typeface="Microsoft YaHei" pitchFamily="34" charset="-120"/>
+                <a:latin typeface="微软雅黑" panose="020B0503020204020204" pitchFamily="34" charset="-122"/>
+                <a:ea typeface="微软雅黑" panose="020B0503020204020204" pitchFamily="34" charset="-122"/>
+                <a:cs typeface="微软雅黑" panose="020B0503020204020204" pitchFamily="34" charset="-120"/>
               </a:rPr>
               <a:t>OfficePilot · 2026-10-25</a:t>
             </a:r>
@@ -3201,13 +3103,12 @@
             <a:avLst/>
           </a:prstGeom>
           <a:noFill/>
-          <a:ln/>
-        </p:spPr>
-        <p:txBody>
-          <a:bodyPr wrap="square" lIns="0" tIns="0" rIns="0" bIns="0" rtlCol="0" anchor="ctr"/>
-          <a:lstStyle/>
-          <a:p>
-            <a:pPr algn="r" indent="0" marL="0">
+        </p:spPr>
+        <p:txBody>
+          <a:bodyPr wrap="square" lIns="0" tIns="0" rIns="0" bIns="0" rtlCol="0" anchor="ctr"/>
+          <a:lstStyle/>
+          <a:p>
+            <a:pPr marL="0" indent="0" algn="r">
               <a:buNone/>
             </a:pPr>
             <a:r>
@@ -3215,9 +3116,9 @@
                 <a:solidFill>
                   <a:srgbClr val="7A7468"/>
                 </a:solidFill>
-                <a:latin typeface="Georgia" pitchFamily="34" charset="0"/>
-                <a:ea typeface="Georgia" pitchFamily="34" charset="-122"/>
-                <a:cs typeface="Georgia" pitchFamily="34" charset="-120"/>
+                <a:latin typeface="Georgia" panose="02040502050405020303" pitchFamily="34" charset="0"/>
+                <a:ea typeface="Georgia" panose="02040502050405020303" pitchFamily="34" charset="-122"/>
+                <a:cs typeface="Georgia" panose="02040502050405020303" pitchFamily="34" charset="-120"/>
               </a:rPr>
               <a:t>02</a:t>
             </a:r>
@@ -3235,12 +3136,13 @@
 
 <file path=ppt/slides/slide3.xml><?xml version="1.0" encoding="utf-8"?>
 <p:sld xmlns:a="http://schemas.openxmlformats.org/drawingml/2006/main" xmlns:r="http://schemas.openxmlformats.org/officeDocument/2006/relationships" xmlns:p="http://schemas.openxmlformats.org/presentationml/2006/main">
-  <p:cSld name="Slide 3">
+  <p:cSld>
     <p:bg>
       <p:bgPr>
         <a:solidFill>
           <a:srgbClr val="F4F1EA"/>
         </a:solidFill>
+        <a:effectLst/>
       </p:bgPr>
     </p:bg>
     <p:spTree>
@@ -3272,23 +3174,22 @@
             <a:avLst/>
           </a:prstGeom>
           <a:noFill/>
-          <a:ln/>
-        </p:spPr>
-        <p:txBody>
-          <a:bodyPr wrap="square" lIns="0" tIns="0" rIns="0" bIns="0" rtlCol="0" anchor="ctr"/>
-          <a:lstStyle/>
-          <a:p>
-            <a:pPr indent="0" marL="0">
-              <a:buNone/>
-            </a:pPr>
-            <a:r>
-              <a:rPr lang="en-US" sz="900" b="1" spc="120" kern="0" dirty="0">
+        </p:spPr>
+        <p:txBody>
+          <a:bodyPr wrap="square" lIns="0" tIns="0" rIns="0" bIns="0" rtlCol="0" anchor="ctr"/>
+          <a:lstStyle/>
+          <a:p>
+            <a:pPr marL="0" indent="0">
+              <a:buNone/>
+            </a:pPr>
+            <a:r>
+              <a:rPr lang="en-US" sz="900" b="1" kern="0" spc="120" dirty="0">
                 <a:solidFill>
                   <a:srgbClr val="B8421D"/>
                 </a:solidFill>
-                <a:latin typeface="Microsoft YaHei" pitchFamily="34" charset="0"/>
-                <a:ea typeface="Microsoft YaHei" pitchFamily="34" charset="-122"/>
-                <a:cs typeface="Microsoft YaHei" pitchFamily="34" charset="-120"/>
+                <a:latin typeface="微软雅黑" panose="020B0503020204020204" pitchFamily="34" charset="-122"/>
+                <a:ea typeface="微软雅黑" panose="020B0503020204020204" pitchFamily="34" charset="-122"/>
+                <a:cs typeface="微软雅黑" panose="020B0503020204020204" pitchFamily="34" charset="-120"/>
               </a:rPr>
               <a:t>02 / PRODUCT</a:t>
             </a:r>
@@ -3311,13 +3212,12 @@
             <a:avLst/>
           </a:prstGeom>
           <a:noFill/>
-          <a:ln/>
-        </p:spPr>
-        <p:txBody>
-          <a:bodyPr wrap="square" lIns="0" tIns="0" rIns="0" bIns="0" rtlCol="0" anchor="ctr"/>
-          <a:lstStyle/>
-          <a:p>
-            <a:pPr indent="0" marL="0">
+        </p:spPr>
+        <p:txBody>
+          <a:bodyPr wrap="square" lIns="0" tIns="0" rIns="0" bIns="0" rtlCol="0" anchor="ctr"/>
+          <a:lstStyle/>
+          <a:p>
+            <a:pPr marL="0" indent="0">
               <a:buNone/>
             </a:pPr>
             <a:r>
@@ -3325,9 +3225,9 @@
                 <a:solidFill>
                   <a:srgbClr val="1B1A17"/>
                 </a:solidFill>
-                <a:latin typeface="Microsoft YaHei" pitchFamily="34" charset="0"/>
-                <a:ea typeface="Microsoft YaHei" pitchFamily="34" charset="-122"/>
-                <a:cs typeface="Microsoft YaHei" pitchFamily="34" charset="-120"/>
+                <a:latin typeface="微软雅黑" panose="020B0503020204020204" pitchFamily="34" charset="-122"/>
+                <a:ea typeface="微软雅黑" panose="020B0503020204020204" pitchFamily="34" charset="-122"/>
+                <a:cs typeface="微软雅黑" panose="020B0503020204020204" pitchFamily="34" charset="-120"/>
               </a:rPr>
               <a:t>一个工作台，三个技能</a:t>
             </a:r>
@@ -3427,13 +3327,12 @@
             <a:avLst/>
           </a:prstGeom>
           <a:noFill/>
-          <a:ln/>
-        </p:spPr>
-        <p:txBody>
-          <a:bodyPr wrap="square" lIns="0" tIns="0" rIns="0" bIns="0" rtlCol="0" anchor="ctr"/>
-          <a:lstStyle/>
-          <a:p>
-            <a:pPr indent="0" marL="0">
+        </p:spPr>
+        <p:txBody>
+          <a:bodyPr wrap="square" lIns="0" tIns="0" rIns="0" bIns="0" rtlCol="0" anchor="ctr"/>
+          <a:lstStyle/>
+          <a:p>
+            <a:pPr marL="0" indent="0">
               <a:buNone/>
             </a:pPr>
             <a:r>
@@ -3441,9 +3340,9 @@
                 <a:solidFill>
                   <a:srgbClr val="1B1A17"/>
                 </a:solidFill>
-                <a:latin typeface="Microsoft YaHei" pitchFamily="34" charset="0"/>
-                <a:ea typeface="Microsoft YaHei" pitchFamily="34" charset="-122"/>
-                <a:cs typeface="Microsoft YaHei" pitchFamily="34" charset="-120"/>
+                <a:latin typeface="微软雅黑" panose="020B0503020204020204" pitchFamily="34" charset="-122"/>
+                <a:ea typeface="微软雅黑" panose="020B0503020204020204" pitchFamily="34" charset="-122"/>
+                <a:cs typeface="微软雅黑" panose="020B0503020204020204" pitchFamily="34" charset="-120"/>
               </a:rPr>
               <a:t>制度问答 / 摘要</a:t>
             </a:r>
@@ -3466,13 +3365,12 @@
             <a:avLst/>
           </a:prstGeom>
           <a:noFill/>
-          <a:ln/>
-        </p:spPr>
-        <p:txBody>
-          <a:bodyPr wrap="square" lIns="0" tIns="0" rIns="0" bIns="0" rtlCol="0" anchor="ctr"/>
-          <a:lstStyle/>
-          <a:p>
-            <a:pPr indent="0" marL="0">
+        </p:spPr>
+        <p:txBody>
+          <a:bodyPr wrap="square" lIns="0" tIns="0" rIns="0" bIns="0" rtlCol="0" anchor="ctr"/>
+          <a:lstStyle/>
+          <a:p>
+            <a:pPr marL="0" indent="0">
               <a:buNone/>
             </a:pPr>
             <a:r>
@@ -3480,9 +3378,9 @@
                 <a:solidFill>
                   <a:srgbClr val="B8421D"/>
                 </a:solidFill>
-                <a:latin typeface="Microsoft YaHei" pitchFamily="34" charset="0"/>
-                <a:ea typeface="Microsoft YaHei" pitchFamily="34" charset="-122"/>
-                <a:cs typeface="Microsoft YaHei" pitchFamily="34" charset="-120"/>
+                <a:latin typeface="微软雅黑" panose="020B0503020204020204" pitchFamily="34" charset="-122"/>
+                <a:ea typeface="微软雅黑" panose="020B0503020204020204" pitchFamily="34" charset="-122"/>
+                <a:cs typeface="微软雅黑" panose="020B0503020204020204" pitchFamily="34" charset="-120"/>
               </a:rPr>
               <a:t>输入</a:t>
             </a:r>
@@ -3505,13 +3403,12 @@
             <a:avLst/>
           </a:prstGeom>
           <a:noFill/>
-          <a:ln/>
         </p:spPr>
         <p:txBody>
           <a:bodyPr wrap="square" lIns="0" tIns="0" rIns="0" bIns="0" rtlCol="0" anchor="t"/>
           <a:lstStyle/>
           <a:p>
-            <a:pPr indent="0" marL="0">
+            <a:pPr marL="0" indent="0">
               <a:buNone/>
             </a:pPr>
             <a:r>
@@ -3519,9 +3416,9 @@
                 <a:solidFill>
                   <a:srgbClr val="7A7468"/>
                 </a:solidFill>
-                <a:latin typeface="Microsoft YaHei" pitchFamily="34" charset="0"/>
-                <a:ea typeface="Microsoft YaHei" pitchFamily="34" charset="-122"/>
-                <a:cs typeface="Microsoft YaHei" pitchFamily="34" charset="-120"/>
+                <a:latin typeface="微软雅黑" panose="020B0503020204020204" pitchFamily="34" charset="-122"/>
+                <a:ea typeface="微软雅黑" panose="020B0503020204020204" pitchFamily="34" charset="-122"/>
+                <a:cs typeface="微软雅黑" panose="020B0503020204020204" pitchFamily="34" charset="-120"/>
               </a:rPr>
               <a:t>自然语言问题 + @ 文档</a:t>
             </a:r>
@@ -3544,13 +3441,12 @@
             <a:avLst/>
           </a:prstGeom>
           <a:noFill/>
-          <a:ln/>
-        </p:spPr>
-        <p:txBody>
-          <a:bodyPr wrap="square" lIns="0" tIns="0" rIns="0" bIns="0" rtlCol="0" anchor="ctr"/>
-          <a:lstStyle/>
-          <a:p>
-            <a:pPr indent="0" marL="0">
+        </p:spPr>
+        <p:txBody>
+          <a:bodyPr wrap="square" lIns="0" tIns="0" rIns="0" bIns="0" rtlCol="0" anchor="ctr"/>
+          <a:lstStyle/>
+          <a:p>
+            <a:pPr marL="0" indent="0">
               <a:buNone/>
             </a:pPr>
             <a:r>
@@ -3558,9 +3454,9 @@
                 <a:solidFill>
                   <a:srgbClr val="B8421D"/>
                 </a:solidFill>
-                <a:latin typeface="Microsoft YaHei" pitchFamily="34" charset="0"/>
-                <a:ea typeface="Microsoft YaHei" pitchFamily="34" charset="-122"/>
-                <a:cs typeface="Microsoft YaHei" pitchFamily="34" charset="-120"/>
+                <a:latin typeface="微软雅黑" panose="020B0503020204020204" pitchFamily="34" charset="-122"/>
+                <a:ea typeface="微软雅黑" panose="020B0503020204020204" pitchFamily="34" charset="-122"/>
+                <a:cs typeface="微软雅黑" panose="020B0503020204020204" pitchFamily="34" charset="-120"/>
               </a:rPr>
               <a:t>处理</a:t>
             </a:r>
@@ -3583,13 +3479,12 @@
             <a:avLst/>
           </a:prstGeom>
           <a:noFill/>
-          <a:ln/>
         </p:spPr>
         <p:txBody>
           <a:bodyPr wrap="square" lIns="0" tIns="0" rIns="0" bIns="0" rtlCol="0" anchor="t"/>
           <a:lstStyle/>
           <a:p>
-            <a:pPr indent="0" marL="0">
+            <a:pPr marL="0" indent="0">
               <a:buNone/>
             </a:pPr>
             <a:r>
@@ -3597,9 +3492,9 @@
                 <a:solidFill>
                   <a:srgbClr val="7A7468"/>
                 </a:solidFill>
-                <a:latin typeface="Microsoft YaHei" pitchFamily="34" charset="0"/>
-                <a:ea typeface="Microsoft YaHei" pitchFamily="34" charset="-122"/>
-                <a:cs typeface="Microsoft YaHei" pitchFamily="34" charset="-120"/>
+                <a:latin typeface="微软雅黑" panose="020B0503020204020204" pitchFamily="34" charset="-122"/>
+                <a:ea typeface="微软雅黑" panose="020B0503020204020204" pitchFamily="34" charset="-122"/>
+                <a:cs typeface="微软雅黑" panose="020B0503020204020204" pitchFamily="34" charset="-120"/>
               </a:rPr>
               <a:t>混合检索 → 阈值 → 带引用生成</a:t>
             </a:r>
@@ -3622,13 +3517,12 @@
             <a:avLst/>
           </a:prstGeom>
           <a:noFill/>
-          <a:ln/>
-        </p:spPr>
-        <p:txBody>
-          <a:bodyPr wrap="square" lIns="0" tIns="0" rIns="0" bIns="0" rtlCol="0" anchor="ctr"/>
-          <a:lstStyle/>
-          <a:p>
-            <a:pPr indent="0" marL="0">
+        </p:spPr>
+        <p:txBody>
+          <a:bodyPr wrap="square" lIns="0" tIns="0" rIns="0" bIns="0" rtlCol="0" anchor="ctr"/>
+          <a:lstStyle/>
+          <a:p>
+            <a:pPr marL="0" indent="0">
               <a:buNone/>
             </a:pPr>
             <a:r>
@@ -3636,9 +3530,9 @@
                 <a:solidFill>
                   <a:srgbClr val="B8421D"/>
                 </a:solidFill>
-                <a:latin typeface="Microsoft YaHei" pitchFamily="34" charset="0"/>
-                <a:ea typeface="Microsoft YaHei" pitchFamily="34" charset="-122"/>
-                <a:cs typeface="Microsoft YaHei" pitchFamily="34" charset="-120"/>
+                <a:latin typeface="微软雅黑" panose="020B0503020204020204" pitchFamily="34" charset="-122"/>
+                <a:ea typeface="微软雅黑" panose="020B0503020204020204" pitchFamily="34" charset="-122"/>
+                <a:cs typeface="微软雅黑" panose="020B0503020204020204" pitchFamily="34" charset="-120"/>
               </a:rPr>
               <a:t>输出</a:t>
             </a:r>
@@ -3661,13 +3555,12 @@
             <a:avLst/>
           </a:prstGeom>
           <a:noFill/>
-          <a:ln/>
         </p:spPr>
         <p:txBody>
           <a:bodyPr wrap="square" lIns="0" tIns="0" rIns="0" bIns="0" rtlCol="0" anchor="t"/>
           <a:lstStyle/>
           <a:p>
-            <a:pPr indent="0" marL="0">
+            <a:pPr marL="0" indent="0">
               <a:buNone/>
             </a:pPr>
             <a:r>
@@ -3675,9 +3568,9 @@
                 <a:solidFill>
                   <a:srgbClr val="7A7468"/>
                 </a:solidFill>
-                <a:latin typeface="Microsoft YaHei" pitchFamily="34" charset="0"/>
-                <a:ea typeface="Microsoft YaHei" pitchFamily="34" charset="-122"/>
-                <a:cs typeface="Microsoft YaHei" pitchFamily="34" charset="-120"/>
+                <a:latin typeface="微软雅黑" panose="020B0503020204020204" pitchFamily="34" charset="-122"/>
+                <a:ea typeface="微软雅黑" panose="020B0503020204020204" pitchFamily="34" charset="-122"/>
+                <a:cs typeface="微软雅黑" panose="020B0503020204020204" pitchFamily="34" charset="-120"/>
               </a:rPr>
               <a:t>流式回答 + [n] + 证据面板</a:t>
             </a:r>
@@ -3700,13 +3593,12 @@
             <a:avLst/>
           </a:prstGeom>
           <a:noFill/>
-          <a:ln/>
-        </p:spPr>
-        <p:txBody>
-          <a:bodyPr wrap="square" lIns="0" tIns="0" rIns="0" bIns="0" rtlCol="0" anchor="ctr"/>
-          <a:lstStyle/>
-          <a:p>
-            <a:pPr indent="0" marL="0">
+        </p:spPr>
+        <p:txBody>
+          <a:bodyPr wrap="square" lIns="0" tIns="0" rIns="0" bIns="0" rtlCol="0" anchor="ctr"/>
+          <a:lstStyle/>
+          <a:p>
+            <a:pPr marL="0" indent="0">
               <a:buNone/>
             </a:pPr>
             <a:r>
@@ -3714,9 +3606,9 @@
                 <a:solidFill>
                   <a:srgbClr val="B8421D"/>
                 </a:solidFill>
-                <a:latin typeface="Microsoft YaHei" pitchFamily="34" charset="0"/>
-                <a:ea typeface="Microsoft YaHei" pitchFamily="34" charset="-122"/>
-                <a:cs typeface="Microsoft YaHei" pitchFamily="34" charset="-120"/>
+                <a:latin typeface="微软雅黑" panose="020B0503020204020204" pitchFamily="34" charset="-122"/>
+                <a:ea typeface="微软雅黑" panose="020B0503020204020204" pitchFamily="34" charset="-122"/>
+                <a:cs typeface="微软雅黑" panose="020B0503020204020204" pitchFamily="34" charset="-120"/>
               </a:rPr>
               <a:t>边界</a:t>
             </a:r>
@@ -3739,13 +3631,12 @@
             <a:avLst/>
           </a:prstGeom>
           <a:noFill/>
-          <a:ln/>
         </p:spPr>
         <p:txBody>
           <a:bodyPr wrap="square" lIns="0" tIns="0" rIns="0" bIns="0" rtlCol="0" anchor="t"/>
           <a:lstStyle/>
           <a:p>
-            <a:pPr indent="0" marL="0">
+            <a:pPr marL="0" indent="0">
               <a:buNone/>
             </a:pPr>
             <a:r>
@@ -3753,9 +3644,9 @@
                 <a:solidFill>
                   <a:srgbClr val="7A7468"/>
                 </a:solidFill>
-                <a:latin typeface="Microsoft YaHei" pitchFamily="34" charset="0"/>
-                <a:ea typeface="Microsoft YaHei" pitchFamily="34" charset="-122"/>
-                <a:cs typeface="Microsoft YaHei" pitchFamily="34" charset="-120"/>
+                <a:latin typeface="微软雅黑" panose="020B0503020204020204" pitchFamily="34" charset="-122"/>
+                <a:ea typeface="微软雅黑" panose="020B0503020204020204" pitchFamily="34" charset="-122"/>
+                <a:cs typeface="微软雅黑" panose="020B0503020204020204" pitchFamily="34" charset="-120"/>
               </a:rPr>
               <a:t>无依据拒答 / 转人工建议</a:t>
             </a:r>
@@ -3830,13 +3721,12 @@
             <a:avLst/>
           </a:prstGeom>
           <a:noFill/>
-          <a:ln/>
-        </p:spPr>
-        <p:txBody>
-          <a:bodyPr wrap="square" lIns="0" tIns="0" rIns="0" bIns="0" rtlCol="0" anchor="ctr"/>
-          <a:lstStyle/>
-          <a:p>
-            <a:pPr indent="0" marL="0">
+        </p:spPr>
+        <p:txBody>
+          <a:bodyPr wrap="square" lIns="0" tIns="0" rIns="0" bIns="0" rtlCol="0" anchor="ctr"/>
+          <a:lstStyle/>
+          <a:p>
+            <a:pPr marL="0" indent="0">
               <a:buNone/>
             </a:pPr>
             <a:r>
@@ -3844,9 +3734,9 @@
                 <a:solidFill>
                   <a:srgbClr val="1B1A17"/>
                 </a:solidFill>
-                <a:latin typeface="Microsoft YaHei" pitchFamily="34" charset="0"/>
-                <a:ea typeface="Microsoft YaHei" pitchFamily="34" charset="-122"/>
-                <a:cs typeface="Microsoft YaHei" pitchFamily="34" charset="-120"/>
+                <a:latin typeface="微软雅黑" panose="020B0503020204020204" pitchFamily="34" charset="-122"/>
+                <a:ea typeface="微软雅黑" panose="020B0503020204020204" pitchFamily="34" charset="-122"/>
+                <a:cs typeface="微软雅黑" panose="020B0503020204020204" pitchFamily="34" charset="-120"/>
               </a:rPr>
               <a:t>文档抽取</a:t>
             </a:r>
@@ -3869,13 +3759,12 @@
             <a:avLst/>
           </a:prstGeom>
           <a:noFill/>
-          <a:ln/>
-        </p:spPr>
-        <p:txBody>
-          <a:bodyPr wrap="square" lIns="0" tIns="0" rIns="0" bIns="0" rtlCol="0" anchor="ctr"/>
-          <a:lstStyle/>
-          <a:p>
-            <a:pPr indent="0" marL="0">
+        </p:spPr>
+        <p:txBody>
+          <a:bodyPr wrap="square" lIns="0" tIns="0" rIns="0" bIns="0" rtlCol="0" anchor="ctr"/>
+          <a:lstStyle/>
+          <a:p>
+            <a:pPr marL="0" indent="0">
               <a:buNone/>
             </a:pPr>
             <a:r>
@@ -3883,9 +3772,9 @@
                 <a:solidFill>
                   <a:srgbClr val="B8421D"/>
                 </a:solidFill>
-                <a:latin typeface="Microsoft YaHei" pitchFamily="34" charset="0"/>
-                <a:ea typeface="Microsoft YaHei" pitchFamily="34" charset="-122"/>
-                <a:cs typeface="Microsoft YaHei" pitchFamily="34" charset="-120"/>
+                <a:latin typeface="微软雅黑" panose="020B0503020204020204" pitchFamily="34" charset="-122"/>
+                <a:ea typeface="微软雅黑" panose="020B0503020204020204" pitchFamily="34" charset="-122"/>
+                <a:cs typeface="微软雅黑" panose="020B0503020204020204" pitchFamily="34" charset="-120"/>
               </a:rPr>
               <a:t>输入</a:t>
             </a:r>
@@ -3908,13 +3797,12 @@
             <a:avLst/>
           </a:prstGeom>
           <a:noFill/>
-          <a:ln/>
         </p:spPr>
         <p:txBody>
           <a:bodyPr wrap="square" lIns="0" tIns="0" rIns="0" bIns="0" rtlCol="0" anchor="t"/>
           <a:lstStyle/>
           <a:p>
-            <a:pPr indent="0" marL="0">
+            <a:pPr marL="0" indent="0">
               <a:buNone/>
             </a:pPr>
             <a:r>
@@ -3922,9 +3810,9 @@
                 <a:solidFill>
                   <a:srgbClr val="7A7468"/>
                 </a:solidFill>
-                <a:latin typeface="Microsoft YaHei" pitchFamily="34" charset="0"/>
-                <a:ea typeface="Microsoft YaHei" pitchFamily="34" charset="-122"/>
-                <a:cs typeface="Microsoft YaHei" pitchFamily="34" charset="-120"/>
+                <a:latin typeface="微软雅黑" panose="020B0503020204020204" pitchFamily="34" charset="-122"/>
+                <a:ea typeface="微软雅黑" panose="020B0503020204020204" pitchFamily="34" charset="-122"/>
+                <a:cs typeface="微软雅黑" panose="020B0503020204020204" pitchFamily="34" charset="-120"/>
               </a:rPr>
               <a:t>@ 指定 1 份文档 + 字段模板</a:t>
             </a:r>
@@ -3947,13 +3835,12 @@
             <a:avLst/>
           </a:prstGeom>
           <a:noFill/>
-          <a:ln/>
-        </p:spPr>
-        <p:txBody>
-          <a:bodyPr wrap="square" lIns="0" tIns="0" rIns="0" bIns="0" rtlCol="0" anchor="ctr"/>
-          <a:lstStyle/>
-          <a:p>
-            <a:pPr indent="0" marL="0">
+        </p:spPr>
+        <p:txBody>
+          <a:bodyPr wrap="square" lIns="0" tIns="0" rIns="0" bIns="0" rtlCol="0" anchor="ctr"/>
+          <a:lstStyle/>
+          <a:p>
+            <a:pPr marL="0" indent="0">
               <a:buNone/>
             </a:pPr>
             <a:r>
@@ -3961,9 +3848,9 @@
                 <a:solidFill>
                   <a:srgbClr val="B8421D"/>
                 </a:solidFill>
-                <a:latin typeface="Microsoft YaHei" pitchFamily="34" charset="0"/>
-                <a:ea typeface="Microsoft YaHei" pitchFamily="34" charset="-122"/>
-                <a:cs typeface="Microsoft YaHei" pitchFamily="34" charset="-120"/>
+                <a:latin typeface="微软雅黑" panose="020B0503020204020204" pitchFamily="34" charset="-122"/>
+                <a:ea typeface="微软雅黑" panose="020B0503020204020204" pitchFamily="34" charset="-122"/>
+                <a:cs typeface="微软雅黑" panose="020B0503020204020204" pitchFamily="34" charset="-120"/>
               </a:rPr>
               <a:t>处理</a:t>
             </a:r>
@@ -3986,13 +3873,12 @@
             <a:avLst/>
           </a:prstGeom>
           <a:noFill/>
-          <a:ln/>
         </p:spPr>
         <p:txBody>
           <a:bodyPr wrap="square" lIns="0" tIns="0" rIns="0" bIns="0" rtlCol="0" anchor="t"/>
           <a:lstStyle/>
           <a:p>
-            <a:pPr indent="0" marL="0">
+            <a:pPr marL="0" indent="0">
               <a:buNone/>
             </a:pPr>
             <a:r>
@@ -4000,9 +3886,9 @@
                 <a:solidFill>
                   <a:srgbClr val="7A7468"/>
                 </a:solidFill>
-                <a:latin typeface="Microsoft YaHei" pitchFamily="34" charset="0"/>
-                <a:ea typeface="Microsoft YaHei" pitchFamily="34" charset="-122"/>
-                <a:cs typeface="Microsoft YaHei" pitchFamily="34" charset="-120"/>
+                <a:latin typeface="微软雅黑" panose="020B0503020204020204" pitchFamily="34" charset="-122"/>
+                <a:ea typeface="微软雅黑" panose="020B0503020204020204" pitchFamily="34" charset="-122"/>
+                <a:cs typeface="微软雅黑" panose="020B0503020204020204" pitchFamily="34" charset="-120"/>
               </a:rPr>
               <a:t>JSON 输出 → zod 逐行校验</a:t>
             </a:r>
@@ -4025,13 +3911,12 @@
             <a:avLst/>
           </a:prstGeom>
           <a:noFill/>
-          <a:ln/>
-        </p:spPr>
-        <p:txBody>
-          <a:bodyPr wrap="square" lIns="0" tIns="0" rIns="0" bIns="0" rtlCol="0" anchor="ctr"/>
-          <a:lstStyle/>
-          <a:p>
-            <a:pPr indent="0" marL="0">
+        </p:spPr>
+        <p:txBody>
+          <a:bodyPr wrap="square" lIns="0" tIns="0" rIns="0" bIns="0" rtlCol="0" anchor="ctr"/>
+          <a:lstStyle/>
+          <a:p>
+            <a:pPr marL="0" indent="0">
               <a:buNone/>
             </a:pPr>
             <a:r>
@@ -4039,9 +3924,9 @@
                 <a:solidFill>
                   <a:srgbClr val="B8421D"/>
                 </a:solidFill>
-                <a:latin typeface="Microsoft YaHei" pitchFamily="34" charset="0"/>
-                <a:ea typeface="Microsoft YaHei" pitchFamily="34" charset="-122"/>
-                <a:cs typeface="Microsoft YaHei" pitchFamily="34" charset="-120"/>
+                <a:latin typeface="微软雅黑" panose="020B0503020204020204" pitchFamily="34" charset="-122"/>
+                <a:ea typeface="微软雅黑" panose="020B0503020204020204" pitchFamily="34" charset="-122"/>
+                <a:cs typeface="微软雅黑" panose="020B0503020204020204" pitchFamily="34" charset="-120"/>
               </a:rPr>
               <a:t>输出</a:t>
             </a:r>
@@ -4064,13 +3949,12 @@
             <a:avLst/>
           </a:prstGeom>
           <a:noFill/>
-          <a:ln/>
         </p:spPr>
         <p:txBody>
           <a:bodyPr wrap="square" lIns="0" tIns="0" rIns="0" bIns="0" rtlCol="0" anchor="t"/>
           <a:lstStyle/>
           <a:p>
-            <a:pPr indent="0" marL="0">
+            <a:pPr marL="0" indent="0">
               <a:buNone/>
             </a:pPr>
             <a:r>
@@ -4078,9 +3962,9 @@
                 <a:solidFill>
                   <a:srgbClr val="7A7468"/>
                 </a:solidFill>
-                <a:latin typeface="Microsoft YaHei" pitchFamily="34" charset="0"/>
-                <a:ea typeface="Microsoft YaHei" pitchFamily="34" charset="-122"/>
-                <a:cs typeface="Microsoft YaHei" pitchFamily="34" charset="-120"/>
+                <a:latin typeface="微软雅黑" panose="020B0503020204020204" pitchFamily="34" charset="-122"/>
+                <a:ea typeface="微软雅黑" panose="020B0503020204020204" pitchFamily="34" charset="-122"/>
+                <a:cs typeface="微软雅黑" panose="020B0503020204020204" pitchFamily="34" charset="-120"/>
               </a:rPr>
               <a:t>4 套模板 / 5 行会议行动项</a:t>
             </a:r>
@@ -4103,13 +3987,12 @@
             <a:avLst/>
           </a:prstGeom>
           <a:noFill/>
-          <a:ln/>
-        </p:spPr>
-        <p:txBody>
-          <a:bodyPr wrap="square" lIns="0" tIns="0" rIns="0" bIns="0" rtlCol="0" anchor="ctr"/>
-          <a:lstStyle/>
-          <a:p>
-            <a:pPr indent="0" marL="0">
+        </p:spPr>
+        <p:txBody>
+          <a:bodyPr wrap="square" lIns="0" tIns="0" rIns="0" bIns="0" rtlCol="0" anchor="ctr"/>
+          <a:lstStyle/>
+          <a:p>
+            <a:pPr marL="0" indent="0">
               <a:buNone/>
             </a:pPr>
             <a:r>
@@ -4117,9 +4000,9 @@
                 <a:solidFill>
                   <a:srgbClr val="B8421D"/>
                 </a:solidFill>
-                <a:latin typeface="Microsoft YaHei" pitchFamily="34" charset="0"/>
-                <a:ea typeface="Microsoft YaHei" pitchFamily="34" charset="-122"/>
-                <a:cs typeface="Microsoft YaHei" pitchFamily="34" charset="-120"/>
+                <a:latin typeface="微软雅黑" panose="020B0503020204020204" pitchFamily="34" charset="-122"/>
+                <a:ea typeface="微软雅黑" panose="020B0503020204020204" pitchFamily="34" charset="-122"/>
+                <a:cs typeface="微软雅黑" panose="020B0503020204020204" pitchFamily="34" charset="-120"/>
               </a:rPr>
               <a:t>失败</a:t>
             </a:r>
@@ -4142,13 +4025,12 @@
             <a:avLst/>
           </a:prstGeom>
           <a:noFill/>
-          <a:ln/>
         </p:spPr>
         <p:txBody>
           <a:bodyPr wrap="square" lIns="0" tIns="0" rIns="0" bIns="0" rtlCol="0" anchor="t"/>
           <a:lstStyle/>
           <a:p>
-            <a:pPr indent="0" marL="0">
+            <a:pPr marL="0" indent="0">
               <a:buNone/>
             </a:pPr>
             <a:r>
@@ -4156,9 +4038,9 @@
                 <a:solidFill>
                   <a:srgbClr val="7A7468"/>
                 </a:solidFill>
-                <a:latin typeface="Microsoft YaHei" pitchFamily="34" charset="0"/>
-                <a:ea typeface="Microsoft YaHei" pitchFamily="34" charset="-122"/>
-                <a:cs typeface="Microsoft YaHei" pitchFamily="34" charset="-120"/>
+                <a:latin typeface="微软雅黑" panose="020B0503020204020204" pitchFamily="34" charset="-122"/>
+                <a:ea typeface="微软雅黑" panose="020B0503020204020204" pitchFamily="34" charset="-122"/>
+                <a:cs typeface="微软雅黑" panose="020B0503020204020204" pitchFamily="34" charset="-120"/>
               </a:rPr>
               <a:t>回灌错误重试 1 次</a:t>
             </a:r>
@@ -4233,13 +4115,12 @@
             <a:avLst/>
           </a:prstGeom>
           <a:noFill/>
-          <a:ln/>
-        </p:spPr>
-        <p:txBody>
-          <a:bodyPr wrap="square" lIns="0" tIns="0" rIns="0" bIns="0" rtlCol="0" anchor="ctr"/>
-          <a:lstStyle/>
-          <a:p>
-            <a:pPr indent="0" marL="0">
+        </p:spPr>
+        <p:txBody>
+          <a:bodyPr wrap="square" lIns="0" tIns="0" rIns="0" bIns="0" rtlCol="0" anchor="ctr"/>
+          <a:lstStyle/>
+          <a:p>
+            <a:pPr marL="0" indent="0">
               <a:buNone/>
             </a:pPr>
             <a:r>
@@ -4247,9 +4128,9 @@
                 <a:solidFill>
                   <a:srgbClr val="1B1A17"/>
                 </a:solidFill>
-                <a:latin typeface="Microsoft YaHei" pitchFamily="34" charset="0"/>
-                <a:ea typeface="Microsoft YaHei" pitchFamily="34" charset="-122"/>
-                <a:cs typeface="Microsoft YaHei" pitchFamily="34" charset="-120"/>
+                <a:latin typeface="微软雅黑" panose="020B0503020204020204" pitchFamily="34" charset="-122"/>
+                <a:ea typeface="微软雅黑" panose="020B0503020204020204" pitchFamily="34" charset="-122"/>
+                <a:cs typeface="微软雅黑" panose="020B0503020204020204" pitchFamily="34" charset="-120"/>
               </a:rPr>
               <a:t>周报生成</a:t>
             </a:r>
@@ -4272,13 +4153,12 @@
             <a:avLst/>
           </a:prstGeom>
           <a:noFill/>
-          <a:ln/>
-        </p:spPr>
-        <p:txBody>
-          <a:bodyPr wrap="square" lIns="0" tIns="0" rIns="0" bIns="0" rtlCol="0" anchor="ctr"/>
-          <a:lstStyle/>
-          <a:p>
-            <a:pPr indent="0" marL="0">
+        </p:spPr>
+        <p:txBody>
+          <a:bodyPr wrap="square" lIns="0" tIns="0" rIns="0" bIns="0" rtlCol="0" anchor="ctr"/>
+          <a:lstStyle/>
+          <a:p>
+            <a:pPr marL="0" indent="0">
               <a:buNone/>
             </a:pPr>
             <a:r>
@@ -4286,9 +4166,9 @@
                 <a:solidFill>
                   <a:srgbClr val="B8421D"/>
                 </a:solidFill>
-                <a:latin typeface="Microsoft YaHei" pitchFamily="34" charset="0"/>
-                <a:ea typeface="Microsoft YaHei" pitchFamily="34" charset="-122"/>
-                <a:cs typeface="Microsoft YaHei" pitchFamily="34" charset="-120"/>
+                <a:latin typeface="微软雅黑" panose="020B0503020204020204" pitchFamily="34" charset="-122"/>
+                <a:ea typeface="微软雅黑" panose="020B0503020204020204" pitchFamily="34" charset="-122"/>
+                <a:cs typeface="微软雅黑" panose="020B0503020204020204" pitchFamily="34" charset="-120"/>
               </a:rPr>
               <a:t>输入</a:t>
             </a:r>
@@ -4311,13 +4191,12 @@
             <a:avLst/>
           </a:prstGeom>
           <a:noFill/>
-          <a:ln/>
         </p:spPr>
         <p:txBody>
           <a:bodyPr wrap="square" lIns="0" tIns="0" rIns="0" bIns="0" rtlCol="0" anchor="t"/>
           <a:lstStyle/>
           <a:p>
-            <a:pPr indent="0" marL="0">
+            <a:pPr marL="0" indent="0">
               <a:buNone/>
             </a:pPr>
             <a:r>
@@ -4325,9 +4204,9 @@
                 <a:solidFill>
                   <a:srgbClr val="7A7468"/>
                 </a:solidFill>
-                <a:latin typeface="Microsoft YaHei" pitchFamily="34" charset="0"/>
-                <a:ea typeface="Microsoft YaHei" pitchFamily="34" charset="-122"/>
-                <a:cs typeface="Microsoft YaHei" pitchFamily="34" charset="-120"/>
+                <a:latin typeface="微软雅黑" panose="020B0503020204020204" pitchFamily="34" charset="-122"/>
+                <a:ea typeface="微软雅黑" panose="020B0503020204020204" pitchFamily="34" charset="-122"/>
+                <a:cs typeface="微软雅黑" panose="020B0503020204020204" pitchFamily="34" charset="-120"/>
               </a:rPr>
               <a:t>最近 7 天或手动勾选文档</a:t>
             </a:r>
@@ -4350,13 +4229,12 @@
             <a:avLst/>
           </a:prstGeom>
           <a:noFill/>
-          <a:ln/>
-        </p:spPr>
-        <p:txBody>
-          <a:bodyPr wrap="square" lIns="0" tIns="0" rIns="0" bIns="0" rtlCol="0" anchor="ctr"/>
-          <a:lstStyle/>
-          <a:p>
-            <a:pPr indent="0" marL="0">
+        </p:spPr>
+        <p:txBody>
+          <a:bodyPr wrap="square" lIns="0" tIns="0" rIns="0" bIns="0" rtlCol="0" anchor="ctr"/>
+          <a:lstStyle/>
+          <a:p>
+            <a:pPr marL="0" indent="0">
               <a:buNone/>
             </a:pPr>
             <a:r>
@@ -4364,9 +4242,9 @@
                 <a:solidFill>
                   <a:srgbClr val="B8421D"/>
                 </a:solidFill>
-                <a:latin typeface="Microsoft YaHei" pitchFamily="34" charset="0"/>
-                <a:ea typeface="Microsoft YaHei" pitchFamily="34" charset="-122"/>
-                <a:cs typeface="Microsoft YaHei" pitchFamily="34" charset="-120"/>
+                <a:latin typeface="微软雅黑" panose="020B0503020204020204" pitchFamily="34" charset="-122"/>
+                <a:ea typeface="微软雅黑" panose="020B0503020204020204" pitchFamily="34" charset="-122"/>
+                <a:cs typeface="微软雅黑" panose="020B0503020204020204" pitchFamily="34" charset="-120"/>
               </a:rPr>
               <a:t>处理</a:t>
             </a:r>
@@ -4389,13 +4267,12 @@
             <a:avLst/>
           </a:prstGeom>
           <a:noFill/>
-          <a:ln/>
         </p:spPr>
         <p:txBody>
           <a:bodyPr wrap="square" lIns="0" tIns="0" rIns="0" bIns="0" rtlCol="0" anchor="t"/>
           <a:lstStyle/>
           <a:p>
-            <a:pPr indent="0" marL="0">
+            <a:pPr marL="0" indent="0">
               <a:buNone/>
             </a:pPr>
             <a:r>
@@ -4403,9 +4280,9 @@
                 <a:solidFill>
                   <a:srgbClr val="7A7468"/>
                 </a:solidFill>
-                <a:latin typeface="Microsoft YaHei" pitchFamily="34" charset="0"/>
-                <a:ea typeface="Microsoft YaHei" pitchFamily="34" charset="-122"/>
-                <a:cs typeface="Microsoft YaHei" pitchFamily="34" charset="-120"/>
+                <a:latin typeface="微软雅黑" panose="020B0503020204020204" pitchFamily="34" charset="-122"/>
+                <a:ea typeface="微软雅黑" panose="020B0503020204020204" pitchFamily="34" charset="-122"/>
+                <a:cs typeface="微软雅黑" panose="020B0503020204020204" pitchFamily="34" charset="-120"/>
               </a:rPr>
               <a:t>逐份摘要 → 四段式组装</a:t>
             </a:r>
@@ -4428,13 +4305,12 @@
             <a:avLst/>
           </a:prstGeom>
           <a:noFill/>
-          <a:ln/>
-        </p:spPr>
-        <p:txBody>
-          <a:bodyPr wrap="square" lIns="0" tIns="0" rIns="0" bIns="0" rtlCol="0" anchor="ctr"/>
-          <a:lstStyle/>
-          <a:p>
-            <a:pPr indent="0" marL="0">
+        </p:spPr>
+        <p:txBody>
+          <a:bodyPr wrap="square" lIns="0" tIns="0" rIns="0" bIns="0" rtlCol="0" anchor="ctr"/>
+          <a:lstStyle/>
+          <a:p>
+            <a:pPr marL="0" indent="0">
               <a:buNone/>
             </a:pPr>
             <a:r>
@@ -4442,9 +4318,9 @@
                 <a:solidFill>
                   <a:srgbClr val="B8421D"/>
                 </a:solidFill>
-                <a:latin typeface="Microsoft YaHei" pitchFamily="34" charset="0"/>
-                <a:ea typeface="Microsoft YaHei" pitchFamily="34" charset="-122"/>
-                <a:cs typeface="Microsoft YaHei" pitchFamily="34" charset="-120"/>
+                <a:latin typeface="微软雅黑" panose="020B0503020204020204" pitchFamily="34" charset="-122"/>
+                <a:ea typeface="微软雅黑" panose="020B0503020204020204" pitchFamily="34" charset="-122"/>
+                <a:cs typeface="微软雅黑" panose="020B0503020204020204" pitchFamily="34" charset="-120"/>
               </a:rPr>
               <a:t>输出</a:t>
             </a:r>
@@ -4467,13 +4343,12 @@
             <a:avLst/>
           </a:prstGeom>
           <a:noFill/>
-          <a:ln/>
         </p:spPr>
         <p:txBody>
           <a:bodyPr wrap="square" lIns="0" tIns="0" rIns="0" bIns="0" rtlCol="0" anchor="t"/>
           <a:lstStyle/>
           <a:p>
-            <a:pPr indent="0" marL="0">
+            <a:pPr marL="0" indent="0">
               <a:buNone/>
             </a:pPr>
             <a:r>
@@ -4481,9 +4356,9 @@
                 <a:solidFill>
                   <a:srgbClr val="7A7468"/>
                 </a:solidFill>
-                <a:latin typeface="Microsoft YaHei" pitchFamily="34" charset="0"/>
-                <a:ea typeface="Microsoft YaHei" pitchFamily="34" charset="-122"/>
-                <a:cs typeface="Microsoft YaHei" pitchFamily="34" charset="-120"/>
+                <a:latin typeface="微软雅黑" panose="020B0503020204020204" pitchFamily="34" charset="-122"/>
+                <a:ea typeface="微软雅黑" panose="020B0503020204020204" pitchFamily="34" charset="-122"/>
+                <a:cs typeface="微软雅黑" panose="020B0503020204020204" pitchFamily="34" charset="-120"/>
               </a:rPr>
               <a:t>本周完成 / 进行中 / 风险 / 下周</a:t>
             </a:r>
@@ -4506,13 +4381,12 @@
             <a:avLst/>
           </a:prstGeom>
           <a:noFill/>
-          <a:ln/>
-        </p:spPr>
-        <p:txBody>
-          <a:bodyPr wrap="square" lIns="0" tIns="0" rIns="0" bIns="0" rtlCol="0" anchor="ctr"/>
-          <a:lstStyle/>
-          <a:p>
-            <a:pPr indent="0" marL="0">
+        </p:spPr>
+        <p:txBody>
+          <a:bodyPr wrap="square" lIns="0" tIns="0" rIns="0" bIns="0" rtlCol="0" anchor="ctr"/>
+          <a:lstStyle/>
+          <a:p>
+            <a:pPr marL="0" indent="0">
               <a:buNone/>
             </a:pPr>
             <a:r>
@@ -4520,9 +4394,9 @@
                 <a:solidFill>
                   <a:srgbClr val="B8421D"/>
                 </a:solidFill>
-                <a:latin typeface="Microsoft YaHei" pitchFamily="34" charset="0"/>
-                <a:ea typeface="Microsoft YaHei" pitchFamily="34" charset="-122"/>
-                <a:cs typeface="Microsoft YaHei" pitchFamily="34" charset="-120"/>
+                <a:latin typeface="微软雅黑" panose="020B0503020204020204" pitchFamily="34" charset="-122"/>
+                <a:ea typeface="微软雅黑" panose="020B0503020204020204" pitchFamily="34" charset="-122"/>
+                <a:cs typeface="微软雅黑" panose="020B0503020204020204" pitchFamily="34" charset="-120"/>
               </a:rPr>
               <a:t>导出</a:t>
             </a:r>
@@ -4545,13 +4419,12 @@
             <a:avLst/>
           </a:prstGeom>
           <a:noFill/>
-          <a:ln/>
         </p:spPr>
         <p:txBody>
           <a:bodyPr wrap="square" lIns="0" tIns="0" rIns="0" bIns="0" rtlCol="0" anchor="t"/>
           <a:lstStyle/>
           <a:p>
-            <a:pPr indent="0" marL="0">
+            <a:pPr marL="0" indent="0">
               <a:buNone/>
             </a:pPr>
             <a:r>
@@ -4559,9 +4432,9 @@
                 <a:solidFill>
                   <a:srgbClr val="7A7468"/>
                 </a:solidFill>
-                <a:latin typeface="Microsoft YaHei" pitchFamily="34" charset="0"/>
-                <a:ea typeface="Microsoft YaHei" pitchFamily="34" charset="-122"/>
-                <a:cs typeface="Microsoft YaHei" pitchFamily="34" charset="-120"/>
+                <a:latin typeface="微软雅黑" panose="020B0503020204020204" pitchFamily="34" charset="-122"/>
+                <a:ea typeface="微软雅黑" panose="020B0503020204020204" pitchFamily="34" charset="-122"/>
+                <a:cs typeface="微软雅黑" panose="020B0503020204020204" pitchFamily="34" charset="-120"/>
               </a:rPr>
               <a:t>Markdown，保留来源与缺口</a:t>
             </a:r>
@@ -4611,13 +4484,12 @@
             <a:avLst/>
           </a:prstGeom>
           <a:noFill/>
-          <a:ln/>
-        </p:spPr>
-        <p:txBody>
-          <a:bodyPr wrap="square" lIns="0" tIns="0" rIns="0" bIns="0" rtlCol="0" anchor="ctr"/>
-          <a:lstStyle/>
-          <a:p>
-            <a:pPr indent="0" marL="0">
+        </p:spPr>
+        <p:txBody>
+          <a:bodyPr wrap="square" lIns="0" tIns="0" rIns="0" bIns="0" rtlCol="0" anchor="ctr"/>
+          <a:lstStyle/>
+          <a:p>
+            <a:pPr marL="0" indent="0">
               <a:buNone/>
             </a:pPr>
             <a:r>
@@ -4625,9 +4497,9 @@
                 <a:solidFill>
                   <a:srgbClr val="B8421D"/>
                 </a:solidFill>
-                <a:latin typeface="Georgia" pitchFamily="34" charset="0"/>
-                <a:ea typeface="Georgia" pitchFamily="34" charset="-122"/>
-                <a:cs typeface="Georgia" pitchFamily="34" charset="-120"/>
+                <a:latin typeface="Georgia" panose="02040502050405020303" pitchFamily="34" charset="0"/>
+                <a:ea typeface="Georgia" panose="02040502050405020303" pitchFamily="34" charset="-122"/>
+                <a:cs typeface="Georgia" panose="02040502050405020303" pitchFamily="34" charset="-120"/>
               </a:rPr>
               <a:t>7</a:t>
             </a:r>
@@ -4650,13 +4522,12 @@
             <a:avLst/>
           </a:prstGeom>
           <a:noFill/>
-          <a:ln/>
-        </p:spPr>
-        <p:txBody>
-          <a:bodyPr wrap="square" lIns="0" tIns="0" rIns="0" bIns="0" rtlCol="0" anchor="ctr"/>
-          <a:lstStyle/>
-          <a:p>
-            <a:pPr indent="0" marL="0">
+        </p:spPr>
+        <p:txBody>
+          <a:bodyPr wrap="square" lIns="0" tIns="0" rIns="0" bIns="0" rtlCol="0" anchor="ctr"/>
+          <a:lstStyle/>
+          <a:p>
+            <a:pPr marL="0" indent="0">
               <a:buNone/>
             </a:pPr>
             <a:r>
@@ -4664,9 +4535,9 @@
                 <a:solidFill>
                   <a:srgbClr val="7A7468"/>
                 </a:solidFill>
-                <a:latin typeface="Microsoft YaHei" pitchFamily="34" charset="0"/>
-                <a:ea typeface="Microsoft YaHei" pitchFamily="34" charset="-122"/>
-                <a:cs typeface="Microsoft YaHei" pitchFamily="34" charset="-120"/>
+                <a:latin typeface="微软雅黑" panose="020B0503020204020204" pitchFamily="34" charset="-122"/>
+                <a:ea typeface="微软雅黑" panose="020B0503020204020204" pitchFamily="34" charset="-122"/>
+                <a:cs typeface="微软雅黑" panose="020B0503020204020204" pitchFamily="34" charset="-120"/>
               </a:rPr>
               <a:t>演示文档</a:t>
             </a:r>
@@ -4716,13 +4587,12 @@
             <a:avLst/>
           </a:prstGeom>
           <a:noFill/>
-          <a:ln/>
-        </p:spPr>
-        <p:txBody>
-          <a:bodyPr wrap="square" lIns="0" tIns="0" rIns="0" bIns="0" rtlCol="0" anchor="ctr"/>
-          <a:lstStyle/>
-          <a:p>
-            <a:pPr indent="0" marL="0">
+        </p:spPr>
+        <p:txBody>
+          <a:bodyPr wrap="square" lIns="0" tIns="0" rIns="0" bIns="0" rtlCol="0" anchor="ctr"/>
+          <a:lstStyle/>
+          <a:p>
+            <a:pPr marL="0" indent="0">
               <a:buNone/>
             </a:pPr>
             <a:r>
@@ -4730,9 +4600,9 @@
                 <a:solidFill>
                   <a:srgbClr val="B8421D"/>
                 </a:solidFill>
-                <a:latin typeface="Georgia" pitchFamily="34" charset="0"/>
-                <a:ea typeface="Georgia" pitchFamily="34" charset="-122"/>
-                <a:cs typeface="Georgia" pitchFamily="34" charset="-120"/>
+                <a:latin typeface="Georgia" panose="02040502050405020303" pitchFamily="34" charset="0"/>
+                <a:ea typeface="Georgia" panose="02040502050405020303" pitchFamily="34" charset="-122"/>
+                <a:cs typeface="Georgia" panose="02040502050405020303" pitchFamily="34" charset="-120"/>
               </a:rPr>
               <a:t>6</a:t>
             </a:r>
@@ -4755,13 +4625,12 @@
             <a:avLst/>
           </a:prstGeom>
           <a:noFill/>
-          <a:ln/>
-        </p:spPr>
-        <p:txBody>
-          <a:bodyPr wrap="square" lIns="0" tIns="0" rIns="0" bIns="0" rtlCol="0" anchor="ctr"/>
-          <a:lstStyle/>
-          <a:p>
-            <a:pPr indent="0" marL="0">
+        </p:spPr>
+        <p:txBody>
+          <a:bodyPr wrap="square" lIns="0" tIns="0" rIns="0" bIns="0" rtlCol="0" anchor="ctr"/>
+          <a:lstStyle/>
+          <a:p>
+            <a:pPr marL="0" indent="0">
               <a:buNone/>
             </a:pPr>
             <a:r>
@@ -4769,9 +4638,9 @@
                 <a:solidFill>
                   <a:srgbClr val="7A7468"/>
                 </a:solidFill>
-                <a:latin typeface="Microsoft YaHei" pitchFamily="34" charset="0"/>
-                <a:ea typeface="Microsoft YaHei" pitchFamily="34" charset="-122"/>
-                <a:cs typeface="Microsoft YaHei" pitchFamily="34" charset="-120"/>
+                <a:latin typeface="微软雅黑" panose="020B0503020204020204" pitchFamily="34" charset="-122"/>
+                <a:ea typeface="微软雅黑" panose="020B0503020204020204" pitchFamily="34" charset="-122"/>
+                <a:cs typeface="微软雅黑" panose="020B0503020204020204" pitchFamily="34" charset="-120"/>
               </a:rPr>
               <a:t>支持格式</a:t>
             </a:r>
@@ -4821,13 +4690,12 @@
             <a:avLst/>
           </a:prstGeom>
           <a:noFill/>
-          <a:ln/>
-        </p:spPr>
-        <p:txBody>
-          <a:bodyPr wrap="square" lIns="0" tIns="0" rIns="0" bIns="0" rtlCol="0" anchor="ctr"/>
-          <a:lstStyle/>
-          <a:p>
-            <a:pPr indent="0" marL="0">
+        </p:spPr>
+        <p:txBody>
+          <a:bodyPr wrap="square" lIns="0" tIns="0" rIns="0" bIns="0" rtlCol="0" anchor="ctr"/>
+          <a:lstStyle/>
+          <a:p>
+            <a:pPr marL="0" indent="0">
               <a:buNone/>
             </a:pPr>
             <a:r>
@@ -4835,9 +4703,9 @@
                 <a:solidFill>
                   <a:srgbClr val="B8421D"/>
                 </a:solidFill>
-                <a:latin typeface="Georgia" pitchFamily="34" charset="0"/>
-                <a:ea typeface="Georgia" pitchFamily="34" charset="-122"/>
-                <a:cs typeface="Georgia" pitchFamily="34" charset="-120"/>
+                <a:latin typeface="Georgia" panose="02040502050405020303" pitchFamily="34" charset="0"/>
+                <a:ea typeface="Georgia" panose="02040502050405020303" pitchFamily="34" charset="-122"/>
+                <a:cs typeface="Georgia" panose="02040502050405020303" pitchFamily="34" charset="-120"/>
               </a:rPr>
               <a:t>4</a:t>
             </a:r>
@@ -4860,13 +4728,12 @@
             <a:avLst/>
           </a:prstGeom>
           <a:noFill/>
-          <a:ln/>
-        </p:spPr>
-        <p:txBody>
-          <a:bodyPr wrap="square" lIns="0" tIns="0" rIns="0" bIns="0" rtlCol="0" anchor="ctr"/>
-          <a:lstStyle/>
-          <a:p>
-            <a:pPr indent="0" marL="0">
+        </p:spPr>
+        <p:txBody>
+          <a:bodyPr wrap="square" lIns="0" tIns="0" rIns="0" bIns="0" rtlCol="0" anchor="ctr"/>
+          <a:lstStyle/>
+          <a:p>
+            <a:pPr marL="0" indent="0">
               <a:buNone/>
             </a:pPr>
             <a:r>
@@ -4874,9 +4741,9 @@
                 <a:solidFill>
                   <a:srgbClr val="7A7468"/>
                 </a:solidFill>
-                <a:latin typeface="Microsoft YaHei" pitchFamily="34" charset="0"/>
-                <a:ea typeface="Microsoft YaHei" pitchFamily="34" charset="-122"/>
-                <a:cs typeface="Microsoft YaHei" pitchFamily="34" charset="-120"/>
+                <a:latin typeface="微软雅黑" panose="020B0503020204020204" pitchFamily="34" charset="-122"/>
+                <a:ea typeface="微软雅黑" panose="020B0503020204020204" pitchFamily="34" charset="-122"/>
+                <a:cs typeface="微软雅黑" panose="020B0503020204020204" pitchFamily="34" charset="-120"/>
               </a:rPr>
               <a:t>抽取字段模板</a:t>
             </a:r>
@@ -4926,13 +4793,12 @@
             <a:avLst/>
           </a:prstGeom>
           <a:noFill/>
-          <a:ln/>
-        </p:spPr>
-        <p:txBody>
-          <a:bodyPr wrap="square" lIns="0" tIns="0" rIns="0" bIns="0" rtlCol="0" anchor="ctr"/>
-          <a:lstStyle/>
-          <a:p>
-            <a:pPr indent="0" marL="0">
+        </p:spPr>
+        <p:txBody>
+          <a:bodyPr wrap="square" lIns="0" tIns="0" rIns="0" bIns="0" rtlCol="0" anchor="ctr"/>
+          <a:lstStyle/>
+          <a:p>
+            <a:pPr marL="0" indent="0">
               <a:buNone/>
             </a:pPr>
             <a:r>
@@ -4940,9 +4806,9 @@
                 <a:solidFill>
                   <a:srgbClr val="F4F1EA"/>
                 </a:solidFill>
-                <a:latin typeface="Georgia" pitchFamily="34" charset="0"/>
-                <a:ea typeface="Georgia" pitchFamily="34" charset="-122"/>
-                <a:cs typeface="Georgia" pitchFamily="34" charset="-120"/>
+                <a:latin typeface="Georgia" panose="02040502050405020303" pitchFamily="34" charset="0"/>
+                <a:ea typeface="Georgia" panose="02040502050405020303" pitchFamily="34" charset="-122"/>
+                <a:cs typeface="Georgia" panose="02040502050405020303" pitchFamily="34" charset="-120"/>
               </a:rPr>
               <a:t>SSE</a:t>
             </a:r>
@@ -4965,13 +4831,12 @@
             <a:avLst/>
           </a:prstGeom>
           <a:noFill/>
-          <a:ln/>
-        </p:spPr>
-        <p:txBody>
-          <a:bodyPr wrap="square" lIns="0" tIns="0" rIns="0" bIns="0" rtlCol="0" anchor="ctr"/>
-          <a:lstStyle/>
-          <a:p>
-            <a:pPr indent="0" marL="0">
+        </p:spPr>
+        <p:txBody>
+          <a:bodyPr wrap="square" lIns="0" tIns="0" rIns="0" bIns="0" rtlCol="0" anchor="ctr"/>
+          <a:lstStyle/>
+          <a:p>
+            <a:pPr marL="0" indent="0">
               <a:buNone/>
             </a:pPr>
             <a:r>
@@ -4979,9 +4844,9 @@
                 <a:solidFill>
                   <a:srgbClr val="F4F1EA"/>
                 </a:solidFill>
-                <a:latin typeface="Microsoft YaHei" pitchFamily="34" charset="0"/>
-                <a:ea typeface="Microsoft YaHei" pitchFamily="34" charset="-122"/>
-                <a:cs typeface="Microsoft YaHei" pitchFamily="34" charset="-120"/>
+                <a:latin typeface="微软雅黑" panose="020B0503020204020204" pitchFamily="34" charset="-122"/>
+                <a:ea typeface="微软雅黑" panose="020B0503020204020204" pitchFamily="34" charset="-122"/>
+                <a:cs typeface="微软雅黑" panose="020B0503020204020204" pitchFamily="34" charset="-120"/>
               </a:rPr>
               <a:t>事件可回放</a:t>
             </a:r>
@@ -5004,13 +4869,12 @@
             <a:avLst/>
           </a:prstGeom>
           <a:noFill/>
-          <a:ln/>
-        </p:spPr>
-        <p:txBody>
-          <a:bodyPr wrap="square" lIns="0" tIns="0" rIns="0" bIns="0" rtlCol="0" anchor="ctr"/>
-          <a:lstStyle/>
-          <a:p>
-            <a:pPr indent="0" marL="0">
+        </p:spPr>
+        <p:txBody>
+          <a:bodyPr wrap="square" lIns="0" tIns="0" rIns="0" bIns="0" rtlCol="0" anchor="ctr"/>
+          <a:lstStyle/>
+          <a:p>
+            <a:pPr marL="0" indent="0">
               <a:buNone/>
             </a:pPr>
             <a:r>
@@ -5018,9 +4882,9 @@
                 <a:solidFill>
                   <a:srgbClr val="7A7468"/>
                 </a:solidFill>
-                <a:latin typeface="Microsoft YaHei" pitchFamily="34" charset="0"/>
-                <a:ea typeface="Microsoft YaHei" pitchFamily="34" charset="-122"/>
-                <a:cs typeface="Microsoft YaHei" pitchFamily="34" charset="-120"/>
+                <a:latin typeface="微软雅黑" panose="020B0503020204020204" pitchFamily="34" charset="-122"/>
+                <a:ea typeface="微软雅黑" panose="020B0503020204020204" pitchFamily="34" charset="-122"/>
+                <a:cs typeface="微软雅黑" panose="020B0503020204020204" pitchFamily="34" charset="-120"/>
               </a:rPr>
               <a:t>OfficePilot · 2026-10-25</a:t>
             </a:r>
@@ -5043,13 +4907,12 @@
             <a:avLst/>
           </a:prstGeom>
           <a:noFill/>
-          <a:ln/>
-        </p:spPr>
-        <p:txBody>
-          <a:bodyPr wrap="square" lIns="0" tIns="0" rIns="0" bIns="0" rtlCol="0" anchor="ctr"/>
-          <a:lstStyle/>
-          <a:p>
-            <a:pPr algn="r" indent="0" marL="0">
+        </p:spPr>
+        <p:txBody>
+          <a:bodyPr wrap="square" lIns="0" tIns="0" rIns="0" bIns="0" rtlCol="0" anchor="ctr"/>
+          <a:lstStyle/>
+          <a:p>
+            <a:pPr marL="0" indent="0" algn="r">
               <a:buNone/>
             </a:pPr>
             <a:r>
@@ -5057,9 +4920,9 @@
                 <a:solidFill>
                   <a:srgbClr val="7A7468"/>
                 </a:solidFill>
-                <a:latin typeface="Georgia" pitchFamily="34" charset="0"/>
-                <a:ea typeface="Georgia" pitchFamily="34" charset="-122"/>
-                <a:cs typeface="Georgia" pitchFamily="34" charset="-120"/>
+                <a:latin typeface="Georgia" panose="02040502050405020303" pitchFamily="34" charset="0"/>
+                <a:ea typeface="Georgia" panose="02040502050405020303" pitchFamily="34" charset="-122"/>
+                <a:cs typeface="Georgia" panose="02040502050405020303" pitchFamily="34" charset="-120"/>
               </a:rPr>
               <a:t>03</a:t>
             </a:r>
@@ -5077,12 +4940,13 @@
 
 <file path=ppt/slides/slide4.xml><?xml version="1.0" encoding="utf-8"?>
 <p:sld xmlns:a="http://schemas.openxmlformats.org/drawingml/2006/main" xmlns:r="http://schemas.openxmlformats.org/officeDocument/2006/relationships" xmlns:p="http://schemas.openxmlformats.org/presentationml/2006/main">
-  <p:cSld name="Slide 4">
+  <p:cSld>
     <p:bg>
       <p:bgPr>
         <a:solidFill>
           <a:srgbClr val="F4F1EA"/>
         </a:solidFill>
+        <a:effectLst/>
       </p:bgPr>
     </p:bg>
     <p:spTree>
@@ -5114,23 +4978,22 @@
             <a:avLst/>
           </a:prstGeom>
           <a:noFill/>
-          <a:ln/>
-        </p:spPr>
-        <p:txBody>
-          <a:bodyPr wrap="square" lIns="0" tIns="0" rIns="0" bIns="0" rtlCol="0" anchor="ctr"/>
-          <a:lstStyle/>
-          <a:p>
-            <a:pPr indent="0" marL="0">
-              <a:buNone/>
-            </a:pPr>
-            <a:r>
-              <a:rPr lang="en-US" sz="900" b="1" spc="120" kern="0" dirty="0">
+        </p:spPr>
+        <p:txBody>
+          <a:bodyPr wrap="square" lIns="0" tIns="0" rIns="0" bIns="0" rtlCol="0" anchor="ctr"/>
+          <a:lstStyle/>
+          <a:p>
+            <a:pPr marL="0" indent="0">
+              <a:buNone/>
+            </a:pPr>
+            <a:r>
+              <a:rPr lang="en-US" sz="900" b="1" kern="0" spc="120" dirty="0">
                 <a:solidFill>
                   <a:srgbClr val="B8421D"/>
                 </a:solidFill>
-                <a:latin typeface="Microsoft YaHei" pitchFamily="34" charset="0"/>
-                <a:ea typeface="Microsoft YaHei" pitchFamily="34" charset="-122"/>
-                <a:cs typeface="Microsoft YaHei" pitchFamily="34" charset="-120"/>
+                <a:latin typeface="微软雅黑" panose="020B0503020204020204" pitchFamily="34" charset="-122"/>
+                <a:ea typeface="微软雅黑" panose="020B0503020204020204" pitchFamily="34" charset="-122"/>
+                <a:cs typeface="微软雅黑" panose="020B0503020204020204" pitchFamily="34" charset="-120"/>
               </a:rPr>
               <a:t>03 / ARCHITECTURE</a:t>
             </a:r>
@@ -5153,13 +5016,12 @@
             <a:avLst/>
           </a:prstGeom>
           <a:noFill/>
-          <a:ln/>
-        </p:spPr>
-        <p:txBody>
-          <a:bodyPr wrap="square" lIns="0" tIns="0" rIns="0" bIns="0" rtlCol="0" anchor="ctr"/>
-          <a:lstStyle/>
-          <a:p>
-            <a:pPr indent="0" marL="0">
+        </p:spPr>
+        <p:txBody>
+          <a:bodyPr wrap="square" lIns="0" tIns="0" rIns="0" bIns="0" rtlCol="0" anchor="ctr"/>
+          <a:lstStyle/>
+          <a:p>
+            <a:pPr marL="0" indent="0">
               <a:buNone/>
             </a:pPr>
             <a:r>
@@ -5167,9 +5029,9 @@
                 <a:solidFill>
                   <a:srgbClr val="1B1A17"/>
                 </a:solidFill>
-                <a:latin typeface="Microsoft YaHei" pitchFamily="34" charset="0"/>
-                <a:ea typeface="Microsoft YaHei" pitchFamily="34" charset="-122"/>
-                <a:cs typeface="Microsoft YaHei" pitchFamily="34" charset="-120"/>
+                <a:latin typeface="微软雅黑" panose="020B0503020204020204" pitchFamily="34" charset="-122"/>
+                <a:ea typeface="微软雅黑" panose="020B0503020204020204" pitchFamily="34" charset="-122"/>
+                <a:cs typeface="微软雅黑" panose="020B0503020204020204" pitchFamily="34" charset="-120"/>
               </a:rPr>
               <a:t>三层架构：工作台 / API / 模型与存储</a:t>
             </a:r>
@@ -5269,13 +5131,12 @@
             <a:avLst/>
           </a:prstGeom>
           <a:noFill/>
-          <a:ln/>
-        </p:spPr>
-        <p:txBody>
-          <a:bodyPr wrap="square" lIns="0" tIns="0" rIns="0" bIns="0" rtlCol="0" anchor="ctr"/>
-          <a:lstStyle/>
-          <a:p>
-            <a:pPr indent="0" marL="0">
+        </p:spPr>
+        <p:txBody>
+          <a:bodyPr wrap="square" lIns="0" tIns="0" rIns="0" bIns="0" rtlCol="0" anchor="ctr"/>
+          <a:lstStyle/>
+          <a:p>
+            <a:pPr marL="0" indent="0">
               <a:buNone/>
             </a:pPr>
             <a:r>
@@ -5283,9 +5144,9 @@
                 <a:solidFill>
                   <a:srgbClr val="1B1A17"/>
                 </a:solidFill>
-                <a:latin typeface="Microsoft YaHei" pitchFamily="34" charset="0"/>
-                <a:ea typeface="Microsoft YaHei" pitchFamily="34" charset="-122"/>
-                <a:cs typeface="Microsoft YaHei" pitchFamily="34" charset="-120"/>
+                <a:latin typeface="微软雅黑" panose="020B0503020204020204" pitchFamily="34" charset="-122"/>
+                <a:ea typeface="微软雅黑" panose="020B0503020204020204" pitchFamily="34" charset="-122"/>
+                <a:cs typeface="微软雅黑" panose="020B0503020204020204" pitchFamily="34" charset="-120"/>
               </a:rPr>
               <a:t>React 工作台</a:t>
             </a:r>
@@ -5308,13 +5169,12 @@
             <a:avLst/>
           </a:prstGeom>
           <a:noFill/>
-          <a:ln/>
         </p:spPr>
         <p:txBody>
           <a:bodyPr wrap="square" lIns="0" tIns="0" rIns="0" bIns="0" rtlCol="0" anchor="t"/>
           <a:lstStyle/>
           <a:p>
-            <a:pPr indent="0" marL="0">
+            <a:pPr marL="0" indent="0">
               <a:buNone/>
             </a:pPr>
             <a:r>
@@ -5322,16 +5182,16 @@
                 <a:solidFill>
                   <a:srgbClr val="7A7468"/>
                 </a:solidFill>
-                <a:latin typeface="Microsoft YaHei" pitchFamily="34" charset="0"/>
-                <a:ea typeface="Microsoft YaHei" pitchFamily="34" charset="-122"/>
-                <a:cs typeface="Microsoft YaHei" pitchFamily="34" charset="-120"/>
+                <a:latin typeface="微软雅黑" panose="020B0503020204020204" pitchFamily="34" charset="-122"/>
+                <a:ea typeface="微软雅黑" panose="020B0503020204020204" pitchFamily="34" charset="-122"/>
+                <a:cs typeface="微软雅黑" panose="020B0503020204020204" pitchFamily="34" charset="-120"/>
               </a:rPr>
               <a:t>文档库 · 对话 · @ 引用</a:t>
             </a:r>
             <a:endParaRPr lang="en-US" sz="1000" dirty="0"/>
           </a:p>
           <a:p>
-            <a:pPr indent="0" marL="0">
+            <a:pPr marL="0" indent="0">
               <a:buNone/>
             </a:pPr>
             <a:r>
@@ -5339,16 +5199,16 @@
                 <a:solidFill>
                   <a:srgbClr val="7A7468"/>
                 </a:solidFill>
-                <a:latin typeface="Microsoft YaHei" pitchFamily="34" charset="0"/>
-                <a:ea typeface="Microsoft YaHei" pitchFamily="34" charset="-122"/>
-                <a:cs typeface="Microsoft YaHei" pitchFamily="34" charset="-120"/>
+                <a:latin typeface="微软雅黑" panose="020B0503020204020204" pitchFamily="34" charset="-122"/>
+                <a:ea typeface="微软雅黑" panose="020B0503020204020204" pitchFamily="34" charset="-122"/>
+                <a:cs typeface="微软雅黑" panose="020B0503020204020204" pitchFamily="34" charset="-120"/>
               </a:rPr>
               <a:t>证据 / 结果 / 执行链路</a:t>
             </a:r>
             <a:endParaRPr lang="en-US" sz="1000" dirty="0"/>
           </a:p>
           <a:p>
-            <a:pPr indent="0" marL="0">
+            <a:pPr marL="0" indent="0">
               <a:buNone/>
             </a:pPr>
             <a:r>
@@ -5356,9 +5216,9 @@
                 <a:solidFill>
                   <a:srgbClr val="7A7468"/>
                 </a:solidFill>
-                <a:latin typeface="Microsoft YaHei" pitchFamily="34" charset="0"/>
-                <a:ea typeface="Microsoft YaHei" pitchFamily="34" charset="-122"/>
-                <a:cs typeface="Microsoft YaHei" pitchFamily="34" charset="-120"/>
+                <a:latin typeface="微软雅黑" panose="020B0503020204020204" pitchFamily="34" charset="-122"/>
+                <a:ea typeface="微软雅黑" panose="020B0503020204020204" pitchFamily="34" charset="-122"/>
+                <a:cs typeface="微软雅黑" panose="020B0503020204020204" pitchFamily="34" charset="-120"/>
               </a:rPr>
               <a:t>REST + EventSource</a:t>
             </a:r>
@@ -5406,13 +5266,12 @@
             <a:avLst/>
           </a:prstGeom>
           <a:noFill/>
-          <a:ln/>
-        </p:spPr>
-        <p:txBody>
-          <a:bodyPr wrap="square" lIns="0" tIns="0" rIns="0" bIns="0" rtlCol="0" anchor="ctr"/>
-          <a:lstStyle/>
-          <a:p>
-            <a:pPr algn="ctr" indent="0" marL="0">
+        </p:spPr>
+        <p:txBody>
+          <a:bodyPr wrap="square" lIns="0" tIns="0" rIns="0" bIns="0" rtlCol="0" anchor="ctr"/>
+          <a:lstStyle/>
+          <a:p>
+            <a:pPr marL="0" indent="0" algn="ctr">
               <a:buNone/>
             </a:pPr>
             <a:r>
@@ -5420,9 +5279,9 @@
                 <a:solidFill>
                   <a:srgbClr val="7A7468"/>
                 </a:solidFill>
-                <a:latin typeface="Microsoft YaHei" pitchFamily="34" charset="0"/>
-                <a:ea typeface="Microsoft YaHei" pitchFamily="34" charset="-122"/>
-                <a:cs typeface="Microsoft YaHei" pitchFamily="34" charset="-120"/>
+                <a:latin typeface="微软雅黑" panose="020B0503020204020204" pitchFamily="34" charset="-122"/>
+                <a:ea typeface="微软雅黑" panose="020B0503020204020204" pitchFamily="34" charset="-122"/>
+                <a:cs typeface="微软雅黑" panose="020B0503020204020204" pitchFamily="34" charset="-120"/>
               </a:rPr>
               <a:t>REST + SSE</a:t>
             </a:r>
@@ -5497,13 +5356,12 @@
             <a:avLst/>
           </a:prstGeom>
           <a:noFill/>
-          <a:ln/>
-        </p:spPr>
-        <p:txBody>
-          <a:bodyPr wrap="square" lIns="0" tIns="0" rIns="0" bIns="0" rtlCol="0" anchor="ctr"/>
-          <a:lstStyle/>
-          <a:p>
-            <a:pPr indent="0" marL="0">
+        </p:spPr>
+        <p:txBody>
+          <a:bodyPr wrap="square" lIns="0" tIns="0" rIns="0" bIns="0" rtlCol="0" anchor="ctr"/>
+          <a:lstStyle/>
+          <a:p>
+            <a:pPr marL="0" indent="0">
               <a:buNone/>
             </a:pPr>
             <a:r>
@@ -5511,9 +5369,9 @@
                 <a:solidFill>
                   <a:srgbClr val="1B1A17"/>
                 </a:solidFill>
-                <a:latin typeface="Microsoft YaHei" pitchFamily="34" charset="0"/>
-                <a:ea typeface="Microsoft YaHei" pitchFamily="34" charset="-122"/>
-                <a:cs typeface="Microsoft YaHei" pitchFamily="34" charset="-120"/>
+                <a:latin typeface="微软雅黑" panose="020B0503020204020204" pitchFamily="34" charset="-122"/>
+                <a:ea typeface="微软雅黑" panose="020B0503020204020204" pitchFamily="34" charset="-122"/>
+                <a:cs typeface="微软雅黑" panose="020B0503020204020204" pitchFamily="34" charset="-120"/>
               </a:rPr>
               <a:t>Fastify API</a:t>
             </a:r>
@@ -5536,13 +5394,12 @@
             <a:avLst/>
           </a:prstGeom>
           <a:noFill/>
-          <a:ln/>
         </p:spPr>
         <p:txBody>
           <a:bodyPr wrap="square" lIns="0" tIns="0" rIns="0" bIns="0" rtlCol="0" anchor="t"/>
           <a:lstStyle/>
           <a:p>
-            <a:pPr indent="0" marL="0">
+            <a:pPr marL="0" indent="0">
               <a:buNone/>
             </a:pPr>
             <a:r>
@@ -5550,16 +5407,16 @@
                 <a:solidFill>
                   <a:srgbClr val="7A7468"/>
                 </a:solidFill>
-                <a:latin typeface="Microsoft YaHei" pitchFamily="34" charset="0"/>
-                <a:ea typeface="Microsoft YaHei" pitchFamily="34" charset="-122"/>
-                <a:cs typeface="Microsoft YaHei" pitchFamily="34" charset="-120"/>
+                <a:latin typeface="微软雅黑" panose="020B0503020204020204" pitchFamily="34" charset="-122"/>
+                <a:ea typeface="微软雅黑" panose="020B0503020204020204" pitchFamily="34" charset="-122"/>
+                <a:cs typeface="微软雅黑" panose="020B0503020204020204" pitchFamily="34" charset="-120"/>
               </a:rPr>
               <a:t>documents / runs / health / openapi</a:t>
             </a:r>
             <a:endParaRPr lang="en-US" sz="1000" dirty="0"/>
           </a:p>
           <a:p>
-            <a:pPr indent="0" marL="0">
+            <a:pPr marL="0" indent="0">
               <a:buNone/>
             </a:pPr>
             <a:r>
@@ -5567,16 +5424,16 @@
                 <a:solidFill>
                   <a:srgbClr val="7A7468"/>
                 </a:solidFill>
-                <a:latin typeface="Microsoft YaHei" pitchFamily="34" charset="0"/>
-                <a:ea typeface="Microsoft YaHei" pitchFamily="34" charset="-122"/>
-                <a:cs typeface="Microsoft YaHei" pitchFamily="34" charset="-120"/>
+                <a:latin typeface="微软雅黑" panose="020B0503020204020204" pitchFamily="34" charset="-122"/>
+                <a:ea typeface="微软雅黑" panose="020B0503020204020204" pitchFamily="34" charset="-122"/>
+                <a:cs typeface="微软雅黑" panose="020B0503020204020204" pitchFamily="34" charset="-120"/>
               </a:rPr>
               <a:t>入库串行队列 · 运行管理</a:t>
             </a:r>
             <a:endParaRPr lang="en-US" sz="1000" dirty="0"/>
           </a:p>
           <a:p>
-            <a:pPr indent="0" marL="0">
+            <a:pPr marL="0" indent="0">
               <a:buNone/>
             </a:pPr>
             <a:r>
@@ -5584,9 +5441,9 @@
                 <a:solidFill>
                   <a:srgbClr val="7A7468"/>
                 </a:solidFill>
-                <a:latin typeface="Microsoft YaHei" pitchFamily="34" charset="0"/>
-                <a:ea typeface="Microsoft YaHei" pitchFamily="34" charset="-122"/>
-                <a:cs typeface="Microsoft YaHei" pitchFamily="34" charset="-120"/>
+                <a:latin typeface="微软雅黑" panose="020B0503020204020204" pitchFamily="34" charset="-122"/>
+                <a:ea typeface="微软雅黑" panose="020B0503020204020204" pitchFamily="34" charset="-122"/>
+                <a:cs typeface="微软雅黑" panose="020B0503020204020204" pitchFamily="34" charset="-120"/>
               </a:rPr>
               <a:t>SSE 事件回放</a:t>
             </a:r>
@@ -5686,13 +5543,12 @@
             <a:avLst/>
           </a:prstGeom>
           <a:noFill/>
-          <a:ln/>
-        </p:spPr>
-        <p:txBody>
-          <a:bodyPr wrap="square" lIns="0" tIns="0" rIns="0" bIns="0" rtlCol="0" anchor="ctr"/>
-          <a:lstStyle/>
-          <a:p>
-            <a:pPr indent="0" marL="0">
+        </p:spPr>
+        <p:txBody>
+          <a:bodyPr wrap="square" lIns="0" tIns="0" rIns="0" bIns="0" rtlCol="0" anchor="ctr"/>
+          <a:lstStyle/>
+          <a:p>
+            <a:pPr marL="0" indent="0">
               <a:buNone/>
             </a:pPr>
             <a:r>
@@ -5700,9 +5556,9 @@
                 <a:solidFill>
                   <a:srgbClr val="1B1A17"/>
                 </a:solidFill>
-                <a:latin typeface="Microsoft YaHei" pitchFamily="34" charset="0"/>
-                <a:ea typeface="Microsoft YaHei" pitchFamily="34" charset="-122"/>
-                <a:cs typeface="Microsoft YaHei" pitchFamily="34" charset="-120"/>
+                <a:latin typeface="微软雅黑" panose="020B0503020204020204" pitchFamily="34" charset="-122"/>
+                <a:ea typeface="微软雅黑" panose="020B0503020204020204" pitchFamily="34" charset="-122"/>
+                <a:cs typeface="微软雅黑" panose="020B0503020204020204" pitchFamily="34" charset="-120"/>
               </a:rPr>
               <a:t>LangGraph + RAG</a:t>
             </a:r>
@@ -5725,13 +5581,12 @@
             <a:avLst/>
           </a:prstGeom>
           <a:noFill/>
-          <a:ln/>
         </p:spPr>
         <p:txBody>
           <a:bodyPr wrap="square" lIns="0" tIns="0" rIns="0" bIns="0" rtlCol="0" anchor="t"/>
           <a:lstStyle/>
           <a:p>
-            <a:pPr indent="0" marL="0">
+            <a:pPr marL="0" indent="0">
               <a:buNone/>
             </a:pPr>
             <a:r>
@@ -5739,16 +5594,16 @@
                 <a:solidFill>
                   <a:srgbClr val="7A7468"/>
                 </a:solidFill>
-                <a:latin typeface="Microsoft YaHei" pitchFamily="34" charset="0"/>
-                <a:ea typeface="Microsoft YaHei" pitchFamily="34" charset="-122"/>
-                <a:cs typeface="Microsoft YaHei" pitchFamily="34" charset="-120"/>
+                <a:latin typeface="微软雅黑" panose="020B0503020204020204" pitchFamily="34" charset="-122"/>
+                <a:ea typeface="微软雅黑" panose="020B0503020204020204" pitchFamily="34" charset="-122"/>
+                <a:cs typeface="微软雅黑" panose="020B0503020204020204" pitchFamily="34" charset="-120"/>
               </a:rPr>
               <a:t>router → qa / summary / extract / weekly</a:t>
             </a:r>
             <a:endParaRPr lang="en-US" sz="1000" dirty="0"/>
           </a:p>
           <a:p>
-            <a:pPr indent="0" marL="0">
+            <a:pPr marL="0" indent="0">
               <a:buNone/>
             </a:pPr>
             <a:r>
@@ -5756,9 +5611,9 @@
                 <a:solidFill>
                   <a:srgbClr val="7A7468"/>
                 </a:solidFill>
-                <a:latin typeface="Microsoft YaHei" pitchFamily="34" charset="0"/>
-                <a:ea typeface="Microsoft YaHei" pitchFamily="34" charset="-122"/>
-                <a:cs typeface="Microsoft YaHei" pitchFamily="34" charset="-120"/>
+                <a:latin typeface="微软雅黑" panose="020B0503020204020204" pitchFamily="34" charset="-122"/>
+                <a:ea typeface="微软雅黑" panose="020B0503020204020204" pitchFamily="34" charset="-122"/>
+                <a:cs typeface="微软雅黑" panose="020B0503020204020204" pitchFamily="34" charset="-120"/>
               </a:rPr>
               <a:t>混合检索 · 引用校验 · 阈值边界</a:t>
             </a:r>
@@ -5833,13 +5688,12 @@
             <a:avLst/>
           </a:prstGeom>
           <a:noFill/>
-          <a:ln/>
-        </p:spPr>
-        <p:txBody>
-          <a:bodyPr wrap="square" lIns="0" tIns="0" rIns="0" bIns="0" rtlCol="0" anchor="ctr"/>
-          <a:lstStyle/>
-          <a:p>
-            <a:pPr indent="0" marL="0">
+        </p:spPr>
+        <p:txBody>
+          <a:bodyPr wrap="square" lIns="0" tIns="0" rIns="0" bIns="0" rtlCol="0" anchor="ctr"/>
+          <a:lstStyle/>
+          <a:p>
+            <a:pPr marL="0" indent="0">
               <a:buNone/>
             </a:pPr>
             <a:r>
@@ -5847,9 +5701,9 @@
                 <a:solidFill>
                   <a:srgbClr val="1B1A17"/>
                 </a:solidFill>
-                <a:latin typeface="Microsoft YaHei" pitchFamily="34" charset="0"/>
-                <a:ea typeface="Microsoft YaHei" pitchFamily="34" charset="-122"/>
-                <a:cs typeface="Microsoft YaHei" pitchFamily="34" charset="-120"/>
+                <a:latin typeface="微软雅黑" panose="020B0503020204020204" pitchFamily="34" charset="-122"/>
+                <a:ea typeface="微软雅黑" panose="020B0503020204020204" pitchFamily="34" charset="-122"/>
+                <a:cs typeface="微软雅黑" panose="020B0503020204020204" pitchFamily="34" charset="-120"/>
               </a:rPr>
               <a:t>模型网关</a:t>
             </a:r>
@@ -5872,13 +5726,12 @@
             <a:avLst/>
           </a:prstGeom>
           <a:noFill/>
-          <a:ln/>
         </p:spPr>
         <p:txBody>
           <a:bodyPr wrap="square" lIns="0" tIns="0" rIns="0" bIns="0" rtlCol="0" anchor="t"/>
           <a:lstStyle/>
           <a:p>
-            <a:pPr indent="0" marL="0">
+            <a:pPr marL="0" indent="0">
               <a:buNone/>
             </a:pPr>
             <a:r>
@@ -5886,16 +5739,16 @@
                 <a:solidFill>
                   <a:srgbClr val="7A7468"/>
                 </a:solidFill>
-                <a:latin typeface="Microsoft YaHei" pitchFamily="34" charset="0"/>
-                <a:ea typeface="Microsoft YaHei" pitchFamily="34" charset="-122"/>
-                <a:cs typeface="Microsoft YaHei" pitchFamily="34" charset="-120"/>
+                <a:latin typeface="微软雅黑" panose="020B0503020204020204" pitchFamily="34" charset="-122"/>
+                <a:ea typeface="微软雅黑" panose="020B0503020204020204" pitchFamily="34" charset="-122"/>
+                <a:cs typeface="微软雅黑" panose="020B0503020204020204" pitchFamily="34" charset="-120"/>
               </a:rPr>
               <a:t>OpenAI 兼容直连 / 代理</a:t>
             </a:r>
             <a:endParaRPr lang="en-US" sz="1000" dirty="0"/>
           </a:p>
           <a:p>
-            <a:pPr indent="0" marL="0">
+            <a:pPr marL="0" indent="0">
               <a:buNone/>
             </a:pPr>
             <a:r>
@@ -5903,9 +5756,9 @@
                 <a:solidFill>
                   <a:srgbClr val="7A7468"/>
                 </a:solidFill>
-                <a:latin typeface="Microsoft YaHei" pitchFamily="34" charset="0"/>
-                <a:ea typeface="Microsoft YaHei" pitchFamily="34" charset="-122"/>
-                <a:cs typeface="Microsoft YaHei" pitchFamily="34" charset="-120"/>
+                <a:latin typeface="微软雅黑" panose="020B0503020204020204" pitchFamily="34" charset="-122"/>
+                <a:ea typeface="微软雅黑" panose="020B0503020204020204" pitchFamily="34" charset="-122"/>
+                <a:cs typeface="微软雅黑" panose="020B0503020204020204" pitchFamily="34" charset="-120"/>
               </a:rPr>
               <a:t>兜底 provider / demo provider</a:t>
             </a:r>
@@ -5980,13 +5833,12 @@
             <a:avLst/>
           </a:prstGeom>
           <a:noFill/>
-          <a:ln/>
-        </p:spPr>
-        <p:txBody>
-          <a:bodyPr wrap="square" lIns="0" tIns="0" rIns="0" bIns="0" rtlCol="0" anchor="ctr"/>
-          <a:lstStyle/>
-          <a:p>
-            <a:pPr indent="0" marL="0">
+        </p:spPr>
+        <p:txBody>
+          <a:bodyPr wrap="square" lIns="0" tIns="0" rIns="0" bIns="0" rtlCol="0" anchor="ctr"/>
+          <a:lstStyle/>
+          <a:p>
+            <a:pPr marL="0" indent="0">
               <a:buNone/>
             </a:pPr>
             <a:r>
@@ -5994,9 +5846,9 @@
                 <a:solidFill>
                   <a:srgbClr val="1B1A17"/>
                 </a:solidFill>
-                <a:latin typeface="Microsoft YaHei" pitchFamily="34" charset="0"/>
-                <a:ea typeface="Microsoft YaHei" pitchFamily="34" charset="-122"/>
-                <a:cs typeface="Microsoft YaHei" pitchFamily="34" charset="-120"/>
+                <a:latin typeface="微软雅黑" panose="020B0503020204020204" pitchFamily="34" charset="-122"/>
+                <a:ea typeface="微软雅黑" panose="020B0503020204020204" pitchFamily="34" charset="-122"/>
+                <a:cs typeface="微软雅黑" panose="020B0503020204020204" pitchFamily="34" charset="-120"/>
               </a:rPr>
               <a:t>SQLite · node:sqlite</a:t>
             </a:r>
@@ -6019,13 +5871,12 @@
             <a:avLst/>
           </a:prstGeom>
           <a:noFill/>
-          <a:ln/>
         </p:spPr>
         <p:txBody>
           <a:bodyPr wrap="square" lIns="0" tIns="0" rIns="0" bIns="0" rtlCol="0" anchor="t"/>
           <a:lstStyle/>
           <a:p>
-            <a:pPr indent="0" marL="0">
+            <a:pPr marL="0" indent="0">
               <a:buNone/>
             </a:pPr>
             <a:r>
@@ -6033,16 +5884,16 @@
                 <a:solidFill>
                   <a:srgbClr val="7A7468"/>
                 </a:solidFill>
-                <a:latin typeface="Microsoft YaHei" pitchFamily="34" charset="0"/>
-                <a:ea typeface="Microsoft YaHei" pitchFamily="34" charset="-122"/>
-                <a:cs typeface="Microsoft YaHei" pitchFamily="34" charset="-120"/>
+                <a:latin typeface="微软雅黑" panose="020B0503020204020204" pitchFamily="34" charset="-122"/>
+                <a:ea typeface="微软雅黑" panose="020B0503020204020204" pitchFamily="34" charset="-122"/>
+                <a:cs typeface="微软雅黑" panose="020B0503020204020204" pitchFamily="34" charset="-120"/>
               </a:rPr>
               <a:t>documents / chunks / FTS5 / 向量</a:t>
             </a:r>
             <a:endParaRPr lang="en-US" sz="1000" dirty="0"/>
           </a:p>
           <a:p>
-            <a:pPr indent="0" marL="0">
+            <a:pPr marL="0" indent="0">
               <a:buNone/>
             </a:pPr>
             <a:r>
@@ -6050,9 +5901,9 @@
                 <a:solidFill>
                   <a:srgbClr val="7A7468"/>
                 </a:solidFill>
-                <a:latin typeface="Microsoft YaHei" pitchFamily="34" charset="0"/>
-                <a:ea typeface="Microsoft YaHei" pitchFamily="34" charset="-122"/>
-                <a:cs typeface="Microsoft YaHei" pitchFamily="34" charset="-120"/>
+                <a:latin typeface="微软雅黑" panose="020B0503020204020204" pitchFamily="34" charset="-122"/>
+                <a:ea typeface="微软雅黑" panose="020B0503020204020204" pitchFamily="34" charset="-122"/>
+                <a:cs typeface="微软雅黑" panose="020B0503020204020204" pitchFamily="34" charset="-120"/>
               </a:rPr>
               <a:t>runs / run_events / embedding_cache</a:t>
             </a:r>
@@ -6102,13 +5953,12 @@
             <a:avLst/>
           </a:prstGeom>
           <a:noFill/>
-          <a:ln/>
-        </p:spPr>
-        <p:txBody>
-          <a:bodyPr wrap="square" lIns="0" tIns="0" rIns="0" bIns="0" rtlCol="0" anchor="ctr"/>
-          <a:lstStyle/>
-          <a:p>
-            <a:pPr indent="0" marL="0">
+        </p:spPr>
+        <p:txBody>
+          <a:bodyPr wrap="square" lIns="0" tIns="0" rIns="0" bIns="0" rtlCol="0" anchor="ctr"/>
+          <a:lstStyle/>
+          <a:p>
+            <a:pPr marL="0" indent="0">
               <a:buNone/>
             </a:pPr>
             <a:r>
@@ -6116,9 +5966,9 @@
                 <a:solidFill>
                   <a:srgbClr val="F4F1EA"/>
                 </a:solidFill>
-                <a:latin typeface="Microsoft YaHei" pitchFamily="34" charset="0"/>
-                <a:ea typeface="Microsoft YaHei" pitchFamily="34" charset="-122"/>
-                <a:cs typeface="Microsoft YaHei" pitchFamily="34" charset="-120"/>
+                <a:latin typeface="微软雅黑" panose="020B0503020204020204" pitchFamily="34" charset="-122"/>
+                <a:ea typeface="微软雅黑" panose="020B0503020204020204" pitchFamily="34" charset="-122"/>
+                <a:cs typeface="微软雅黑" panose="020B0503020204020204" pitchFamily="34" charset="-120"/>
               </a:rPr>
               <a:t>关键取舍</a:t>
             </a:r>
@@ -6141,13 +5991,12 @@
             <a:avLst/>
           </a:prstGeom>
           <a:noFill/>
-          <a:ln/>
-        </p:spPr>
-        <p:txBody>
-          <a:bodyPr wrap="square" lIns="0" tIns="0" rIns="0" bIns="0" rtlCol="0" anchor="ctr"/>
-          <a:lstStyle/>
-          <a:p>
-            <a:pPr indent="0" marL="0">
+        </p:spPr>
+        <p:txBody>
+          <a:bodyPr wrap="square" lIns="0" tIns="0" rIns="0" bIns="0" rtlCol="0" anchor="ctr"/>
+          <a:lstStyle/>
+          <a:p>
+            <a:pPr marL="0" indent="0">
               <a:buNone/>
             </a:pPr>
             <a:r>
@@ -6155,9 +6004,9 @@
                 <a:solidFill>
                   <a:srgbClr val="F4F1EA"/>
                 </a:solidFill>
-                <a:latin typeface="Microsoft YaHei" pitchFamily="34" charset="0"/>
-                <a:ea typeface="Microsoft YaHei" pitchFamily="34" charset="-122"/>
-                <a:cs typeface="Microsoft YaHei" pitchFamily="34" charset="-120"/>
+                <a:latin typeface="微软雅黑" panose="020B0503020204020204" pitchFamily="34" charset="-122"/>
+                <a:ea typeface="微软雅黑" panose="020B0503020204020204" pitchFamily="34" charset="-122"/>
+                <a:cs typeface="微软雅黑" panose="020B0503020204020204" pitchFamily="34" charset="-120"/>
               </a:rPr>
               <a:t>TS 全栈共享 zod 契约 · node:sqlite 零原生依赖 · 运行 + 事件表 + SSE 可恢复 · 串行队列避免本地写竞争</a:t>
             </a:r>
@@ -6180,13 +6029,12 @@
             <a:avLst/>
           </a:prstGeom>
           <a:noFill/>
-          <a:ln/>
-        </p:spPr>
-        <p:txBody>
-          <a:bodyPr wrap="square" lIns="0" tIns="0" rIns="0" bIns="0" rtlCol="0" anchor="ctr"/>
-          <a:lstStyle/>
-          <a:p>
-            <a:pPr indent="0" marL="0">
+        </p:spPr>
+        <p:txBody>
+          <a:bodyPr wrap="square" lIns="0" tIns="0" rIns="0" bIns="0" rtlCol="0" anchor="ctr"/>
+          <a:lstStyle/>
+          <a:p>
+            <a:pPr marL="0" indent="0">
               <a:buNone/>
             </a:pPr>
             <a:r>
@@ -6194,9 +6042,9 @@
                 <a:solidFill>
                   <a:srgbClr val="C9C2B4"/>
                 </a:solidFill>
-                <a:latin typeface="Microsoft YaHei" pitchFamily="34" charset="0"/>
-                <a:ea typeface="Microsoft YaHei" pitchFamily="34" charset="-122"/>
-                <a:cs typeface="Microsoft YaHei" pitchFamily="34" charset="-120"/>
+                <a:latin typeface="微软雅黑" panose="020B0503020204020204" pitchFamily="34" charset="-122"/>
+                <a:ea typeface="微软雅黑" panose="020B0503020204020204" pitchFamily="34" charset="-122"/>
+                <a:cs typeface="微软雅黑" panose="020B0503020204020204" pitchFamily="34" charset="-120"/>
               </a:rPr>
               <a:t>默认只监听 127.0.0.1；无鉴权，定位本地演示。</a:t>
             </a:r>
@@ -6219,13 +6067,12 @@
             <a:avLst/>
           </a:prstGeom>
           <a:noFill/>
-          <a:ln/>
-        </p:spPr>
-        <p:txBody>
-          <a:bodyPr wrap="square" lIns="0" tIns="0" rIns="0" bIns="0" rtlCol="0" anchor="ctr"/>
-          <a:lstStyle/>
-          <a:p>
-            <a:pPr indent="0" marL="0">
+        </p:spPr>
+        <p:txBody>
+          <a:bodyPr wrap="square" lIns="0" tIns="0" rIns="0" bIns="0" rtlCol="0" anchor="ctr"/>
+          <a:lstStyle/>
+          <a:p>
+            <a:pPr marL="0" indent="0">
               <a:buNone/>
             </a:pPr>
             <a:r>
@@ -6233,9 +6080,9 @@
                 <a:solidFill>
                   <a:srgbClr val="7A7468"/>
                 </a:solidFill>
-                <a:latin typeface="Microsoft YaHei" pitchFamily="34" charset="0"/>
-                <a:ea typeface="Microsoft YaHei" pitchFamily="34" charset="-122"/>
-                <a:cs typeface="Microsoft YaHei" pitchFamily="34" charset="-120"/>
+                <a:latin typeface="微软雅黑" panose="020B0503020204020204" pitchFamily="34" charset="-122"/>
+                <a:ea typeface="微软雅黑" panose="020B0503020204020204" pitchFamily="34" charset="-122"/>
+                <a:cs typeface="微软雅黑" panose="020B0503020204020204" pitchFamily="34" charset="-120"/>
               </a:rPr>
               <a:t>OfficePilot · 2026-10-25</a:t>
             </a:r>
@@ -6258,13 +6105,12 @@
             <a:avLst/>
           </a:prstGeom>
           <a:noFill/>
-          <a:ln/>
-        </p:spPr>
-        <p:txBody>
-          <a:bodyPr wrap="square" lIns="0" tIns="0" rIns="0" bIns="0" rtlCol="0" anchor="ctr"/>
-          <a:lstStyle/>
-          <a:p>
-            <a:pPr algn="r" indent="0" marL="0">
+        </p:spPr>
+        <p:txBody>
+          <a:bodyPr wrap="square" lIns="0" tIns="0" rIns="0" bIns="0" rtlCol="0" anchor="ctr"/>
+          <a:lstStyle/>
+          <a:p>
+            <a:pPr marL="0" indent="0" algn="r">
               <a:buNone/>
             </a:pPr>
             <a:r>
@@ -6272,9 +6118,9 @@
                 <a:solidFill>
                   <a:srgbClr val="7A7468"/>
                 </a:solidFill>
-                <a:latin typeface="Georgia" pitchFamily="34" charset="0"/>
-                <a:ea typeface="Georgia" pitchFamily="34" charset="-122"/>
-                <a:cs typeface="Georgia" pitchFamily="34" charset="-120"/>
+                <a:latin typeface="Georgia" panose="02040502050405020303" pitchFamily="34" charset="0"/>
+                <a:ea typeface="Georgia" panose="02040502050405020303" pitchFamily="34" charset="-122"/>
+                <a:cs typeface="Georgia" panose="02040502050405020303" pitchFamily="34" charset="-120"/>
               </a:rPr>
               <a:t>04</a:t>
             </a:r>
@@ -6292,12 +6138,13 @@
 
 <file path=ppt/slides/slide5.xml><?xml version="1.0" encoding="utf-8"?>
 <p:sld xmlns:a="http://schemas.openxmlformats.org/drawingml/2006/main" xmlns:r="http://schemas.openxmlformats.org/officeDocument/2006/relationships" xmlns:p="http://schemas.openxmlformats.org/presentationml/2006/main">
-  <p:cSld name="Slide 5">
+  <p:cSld>
     <p:bg>
       <p:bgPr>
         <a:solidFill>
           <a:srgbClr val="F4F1EA"/>
         </a:solidFill>
+        <a:effectLst/>
       </p:bgPr>
     </p:bg>
     <p:spTree>
@@ -6329,23 +6176,22 @@
             <a:avLst/>
           </a:prstGeom>
           <a:noFill/>
-          <a:ln/>
-        </p:spPr>
-        <p:txBody>
-          <a:bodyPr wrap="square" lIns="0" tIns="0" rIns="0" bIns="0" rtlCol="0" anchor="ctr"/>
-          <a:lstStyle/>
-          <a:p>
-            <a:pPr indent="0" marL="0">
-              <a:buNone/>
-            </a:pPr>
-            <a:r>
-              <a:rPr lang="en-US" sz="900" b="1" spc="120" kern="0" dirty="0">
+        </p:spPr>
+        <p:txBody>
+          <a:bodyPr wrap="square" lIns="0" tIns="0" rIns="0" bIns="0" rtlCol="0" anchor="ctr"/>
+          <a:lstStyle/>
+          <a:p>
+            <a:pPr marL="0" indent="0">
+              <a:buNone/>
+            </a:pPr>
+            <a:r>
+              <a:rPr lang="en-US" sz="900" b="1" kern="0" spc="120" dirty="0">
                 <a:solidFill>
                   <a:srgbClr val="B8421D"/>
                 </a:solidFill>
-                <a:latin typeface="Microsoft YaHei" pitchFamily="34" charset="0"/>
-                <a:ea typeface="Microsoft YaHei" pitchFamily="34" charset="-122"/>
-                <a:cs typeface="Microsoft YaHei" pitchFamily="34" charset="-120"/>
+                <a:latin typeface="微软雅黑" panose="020B0503020204020204" pitchFamily="34" charset="-122"/>
+                <a:ea typeface="微软雅黑" panose="020B0503020204020204" pitchFamily="34" charset="-122"/>
+                <a:cs typeface="微软雅黑" panose="020B0503020204020204" pitchFamily="34" charset="-120"/>
               </a:rPr>
               <a:t>04 / RAG</a:t>
             </a:r>
@@ -6368,13 +6214,12 @@
             <a:avLst/>
           </a:prstGeom>
           <a:noFill/>
-          <a:ln/>
-        </p:spPr>
-        <p:txBody>
-          <a:bodyPr wrap="square" lIns="0" tIns="0" rIns="0" bIns="0" rtlCol="0" anchor="ctr"/>
-          <a:lstStyle/>
-          <a:p>
-            <a:pPr indent="0" marL="0">
+        </p:spPr>
+        <p:txBody>
+          <a:bodyPr wrap="square" lIns="0" tIns="0" rIns="0" bIns="0" rtlCol="0" anchor="ctr"/>
+          <a:lstStyle/>
+          <a:p>
+            <a:pPr marL="0" indent="0">
               <a:buNone/>
             </a:pPr>
             <a:r>
@@ -6382,9 +6227,9 @@
                 <a:solidFill>
                   <a:srgbClr val="1B1A17"/>
                 </a:solidFill>
-                <a:latin typeface="Microsoft YaHei" pitchFamily="34" charset="0"/>
-                <a:ea typeface="Microsoft YaHei" pitchFamily="34" charset="-122"/>
-                <a:cs typeface="Microsoft YaHei" pitchFamily="34" charset="-120"/>
+                <a:latin typeface="微软雅黑" panose="020B0503020204020204" pitchFamily="34" charset="-122"/>
+                <a:ea typeface="微软雅黑" panose="020B0503020204020204" pitchFamily="34" charset="-122"/>
+                <a:cs typeface="微软雅黑" panose="020B0503020204020204" pitchFamily="34" charset="-120"/>
               </a:rPr>
               <a:t>RAG 管线：先检索，再回答，最后校验</a:t>
             </a:r>
@@ -6459,13 +6304,12 @@
             <a:avLst/>
           </a:prstGeom>
           <a:noFill/>
-          <a:ln/>
-        </p:spPr>
-        <p:txBody>
-          <a:bodyPr wrap="square" lIns="0" tIns="0" rIns="0" bIns="0" rtlCol="0" anchor="ctr"/>
-          <a:lstStyle/>
-          <a:p>
-            <a:pPr indent="0" marL="0">
+        </p:spPr>
+        <p:txBody>
+          <a:bodyPr wrap="square" lIns="0" tIns="0" rIns="0" bIns="0" rtlCol="0" anchor="ctr"/>
+          <a:lstStyle/>
+          <a:p>
+            <a:pPr marL="0" indent="0">
               <a:buNone/>
             </a:pPr>
             <a:r>
@@ -6473,9 +6317,9 @@
                 <a:solidFill>
                   <a:srgbClr val="1B1A17"/>
                 </a:solidFill>
-                <a:latin typeface="Microsoft YaHei" pitchFamily="34" charset="0"/>
-                <a:ea typeface="Microsoft YaHei" pitchFamily="34" charset="-122"/>
-                <a:cs typeface="Microsoft YaHei" pitchFamily="34" charset="-120"/>
+                <a:latin typeface="微软雅黑" panose="020B0503020204020204" pitchFamily="34" charset="-122"/>
+                <a:ea typeface="微软雅黑" panose="020B0503020204020204" pitchFamily="34" charset="-122"/>
+                <a:cs typeface="微软雅黑" panose="020B0503020204020204" pitchFamily="34" charset="-120"/>
               </a:rPr>
               <a:t>01 解析</a:t>
             </a:r>
@@ -6498,13 +6342,12 @@
             <a:avLst/>
           </a:prstGeom>
           <a:noFill/>
-          <a:ln/>
-        </p:spPr>
-        <p:txBody>
-          <a:bodyPr wrap="square" lIns="0" tIns="0" rIns="0" bIns="0" rtlCol="0" anchor="ctr"/>
-          <a:lstStyle/>
-          <a:p>
-            <a:pPr indent="0" marL="0">
+        </p:spPr>
+        <p:txBody>
+          <a:bodyPr wrap="square" lIns="0" tIns="0" rIns="0" bIns="0" rtlCol="0" anchor="ctr"/>
+          <a:lstStyle/>
+          <a:p>
+            <a:pPr marL="0" indent="0">
               <a:buNone/>
             </a:pPr>
             <a:r>
@@ -6512,9 +6355,9 @@
                 <a:solidFill>
                   <a:srgbClr val="7A7468"/>
                 </a:solidFill>
-                <a:latin typeface="Microsoft YaHei" pitchFamily="34" charset="0"/>
-                <a:ea typeface="Microsoft YaHei" pitchFamily="34" charset="-122"/>
-                <a:cs typeface="Microsoft YaHei" pitchFamily="34" charset="-120"/>
+                <a:latin typeface="微软雅黑" panose="020B0503020204020204" pitchFamily="34" charset="-122"/>
+                <a:ea typeface="微软雅黑" panose="020B0503020204020204" pitchFamily="34" charset="-122"/>
+                <a:cs typeface="微软雅黑" panose="020B0503020204020204" pitchFamily="34" charset="-120"/>
               </a:rPr>
               <a:t>unpdf / mammoth / exceljs</a:t>
             </a:r>
@@ -6589,13 +6432,12 @@
             <a:avLst/>
           </a:prstGeom>
           <a:noFill/>
-          <a:ln/>
-        </p:spPr>
-        <p:txBody>
-          <a:bodyPr wrap="square" lIns="0" tIns="0" rIns="0" bIns="0" rtlCol="0" anchor="ctr"/>
-          <a:lstStyle/>
-          <a:p>
-            <a:pPr indent="0" marL="0">
+        </p:spPr>
+        <p:txBody>
+          <a:bodyPr wrap="square" lIns="0" tIns="0" rIns="0" bIns="0" rtlCol="0" anchor="ctr"/>
+          <a:lstStyle/>
+          <a:p>
+            <a:pPr marL="0" indent="0">
               <a:buNone/>
             </a:pPr>
             <a:r>
@@ -6603,9 +6445,9 @@
                 <a:solidFill>
                   <a:srgbClr val="1B1A17"/>
                 </a:solidFill>
-                <a:latin typeface="Microsoft YaHei" pitchFamily="34" charset="0"/>
-                <a:ea typeface="Microsoft YaHei" pitchFamily="34" charset="-122"/>
-                <a:cs typeface="Microsoft YaHei" pitchFamily="34" charset="-120"/>
+                <a:latin typeface="微软雅黑" panose="020B0503020204020204" pitchFamily="34" charset="-122"/>
+                <a:ea typeface="微软雅黑" panose="020B0503020204020204" pitchFamily="34" charset="-122"/>
+                <a:cs typeface="微软雅黑" panose="020B0503020204020204" pitchFamily="34" charset="-120"/>
               </a:rPr>
               <a:t>02 切块</a:t>
             </a:r>
@@ -6628,13 +6470,12 @@
             <a:avLst/>
           </a:prstGeom>
           <a:noFill/>
-          <a:ln/>
-        </p:spPr>
-        <p:txBody>
-          <a:bodyPr wrap="square" lIns="0" tIns="0" rIns="0" bIns="0" rtlCol="0" anchor="ctr"/>
-          <a:lstStyle/>
-          <a:p>
-            <a:pPr indent="0" marL="0">
+        </p:spPr>
+        <p:txBody>
+          <a:bodyPr wrap="square" lIns="0" tIns="0" rIns="0" bIns="0" rtlCol="0" anchor="ctr"/>
+          <a:lstStyle/>
+          <a:p>
+            <a:pPr marL="0" indent="0">
               <a:buNone/>
             </a:pPr>
             <a:r>
@@ -6642,9 +6483,9 @@
                 <a:solidFill>
                   <a:srgbClr val="7A7468"/>
                 </a:solidFill>
-                <a:latin typeface="Microsoft YaHei" pitchFamily="34" charset="0"/>
-                <a:ea typeface="Microsoft YaHei" pitchFamily="34" charset="-122"/>
-                <a:cs typeface="Microsoft YaHei" pitchFamily="34" charset="-120"/>
+                <a:latin typeface="微软雅黑" panose="020B0503020204020204" pitchFamily="34" charset="-122"/>
+                <a:ea typeface="微软雅黑" panose="020B0503020204020204" pitchFamily="34" charset="-122"/>
+                <a:cs typeface="微软雅黑" panose="020B0503020204020204" pitchFamily="34" charset="-120"/>
               </a:rPr>
               <a:t>800 字 / 120 重叠</a:t>
             </a:r>
@@ -6719,13 +6560,12 @@
             <a:avLst/>
           </a:prstGeom>
           <a:noFill/>
-          <a:ln/>
-        </p:spPr>
-        <p:txBody>
-          <a:bodyPr wrap="square" lIns="0" tIns="0" rIns="0" bIns="0" rtlCol="0" anchor="ctr"/>
-          <a:lstStyle/>
-          <a:p>
-            <a:pPr indent="0" marL="0">
+        </p:spPr>
+        <p:txBody>
+          <a:bodyPr wrap="square" lIns="0" tIns="0" rIns="0" bIns="0" rtlCol="0" anchor="ctr"/>
+          <a:lstStyle/>
+          <a:p>
+            <a:pPr marL="0" indent="0">
               <a:buNone/>
             </a:pPr>
             <a:r>
@@ -6733,9 +6573,9 @@
                 <a:solidFill>
                   <a:srgbClr val="1B1A17"/>
                 </a:solidFill>
-                <a:latin typeface="Microsoft YaHei" pitchFamily="34" charset="0"/>
-                <a:ea typeface="Microsoft YaHei" pitchFamily="34" charset="-122"/>
-                <a:cs typeface="Microsoft YaHei" pitchFamily="34" charset="-120"/>
+                <a:latin typeface="微软雅黑" panose="020B0503020204020204" pitchFamily="34" charset="-122"/>
+                <a:ea typeface="微软雅黑" panose="020B0503020204020204" pitchFamily="34" charset="-122"/>
+                <a:cs typeface="微软雅黑" panose="020B0503020204020204" pitchFamily="34" charset="-120"/>
               </a:rPr>
               <a:t>03 Embedding</a:t>
             </a:r>
@@ -6758,13 +6598,12 @@
             <a:avLst/>
           </a:prstGeom>
           <a:noFill/>
-          <a:ln/>
-        </p:spPr>
-        <p:txBody>
-          <a:bodyPr wrap="square" lIns="0" tIns="0" rIns="0" bIns="0" rtlCol="0" anchor="ctr"/>
-          <a:lstStyle/>
-          <a:p>
-            <a:pPr indent="0" marL="0">
+        </p:spPr>
+        <p:txBody>
+          <a:bodyPr wrap="square" lIns="0" tIns="0" rIns="0" bIns="0" rtlCol="0" anchor="ctr"/>
+          <a:lstStyle/>
+          <a:p>
+            <a:pPr marL="0" indent="0">
               <a:buNone/>
             </a:pPr>
             <a:r>
@@ -6772,9 +6611,9 @@
                 <a:solidFill>
                   <a:srgbClr val="7A7468"/>
                 </a:solidFill>
-                <a:latin typeface="Microsoft YaHei" pitchFamily="34" charset="0"/>
-                <a:ea typeface="Microsoft YaHei" pitchFamily="34" charset="-122"/>
-                <a:cs typeface="Microsoft YaHei" pitchFamily="34" charset="-120"/>
+                <a:latin typeface="微软雅黑" panose="020B0503020204020204" pitchFamily="34" charset="-122"/>
+                <a:ea typeface="微软雅黑" panose="020B0503020204020204" pitchFamily="34" charset="-122"/>
+                <a:cs typeface="微软雅黑" panose="020B0503020204020204" pitchFamily="34" charset="-120"/>
               </a:rPr>
               <a:t>真实模型或 256 维 demo</a:t>
             </a:r>
@@ -6849,13 +6688,12 @@
             <a:avLst/>
           </a:prstGeom>
           <a:noFill/>
-          <a:ln/>
-        </p:spPr>
-        <p:txBody>
-          <a:bodyPr wrap="square" lIns="0" tIns="0" rIns="0" bIns="0" rtlCol="0" anchor="ctr"/>
-          <a:lstStyle/>
-          <a:p>
-            <a:pPr indent="0" marL="0">
+        </p:spPr>
+        <p:txBody>
+          <a:bodyPr wrap="square" lIns="0" tIns="0" rIns="0" bIns="0" rtlCol="0" anchor="ctr"/>
+          <a:lstStyle/>
+          <a:p>
+            <a:pPr marL="0" indent="0">
               <a:buNone/>
             </a:pPr>
             <a:r>
@@ -6863,9 +6701,9 @@
                 <a:solidFill>
                   <a:srgbClr val="1B1A17"/>
                 </a:solidFill>
-                <a:latin typeface="Microsoft YaHei" pitchFamily="34" charset="0"/>
-                <a:ea typeface="Microsoft YaHei" pitchFamily="34" charset="-122"/>
-                <a:cs typeface="Microsoft YaHei" pitchFamily="34" charset="-120"/>
+                <a:latin typeface="微软雅黑" panose="020B0503020204020204" pitchFamily="34" charset="-122"/>
+                <a:ea typeface="微软雅黑" panose="020B0503020204020204" pitchFamily="34" charset="-122"/>
+                <a:cs typeface="微软雅黑" panose="020B0503020204020204" pitchFamily="34" charset="-120"/>
               </a:rPr>
               <a:t>04 FTS5</a:t>
             </a:r>
@@ -6888,13 +6726,12 @@
             <a:avLst/>
           </a:prstGeom>
           <a:noFill/>
-          <a:ln/>
-        </p:spPr>
-        <p:txBody>
-          <a:bodyPr wrap="square" lIns="0" tIns="0" rIns="0" bIns="0" rtlCol="0" anchor="ctr"/>
-          <a:lstStyle/>
-          <a:p>
-            <a:pPr indent="0" marL="0">
+        </p:spPr>
+        <p:txBody>
+          <a:bodyPr wrap="square" lIns="0" tIns="0" rIns="0" bIns="0" rtlCol="0" anchor="ctr"/>
+          <a:lstStyle/>
+          <a:p>
+            <a:pPr marL="0" indent="0">
               <a:buNone/>
             </a:pPr>
             <a:r>
@@ -6902,9 +6739,9 @@
                 <a:solidFill>
                   <a:srgbClr val="7A7468"/>
                 </a:solidFill>
-                <a:latin typeface="Microsoft YaHei" pitchFamily="34" charset="0"/>
-                <a:ea typeface="Microsoft YaHei" pitchFamily="34" charset="-122"/>
-                <a:cs typeface="Microsoft YaHei" pitchFamily="34" charset="-120"/>
+                <a:latin typeface="微软雅黑" panose="020B0503020204020204" pitchFamily="34" charset="-122"/>
+                <a:ea typeface="微软雅黑" panose="020B0503020204020204" pitchFamily="34" charset="-122"/>
+                <a:cs typeface="微软雅黑" panose="020B0503020204020204" pitchFamily="34" charset="-120"/>
               </a:rPr>
               <a:t>中文 bigram 索引</a:t>
             </a:r>
@@ -6979,13 +6816,12 @@
             <a:avLst/>
           </a:prstGeom>
           <a:noFill/>
-          <a:ln/>
-        </p:spPr>
-        <p:txBody>
-          <a:bodyPr wrap="square" lIns="0" tIns="0" rIns="0" bIns="0" rtlCol="0" anchor="ctr"/>
-          <a:lstStyle/>
-          <a:p>
-            <a:pPr indent="0" marL="0">
+        </p:spPr>
+        <p:txBody>
+          <a:bodyPr wrap="square" lIns="0" tIns="0" rIns="0" bIns="0" rtlCol="0" anchor="ctr"/>
+          <a:lstStyle/>
+          <a:p>
+            <a:pPr marL="0" indent="0">
               <a:buNone/>
             </a:pPr>
             <a:r>
@@ -6993,9 +6829,9 @@
                 <a:solidFill>
                   <a:srgbClr val="1B1A17"/>
                 </a:solidFill>
-                <a:latin typeface="Microsoft YaHei" pitchFamily="34" charset="0"/>
-                <a:ea typeface="Microsoft YaHei" pitchFamily="34" charset="-122"/>
-                <a:cs typeface="Microsoft YaHei" pitchFamily="34" charset="-120"/>
+                <a:latin typeface="微软雅黑" panose="020B0503020204020204" pitchFamily="34" charset="-122"/>
+                <a:ea typeface="微软雅黑" panose="020B0503020204020204" pitchFamily="34" charset="-122"/>
+                <a:cs typeface="微软雅黑" panose="020B0503020204020204" pitchFamily="34" charset="-120"/>
               </a:rPr>
               <a:t>01 混合检索</a:t>
             </a:r>
@@ -7018,13 +6854,12 @@
             <a:avLst/>
           </a:prstGeom>
           <a:noFill/>
-          <a:ln/>
-        </p:spPr>
-        <p:txBody>
-          <a:bodyPr wrap="square" lIns="0" tIns="0" rIns="0" bIns="0" rtlCol="0" anchor="ctr"/>
-          <a:lstStyle/>
-          <a:p>
-            <a:pPr indent="0" marL="0">
+        </p:spPr>
+        <p:txBody>
+          <a:bodyPr wrap="square" lIns="0" tIns="0" rIns="0" bIns="0" rtlCol="0" anchor="ctr"/>
+          <a:lstStyle/>
+          <a:p>
+            <a:pPr marL="0" indent="0">
               <a:buNone/>
             </a:pPr>
             <a:r>
@@ -7032,9 +6867,9 @@
                 <a:solidFill>
                   <a:srgbClr val="7A7468"/>
                 </a:solidFill>
-                <a:latin typeface="Microsoft YaHei" pitchFamily="34" charset="0"/>
-                <a:ea typeface="Microsoft YaHei" pitchFamily="34" charset="-122"/>
-                <a:cs typeface="Microsoft YaHei" pitchFamily="34" charset="-120"/>
+                <a:latin typeface="微软雅黑" panose="020B0503020204020204" pitchFamily="34" charset="-122"/>
+                <a:ea typeface="微软雅黑" panose="020B0503020204020204" pitchFamily="34" charset="-122"/>
+                <a:cs typeface="微软雅黑" panose="020B0503020204020204" pitchFamily="34" charset="-120"/>
               </a:rPr>
               <a:t>0.75 vector + 0.25 BM25</a:t>
             </a:r>
@@ -7109,13 +6944,12 @@
             <a:avLst/>
           </a:prstGeom>
           <a:noFill/>
-          <a:ln/>
-        </p:spPr>
-        <p:txBody>
-          <a:bodyPr wrap="square" lIns="0" tIns="0" rIns="0" bIns="0" rtlCol="0" anchor="ctr"/>
-          <a:lstStyle/>
-          <a:p>
-            <a:pPr indent="0" marL="0">
+        </p:spPr>
+        <p:txBody>
+          <a:bodyPr wrap="square" lIns="0" tIns="0" rIns="0" bIns="0" rtlCol="0" anchor="ctr"/>
+          <a:lstStyle/>
+          <a:p>
+            <a:pPr marL="0" indent="0">
               <a:buNone/>
             </a:pPr>
             <a:r>
@@ -7123,9 +6957,9 @@
                 <a:solidFill>
                   <a:srgbClr val="1B1A17"/>
                 </a:solidFill>
-                <a:latin typeface="Microsoft YaHei" pitchFamily="34" charset="0"/>
-                <a:ea typeface="Microsoft YaHei" pitchFamily="34" charset="-122"/>
-                <a:cs typeface="Microsoft YaHei" pitchFamily="34" charset="-120"/>
+                <a:latin typeface="微软雅黑" panose="020B0503020204020204" pitchFamily="34" charset="-122"/>
+                <a:ea typeface="微软雅黑" panose="020B0503020204020204" pitchFamily="34" charset="-122"/>
+                <a:cs typeface="微软雅黑" panose="020B0503020204020204" pitchFamily="34" charset="-120"/>
               </a:rPr>
               <a:t>02 阈值过滤</a:t>
             </a:r>
@@ -7148,13 +6982,12 @@
             <a:avLst/>
           </a:prstGeom>
           <a:noFill/>
-          <a:ln/>
-        </p:spPr>
-        <p:txBody>
-          <a:bodyPr wrap="square" lIns="0" tIns="0" rIns="0" bIns="0" rtlCol="0" anchor="ctr"/>
-          <a:lstStyle/>
-          <a:p>
-            <a:pPr indent="0" marL="0">
+        </p:spPr>
+        <p:txBody>
+          <a:bodyPr wrap="square" lIns="0" tIns="0" rIns="0" bIns="0" rtlCol="0" anchor="ctr"/>
+          <a:lstStyle/>
+          <a:p>
+            <a:pPr marL="0" indent="0">
               <a:buNone/>
             </a:pPr>
             <a:r>
@@ -7162,9 +6995,9 @@
                 <a:solidFill>
                   <a:srgbClr val="7A7468"/>
                 </a:solidFill>
-                <a:latin typeface="Microsoft YaHei" pitchFamily="34" charset="0"/>
-                <a:ea typeface="Microsoft YaHei" pitchFamily="34" charset="-122"/>
-                <a:cs typeface="Microsoft YaHei" pitchFamily="34" charset="-120"/>
+                <a:latin typeface="微软雅黑" panose="020B0503020204020204" pitchFamily="34" charset="-122"/>
+                <a:ea typeface="微软雅黑" panose="020B0503020204020204" pitchFamily="34" charset="-122"/>
+                <a:cs typeface="微软雅黑" panose="020B0503020204020204" pitchFamily="34" charset="-120"/>
               </a:rPr>
               <a:t>demo 0.1 / real 0.55</a:t>
             </a:r>
@@ -7239,13 +7072,12 @@
             <a:avLst/>
           </a:prstGeom>
           <a:noFill/>
-          <a:ln/>
-        </p:spPr>
-        <p:txBody>
-          <a:bodyPr wrap="square" lIns="0" tIns="0" rIns="0" bIns="0" rtlCol="0" anchor="ctr"/>
-          <a:lstStyle/>
-          <a:p>
-            <a:pPr indent="0" marL="0">
+        </p:spPr>
+        <p:txBody>
+          <a:bodyPr wrap="square" lIns="0" tIns="0" rIns="0" bIns="0" rtlCol="0" anchor="ctr"/>
+          <a:lstStyle/>
+          <a:p>
+            <a:pPr marL="0" indent="0">
               <a:buNone/>
             </a:pPr>
             <a:r>
@@ -7253,9 +7085,9 @@
                 <a:solidFill>
                   <a:srgbClr val="1B1A17"/>
                 </a:solidFill>
-                <a:latin typeface="Microsoft YaHei" pitchFamily="34" charset="0"/>
-                <a:ea typeface="Microsoft YaHei" pitchFamily="34" charset="-122"/>
-                <a:cs typeface="Microsoft YaHei" pitchFamily="34" charset="-120"/>
+                <a:latin typeface="微软雅黑" panose="020B0503020204020204" pitchFamily="34" charset="-122"/>
+                <a:ea typeface="微软雅黑" panose="020B0503020204020204" pitchFamily="34" charset="-122"/>
+                <a:cs typeface="微软雅黑" panose="020B0503020204020204" pitchFamily="34" charset="-120"/>
               </a:rPr>
               <a:t>03 带引用生成</a:t>
             </a:r>
@@ -7278,13 +7110,12 @@
             <a:avLst/>
           </a:prstGeom>
           <a:noFill/>
-          <a:ln/>
-        </p:spPr>
-        <p:txBody>
-          <a:bodyPr wrap="square" lIns="0" tIns="0" rIns="0" bIns="0" rtlCol="0" anchor="ctr"/>
-          <a:lstStyle/>
-          <a:p>
-            <a:pPr indent="0" marL="0">
+        </p:spPr>
+        <p:txBody>
+          <a:bodyPr wrap="square" lIns="0" tIns="0" rIns="0" bIns="0" rtlCol="0" anchor="ctr"/>
+          <a:lstStyle/>
+          <a:p>
+            <a:pPr marL="0" indent="0">
               <a:buNone/>
             </a:pPr>
             <a:r>
@@ -7292,9 +7123,9 @@
                 <a:solidFill>
                   <a:srgbClr val="7A7468"/>
                 </a:solidFill>
-                <a:latin typeface="Microsoft YaHei" pitchFamily="34" charset="0"/>
-                <a:ea typeface="Microsoft YaHei" pitchFamily="34" charset="-122"/>
-                <a:cs typeface="Microsoft YaHei" pitchFamily="34" charset="-120"/>
+                <a:latin typeface="微软雅黑" panose="020B0503020204020204" pitchFamily="34" charset="-122"/>
+                <a:ea typeface="微软雅黑" panose="020B0503020204020204" pitchFamily="34" charset="-122"/>
+                <a:cs typeface="微软雅黑" panose="020B0503020204020204" pitchFamily="34" charset="-120"/>
               </a:rPr>
               <a:t>每段结论附 [n]</a:t>
             </a:r>
@@ -7369,13 +7200,12 @@
             <a:avLst/>
           </a:prstGeom>
           <a:noFill/>
-          <a:ln/>
-        </p:spPr>
-        <p:txBody>
-          <a:bodyPr wrap="square" lIns="0" tIns="0" rIns="0" bIns="0" rtlCol="0" anchor="ctr"/>
-          <a:lstStyle/>
-          <a:p>
-            <a:pPr indent="0" marL="0">
+        </p:spPr>
+        <p:txBody>
+          <a:bodyPr wrap="square" lIns="0" tIns="0" rIns="0" bIns="0" rtlCol="0" anchor="ctr"/>
+          <a:lstStyle/>
+          <a:p>
+            <a:pPr marL="0" indent="0">
               <a:buNone/>
             </a:pPr>
             <a:r>
@@ -7383,9 +7213,9 @@
                 <a:solidFill>
                   <a:srgbClr val="F4F1EA"/>
                 </a:solidFill>
-                <a:latin typeface="Microsoft YaHei" pitchFamily="34" charset="0"/>
-                <a:ea typeface="Microsoft YaHei" pitchFamily="34" charset="-122"/>
-                <a:cs typeface="Microsoft YaHei" pitchFamily="34" charset="-120"/>
+                <a:latin typeface="微软雅黑" panose="020B0503020204020204" pitchFamily="34" charset="-122"/>
+                <a:ea typeface="微软雅黑" panose="020B0503020204020204" pitchFamily="34" charset="-122"/>
+                <a:cs typeface="微软雅黑" panose="020B0503020204020204" pitchFamily="34" charset="-120"/>
               </a:rPr>
               <a:t>04 引用校验</a:t>
             </a:r>
@@ -7408,13 +7238,12 @@
             <a:avLst/>
           </a:prstGeom>
           <a:noFill/>
-          <a:ln/>
-        </p:spPr>
-        <p:txBody>
-          <a:bodyPr wrap="square" lIns="0" tIns="0" rIns="0" bIns="0" rtlCol="0" anchor="ctr"/>
-          <a:lstStyle/>
-          <a:p>
-            <a:pPr indent="0" marL="0">
+        </p:spPr>
+        <p:txBody>
+          <a:bodyPr wrap="square" lIns="0" tIns="0" rIns="0" bIns="0" rtlCol="0" anchor="ctr"/>
+          <a:lstStyle/>
+          <a:p>
+            <a:pPr marL="0" indent="0">
               <a:buNone/>
             </a:pPr>
             <a:r>
@@ -7422,9 +7251,9 @@
                 <a:solidFill>
                   <a:srgbClr val="C9C2B4"/>
                 </a:solidFill>
-                <a:latin typeface="Microsoft YaHei" pitchFamily="34" charset="0"/>
-                <a:ea typeface="Microsoft YaHei" pitchFamily="34" charset="-122"/>
-                <a:cs typeface="Microsoft YaHei" pitchFamily="34" charset="-120"/>
+                <a:latin typeface="微软雅黑" panose="020B0503020204020204" pitchFamily="34" charset="-122"/>
+                <a:ea typeface="微软雅黑" panose="020B0503020204020204" pitchFamily="34" charset="-122"/>
+                <a:cs typeface="微软雅黑" panose="020B0503020204020204" pitchFamily="34" charset="-120"/>
               </a:rPr>
               <a:t>编号 / 日期 / 数字</a:t>
             </a:r>
@@ -7474,13 +7303,12 @@
             <a:avLst/>
           </a:prstGeom>
           <a:noFill/>
-          <a:ln/>
-        </p:spPr>
-        <p:txBody>
-          <a:bodyPr wrap="square" lIns="0" tIns="0" rIns="0" bIns="0" rtlCol="0" anchor="ctr"/>
-          <a:lstStyle/>
-          <a:p>
-            <a:pPr indent="0" marL="0">
+        </p:spPr>
+        <p:txBody>
+          <a:bodyPr wrap="square" lIns="0" tIns="0" rIns="0" bIns="0" rtlCol="0" anchor="ctr"/>
+          <a:lstStyle/>
+          <a:p>
+            <a:pPr marL="0" indent="0">
               <a:buNone/>
             </a:pPr>
             <a:r>
@@ -7488,9 +7316,9 @@
                 <a:solidFill>
                   <a:srgbClr val="7A7468"/>
                 </a:solidFill>
-                <a:latin typeface="Microsoft YaHei" pitchFamily="34" charset="0"/>
-                <a:ea typeface="Microsoft YaHei" pitchFamily="34" charset="-122"/>
-                <a:cs typeface="Microsoft YaHei" pitchFamily="34" charset="-120"/>
+                <a:latin typeface="微软雅黑" panose="020B0503020204020204" pitchFamily="34" charset="-122"/>
+                <a:ea typeface="微软雅黑" panose="020B0503020204020204" pitchFamily="34" charset="-122"/>
+                <a:cs typeface="微软雅黑" panose="020B0503020204020204" pitchFamily="34" charset="-120"/>
               </a:rPr>
               <a:t>校验失败 → 回灌错误重试 ≤ 2 次 → 仍失败降级为「无法确认」；没有来源则不调用生成。</a:t>
             </a:r>
@@ -7513,13 +7341,12 @@
             <a:avLst/>
           </a:prstGeom>
           <a:noFill/>
-          <a:ln/>
-        </p:spPr>
-        <p:txBody>
-          <a:bodyPr wrap="square" lIns="0" tIns="0" rIns="0" bIns="0" rtlCol="0" anchor="ctr"/>
-          <a:lstStyle/>
-          <a:p>
-            <a:pPr algn="r" indent="0" marL="0">
+        </p:spPr>
+        <p:txBody>
+          <a:bodyPr wrap="square" lIns="0" tIns="0" rIns="0" bIns="0" rtlCol="0" anchor="ctr"/>
+          <a:lstStyle/>
+          <a:p>
+            <a:pPr marL="0" indent="0" algn="r">
               <a:buNone/>
             </a:pPr>
             <a:r>
@@ -7527,9 +7354,9 @@
                 <a:solidFill>
                   <a:srgbClr val="B8421D"/>
                 </a:solidFill>
-                <a:latin typeface="Georgia" pitchFamily="34" charset="0"/>
-                <a:ea typeface="Georgia" pitchFamily="34" charset="-122"/>
-                <a:cs typeface="Georgia" pitchFamily="34" charset="-120"/>
+                <a:latin typeface="Georgia" panose="02040502050405020303" pitchFamily="34" charset="0"/>
+                <a:ea typeface="Georgia" panose="02040502050405020303" pitchFamily="34" charset="-122"/>
+                <a:cs typeface="Georgia" panose="02040502050405020303" pitchFamily="34" charset="-120"/>
               </a:rPr>
               <a:t>9/9</a:t>
             </a:r>
@@ -7552,13 +7379,12 @@
             <a:avLst/>
           </a:prstGeom>
           <a:noFill/>
-          <a:ln/>
-        </p:spPr>
-        <p:txBody>
-          <a:bodyPr wrap="square" lIns="0" tIns="0" rIns="0" bIns="0" rtlCol="0" anchor="ctr"/>
-          <a:lstStyle/>
-          <a:p>
-            <a:pPr indent="0" marL="0">
+        </p:spPr>
+        <p:txBody>
+          <a:bodyPr wrap="square" lIns="0" tIns="0" rIns="0" bIns="0" rtlCol="0" anchor="ctr"/>
+          <a:lstStyle/>
+          <a:p>
+            <a:pPr marL="0" indent="0">
               <a:buNone/>
             </a:pPr>
             <a:r>
@@ -7566,9 +7392,9 @@
                 <a:solidFill>
                   <a:srgbClr val="7A7468"/>
                 </a:solidFill>
-                <a:latin typeface="Microsoft YaHei" pitchFamily="34" charset="0"/>
-                <a:ea typeface="Microsoft YaHei" pitchFamily="34" charset="-122"/>
-                <a:cs typeface="Microsoft YaHei" pitchFamily="34" charset="-120"/>
+                <a:latin typeface="微软雅黑" panose="020B0503020204020204" pitchFamily="34" charset="-122"/>
+                <a:ea typeface="微软雅黑" panose="020B0503020204020204" pitchFamily="34" charset="-122"/>
+                <a:cs typeface="微软雅黑" panose="020B0503020204020204" pitchFamily="34" charset="-120"/>
               </a:rPr>
               <a:t>hit@3（9 条事实题）</a:t>
             </a:r>
@@ -7591,13 +7417,12 @@
             <a:avLst/>
           </a:prstGeom>
           <a:noFill/>
-          <a:ln/>
-        </p:spPr>
-        <p:txBody>
-          <a:bodyPr wrap="square" lIns="0" tIns="0" rIns="0" bIns="0" rtlCol="0" anchor="ctr"/>
-          <a:lstStyle/>
-          <a:p>
-            <a:pPr algn="r" indent="0" marL="0">
+        </p:spPr>
+        <p:txBody>
+          <a:bodyPr wrap="square" lIns="0" tIns="0" rIns="0" bIns="0" rtlCol="0" anchor="ctr"/>
+          <a:lstStyle/>
+          <a:p>
+            <a:pPr marL="0" indent="0" algn="r">
               <a:buNone/>
             </a:pPr>
             <a:r>
@@ -7605,9 +7430,9 @@
                 <a:solidFill>
                   <a:srgbClr val="B8421D"/>
                 </a:solidFill>
-                <a:latin typeface="Georgia" pitchFamily="34" charset="0"/>
-                <a:ea typeface="Georgia" pitchFamily="34" charset="-122"/>
-                <a:cs typeface="Georgia" pitchFamily="34" charset="-120"/>
+                <a:latin typeface="Georgia" panose="02040502050405020303" pitchFamily="34" charset="0"/>
+                <a:ea typeface="Georgia" panose="02040502050405020303" pitchFamily="34" charset="-122"/>
+                <a:cs typeface="Georgia" panose="02040502050405020303" pitchFamily="34" charset="-120"/>
               </a:rPr>
               <a:t>PASS</a:t>
             </a:r>
@@ -7630,13 +7455,12 @@
             <a:avLst/>
           </a:prstGeom>
           <a:noFill/>
-          <a:ln/>
-        </p:spPr>
-        <p:txBody>
-          <a:bodyPr wrap="square" lIns="0" tIns="0" rIns="0" bIns="0" rtlCol="0" anchor="ctr"/>
-          <a:lstStyle/>
-          <a:p>
-            <a:pPr indent="0" marL="0">
+        </p:spPr>
+        <p:txBody>
+          <a:bodyPr wrap="square" lIns="0" tIns="0" rIns="0" bIns="0" rtlCol="0" anchor="ctr"/>
+          <a:lstStyle/>
+          <a:p>
+            <a:pPr marL="0" indent="0">
               <a:buNone/>
             </a:pPr>
             <a:r>
@@ -7644,9 +7468,9 @@
                 <a:solidFill>
                   <a:srgbClr val="7A7468"/>
                 </a:solidFill>
-                <a:latin typeface="Microsoft YaHei" pitchFamily="34" charset="0"/>
-                <a:ea typeface="Microsoft YaHei" pitchFamily="34" charset="-122"/>
-                <a:cs typeface="Microsoft YaHei" pitchFamily="34" charset="-120"/>
+                <a:latin typeface="微软雅黑" panose="020B0503020204020204" pitchFamily="34" charset="-122"/>
+                <a:ea typeface="微软雅黑" panose="020B0503020204020204" pitchFamily="34" charset="-122"/>
+                <a:cs typeface="微软雅黑" panose="020B0503020204020204" pitchFamily="34" charset="-120"/>
               </a:rPr>
               <a:t>第 10 题边界拒答</a:t>
             </a:r>
@@ -7669,13 +7493,12 @@
             <a:avLst/>
           </a:prstGeom>
           <a:noFill/>
-          <a:ln/>
-        </p:spPr>
-        <p:txBody>
-          <a:bodyPr wrap="square" lIns="0" tIns="0" rIns="0" bIns="0" rtlCol="0" anchor="ctr"/>
-          <a:lstStyle/>
-          <a:p>
-            <a:pPr algn="r" indent="0" marL="0">
+        </p:spPr>
+        <p:txBody>
+          <a:bodyPr wrap="square" lIns="0" tIns="0" rIns="0" bIns="0" rtlCol="0" anchor="ctr"/>
+          <a:lstStyle/>
+          <a:p>
+            <a:pPr marL="0" indent="0" algn="r">
               <a:buNone/>
             </a:pPr>
             <a:r>
@@ -7683,9 +7506,9 @@
                 <a:solidFill>
                   <a:srgbClr val="B8421D"/>
                 </a:solidFill>
-                <a:latin typeface="Georgia" pitchFamily="34" charset="0"/>
-                <a:ea typeface="Georgia" pitchFamily="34" charset="-122"/>
-                <a:cs typeface="Georgia" pitchFamily="34" charset="-120"/>
+                <a:latin typeface="Georgia" panose="02040502050405020303" pitchFamily="34" charset="0"/>
+                <a:ea typeface="Georgia" panose="02040502050405020303" pitchFamily="34" charset="-122"/>
+                <a:cs typeface="Georgia" panose="02040502050405020303" pitchFamily="34" charset="-120"/>
               </a:rPr>
               <a:t>233 ms</a:t>
             </a:r>
@@ -7708,13 +7531,12 @@
             <a:avLst/>
           </a:prstGeom>
           <a:noFill/>
-          <a:ln/>
-        </p:spPr>
-        <p:txBody>
-          <a:bodyPr wrap="square" lIns="0" tIns="0" rIns="0" bIns="0" rtlCol="0" anchor="ctr"/>
-          <a:lstStyle/>
-          <a:p>
-            <a:pPr indent="0" marL="0">
+        </p:spPr>
+        <p:txBody>
+          <a:bodyPr wrap="square" lIns="0" tIns="0" rIns="0" bIns="0" rtlCol="0" anchor="ctr"/>
+          <a:lstStyle/>
+          <a:p>
+            <a:pPr marL="0" indent="0">
               <a:buNone/>
             </a:pPr>
             <a:r>
@@ -7722,9 +7544,9 @@
                 <a:solidFill>
                   <a:srgbClr val="7A7468"/>
                 </a:solidFill>
-                <a:latin typeface="Microsoft YaHei" pitchFamily="34" charset="0"/>
-                <a:ea typeface="Microsoft YaHei" pitchFamily="34" charset="-122"/>
-                <a:cs typeface="Microsoft YaHei" pitchFamily="34" charset="-120"/>
+                <a:latin typeface="微软雅黑" panose="020B0503020204020204" pitchFamily="34" charset="-122"/>
+                <a:ea typeface="微软雅黑" panose="020B0503020204020204" pitchFamily="34" charset="-122"/>
+                <a:cs typeface="微软雅黑" panose="020B0503020204020204" pitchFamily="34" charset="-120"/>
               </a:rPr>
               <a:t>P95（demo provider）</a:t>
             </a:r>
@@ -7747,13 +7569,12 @@
             <a:avLst/>
           </a:prstGeom>
           <a:noFill/>
-          <a:ln/>
-        </p:spPr>
-        <p:txBody>
-          <a:bodyPr wrap="square" lIns="0" tIns="0" rIns="0" bIns="0" rtlCol="0" anchor="ctr"/>
-          <a:lstStyle/>
-          <a:p>
-            <a:pPr algn="r" indent="0" marL="0">
+        </p:spPr>
+        <p:txBody>
+          <a:bodyPr wrap="square" lIns="0" tIns="0" rIns="0" bIns="0" rtlCol="0" anchor="ctr"/>
+          <a:lstStyle/>
+          <a:p>
+            <a:pPr marL="0" indent="0" algn="r">
               <a:buNone/>
             </a:pPr>
             <a:r>
@@ -7761,9 +7582,9 @@
                 <a:solidFill>
                   <a:srgbClr val="B8421D"/>
                 </a:solidFill>
-                <a:latin typeface="Georgia" pitchFamily="34" charset="0"/>
-                <a:ea typeface="Georgia" pitchFamily="34" charset="-122"/>
-                <a:cs typeface="Georgia" pitchFamily="34" charset="-120"/>
+                <a:latin typeface="Georgia" panose="02040502050405020303" pitchFamily="34" charset="0"/>
+                <a:ea typeface="Georgia" panose="02040502050405020303" pitchFamily="34" charset="-122"/>
+                <a:cs typeface="Georgia" panose="02040502050405020303" pitchFamily="34" charset="-120"/>
               </a:rPr>
               <a:t>≤ 5</a:t>
             </a:r>
@@ -7786,13 +7607,12 @@
             <a:avLst/>
           </a:prstGeom>
           <a:noFill/>
-          <a:ln/>
-        </p:spPr>
-        <p:txBody>
-          <a:bodyPr wrap="square" lIns="0" tIns="0" rIns="0" bIns="0" rtlCol="0" anchor="ctr"/>
-          <a:lstStyle/>
-          <a:p>
-            <a:pPr indent="0" marL="0">
+        </p:spPr>
+        <p:txBody>
+          <a:bodyPr wrap="square" lIns="0" tIns="0" rIns="0" bIns="0" rtlCol="0" anchor="ctr"/>
+          <a:lstStyle/>
+          <a:p>
+            <a:pPr marL="0" indent="0">
               <a:buNone/>
             </a:pPr>
             <a:r>
@@ -7800,9 +7620,9 @@
                 <a:solidFill>
                   <a:srgbClr val="7A7468"/>
                 </a:solidFill>
-                <a:latin typeface="Microsoft YaHei" pitchFamily="34" charset="0"/>
-                <a:ea typeface="Microsoft YaHei" pitchFamily="34" charset="-122"/>
-                <a:cs typeface="Microsoft YaHei" pitchFamily="34" charset="-120"/>
+                <a:latin typeface="微软雅黑" panose="020B0503020204020204" pitchFamily="34" charset="-122"/>
+                <a:ea typeface="微软雅黑" panose="020B0503020204020204" pitchFamily="34" charset="-122"/>
+                <a:cs typeface="微软雅黑" panose="020B0503020204020204" pitchFamily="34" charset="-120"/>
               </a:rPr>
               <a:t>返回来源条数</a:t>
             </a:r>
@@ -7825,13 +7645,12 @@
             <a:avLst/>
           </a:prstGeom>
           <a:noFill/>
-          <a:ln/>
-        </p:spPr>
-        <p:txBody>
-          <a:bodyPr wrap="square" lIns="0" tIns="0" rIns="0" bIns="0" rtlCol="0" anchor="ctr"/>
-          <a:lstStyle/>
-          <a:p>
-            <a:pPr indent="0" marL="0">
+        </p:spPr>
+        <p:txBody>
+          <a:bodyPr wrap="square" lIns="0" tIns="0" rIns="0" bIns="0" rtlCol="0" anchor="ctr"/>
+          <a:lstStyle/>
+          <a:p>
+            <a:pPr marL="0" indent="0">
               <a:buNone/>
             </a:pPr>
             <a:r>
@@ -7839,9 +7658,9 @@
                 <a:solidFill>
                   <a:srgbClr val="B8421D"/>
                 </a:solidFill>
-                <a:latin typeface="Microsoft YaHei" pitchFamily="34" charset="0"/>
-                <a:ea typeface="Microsoft YaHei" pitchFamily="34" charset="-122"/>
-                <a:cs typeface="Microsoft YaHei" pitchFamily="34" charset="-120"/>
+                <a:latin typeface="微软雅黑" panose="020B0503020204020204" pitchFamily="34" charset="-122"/>
+                <a:ea typeface="微软雅黑" panose="020B0503020204020204" pitchFamily="34" charset="-122"/>
+                <a:cs typeface="微软雅黑" panose="020B0503020204020204" pitchFamily="34" charset="-120"/>
               </a:rPr>
               <a:t>“引用必须能回到原文；没有依据就拒答。”</a:t>
             </a:r>
@@ -7864,13 +7683,12 @@
             <a:avLst/>
           </a:prstGeom>
           <a:noFill/>
-          <a:ln/>
-        </p:spPr>
-        <p:txBody>
-          <a:bodyPr wrap="square" lIns="0" tIns="0" rIns="0" bIns="0" rtlCol="0" anchor="ctr"/>
-          <a:lstStyle/>
-          <a:p>
-            <a:pPr indent="0" marL="0">
+        </p:spPr>
+        <p:txBody>
+          <a:bodyPr wrap="square" lIns="0" tIns="0" rIns="0" bIns="0" rtlCol="0" anchor="ctr"/>
+          <a:lstStyle/>
+          <a:p>
+            <a:pPr marL="0" indent="0">
               <a:buNone/>
             </a:pPr>
             <a:r>
@@ -7878,9 +7696,9 @@
                 <a:solidFill>
                   <a:srgbClr val="7A7468"/>
                 </a:solidFill>
-                <a:latin typeface="Microsoft YaHei" pitchFamily="34" charset="0"/>
-                <a:ea typeface="Microsoft YaHei" pitchFamily="34" charset="-122"/>
-                <a:cs typeface="Microsoft YaHei" pitchFamily="34" charset="-120"/>
+                <a:latin typeface="微软雅黑" panose="020B0503020204020204" pitchFamily="34" charset="-122"/>
+                <a:ea typeface="微软雅黑" panose="020B0503020204020204" pitchFamily="34" charset="-122"/>
+                <a:cs typeface="微软雅黑" panose="020B0503020204020204" pitchFamily="34" charset="-120"/>
               </a:rPr>
               <a:t>OfficePilot · 2026-10-25</a:t>
             </a:r>
@@ -7903,13 +7721,12 @@
             <a:avLst/>
           </a:prstGeom>
           <a:noFill/>
-          <a:ln/>
-        </p:spPr>
-        <p:txBody>
-          <a:bodyPr wrap="square" lIns="0" tIns="0" rIns="0" bIns="0" rtlCol="0" anchor="ctr"/>
-          <a:lstStyle/>
-          <a:p>
-            <a:pPr algn="r" indent="0" marL="0">
+        </p:spPr>
+        <p:txBody>
+          <a:bodyPr wrap="square" lIns="0" tIns="0" rIns="0" bIns="0" rtlCol="0" anchor="ctr"/>
+          <a:lstStyle/>
+          <a:p>
+            <a:pPr marL="0" indent="0" algn="r">
               <a:buNone/>
             </a:pPr>
             <a:r>
@@ -7917,9 +7734,9 @@
                 <a:solidFill>
                   <a:srgbClr val="7A7468"/>
                 </a:solidFill>
-                <a:latin typeface="Georgia" pitchFamily="34" charset="0"/>
-                <a:ea typeface="Georgia" pitchFamily="34" charset="-122"/>
-                <a:cs typeface="Georgia" pitchFamily="34" charset="-120"/>
+                <a:latin typeface="Georgia" panose="02040502050405020303" pitchFamily="34" charset="0"/>
+                <a:ea typeface="Georgia" panose="02040502050405020303" pitchFamily="34" charset="-122"/>
+                <a:cs typeface="Georgia" panose="02040502050405020303" pitchFamily="34" charset="-120"/>
               </a:rPr>
               <a:t>05</a:t>
             </a:r>
@@ -7937,12 +7754,13 @@
 
 <file path=ppt/slides/slide6.xml><?xml version="1.0" encoding="utf-8"?>
 <p:sld xmlns:a="http://schemas.openxmlformats.org/drawingml/2006/main" xmlns:r="http://schemas.openxmlformats.org/officeDocument/2006/relationships" xmlns:p="http://schemas.openxmlformats.org/presentationml/2006/main">
-  <p:cSld name="Slide 6">
+  <p:cSld>
     <p:bg>
       <p:bgPr>
         <a:solidFill>
           <a:srgbClr val="F4F1EA"/>
         </a:solidFill>
+        <a:effectLst/>
       </p:bgPr>
     </p:bg>
     <p:spTree>
@@ -7974,23 +7792,22 @@
             <a:avLst/>
           </a:prstGeom>
           <a:noFill/>
-          <a:ln/>
-        </p:spPr>
-        <p:txBody>
-          <a:bodyPr wrap="square" lIns="0" tIns="0" rIns="0" bIns="0" rtlCol="0" anchor="ctr"/>
-          <a:lstStyle/>
-          <a:p>
-            <a:pPr indent="0" marL="0">
-              <a:buNone/>
-            </a:pPr>
-            <a:r>
-              <a:rPr lang="en-US" sz="900" b="1" spc="120" kern="0" dirty="0">
+        </p:spPr>
+        <p:txBody>
+          <a:bodyPr wrap="square" lIns="0" tIns="0" rIns="0" bIns="0" rtlCol="0" anchor="ctr"/>
+          <a:lstStyle/>
+          <a:p>
+            <a:pPr marL="0" indent="0">
+              <a:buNone/>
+            </a:pPr>
+            <a:r>
+              <a:rPr lang="en-US" sz="900" b="1" kern="0" spc="120" dirty="0">
                 <a:solidFill>
                   <a:srgbClr val="B8421D"/>
                 </a:solidFill>
-                <a:latin typeface="Microsoft YaHei" pitchFamily="34" charset="0"/>
-                <a:ea typeface="Microsoft YaHei" pitchFamily="34" charset="-122"/>
-                <a:cs typeface="Microsoft YaHei" pitchFamily="34" charset="-120"/>
+                <a:latin typeface="微软雅黑" panose="020B0503020204020204" pitchFamily="34" charset="-122"/>
+                <a:ea typeface="微软雅黑" panose="020B0503020204020204" pitchFamily="34" charset="-122"/>
+                <a:cs typeface="微软雅黑" panose="020B0503020204020204" pitchFamily="34" charset="-120"/>
               </a:rPr>
               <a:t>05 / LANGGRAPH</a:t>
             </a:r>
@@ -8013,13 +7830,12 @@
             <a:avLst/>
           </a:prstGeom>
           <a:noFill/>
-          <a:ln/>
-        </p:spPr>
-        <p:txBody>
-          <a:bodyPr wrap="square" lIns="0" tIns="0" rIns="0" bIns="0" rtlCol="0" anchor="ctr"/>
-          <a:lstStyle/>
-          <a:p>
-            <a:pPr indent="0" marL="0">
+        </p:spPr>
+        <p:txBody>
+          <a:bodyPr wrap="square" lIns="0" tIns="0" rIns="0" bIns="0" rtlCol="0" anchor="ctr"/>
+          <a:lstStyle/>
+          <a:p>
+            <a:pPr marL="0" indent="0">
               <a:buNone/>
             </a:pPr>
             <a:r>
@@ -8027,9 +7843,9 @@
                 <a:solidFill>
                   <a:srgbClr val="1B1A17"/>
                 </a:solidFill>
-                <a:latin typeface="Microsoft YaHei" pitchFamily="34" charset="0"/>
-                <a:ea typeface="Microsoft YaHei" pitchFamily="34" charset="-122"/>
-                <a:cs typeface="Microsoft YaHei" pitchFamily="34" charset="-120"/>
+                <a:latin typeface="微软雅黑" panose="020B0503020204020204" pitchFamily="34" charset="-122"/>
+                <a:ea typeface="微软雅黑" panose="020B0503020204020204" pitchFamily="34" charset="-122"/>
+                <a:cs typeface="微软雅黑" panose="020B0503020204020204" pitchFamily="34" charset="-120"/>
               </a:rPr>
               <a:t>显式状态图 + 可恢复的运行事件</a:t>
             </a:r>
@@ -8104,13 +7920,12 @@
             <a:avLst/>
           </a:prstGeom>
           <a:noFill/>
-          <a:ln/>
-        </p:spPr>
-        <p:txBody>
-          <a:bodyPr wrap="square" lIns="0" tIns="0" rIns="0" bIns="0" rtlCol="0" anchor="ctr"/>
-          <a:lstStyle/>
-          <a:p>
-            <a:pPr algn="ctr" indent="0" marL="0">
+        </p:spPr>
+        <p:txBody>
+          <a:bodyPr wrap="square" lIns="0" tIns="0" rIns="0" bIns="0" rtlCol="0" anchor="ctr"/>
+          <a:lstStyle/>
+          <a:p>
+            <a:pPr marL="0" indent="0" algn="ctr">
               <a:buNone/>
             </a:pPr>
             <a:r>
@@ -8118,9 +7933,9 @@
                 <a:solidFill>
                   <a:srgbClr val="F4F1EA"/>
                 </a:solidFill>
-                <a:latin typeface="Georgia" pitchFamily="34" charset="0"/>
-                <a:ea typeface="Georgia" pitchFamily="34" charset="-122"/>
-                <a:cs typeface="Georgia" pitchFamily="34" charset="-120"/>
+                <a:latin typeface="Georgia" panose="02040502050405020303" pitchFamily="34" charset="0"/>
+                <a:ea typeface="Georgia" panose="02040502050405020303" pitchFamily="34" charset="-122"/>
+                <a:cs typeface="Georgia" panose="02040502050405020303" pitchFamily="34" charset="-120"/>
               </a:rPr>
               <a:t>START</a:t>
             </a:r>
@@ -8220,13 +8035,12 @@
             <a:avLst/>
           </a:prstGeom>
           <a:noFill/>
-          <a:ln/>
-        </p:spPr>
-        <p:txBody>
-          <a:bodyPr wrap="square" lIns="0" tIns="0" rIns="0" bIns="0" rtlCol="0" anchor="ctr"/>
-          <a:lstStyle/>
-          <a:p>
-            <a:pPr indent="0" marL="0">
+        </p:spPr>
+        <p:txBody>
+          <a:bodyPr wrap="square" lIns="0" tIns="0" rIns="0" bIns="0" rtlCol="0" anchor="ctr"/>
+          <a:lstStyle/>
+          <a:p>
+            <a:pPr marL="0" indent="0">
               <a:buNone/>
             </a:pPr>
             <a:r>
@@ -8234,9 +8048,9 @@
                 <a:solidFill>
                   <a:srgbClr val="1B1A17"/>
                 </a:solidFill>
-                <a:latin typeface="Microsoft YaHei" pitchFamily="34" charset="0"/>
-                <a:ea typeface="Microsoft YaHei" pitchFamily="34" charset="-122"/>
-                <a:cs typeface="Microsoft YaHei" pitchFamily="34" charset="-120"/>
+                <a:latin typeface="微软雅黑" panose="020B0503020204020204" pitchFamily="34" charset="-122"/>
+                <a:ea typeface="微软雅黑" panose="020B0503020204020204" pitchFamily="34" charset="-122"/>
+                <a:cs typeface="微软雅黑" panose="020B0503020204020204" pitchFamily="34" charset="-120"/>
               </a:rPr>
               <a:t>router</a:t>
             </a:r>
@@ -8259,13 +8073,12 @@
             <a:avLst/>
           </a:prstGeom>
           <a:noFill/>
-          <a:ln/>
         </p:spPr>
         <p:txBody>
           <a:bodyPr wrap="square" lIns="0" tIns="0" rIns="0" bIns="0" rtlCol="0" anchor="t"/>
           <a:lstStyle/>
           <a:p>
-            <a:pPr indent="0" marL="0">
+            <a:pPr marL="0" indent="0">
               <a:buNone/>
             </a:pPr>
             <a:r>
@@ -8273,9 +8086,9 @@
                 <a:solidFill>
                   <a:srgbClr val="7A7468"/>
                 </a:solidFill>
-                <a:latin typeface="Microsoft YaHei" pitchFamily="34" charset="0"/>
-                <a:ea typeface="Microsoft YaHei" pitchFamily="34" charset="-122"/>
-                <a:cs typeface="Microsoft YaHei" pitchFamily="34" charset="-120"/>
+                <a:latin typeface="微软雅黑" panose="020B0503020204020204" pitchFamily="34" charset="-122"/>
+                <a:ea typeface="微软雅黑" panose="020B0503020204020204" pitchFamily="34" charset="-122"/>
+                <a:cs typeface="微软雅黑" panose="020B0503020204020204" pitchFamily="34" charset="-120"/>
               </a:rPr>
               <a:t>规则 + 技能</a:t>
             </a:r>
@@ -8396,13 +8209,12 @@
             <a:avLst/>
           </a:prstGeom>
           <a:noFill/>
-          <a:ln/>
-        </p:spPr>
-        <p:txBody>
-          <a:bodyPr wrap="square" lIns="0" tIns="0" rIns="0" bIns="0" rtlCol="0" anchor="ctr"/>
-          <a:lstStyle/>
-          <a:p>
-            <a:pPr indent="0" marL="0">
+        </p:spPr>
+        <p:txBody>
+          <a:bodyPr wrap="square" lIns="0" tIns="0" rIns="0" bIns="0" rtlCol="0" anchor="ctr"/>
+          <a:lstStyle/>
+          <a:p>
+            <a:pPr marL="0" indent="0">
               <a:buNone/>
             </a:pPr>
             <a:r>
@@ -8410,9 +8222,9 @@
                 <a:solidFill>
                   <a:srgbClr val="1B1A17"/>
                 </a:solidFill>
-                <a:latin typeface="Microsoft YaHei" pitchFamily="34" charset="0"/>
-                <a:ea typeface="Microsoft YaHei" pitchFamily="34" charset="-122"/>
-                <a:cs typeface="Microsoft YaHei" pitchFamily="34" charset="-120"/>
+                <a:latin typeface="微软雅黑" panose="020B0503020204020204" pitchFamily="34" charset="-122"/>
+                <a:ea typeface="微软雅黑" panose="020B0503020204020204" pitchFamily="34" charset="-122"/>
+                <a:cs typeface="微软雅黑" panose="020B0503020204020204" pitchFamily="34" charset="-120"/>
               </a:rPr>
               <a:t>qa</a:t>
             </a:r>
@@ -8435,13 +8247,12 @@
             <a:avLst/>
           </a:prstGeom>
           <a:noFill/>
-          <a:ln/>
         </p:spPr>
         <p:txBody>
           <a:bodyPr wrap="square" lIns="0" tIns="0" rIns="0" bIns="0" rtlCol="0" anchor="t"/>
           <a:lstStyle/>
           <a:p>
-            <a:pPr indent="0" marL="0">
+            <a:pPr marL="0" indent="0">
               <a:buNone/>
             </a:pPr>
             <a:r>
@@ -8449,16 +8260,16 @@
                 <a:solidFill>
                   <a:srgbClr val="7A7468"/>
                 </a:solidFill>
-                <a:latin typeface="Microsoft YaHei" pitchFamily="34" charset="0"/>
-                <a:ea typeface="Microsoft YaHei" pitchFamily="34" charset="-122"/>
-                <a:cs typeface="Microsoft YaHei" pitchFamily="34" charset="-120"/>
+                <a:latin typeface="微软雅黑" panose="020B0503020204020204" pitchFamily="34" charset="-122"/>
+                <a:ea typeface="微软雅黑" panose="020B0503020204020204" pitchFamily="34" charset="-122"/>
+                <a:cs typeface="微软雅黑" panose="020B0503020204020204" pitchFamily="34" charset="-120"/>
               </a:rPr>
               <a:t>retrieve → answer</a:t>
             </a:r>
             <a:endParaRPr lang="en-US" sz="1000" dirty="0"/>
           </a:p>
           <a:p>
-            <a:pPr indent="0" marL="0">
+            <a:pPr marL="0" indent="0">
               <a:buNone/>
             </a:pPr>
             <a:r>
@@ -8466,9 +8277,9 @@
                 <a:solidFill>
                   <a:srgbClr val="7A7468"/>
                 </a:solidFill>
-                <a:latin typeface="Microsoft YaHei" pitchFamily="34" charset="0"/>
-                <a:ea typeface="Microsoft YaHei" pitchFamily="34" charset="-122"/>
-                <a:cs typeface="Microsoft YaHei" pitchFamily="34" charset="-120"/>
+                <a:latin typeface="微软雅黑" panose="020B0503020204020204" pitchFamily="34" charset="-122"/>
+                <a:ea typeface="微软雅黑" panose="020B0503020204020204" pitchFamily="34" charset="-122"/>
+                <a:cs typeface="微软雅黑" panose="020B0503020204020204" pitchFamily="34" charset="-120"/>
               </a:rPr>
               <a:t>validate → retry</a:t>
             </a:r>
@@ -8567,13 +8378,12 @@
             <a:avLst/>
           </a:prstGeom>
           <a:noFill/>
-          <a:ln/>
-        </p:spPr>
-        <p:txBody>
-          <a:bodyPr wrap="square" lIns="0" tIns="0" rIns="0" bIns="0" rtlCol="0" anchor="ctr"/>
-          <a:lstStyle/>
-          <a:p>
-            <a:pPr indent="0" marL="0">
+        </p:spPr>
+        <p:txBody>
+          <a:bodyPr wrap="square" lIns="0" tIns="0" rIns="0" bIns="0" rtlCol="0" anchor="ctr"/>
+          <a:lstStyle/>
+          <a:p>
+            <a:pPr marL="0" indent="0">
               <a:buNone/>
             </a:pPr>
             <a:r>
@@ -8581,9 +8391,9 @@
                 <a:solidFill>
                   <a:srgbClr val="1B1A17"/>
                 </a:solidFill>
-                <a:latin typeface="Microsoft YaHei" pitchFamily="34" charset="0"/>
-                <a:ea typeface="Microsoft YaHei" pitchFamily="34" charset="-122"/>
-                <a:cs typeface="Microsoft YaHei" pitchFamily="34" charset="-120"/>
+                <a:latin typeface="微软雅黑" panose="020B0503020204020204" pitchFamily="34" charset="-122"/>
+                <a:ea typeface="微软雅黑" panose="020B0503020204020204" pitchFamily="34" charset="-122"/>
+                <a:cs typeface="微软雅黑" panose="020B0503020204020204" pitchFamily="34" charset="-120"/>
               </a:rPr>
               <a:t>summary</a:t>
             </a:r>
@@ -8606,13 +8416,12 @@
             <a:avLst/>
           </a:prstGeom>
           <a:noFill/>
-          <a:ln/>
         </p:spPr>
         <p:txBody>
           <a:bodyPr wrap="square" lIns="0" tIns="0" rIns="0" bIns="0" rtlCol="0" anchor="t"/>
           <a:lstStyle/>
           <a:p>
-            <a:pPr indent="0" marL="0">
+            <a:pPr marL="0" indent="0">
               <a:buNone/>
             </a:pPr>
             <a:r>
@@ -8620,9 +8429,9 @@
                 <a:solidFill>
                   <a:srgbClr val="7A7468"/>
                 </a:solidFill>
-                <a:latin typeface="Microsoft YaHei" pitchFamily="34" charset="0"/>
-                <a:ea typeface="Microsoft YaHei" pitchFamily="34" charset="-122"/>
-                <a:cs typeface="Microsoft YaHei" pitchFamily="34" charset="-120"/>
+                <a:latin typeface="微软雅黑" panose="020B0503020204020204" pitchFamily="34" charset="-122"/>
+                <a:ea typeface="微软雅黑" panose="020B0503020204020204" pitchFamily="34" charset="-122"/>
+                <a:cs typeface="微软雅黑" panose="020B0503020204020204" pitchFamily="34" charset="-120"/>
               </a:rPr>
               <a:t>loadDoc → map-reduce</a:t>
             </a:r>
@@ -8696,13 +8505,12 @@
             <a:avLst/>
           </a:prstGeom>
           <a:noFill/>
-          <a:ln/>
-        </p:spPr>
-        <p:txBody>
-          <a:bodyPr wrap="square" lIns="0" tIns="0" rIns="0" bIns="0" rtlCol="0" anchor="ctr"/>
-          <a:lstStyle/>
-          <a:p>
-            <a:pPr indent="0" marL="0">
+        </p:spPr>
+        <p:txBody>
+          <a:bodyPr wrap="square" lIns="0" tIns="0" rIns="0" bIns="0" rtlCol="0" anchor="ctr"/>
+          <a:lstStyle/>
+          <a:p>
+            <a:pPr marL="0" indent="0">
               <a:buNone/>
             </a:pPr>
             <a:r>
@@ -8710,9 +8518,9 @@
                 <a:solidFill>
                   <a:srgbClr val="1B1A17"/>
                 </a:solidFill>
-                <a:latin typeface="Microsoft YaHei" pitchFamily="34" charset="0"/>
-                <a:ea typeface="Microsoft YaHei" pitchFamily="34" charset="-122"/>
-                <a:cs typeface="Microsoft YaHei" pitchFamily="34" charset="-120"/>
+                <a:latin typeface="微软雅黑" panose="020B0503020204020204" pitchFamily="34" charset="-122"/>
+                <a:ea typeface="微软雅黑" panose="020B0503020204020204" pitchFamily="34" charset="-122"/>
+                <a:cs typeface="微软雅黑" panose="020B0503020204020204" pitchFamily="34" charset="-120"/>
               </a:rPr>
               <a:t>extract</a:t>
             </a:r>
@@ -8735,13 +8543,12 @@
             <a:avLst/>
           </a:prstGeom>
           <a:noFill/>
-          <a:ln/>
         </p:spPr>
         <p:txBody>
           <a:bodyPr wrap="square" lIns="0" tIns="0" rIns="0" bIns="0" rtlCol="0" anchor="t"/>
           <a:lstStyle/>
           <a:p>
-            <a:pPr indent="0" marL="0">
+            <a:pPr marL="0" indent="0">
               <a:buNone/>
             </a:pPr>
             <a:r>
@@ -8749,9 +8556,9 @@
                 <a:solidFill>
                   <a:srgbClr val="7A7468"/>
                 </a:solidFill>
-                <a:latin typeface="Microsoft YaHei" pitchFamily="34" charset="0"/>
-                <a:ea typeface="Microsoft YaHei" pitchFamily="34" charset="-122"/>
-                <a:cs typeface="Microsoft YaHei" pitchFamily="34" charset="-120"/>
+                <a:latin typeface="微软雅黑" panose="020B0503020204020204" pitchFamily="34" charset="-122"/>
+                <a:ea typeface="微软雅黑" panose="020B0503020204020204" pitchFamily="34" charset="-122"/>
+                <a:cs typeface="微软雅黑" panose="020B0503020204020204" pitchFamily="34" charset="-120"/>
               </a:rPr>
               <a:t>JSON → zod → retry</a:t>
             </a:r>
@@ -8825,13 +8632,12 @@
             <a:avLst/>
           </a:prstGeom>
           <a:noFill/>
-          <a:ln/>
-        </p:spPr>
-        <p:txBody>
-          <a:bodyPr wrap="square" lIns="0" tIns="0" rIns="0" bIns="0" rtlCol="0" anchor="ctr"/>
-          <a:lstStyle/>
-          <a:p>
-            <a:pPr indent="0" marL="0">
+        </p:spPr>
+        <p:txBody>
+          <a:bodyPr wrap="square" lIns="0" tIns="0" rIns="0" bIns="0" rtlCol="0" anchor="ctr"/>
+          <a:lstStyle/>
+          <a:p>
+            <a:pPr marL="0" indent="0">
               <a:buNone/>
             </a:pPr>
             <a:r>
@@ -8839,9 +8645,9 @@
                 <a:solidFill>
                   <a:srgbClr val="1B1A17"/>
                 </a:solidFill>
-                <a:latin typeface="Microsoft YaHei" pitchFamily="34" charset="0"/>
-                <a:ea typeface="Microsoft YaHei" pitchFamily="34" charset="-122"/>
-                <a:cs typeface="Microsoft YaHei" pitchFamily="34" charset="-120"/>
+                <a:latin typeface="微软雅黑" panose="020B0503020204020204" pitchFamily="34" charset="-122"/>
+                <a:ea typeface="微软雅黑" panose="020B0503020204020204" pitchFamily="34" charset="-122"/>
+                <a:cs typeface="微软雅黑" panose="020B0503020204020204" pitchFamily="34" charset="-120"/>
               </a:rPr>
               <a:t>weekly</a:t>
             </a:r>
@@ -8864,13 +8670,12 @@
             <a:avLst/>
           </a:prstGeom>
           <a:noFill/>
-          <a:ln/>
         </p:spPr>
         <p:txBody>
           <a:bodyPr wrap="square" lIns="0" tIns="0" rIns="0" bIns="0" rtlCol="0" anchor="t"/>
           <a:lstStyle/>
           <a:p>
-            <a:pPr indent="0" marL="0">
+            <a:pPr marL="0" indent="0">
               <a:buNone/>
             </a:pPr>
             <a:r>
@@ -8878,9 +8683,9 @@
                 <a:solidFill>
                   <a:srgbClr val="7A7468"/>
                 </a:solidFill>
-                <a:latin typeface="Microsoft YaHei" pitchFamily="34" charset="0"/>
-                <a:ea typeface="Microsoft YaHei" pitchFamily="34" charset="-122"/>
-                <a:cs typeface="Microsoft YaHei" pitchFamily="34" charset="-120"/>
+                <a:latin typeface="微软雅黑" panose="020B0503020204020204" pitchFamily="34" charset="-122"/>
+                <a:ea typeface="微软雅黑" panose="020B0503020204020204" pitchFamily="34" charset="-122"/>
+                <a:cs typeface="微软雅黑" panose="020B0503020204020204" pitchFamily="34" charset="-120"/>
               </a:rPr>
               <a:t>collect → compose</a:t>
             </a:r>
@@ -8930,13 +8735,12 @@
             <a:avLst/>
           </a:prstGeom>
           <a:noFill/>
-          <a:ln/>
-        </p:spPr>
-        <p:txBody>
-          <a:bodyPr wrap="square" lIns="0" tIns="0" rIns="0" bIns="0" rtlCol="0" anchor="ctr"/>
-          <a:lstStyle/>
-          <a:p>
-            <a:pPr indent="0" marL="0">
+        </p:spPr>
+        <p:txBody>
+          <a:bodyPr wrap="square" lIns="0" tIns="0" rIns="0" bIns="0" rtlCol="0" anchor="ctr"/>
+          <a:lstStyle/>
+          <a:p>
+            <a:pPr marL="0" indent="0">
               <a:buNone/>
             </a:pPr>
             <a:r>
@@ -8944,9 +8748,9 @@
                 <a:solidFill>
                   <a:srgbClr val="7A7468"/>
                 </a:solidFill>
-                <a:latin typeface="Microsoft YaHei" pitchFamily="34" charset="0"/>
-                <a:ea typeface="Microsoft YaHei" pitchFamily="34" charset="-122"/>
-                <a:cs typeface="Microsoft YaHei" pitchFamily="34" charset="-120"/>
+                <a:latin typeface="微软雅黑" panose="020B0503020204020204" pitchFamily="34" charset="-122"/>
+                <a:ea typeface="微软雅黑" panose="020B0503020204020204" pitchFamily="34" charset="-122"/>
+                <a:cs typeface="微软雅黑" panose="020B0503020204020204" pitchFamily="34" charset="-120"/>
               </a:rPr>
               <a:t>qa 内部：检索无来源 → boundary；校验失败 → 重试 ≤ 2 → 降级</a:t>
             </a:r>
@@ -8969,13 +8773,12 @@
             <a:avLst/>
           </a:prstGeom>
           <a:noFill/>
-          <a:ln/>
-        </p:spPr>
-        <p:txBody>
-          <a:bodyPr wrap="square" lIns="0" tIns="0" rIns="0" bIns="0" rtlCol="0" anchor="ctr"/>
-          <a:lstStyle/>
-          <a:p>
-            <a:pPr indent="0" marL="0">
+        </p:spPr>
+        <p:txBody>
+          <a:bodyPr wrap="square" lIns="0" tIns="0" rIns="0" bIns="0" rtlCol="0" anchor="ctr"/>
+          <a:lstStyle/>
+          <a:p>
+            <a:pPr marL="0" indent="0">
               <a:buNone/>
             </a:pPr>
             <a:r>
@@ -8983,9 +8786,9 @@
                 <a:solidFill>
                   <a:srgbClr val="B8421D"/>
                 </a:solidFill>
-                <a:latin typeface="Microsoft YaHei" pitchFamily="34" charset="0"/>
-                <a:ea typeface="Microsoft YaHei" pitchFamily="34" charset="-122"/>
-                <a:cs typeface="Microsoft YaHei" pitchFamily="34" charset="-120"/>
+                <a:latin typeface="微软雅黑" panose="020B0503020204020204" pitchFamily="34" charset="-122"/>
+                <a:ea typeface="微软雅黑" panose="020B0503020204020204" pitchFamily="34" charset="-122"/>
+                <a:cs typeface="微软雅黑" panose="020B0503020204020204" pitchFamily="34" charset="-120"/>
               </a:rPr>
               <a:t>工程化不是附属品</a:t>
             </a:r>
@@ -9008,13 +8811,12 @@
             <a:avLst/>
           </a:prstGeom>
           <a:noFill/>
-          <a:ln/>
-        </p:spPr>
-        <p:txBody>
-          <a:bodyPr wrap="square" lIns="0" tIns="0" rIns="0" bIns="0" rtlCol="0" anchor="ctr"/>
-          <a:lstStyle/>
-          <a:p>
-            <a:pPr indent="0" marL="0">
+        </p:spPr>
+        <p:txBody>
+          <a:bodyPr wrap="square" lIns="0" tIns="0" rIns="0" bIns="0" rtlCol="0" anchor="ctr"/>
+          <a:lstStyle/>
+          <a:p>
+            <a:pPr marL="0" indent="0">
               <a:buNone/>
             </a:pPr>
             <a:r>
@@ -9022,9 +8824,9 @@
                 <a:solidFill>
                   <a:srgbClr val="1B1A17"/>
                 </a:solidFill>
-                <a:latin typeface="Microsoft YaHei" pitchFamily="34" charset="0"/>
-                <a:ea typeface="Microsoft YaHei" pitchFamily="34" charset="-122"/>
-                <a:cs typeface="Microsoft YaHei" pitchFamily="34" charset="-120"/>
+                <a:latin typeface="微软雅黑" panose="020B0503020204020204" pitchFamily="34" charset="-122"/>
+                <a:ea typeface="微软雅黑" panose="020B0503020204020204" pitchFamily="34" charset="-122"/>
+                <a:cs typeface="微软雅黑" panose="020B0503020204020204" pitchFamily="34" charset="-120"/>
               </a:rPr>
               <a:t>run_events(seq)</a:t>
             </a:r>
@@ -9047,13 +8849,12 @@
             <a:avLst/>
           </a:prstGeom>
           <a:noFill/>
-          <a:ln/>
         </p:spPr>
         <p:txBody>
           <a:bodyPr wrap="square" lIns="0" tIns="0" rIns="0" bIns="0" rtlCol="0" anchor="t"/>
           <a:lstStyle/>
           <a:p>
-            <a:pPr indent="0" marL="0">
+            <a:pPr marL="0" indent="0">
               <a:buNone/>
             </a:pPr>
             <a:r>
@@ -9061,9 +8862,9 @@
                 <a:solidFill>
                   <a:srgbClr val="7A7468"/>
                 </a:solidFill>
-                <a:latin typeface="Microsoft YaHei" pitchFamily="34" charset="0"/>
-                <a:ea typeface="Microsoft YaHei" pitchFamily="34" charset="-122"/>
-                <a:cs typeface="Microsoft YaHei" pitchFamily="34" charset="-120"/>
+                <a:latin typeface="微软雅黑" panose="020B0503020204020204" pitchFamily="34" charset="-122"/>
+                <a:ea typeface="微软雅黑" panose="020B0503020204020204" pitchFamily="34" charset="-122"/>
+                <a:cs typeface="微软雅黑" panose="020B0503020204020204" pitchFamily="34" charset="-120"/>
               </a:rPr>
               <a:t>每条 node / token / citation 落库；SSE 的 id 就是 seq。</a:t>
             </a:r>
@@ -9086,13 +8887,12 @@
             <a:avLst/>
           </a:prstGeom>
           <a:noFill/>
-          <a:ln/>
-        </p:spPr>
-        <p:txBody>
-          <a:bodyPr wrap="square" lIns="0" tIns="0" rIns="0" bIns="0" rtlCol="0" anchor="ctr"/>
-          <a:lstStyle/>
-          <a:p>
-            <a:pPr indent="0" marL="0">
+        </p:spPr>
+        <p:txBody>
+          <a:bodyPr wrap="square" lIns="0" tIns="0" rIns="0" bIns="0" rtlCol="0" anchor="ctr"/>
+          <a:lstStyle/>
+          <a:p>
+            <a:pPr marL="0" indent="0">
               <a:buNone/>
             </a:pPr>
             <a:r>
@@ -9100,9 +8900,9 @@
                 <a:solidFill>
                   <a:srgbClr val="1B1A17"/>
                 </a:solidFill>
-                <a:latin typeface="Microsoft YaHei" pitchFamily="34" charset="0"/>
-                <a:ea typeface="Microsoft YaHei" pitchFamily="34" charset="-122"/>
-                <a:cs typeface="Microsoft YaHei" pitchFamily="34" charset="-120"/>
+                <a:latin typeface="微软雅黑" panose="020B0503020204020204" pitchFamily="34" charset="-122"/>
+                <a:ea typeface="微软雅黑" panose="020B0503020204020204" pitchFamily="34" charset="-122"/>
+                <a:cs typeface="微软雅黑" panose="020B0503020204020204" pitchFamily="34" charset="-120"/>
               </a:rPr>
               <a:t>Last-Event-ID</a:t>
             </a:r>
@@ -9125,13 +8925,12 @@
             <a:avLst/>
           </a:prstGeom>
           <a:noFill/>
-          <a:ln/>
         </p:spPr>
         <p:txBody>
           <a:bodyPr wrap="square" lIns="0" tIns="0" rIns="0" bIns="0" rtlCol="0" anchor="t"/>
           <a:lstStyle/>
           <a:p>
-            <a:pPr indent="0" marL="0">
+            <a:pPr marL="0" indent="0">
               <a:buNone/>
             </a:pPr>
             <a:r>
@@ -9139,9 +8938,9 @@
                 <a:solidFill>
                   <a:srgbClr val="7A7468"/>
                 </a:solidFill>
-                <a:latin typeface="Microsoft YaHei" pitchFamily="34" charset="0"/>
-                <a:ea typeface="Microsoft YaHei" pitchFamily="34" charset="-122"/>
-                <a:cs typeface="Microsoft YaHei" pitchFamily="34" charset="-120"/>
+                <a:latin typeface="微软雅黑" panose="020B0503020204020204" pitchFamily="34" charset="-122"/>
+                <a:ea typeface="微软雅黑" panose="020B0503020204020204" pitchFamily="34" charset="-122"/>
+                <a:cs typeface="微软雅黑" panose="020B0503020204020204" pitchFamily="34" charset="-120"/>
               </a:rPr>
               <a:t>断线从 seq &gt; lastId 补发；页面刷新用 GET /api/runs/:id 对账。</a:t>
             </a:r>
@@ -9164,13 +8963,12 @@
             <a:avLst/>
           </a:prstGeom>
           <a:noFill/>
-          <a:ln/>
-        </p:spPr>
-        <p:txBody>
-          <a:bodyPr wrap="square" lIns="0" tIns="0" rIns="0" bIns="0" rtlCol="0" anchor="ctr"/>
-          <a:lstStyle/>
-          <a:p>
-            <a:pPr indent="0" marL="0">
+        </p:spPr>
+        <p:txBody>
+          <a:bodyPr wrap="square" lIns="0" tIns="0" rIns="0" bIns="0" rtlCol="0" anchor="ctr"/>
+          <a:lstStyle/>
+          <a:p>
+            <a:pPr marL="0" indent="0">
               <a:buNone/>
             </a:pPr>
             <a:r>
@@ -9178,9 +8976,9 @@
                 <a:solidFill>
                   <a:srgbClr val="1B1A17"/>
                 </a:solidFill>
-                <a:latin typeface="Microsoft YaHei" pitchFamily="34" charset="0"/>
-                <a:ea typeface="Microsoft YaHei" pitchFamily="34" charset="-122"/>
-                <a:cs typeface="Microsoft YaHei" pitchFamily="34" charset="-120"/>
+                <a:latin typeface="微软雅黑" panose="020B0503020204020204" pitchFamily="34" charset="-122"/>
+                <a:ea typeface="微软雅黑" panose="020B0503020204020204" pitchFamily="34" charset="-122"/>
+                <a:cs typeface="微软雅黑" panose="020B0503020204020204" pitchFamily="34" charset="-120"/>
               </a:rPr>
               <a:t>embedding_cache</a:t>
             </a:r>
@@ -9203,13 +9001,12 @@
             <a:avLst/>
           </a:prstGeom>
           <a:noFill/>
-          <a:ln/>
         </p:spPr>
         <p:txBody>
           <a:bodyPr wrap="square" lIns="0" tIns="0" rIns="0" bIns="0" rtlCol="0" anchor="t"/>
           <a:lstStyle/>
           <a:p>
-            <a:pPr indent="0" marL="0">
+            <a:pPr marL="0" indent="0">
               <a:buNone/>
             </a:pPr>
             <a:r>
@@ -9217,9 +9014,9 @@
                 <a:solidFill>
                   <a:srgbClr val="7A7468"/>
                 </a:solidFill>
-                <a:latin typeface="Microsoft YaHei" pitchFamily="34" charset="0"/>
-                <a:ea typeface="Microsoft YaHei" pitchFamily="34" charset="-122"/>
-                <a:cs typeface="Microsoft YaHei" pitchFamily="34" charset="-120"/>
+                <a:latin typeface="微软雅黑" panose="020B0503020204020204" pitchFamily="34" charset="-122"/>
+                <a:ea typeface="微软雅黑" panose="020B0503020204020204" pitchFamily="34" charset="-122"/>
+                <a:cs typeface="微软雅黑" panose="020B0503020204020204" pitchFamily="34" charset="-120"/>
               </a:rPr>
               <a:t>按 model + dim + 文本 hash 复用；维度不一致直接拒绝。</a:t>
             </a:r>
@@ -9242,13 +9039,12 @@
             <a:avLst/>
           </a:prstGeom>
           <a:noFill/>
-          <a:ln/>
-        </p:spPr>
-        <p:txBody>
-          <a:bodyPr wrap="square" lIns="0" tIns="0" rIns="0" bIns="0" rtlCol="0" anchor="ctr"/>
-          <a:lstStyle/>
-          <a:p>
-            <a:pPr indent="0" marL="0">
+        </p:spPr>
+        <p:txBody>
+          <a:bodyPr wrap="square" lIns="0" tIns="0" rIns="0" bIns="0" rtlCol="0" anchor="ctr"/>
+          <a:lstStyle/>
+          <a:p>
+            <a:pPr marL="0" indent="0">
               <a:buNone/>
             </a:pPr>
             <a:r>
@@ -9256,9 +9052,9 @@
                 <a:solidFill>
                   <a:srgbClr val="1B1A17"/>
                 </a:solidFill>
-                <a:latin typeface="Microsoft YaHei" pitchFamily="34" charset="0"/>
-                <a:ea typeface="Microsoft YaHei" pitchFamily="34" charset="-122"/>
-                <a:cs typeface="Microsoft YaHei" pitchFamily="34" charset="-120"/>
+                <a:latin typeface="微软雅黑" panose="020B0503020204020204" pitchFamily="34" charset="-122"/>
+                <a:ea typeface="微软雅黑" panose="020B0503020204020204" pitchFamily="34" charset="-122"/>
+                <a:cs typeface="微软雅黑" panose="020B0503020204020204" pitchFamily="34" charset="-120"/>
               </a:rPr>
               <a:t>串行队列</a:t>
             </a:r>
@@ -9281,13 +9077,12 @@
             <a:avLst/>
           </a:prstGeom>
           <a:noFill/>
-          <a:ln/>
         </p:spPr>
         <p:txBody>
           <a:bodyPr wrap="square" lIns="0" tIns="0" rIns="0" bIns="0" rtlCol="0" anchor="t"/>
           <a:lstStyle/>
           <a:p>
-            <a:pPr indent="0" marL="0">
+            <a:pPr marL="0" indent="0">
               <a:buNone/>
             </a:pPr>
             <a:r>
@@ -9295,9 +9090,9 @@
                 <a:solidFill>
                   <a:srgbClr val="7A7468"/>
                 </a:solidFill>
-                <a:latin typeface="Microsoft YaHei" pitchFamily="34" charset="0"/>
-                <a:ea typeface="Microsoft YaHei" pitchFamily="34" charset="-122"/>
-                <a:cs typeface="Microsoft YaHei" pitchFamily="34" charset="-120"/>
+                <a:latin typeface="微软雅黑" panose="020B0503020204020204" pitchFamily="34" charset="-122"/>
+                <a:ea typeface="微软雅黑" panose="020B0503020204020204" pitchFamily="34" charset="-122"/>
+                <a:cs typeface="微软雅黑" panose="020B0503020204020204" pitchFamily="34" charset="-120"/>
               </a:rPr>
               <a:t>入库与运行并发 1，避免 SQLite 写竞争与限流。</a:t>
             </a:r>
@@ -9320,13 +9115,12 @@
             <a:avLst/>
           </a:prstGeom>
           <a:noFill/>
-          <a:ln/>
-        </p:spPr>
-        <p:txBody>
-          <a:bodyPr wrap="square" lIns="0" tIns="0" rIns="0" bIns="0" rtlCol="0" anchor="ctr"/>
-          <a:lstStyle/>
-          <a:p>
-            <a:pPr indent="0" marL="0">
+        </p:spPr>
+        <p:txBody>
+          <a:bodyPr wrap="square" lIns="0" tIns="0" rIns="0" bIns="0" rtlCol="0" anchor="ctr"/>
+          <a:lstStyle/>
+          <a:p>
+            <a:pPr marL="0" indent="0">
               <a:buNone/>
             </a:pPr>
             <a:r>
@@ -9334,9 +9128,9 @@
                 <a:solidFill>
                   <a:srgbClr val="1B1A17"/>
                 </a:solidFill>
-                <a:latin typeface="Microsoft YaHei" pitchFamily="34" charset="0"/>
-                <a:ea typeface="Microsoft YaHei" pitchFamily="34" charset="-122"/>
-                <a:cs typeface="Microsoft YaHei" pitchFamily="34" charset="-120"/>
+                <a:latin typeface="微软雅黑" panose="020B0503020204020204" pitchFamily="34" charset="-122"/>
+                <a:ea typeface="微软雅黑" panose="020B0503020204020204" pitchFamily="34" charset="-122"/>
+                <a:cs typeface="微软雅黑" panose="020B0503020204020204" pitchFamily="34" charset="-120"/>
               </a:rPr>
               <a:t>zod + 重试</a:t>
             </a:r>
@@ -9359,13 +9153,12 @@
             <a:avLst/>
           </a:prstGeom>
           <a:noFill/>
-          <a:ln/>
         </p:spPr>
         <p:txBody>
           <a:bodyPr wrap="square" lIns="0" tIns="0" rIns="0" bIns="0" rtlCol="0" anchor="t"/>
           <a:lstStyle/>
           <a:p>
-            <a:pPr indent="0" marL="0">
+            <a:pPr marL="0" indent="0">
               <a:buNone/>
             </a:pPr>
             <a:r>
@@ -9373,9 +9166,9 @@
                 <a:solidFill>
                   <a:srgbClr val="7A7468"/>
                 </a:solidFill>
-                <a:latin typeface="Microsoft YaHei" pitchFamily="34" charset="0"/>
-                <a:ea typeface="Microsoft YaHei" pitchFamily="34" charset="-122"/>
-                <a:cs typeface="Microsoft YaHei" pitchFamily="34" charset="-120"/>
+                <a:latin typeface="微软雅黑" panose="020B0503020204020204" pitchFamily="34" charset="-122"/>
+                <a:ea typeface="微软雅黑" panose="020B0503020204020204" pitchFamily="34" charset="-122"/>
+                <a:cs typeface="微软雅黑" panose="020B0503020204020204" pitchFamily="34" charset="-120"/>
               </a:rPr>
               <a:t>抽取 JSON 失败回灌错误；仍失败返回告警，不填假值。</a:t>
             </a:r>
@@ -9398,13 +9191,12 @@
             <a:avLst/>
           </a:prstGeom>
           <a:noFill/>
-          <a:ln/>
-        </p:spPr>
-        <p:txBody>
-          <a:bodyPr wrap="square" lIns="0" tIns="0" rIns="0" bIns="0" rtlCol="0" anchor="ctr"/>
-          <a:lstStyle/>
-          <a:p>
-            <a:pPr indent="0" marL="0">
+        </p:spPr>
+        <p:txBody>
+          <a:bodyPr wrap="square" lIns="0" tIns="0" rIns="0" bIns="0" rtlCol="0" anchor="ctr"/>
+          <a:lstStyle/>
+          <a:p>
+            <a:pPr marL="0" indent="0">
               <a:buNone/>
             </a:pPr>
             <a:r>
@@ -9412,9 +9204,9 @@
                 <a:solidFill>
                   <a:srgbClr val="7A7468"/>
                 </a:solidFill>
-                <a:latin typeface="Microsoft YaHei" pitchFamily="34" charset="0"/>
-                <a:ea typeface="Microsoft YaHei" pitchFamily="34" charset="-122"/>
-                <a:cs typeface="Microsoft YaHei" pitchFamily="34" charset="-120"/>
+                <a:latin typeface="微软雅黑" panose="020B0503020204020204" pitchFamily="34" charset="-122"/>
+                <a:ea typeface="微软雅黑" panose="020B0503020204020204" pitchFamily="34" charset="-122"/>
+                <a:cs typeface="微软雅黑" panose="020B0503020204020204" pitchFamily="34" charset="-120"/>
               </a:rPr>
               <a:t>图不是画给 PPT 看的：router 条件边、qa 校验循环、extract schema 重试，都在代码里有对应实现。</a:t>
             </a:r>
@@ -9437,13 +9229,12 @@
             <a:avLst/>
           </a:prstGeom>
           <a:noFill/>
-          <a:ln/>
-        </p:spPr>
-        <p:txBody>
-          <a:bodyPr wrap="square" lIns="0" tIns="0" rIns="0" bIns="0" rtlCol="0" anchor="ctr"/>
-          <a:lstStyle/>
-          <a:p>
-            <a:pPr indent="0" marL="0">
+        </p:spPr>
+        <p:txBody>
+          <a:bodyPr wrap="square" lIns="0" tIns="0" rIns="0" bIns="0" rtlCol="0" anchor="ctr"/>
+          <a:lstStyle/>
+          <a:p>
+            <a:pPr marL="0" indent="0">
               <a:buNone/>
             </a:pPr>
             <a:r>
@@ -9451,9 +9242,9 @@
                 <a:solidFill>
                   <a:srgbClr val="7A7468"/>
                 </a:solidFill>
-                <a:latin typeface="Microsoft YaHei" pitchFamily="34" charset="0"/>
-                <a:ea typeface="Microsoft YaHei" pitchFamily="34" charset="-122"/>
-                <a:cs typeface="Microsoft YaHei" pitchFamily="34" charset="-120"/>
+                <a:latin typeface="微软雅黑" panose="020B0503020204020204" pitchFamily="34" charset="-122"/>
+                <a:ea typeface="微软雅黑" panose="020B0503020204020204" pitchFamily="34" charset="-122"/>
+                <a:cs typeface="微软雅黑" panose="020B0503020204020204" pitchFamily="34" charset="-120"/>
               </a:rPr>
               <a:t>OfficePilot · 2026-10-25</a:t>
             </a:r>
@@ -9476,13 +9267,12 @@
             <a:avLst/>
           </a:prstGeom>
           <a:noFill/>
-          <a:ln/>
-        </p:spPr>
-        <p:txBody>
-          <a:bodyPr wrap="square" lIns="0" tIns="0" rIns="0" bIns="0" rtlCol="0" anchor="ctr"/>
-          <a:lstStyle/>
-          <a:p>
-            <a:pPr algn="r" indent="0" marL="0">
+        </p:spPr>
+        <p:txBody>
+          <a:bodyPr wrap="square" lIns="0" tIns="0" rIns="0" bIns="0" rtlCol="0" anchor="ctr"/>
+          <a:lstStyle/>
+          <a:p>
+            <a:pPr marL="0" indent="0" algn="r">
               <a:buNone/>
             </a:pPr>
             <a:r>
@@ -9490,9 +9280,9 @@
                 <a:solidFill>
                   <a:srgbClr val="7A7468"/>
                 </a:solidFill>
-                <a:latin typeface="Georgia" pitchFamily="34" charset="0"/>
-                <a:ea typeface="Georgia" pitchFamily="34" charset="-122"/>
-                <a:cs typeface="Georgia" pitchFamily="34" charset="-120"/>
+                <a:latin typeface="Georgia" panose="02040502050405020303" pitchFamily="34" charset="0"/>
+                <a:ea typeface="Georgia" panose="02040502050405020303" pitchFamily="34" charset="-122"/>
+                <a:cs typeface="Georgia" panose="02040502050405020303" pitchFamily="34" charset="-120"/>
               </a:rPr>
               <a:t>06</a:t>
             </a:r>
@@ -9510,12 +9300,13 @@
 
 <file path=ppt/slides/slide7.xml><?xml version="1.0" encoding="utf-8"?>
 <p:sld xmlns:a="http://schemas.openxmlformats.org/drawingml/2006/main" xmlns:r="http://schemas.openxmlformats.org/officeDocument/2006/relationships" xmlns:p="http://schemas.openxmlformats.org/presentationml/2006/main">
-  <p:cSld name="Slide 7">
+  <p:cSld>
     <p:bg>
       <p:bgPr>
         <a:solidFill>
           <a:srgbClr val="F4F1EA"/>
         </a:solidFill>
+        <a:effectLst/>
       </p:bgPr>
     </p:bg>
     <p:spTree>
@@ -9547,23 +9338,22 @@
             <a:avLst/>
           </a:prstGeom>
           <a:noFill/>
-          <a:ln/>
-        </p:spPr>
-        <p:txBody>
-          <a:bodyPr wrap="square" lIns="0" tIns="0" rIns="0" bIns="0" rtlCol="0" anchor="ctr"/>
-          <a:lstStyle/>
-          <a:p>
-            <a:pPr indent="0" marL="0">
-              <a:buNone/>
-            </a:pPr>
-            <a:r>
-              <a:rPr lang="en-US" sz="900" b="1" spc="120" kern="0" dirty="0">
+        </p:spPr>
+        <p:txBody>
+          <a:bodyPr wrap="square" lIns="0" tIns="0" rIns="0" bIns="0" rtlCol="0" anchor="ctr"/>
+          <a:lstStyle/>
+          <a:p>
+            <a:pPr marL="0" indent="0">
+              <a:buNone/>
+            </a:pPr>
+            <a:r>
+              <a:rPr lang="en-US" sz="900" b="1" kern="0" spc="120" dirty="0">
                 <a:solidFill>
                   <a:srgbClr val="B8421D"/>
                 </a:solidFill>
-                <a:latin typeface="Microsoft YaHei" pitchFamily="34" charset="0"/>
-                <a:ea typeface="Microsoft YaHei" pitchFamily="34" charset="-122"/>
-                <a:cs typeface="Microsoft YaHei" pitchFamily="34" charset="-120"/>
+                <a:latin typeface="微软雅黑" panose="020B0503020204020204" pitchFamily="34" charset="-122"/>
+                <a:ea typeface="微软雅黑" panose="020B0503020204020204" pitchFamily="34" charset="-122"/>
+                <a:cs typeface="微软雅黑" panose="020B0503020204020204" pitchFamily="34" charset="-120"/>
               </a:rPr>
               <a:t>06 / DEMO &amp; RESULTS</a:t>
             </a:r>
@@ -9586,13 +9376,12 @@
             <a:avLst/>
           </a:prstGeom>
           <a:noFill/>
-          <a:ln/>
-        </p:spPr>
-        <p:txBody>
-          <a:bodyPr wrap="square" lIns="0" tIns="0" rIns="0" bIns="0" rtlCol="0" anchor="ctr"/>
-          <a:lstStyle/>
-          <a:p>
-            <a:pPr indent="0" marL="0">
+        </p:spPr>
+        <p:txBody>
+          <a:bodyPr wrap="square" lIns="0" tIns="0" rIns="0" bIns="0" rtlCol="0" anchor="ctr"/>
+          <a:lstStyle/>
+          <a:p>
+            <a:pPr marL="0" indent="0">
               <a:buNone/>
             </a:pPr>
             <a:r>
@@ -9600,9 +9389,9 @@
                 <a:solidFill>
                   <a:srgbClr val="1B1A17"/>
                 </a:solidFill>
-                <a:latin typeface="Microsoft YaHei" pitchFamily="34" charset="0"/>
-                <a:ea typeface="Microsoft YaHei" pitchFamily="34" charset="-122"/>
-                <a:cs typeface="Microsoft YaHei" pitchFamily="34" charset="-120"/>
+                <a:latin typeface="微软雅黑" panose="020B0503020204020204" pitchFamily="34" charset="-122"/>
+                <a:ea typeface="微软雅黑" panose="020B0503020204020204" pitchFamily="34" charset="-122"/>
+                <a:cs typeface="微软雅黑" panose="020B0503020204020204" pitchFamily="34" charset="-120"/>
               </a:rPr>
               <a:t>6 分钟演示路径与实测结果</a:t>
             </a:r>
@@ -9650,13 +9439,12 @@
             <a:avLst/>
           </a:prstGeom>
           <a:noFill/>
-          <a:ln/>
-        </p:spPr>
-        <p:txBody>
-          <a:bodyPr wrap="square" lIns="0" tIns="0" rIns="0" bIns="0" rtlCol="0" anchor="ctr"/>
-          <a:lstStyle/>
-          <a:p>
-            <a:pPr indent="0" marL="0">
+        </p:spPr>
+        <p:txBody>
+          <a:bodyPr wrap="square" lIns="0" tIns="0" rIns="0" bIns="0" rtlCol="0" anchor="ctr"/>
+          <a:lstStyle/>
+          <a:p>
+            <a:pPr marL="0" indent="0">
               <a:buNone/>
             </a:pPr>
             <a:r>
@@ -9664,9 +9452,9 @@
                 <a:solidFill>
                   <a:srgbClr val="B8421D"/>
                 </a:solidFill>
-                <a:latin typeface="Microsoft YaHei" pitchFamily="34" charset="0"/>
-                <a:ea typeface="Microsoft YaHei" pitchFamily="34" charset="-122"/>
-                <a:cs typeface="Microsoft YaHei" pitchFamily="34" charset="-120"/>
+                <a:latin typeface="微软雅黑" panose="020B0503020204020204" pitchFamily="34" charset="-122"/>
+                <a:ea typeface="微软雅黑" panose="020B0503020204020204" pitchFamily="34" charset="-122"/>
+                <a:cs typeface="微软雅黑" panose="020B0503020204020204" pitchFamily="34" charset="-120"/>
               </a:rPr>
               <a:t>现场路径</a:t>
             </a:r>
@@ -9689,13 +9477,12 @@
             <a:avLst/>
           </a:prstGeom>
           <a:noFill/>
-          <a:ln/>
-        </p:spPr>
-        <p:txBody>
-          <a:bodyPr wrap="square" lIns="0" tIns="0" rIns="0" bIns="0" rtlCol="0" anchor="ctr"/>
-          <a:lstStyle/>
-          <a:p>
-            <a:pPr indent="0" marL="0">
+        </p:spPr>
+        <p:txBody>
+          <a:bodyPr wrap="square" lIns="0" tIns="0" rIns="0" bIns="0" rtlCol="0" anchor="ctr"/>
+          <a:lstStyle/>
+          <a:p>
+            <a:pPr marL="0" indent="0">
               <a:buNone/>
             </a:pPr>
             <a:r>
@@ -9703,9 +9490,9 @@
                 <a:solidFill>
                   <a:srgbClr val="B8421D"/>
                 </a:solidFill>
-                <a:latin typeface="Georgia" pitchFamily="34" charset="0"/>
-                <a:ea typeface="Georgia" pitchFamily="34" charset="-122"/>
-                <a:cs typeface="Georgia" pitchFamily="34" charset="-120"/>
+                <a:latin typeface="Georgia" panose="02040502050405020303" pitchFamily="34" charset="0"/>
+                <a:ea typeface="Georgia" panose="02040502050405020303" pitchFamily="34" charset="-122"/>
+                <a:cs typeface="Georgia" panose="02040502050405020303" pitchFamily="34" charset="-120"/>
               </a:rPr>
               <a:t>01</a:t>
             </a:r>
@@ -9728,13 +9515,12 @@
             <a:avLst/>
           </a:prstGeom>
           <a:noFill/>
-          <a:ln/>
-        </p:spPr>
-        <p:txBody>
-          <a:bodyPr wrap="square" lIns="0" tIns="0" rIns="0" bIns="0" rtlCol="0" anchor="ctr"/>
-          <a:lstStyle/>
-          <a:p>
-            <a:pPr indent="0" marL="0">
+        </p:spPr>
+        <p:txBody>
+          <a:bodyPr wrap="square" lIns="0" tIns="0" rIns="0" bIns="0" rtlCol="0" anchor="ctr"/>
+          <a:lstStyle/>
+          <a:p>
+            <a:pPr marL="0" indent="0">
               <a:buNone/>
             </a:pPr>
             <a:r>
@@ -9742,9 +9528,9 @@
                 <a:solidFill>
                   <a:srgbClr val="1B1A17"/>
                 </a:solidFill>
-                <a:latin typeface="Microsoft YaHei" pitchFamily="34" charset="0"/>
-                <a:ea typeface="Microsoft YaHei" pitchFamily="34" charset="-122"/>
-                <a:cs typeface="Microsoft YaHei" pitchFamily="34" charset="-120"/>
+                <a:latin typeface="微软雅黑" panose="020B0503020204020204" pitchFamily="34" charset="-122"/>
+                <a:ea typeface="微软雅黑" panose="020B0503020204020204" pitchFamily="34" charset="-122"/>
+                <a:cs typeface="微软雅黑" panose="020B0503020204020204" pitchFamily="34" charset="-120"/>
               </a:rPr>
               <a:t>文档库</a:t>
             </a:r>
@@ -9767,13 +9553,12 @@
             <a:avLst/>
           </a:prstGeom>
           <a:noFill/>
-          <a:ln/>
-        </p:spPr>
-        <p:txBody>
-          <a:bodyPr wrap="square" lIns="0" tIns="0" rIns="0" bIns="0" rtlCol="0" anchor="ctr"/>
-          <a:lstStyle/>
-          <a:p>
-            <a:pPr indent="0" marL="0">
+        </p:spPr>
+        <p:txBody>
+          <a:bodyPr wrap="square" lIns="0" tIns="0" rIns="0" bIns="0" rtlCol="0" anchor="ctr"/>
+          <a:lstStyle/>
+          <a:p>
+            <a:pPr marL="0" indent="0">
               <a:buNone/>
             </a:pPr>
             <a:r>
@@ -9781,9 +9566,9 @@
                 <a:solidFill>
                   <a:srgbClr val="7A7468"/>
                 </a:solidFill>
-                <a:latin typeface="Microsoft YaHei" pitchFamily="34" charset="0"/>
-                <a:ea typeface="Microsoft YaHei" pitchFamily="34" charset="-122"/>
-                <a:cs typeface="Microsoft YaHei" pitchFamily="34" charset="-120"/>
+                <a:latin typeface="微软雅黑" panose="020B0503020204020204" pitchFamily="34" charset="-122"/>
+                <a:ea typeface="微软雅黑" panose="020B0503020204020204" pitchFamily="34" charset="-122"/>
+                <a:cs typeface="微软雅黑" panose="020B0503020204020204" pitchFamily="34" charset="-120"/>
               </a:rPr>
               <a:t>7 份文档 / 分类 / 入库状态</a:t>
             </a:r>
@@ -9806,13 +9591,12 @@
             <a:avLst/>
           </a:prstGeom>
           <a:noFill/>
-          <a:ln/>
-        </p:spPr>
-        <p:txBody>
-          <a:bodyPr wrap="square" lIns="0" tIns="0" rIns="0" bIns="0" rtlCol="0" anchor="ctr"/>
-          <a:lstStyle/>
-          <a:p>
-            <a:pPr indent="0" marL="0">
+        </p:spPr>
+        <p:txBody>
+          <a:bodyPr wrap="square" lIns="0" tIns="0" rIns="0" bIns="0" rtlCol="0" anchor="ctr"/>
+          <a:lstStyle/>
+          <a:p>
+            <a:pPr marL="0" indent="0">
               <a:buNone/>
             </a:pPr>
             <a:r>
@@ -9820,9 +9604,9 @@
                 <a:solidFill>
                   <a:srgbClr val="B8421D"/>
                 </a:solidFill>
-                <a:latin typeface="Georgia" pitchFamily="34" charset="0"/>
-                <a:ea typeface="Georgia" pitchFamily="34" charset="-122"/>
-                <a:cs typeface="Georgia" pitchFamily="34" charset="-120"/>
+                <a:latin typeface="Georgia" panose="02040502050405020303" pitchFamily="34" charset="0"/>
+                <a:ea typeface="Georgia" panose="02040502050405020303" pitchFamily="34" charset="-122"/>
+                <a:cs typeface="Georgia" panose="02040502050405020303" pitchFamily="34" charset="-120"/>
               </a:rPr>
               <a:t>02</a:t>
             </a:r>
@@ -9845,13 +9629,12 @@
             <a:avLst/>
           </a:prstGeom>
           <a:noFill/>
-          <a:ln/>
-        </p:spPr>
-        <p:txBody>
-          <a:bodyPr wrap="square" lIns="0" tIns="0" rIns="0" bIns="0" rtlCol="0" anchor="ctr"/>
-          <a:lstStyle/>
-          <a:p>
-            <a:pPr indent="0" marL="0">
+        </p:spPr>
+        <p:txBody>
+          <a:bodyPr wrap="square" lIns="0" tIns="0" rIns="0" bIns="0" rtlCol="0" anchor="ctr"/>
+          <a:lstStyle/>
+          <a:p>
+            <a:pPr marL="0" indent="0">
               <a:buNone/>
             </a:pPr>
             <a:r>
@@ -9859,9 +9642,9 @@
                 <a:solidFill>
                   <a:srgbClr val="1B1A17"/>
                 </a:solidFill>
-                <a:latin typeface="Microsoft YaHei" pitchFamily="34" charset="0"/>
-                <a:ea typeface="Microsoft YaHei" pitchFamily="34" charset="-122"/>
-                <a:cs typeface="Microsoft YaHei" pitchFamily="34" charset="-120"/>
+                <a:latin typeface="微软雅黑" panose="020B0503020204020204" pitchFamily="34" charset="-122"/>
+                <a:ea typeface="微软雅黑" panose="020B0503020204020204" pitchFamily="34" charset="-122"/>
+                <a:cs typeface="微软雅黑" panose="020B0503020204020204" pitchFamily="34" charset="-120"/>
               </a:rPr>
               <a:t>制度问答</a:t>
             </a:r>
@@ -9884,13 +9667,12 @@
             <a:avLst/>
           </a:prstGeom>
           <a:noFill/>
-          <a:ln/>
-        </p:spPr>
-        <p:txBody>
-          <a:bodyPr wrap="square" lIns="0" tIns="0" rIns="0" bIns="0" rtlCol="0" anchor="ctr"/>
-          <a:lstStyle/>
-          <a:p>
-            <a:pPr indent="0" marL="0">
+        </p:spPr>
+        <p:txBody>
+          <a:bodyPr wrap="square" lIns="0" tIns="0" rIns="0" bIns="0" rtlCol="0" anchor="ctr"/>
+          <a:lstStyle/>
+          <a:p>
+            <a:pPr marL="0" indent="0">
               <a:buNone/>
             </a:pPr>
             <a:r>
@@ -9898,9 +9680,9 @@
                 <a:solidFill>
                   <a:srgbClr val="7A7468"/>
                 </a:solidFill>
-                <a:latin typeface="Microsoft YaHei" pitchFamily="34" charset="0"/>
-                <a:ea typeface="Microsoft YaHei" pitchFamily="34" charset="-122"/>
-                <a:cs typeface="Microsoft YaHei" pitchFamily="34" charset="-120"/>
+                <a:latin typeface="微软雅黑" panose="020B0503020204020204" pitchFamily="34" charset="-122"/>
+                <a:ea typeface="微软雅黑" panose="020B0503020204020204" pitchFamily="34" charset="-122"/>
+                <a:cs typeface="微软雅黑" panose="020B0503020204020204" pitchFamily="34" charset="-120"/>
               </a:rPr>
               <a:t>问 650，流式回答 + [1]</a:t>
             </a:r>
@@ -9923,13 +9705,12 @@
             <a:avLst/>
           </a:prstGeom>
           <a:noFill/>
-          <a:ln/>
-        </p:spPr>
-        <p:txBody>
-          <a:bodyPr wrap="square" lIns="0" tIns="0" rIns="0" bIns="0" rtlCol="0" anchor="ctr"/>
-          <a:lstStyle/>
-          <a:p>
-            <a:pPr indent="0" marL="0">
+        </p:spPr>
+        <p:txBody>
+          <a:bodyPr wrap="square" lIns="0" tIns="0" rIns="0" bIns="0" rtlCol="0" anchor="ctr"/>
+          <a:lstStyle/>
+          <a:p>
+            <a:pPr marL="0" indent="0">
               <a:buNone/>
             </a:pPr>
             <a:r>
@@ -9937,9 +9718,9 @@
                 <a:solidFill>
                   <a:srgbClr val="B8421D"/>
                 </a:solidFill>
-                <a:latin typeface="Georgia" pitchFamily="34" charset="0"/>
-                <a:ea typeface="Georgia" pitchFamily="34" charset="-122"/>
-                <a:cs typeface="Georgia" pitchFamily="34" charset="-120"/>
+                <a:latin typeface="Georgia" panose="02040502050405020303" pitchFamily="34" charset="0"/>
+                <a:ea typeface="Georgia" panose="02040502050405020303" pitchFamily="34" charset="-122"/>
+                <a:cs typeface="Georgia" panose="02040502050405020303" pitchFamily="34" charset="-120"/>
               </a:rPr>
               <a:t>03</a:t>
             </a:r>
@@ -9962,13 +9743,12 @@
             <a:avLst/>
           </a:prstGeom>
           <a:noFill/>
-          <a:ln/>
-        </p:spPr>
-        <p:txBody>
-          <a:bodyPr wrap="square" lIns="0" tIns="0" rIns="0" bIns="0" rtlCol="0" anchor="ctr"/>
-          <a:lstStyle/>
-          <a:p>
-            <a:pPr indent="0" marL="0">
+        </p:spPr>
+        <p:txBody>
+          <a:bodyPr wrap="square" lIns="0" tIns="0" rIns="0" bIns="0" rtlCol="0" anchor="ctr"/>
+          <a:lstStyle/>
+          <a:p>
+            <a:pPr marL="0" indent="0">
               <a:buNone/>
             </a:pPr>
             <a:r>
@@ -9976,9 +9756,9 @@
                 <a:solidFill>
                   <a:srgbClr val="1B1A17"/>
                 </a:solidFill>
-                <a:latin typeface="Microsoft YaHei" pitchFamily="34" charset="0"/>
-                <a:ea typeface="Microsoft YaHei" pitchFamily="34" charset="-122"/>
-                <a:cs typeface="Microsoft YaHei" pitchFamily="34" charset="-120"/>
+                <a:latin typeface="微软雅黑" panose="020B0503020204020204" pitchFamily="34" charset="-122"/>
+                <a:ea typeface="微软雅黑" panose="020B0503020204020204" pitchFamily="34" charset="-122"/>
+                <a:cs typeface="微软雅黑" panose="020B0503020204020204" pitchFamily="34" charset="-120"/>
               </a:rPr>
               <a:t>引用定位</a:t>
             </a:r>
@@ -10001,13 +9781,12 @@
             <a:avLst/>
           </a:prstGeom>
           <a:noFill/>
-          <a:ln/>
-        </p:spPr>
-        <p:txBody>
-          <a:bodyPr wrap="square" lIns="0" tIns="0" rIns="0" bIns="0" rtlCol="0" anchor="ctr"/>
-          <a:lstStyle/>
-          <a:p>
-            <a:pPr indent="0" marL="0">
+        </p:spPr>
+        <p:txBody>
+          <a:bodyPr wrap="square" lIns="0" tIns="0" rIns="0" bIns="0" rtlCol="0" anchor="ctr"/>
+          <a:lstStyle/>
+          <a:p>
+            <a:pPr marL="0" indent="0">
               <a:buNone/>
             </a:pPr>
             <a:r>
@@ -10015,9 +9794,9 @@
                 <a:solidFill>
                   <a:srgbClr val="7A7468"/>
                 </a:solidFill>
-                <a:latin typeface="Microsoft YaHei" pitchFamily="34" charset="0"/>
-                <a:ea typeface="Microsoft YaHei" pitchFamily="34" charset="-122"/>
-                <a:cs typeface="Microsoft YaHei" pitchFamily="34" charset="-120"/>
+                <a:latin typeface="微软雅黑" panose="020B0503020204020204" pitchFamily="34" charset="-122"/>
+                <a:ea typeface="微软雅黑" panose="020B0503020204020204" pitchFamily="34" charset="-122"/>
+                <a:cs typeface="微软雅黑" panose="020B0503020204020204" pitchFamily="34" charset="-120"/>
               </a:rPr>
               <a:t>点 [1]，右侧证据高亮</a:t>
             </a:r>
@@ -10040,13 +9819,12 @@
             <a:avLst/>
           </a:prstGeom>
           <a:noFill/>
-          <a:ln/>
-        </p:spPr>
-        <p:txBody>
-          <a:bodyPr wrap="square" lIns="0" tIns="0" rIns="0" bIns="0" rtlCol="0" anchor="ctr"/>
-          <a:lstStyle/>
-          <a:p>
-            <a:pPr indent="0" marL="0">
+        </p:spPr>
+        <p:txBody>
+          <a:bodyPr wrap="square" lIns="0" tIns="0" rIns="0" bIns="0" rtlCol="0" anchor="ctr"/>
+          <a:lstStyle/>
+          <a:p>
+            <a:pPr marL="0" indent="0">
               <a:buNone/>
             </a:pPr>
             <a:r>
@@ -10054,9 +9832,9 @@
                 <a:solidFill>
                   <a:srgbClr val="B8421D"/>
                 </a:solidFill>
-                <a:latin typeface="Georgia" pitchFamily="34" charset="0"/>
-                <a:ea typeface="Georgia" pitchFamily="34" charset="-122"/>
-                <a:cs typeface="Georgia" pitchFamily="34" charset="-120"/>
+                <a:latin typeface="Georgia" panose="02040502050405020303" pitchFamily="34" charset="0"/>
+                <a:ea typeface="Georgia" panose="02040502050405020303" pitchFamily="34" charset="-122"/>
+                <a:cs typeface="Georgia" panose="02040502050405020303" pitchFamily="34" charset="-120"/>
               </a:rPr>
               <a:t>04</a:t>
             </a:r>
@@ -10079,13 +9857,12 @@
             <a:avLst/>
           </a:prstGeom>
           <a:noFill/>
-          <a:ln/>
-        </p:spPr>
-        <p:txBody>
-          <a:bodyPr wrap="square" lIns="0" tIns="0" rIns="0" bIns="0" rtlCol="0" anchor="ctr"/>
-          <a:lstStyle/>
-          <a:p>
-            <a:pPr indent="0" marL="0">
+        </p:spPr>
+        <p:txBody>
+          <a:bodyPr wrap="square" lIns="0" tIns="0" rIns="0" bIns="0" rtlCol="0" anchor="ctr"/>
+          <a:lstStyle/>
+          <a:p>
+            <a:pPr marL="0" indent="0">
               <a:buNone/>
             </a:pPr>
             <a:r>
@@ -10093,9 +9870,9 @@
                 <a:solidFill>
                   <a:srgbClr val="1B1A17"/>
                 </a:solidFill>
-                <a:latin typeface="Microsoft YaHei" pitchFamily="34" charset="0"/>
-                <a:ea typeface="Microsoft YaHei" pitchFamily="34" charset="-122"/>
-                <a:cs typeface="Microsoft YaHei" pitchFamily="34" charset="-120"/>
+                <a:latin typeface="微软雅黑" panose="020B0503020204020204" pitchFamily="34" charset="-122"/>
+                <a:ea typeface="微软雅黑" panose="020B0503020204020204" pitchFamily="34" charset="-122"/>
+                <a:cs typeface="微软雅黑" panose="020B0503020204020204" pitchFamily="34" charset="-120"/>
               </a:rPr>
               <a:t>回答边界</a:t>
             </a:r>
@@ -10118,13 +9895,12 @@
             <a:avLst/>
           </a:prstGeom>
           <a:noFill/>
-          <a:ln/>
-        </p:spPr>
-        <p:txBody>
-          <a:bodyPr wrap="square" lIns="0" tIns="0" rIns="0" bIns="0" rtlCol="0" anchor="ctr"/>
-          <a:lstStyle/>
-          <a:p>
-            <a:pPr indent="0" marL="0">
+        </p:spPr>
+        <p:txBody>
+          <a:bodyPr wrap="square" lIns="0" tIns="0" rIns="0" bIns="0" rtlCol="0" anchor="ctr"/>
+          <a:lstStyle/>
+          <a:p>
+            <a:pPr marL="0" indent="0">
               <a:buNone/>
             </a:pPr>
             <a:r>
@@ -10132,9 +9908,9 @@
                 <a:solidFill>
                   <a:srgbClr val="7A7468"/>
                 </a:solidFill>
-                <a:latin typeface="Microsoft YaHei" pitchFamily="34" charset="0"/>
-                <a:ea typeface="Microsoft YaHei" pitchFamily="34" charset="-122"/>
-                <a:cs typeface="Microsoft YaHei" pitchFamily="34" charset="-120"/>
+                <a:latin typeface="微软雅黑" panose="020B0503020204020204" pitchFamily="34" charset="-122"/>
+                <a:ea typeface="微软雅黑" panose="020B0503020204020204" pitchFamily="34" charset="-122"/>
+                <a:cs typeface="微软雅黑" panose="020B0503020204020204" pitchFamily="34" charset="-120"/>
               </a:rPr>
               <a:t>海外差旅 → 转人工卡</a:t>
             </a:r>
@@ -10157,13 +9933,12 @@
             <a:avLst/>
           </a:prstGeom>
           <a:noFill/>
-          <a:ln/>
-        </p:spPr>
-        <p:txBody>
-          <a:bodyPr wrap="square" lIns="0" tIns="0" rIns="0" bIns="0" rtlCol="0" anchor="ctr"/>
-          <a:lstStyle/>
-          <a:p>
-            <a:pPr indent="0" marL="0">
+        </p:spPr>
+        <p:txBody>
+          <a:bodyPr wrap="square" lIns="0" tIns="0" rIns="0" bIns="0" rtlCol="0" anchor="ctr"/>
+          <a:lstStyle/>
+          <a:p>
+            <a:pPr marL="0" indent="0">
               <a:buNone/>
             </a:pPr>
             <a:r>
@@ -10171,9 +9946,9 @@
                 <a:solidFill>
                   <a:srgbClr val="B8421D"/>
                 </a:solidFill>
-                <a:latin typeface="Georgia" pitchFamily="34" charset="0"/>
-                <a:ea typeface="Georgia" pitchFamily="34" charset="-122"/>
-                <a:cs typeface="Georgia" pitchFamily="34" charset="-120"/>
+                <a:latin typeface="Georgia" panose="02040502050405020303" pitchFamily="34" charset="0"/>
+                <a:ea typeface="Georgia" panose="02040502050405020303" pitchFamily="34" charset="-122"/>
+                <a:cs typeface="Georgia" panose="02040502050405020303" pitchFamily="34" charset="-120"/>
               </a:rPr>
               <a:t>05</a:t>
             </a:r>
@@ -10196,13 +9971,12 @@
             <a:avLst/>
           </a:prstGeom>
           <a:noFill/>
-          <a:ln/>
-        </p:spPr>
-        <p:txBody>
-          <a:bodyPr wrap="square" lIns="0" tIns="0" rIns="0" bIns="0" rtlCol="0" anchor="ctr"/>
-          <a:lstStyle/>
-          <a:p>
-            <a:pPr indent="0" marL="0">
+        </p:spPr>
+        <p:txBody>
+          <a:bodyPr wrap="square" lIns="0" tIns="0" rIns="0" bIns="0" rtlCol="0" anchor="ctr"/>
+          <a:lstStyle/>
+          <a:p>
+            <a:pPr marL="0" indent="0">
               <a:buNone/>
             </a:pPr>
             <a:r>
@@ -10210,9 +9984,9 @@
                 <a:solidFill>
                   <a:srgbClr val="1B1A17"/>
                 </a:solidFill>
-                <a:latin typeface="Microsoft YaHei" pitchFamily="34" charset="0"/>
-                <a:ea typeface="Microsoft YaHei" pitchFamily="34" charset="-122"/>
-                <a:cs typeface="Microsoft YaHei" pitchFamily="34" charset="-120"/>
+                <a:latin typeface="微软雅黑" panose="020B0503020204020204" pitchFamily="34" charset="-122"/>
+                <a:ea typeface="微软雅黑" panose="020B0503020204020204" pitchFamily="34" charset="-122"/>
+                <a:cs typeface="微软雅黑" panose="020B0503020204020204" pitchFamily="34" charset="-120"/>
               </a:rPr>
               <a:t>结构化抽取</a:t>
             </a:r>
@@ -10235,13 +10009,12 @@
             <a:avLst/>
           </a:prstGeom>
           <a:noFill/>
-          <a:ln/>
-        </p:spPr>
-        <p:txBody>
-          <a:bodyPr wrap="square" lIns="0" tIns="0" rIns="0" bIns="0" rtlCol="0" anchor="ctr"/>
-          <a:lstStyle/>
-          <a:p>
-            <a:pPr indent="0" marL="0">
+        </p:spPr>
+        <p:txBody>
+          <a:bodyPr wrap="square" lIns="0" tIns="0" rIns="0" bIns="0" rtlCol="0" anchor="ctr"/>
+          <a:lstStyle/>
+          <a:p>
+            <a:pPr marL="0" indent="0">
               <a:buNone/>
             </a:pPr>
             <a:r>
@@ -10249,9 +10022,9 @@
                 <a:solidFill>
                   <a:srgbClr val="7A7468"/>
                 </a:solidFill>
-                <a:latin typeface="Microsoft YaHei" pitchFamily="34" charset="0"/>
-                <a:ea typeface="Microsoft YaHei" pitchFamily="34" charset="-122"/>
-                <a:cs typeface="Microsoft YaHei" pitchFamily="34" charset="-120"/>
+                <a:latin typeface="微软雅黑" panose="020B0503020204020204" pitchFamily="34" charset="-122"/>
+                <a:ea typeface="微软雅黑" panose="020B0503020204020204" pitchFamily="34" charset="-122"/>
+                <a:cs typeface="微软雅黑" panose="020B0503020204020204" pitchFamily="34" charset="-120"/>
               </a:rPr>
               <a:t>@Q3 → 5 行行动项 → CSV</a:t>
             </a:r>
@@ -10274,13 +10047,12 @@
             <a:avLst/>
           </a:prstGeom>
           <a:noFill/>
-          <a:ln/>
-        </p:spPr>
-        <p:txBody>
-          <a:bodyPr wrap="square" lIns="0" tIns="0" rIns="0" bIns="0" rtlCol="0" anchor="ctr"/>
-          <a:lstStyle/>
-          <a:p>
-            <a:pPr indent="0" marL="0">
+        </p:spPr>
+        <p:txBody>
+          <a:bodyPr wrap="square" lIns="0" tIns="0" rIns="0" bIns="0" rtlCol="0" anchor="ctr"/>
+          <a:lstStyle/>
+          <a:p>
+            <a:pPr marL="0" indent="0">
               <a:buNone/>
             </a:pPr>
             <a:r>
@@ -10288,9 +10060,9 @@
                 <a:solidFill>
                   <a:srgbClr val="B8421D"/>
                 </a:solidFill>
-                <a:latin typeface="Georgia" pitchFamily="34" charset="0"/>
-                <a:ea typeface="Georgia" pitchFamily="34" charset="-122"/>
-                <a:cs typeface="Georgia" pitchFamily="34" charset="-120"/>
+                <a:latin typeface="Georgia" panose="02040502050405020303" pitchFamily="34" charset="0"/>
+                <a:ea typeface="Georgia" panose="02040502050405020303" pitchFamily="34" charset="-122"/>
+                <a:cs typeface="Georgia" panose="02040502050405020303" pitchFamily="34" charset="-120"/>
               </a:rPr>
               <a:t>06</a:t>
             </a:r>
@@ -10313,13 +10085,12 @@
             <a:avLst/>
           </a:prstGeom>
           <a:noFill/>
-          <a:ln/>
-        </p:spPr>
-        <p:txBody>
-          <a:bodyPr wrap="square" lIns="0" tIns="0" rIns="0" bIns="0" rtlCol="0" anchor="ctr"/>
-          <a:lstStyle/>
-          <a:p>
-            <a:pPr indent="0" marL="0">
+        </p:spPr>
+        <p:txBody>
+          <a:bodyPr wrap="square" lIns="0" tIns="0" rIns="0" bIns="0" rtlCol="0" anchor="ctr"/>
+          <a:lstStyle/>
+          <a:p>
+            <a:pPr marL="0" indent="0">
               <a:buNone/>
             </a:pPr>
             <a:r>
@@ -10327,9 +10098,9 @@
                 <a:solidFill>
                   <a:srgbClr val="1B1A17"/>
                 </a:solidFill>
-                <a:latin typeface="Microsoft YaHei" pitchFamily="34" charset="0"/>
-                <a:ea typeface="Microsoft YaHei" pitchFamily="34" charset="-122"/>
-                <a:cs typeface="Microsoft YaHei" pitchFamily="34" charset="-120"/>
+                <a:latin typeface="微软雅黑" panose="020B0503020204020204" pitchFamily="34" charset="-122"/>
+                <a:ea typeface="微软雅黑" panose="020B0503020204020204" pitchFamily="34" charset="-122"/>
+                <a:cs typeface="微软雅黑" panose="020B0503020204020204" pitchFamily="34" charset="-120"/>
               </a:rPr>
               <a:t>周报生成</a:t>
             </a:r>
@@ -10352,13 +10123,12 @@
             <a:avLst/>
           </a:prstGeom>
           <a:noFill/>
-          <a:ln/>
-        </p:spPr>
-        <p:txBody>
-          <a:bodyPr wrap="square" lIns="0" tIns="0" rIns="0" bIns="0" rtlCol="0" anchor="ctr"/>
-          <a:lstStyle/>
-          <a:p>
-            <a:pPr indent="0" marL="0">
+        </p:spPr>
+        <p:txBody>
+          <a:bodyPr wrap="square" lIns="0" tIns="0" rIns="0" bIns="0" rtlCol="0" anchor="ctr"/>
+          <a:lstStyle/>
+          <a:p>
+            <a:pPr marL="0" indent="0">
               <a:buNone/>
             </a:pPr>
             <a:r>
@@ -10366,9 +10136,9 @@
                 <a:solidFill>
                   <a:srgbClr val="7A7468"/>
                 </a:solidFill>
-                <a:latin typeface="Microsoft YaHei" pitchFamily="34" charset="0"/>
-                <a:ea typeface="Microsoft YaHei" pitchFamily="34" charset="-122"/>
-                <a:cs typeface="Microsoft YaHei" pitchFamily="34" charset="-120"/>
+                <a:latin typeface="微软雅黑" panose="020B0503020204020204" pitchFamily="34" charset="-122"/>
+                <a:ea typeface="微软雅黑" panose="020B0503020204020204" pitchFamily="34" charset="-122"/>
+                <a:cs typeface="微软雅黑" panose="020B0503020204020204" pitchFamily="34" charset="-120"/>
               </a:rPr>
               <a:t>四段式 → Markdown</a:t>
             </a:r>
@@ -10391,13 +10161,12 @@
             <a:avLst/>
           </a:prstGeom>
           <a:noFill/>
-          <a:ln/>
-        </p:spPr>
-        <p:txBody>
-          <a:bodyPr wrap="square" lIns="0" tIns="0" rIns="0" bIns="0" rtlCol="0" anchor="ctr"/>
-          <a:lstStyle/>
-          <a:p>
-            <a:pPr indent="0" marL="0">
+        </p:spPr>
+        <p:txBody>
+          <a:bodyPr wrap="square" lIns="0" tIns="0" rIns="0" bIns="0" rtlCol="0" anchor="ctr"/>
+          <a:lstStyle/>
+          <a:p>
+            <a:pPr marL="0" indent="0">
               <a:buNone/>
             </a:pPr>
             <a:r>
@@ -10405,9 +10174,9 @@
                 <a:solidFill>
                   <a:srgbClr val="7A7468"/>
                 </a:solidFill>
-                <a:latin typeface="Microsoft YaHei" pitchFamily="34" charset="0"/>
-                <a:ea typeface="Microsoft YaHei" pitchFamily="34" charset="-122"/>
-                <a:cs typeface="Microsoft YaHei" pitchFamily="34" charset="-120"/>
+                <a:latin typeface="微软雅黑" panose="020B0503020204020204" pitchFamily="34" charset="-122"/>
+                <a:ea typeface="微软雅黑" panose="020B0503020204020204" pitchFamily="34" charset="-122"/>
+                <a:cs typeface="微软雅黑" panose="020B0503020204020204" pitchFamily="34" charset="-120"/>
               </a:rPr>
               <a:t>最后切「执行链路」：Router → Retrieve → Generate → Validate 的真实耗时与重试。</a:t>
             </a:r>
@@ -10457,13 +10226,12 @@
             <a:avLst/>
           </a:prstGeom>
           <a:noFill/>
-          <a:ln/>
-        </p:spPr>
-        <p:txBody>
-          <a:bodyPr wrap="square" lIns="0" tIns="0" rIns="0" bIns="0" rtlCol="0" anchor="ctr"/>
-          <a:lstStyle/>
-          <a:p>
-            <a:pPr algn="ctr" indent="0" marL="0">
+        </p:spPr>
+        <p:txBody>
+          <a:bodyPr wrap="square" lIns="0" tIns="0" rIns="0" bIns="0" rtlCol="0" anchor="ctr"/>
+          <a:lstStyle/>
+          <a:p>
+            <a:pPr marL="0" indent="0" algn="ctr">
               <a:buNone/>
             </a:pPr>
             <a:r>
@@ -10471,9 +10239,9 @@
                 <a:solidFill>
                   <a:srgbClr val="B8421D"/>
                 </a:solidFill>
-                <a:latin typeface="Georgia" pitchFamily="34" charset="0"/>
-                <a:ea typeface="Georgia" pitchFamily="34" charset="-122"/>
-                <a:cs typeface="Georgia" pitchFamily="34" charset="-120"/>
+                <a:latin typeface="Georgia" panose="02040502050405020303" pitchFamily="34" charset="0"/>
+                <a:ea typeface="Georgia" panose="02040502050405020303" pitchFamily="34" charset="-122"/>
+                <a:cs typeface="Georgia" panose="02040502050405020303" pitchFamily="34" charset="-120"/>
               </a:rPr>
               <a:t>162</a:t>
             </a:r>
@@ -10496,13 +10264,12 @@
             <a:avLst/>
           </a:prstGeom>
           <a:noFill/>
-          <a:ln/>
-        </p:spPr>
-        <p:txBody>
-          <a:bodyPr wrap="square" lIns="0" tIns="0" rIns="0" bIns="0" rtlCol="0" anchor="ctr"/>
-          <a:lstStyle/>
-          <a:p>
-            <a:pPr algn="ctr" indent="0" marL="0">
+        </p:spPr>
+        <p:txBody>
+          <a:bodyPr wrap="square" lIns="0" tIns="0" rIns="0" bIns="0" rtlCol="0" anchor="ctr"/>
+          <a:lstStyle/>
+          <a:p>
+            <a:pPr marL="0" indent="0" algn="ctr">
               <a:buNone/>
             </a:pPr>
             <a:r>
@@ -10510,9 +10277,9 @@
                 <a:solidFill>
                   <a:srgbClr val="7A7468"/>
                 </a:solidFill>
-                <a:latin typeface="Microsoft YaHei" pitchFamily="34" charset="0"/>
-                <a:ea typeface="Microsoft YaHei" pitchFamily="34" charset="-122"/>
-                <a:cs typeface="Microsoft YaHei" pitchFamily="34" charset="-120"/>
+                <a:latin typeface="微软雅黑" panose="020B0503020204020204" pitchFamily="34" charset="-122"/>
+                <a:ea typeface="微软雅黑" panose="020B0503020204020204" pitchFamily="34" charset="-122"/>
+                <a:cs typeface="微软雅黑" panose="020B0503020204020204" pitchFamily="34" charset="-120"/>
               </a:rPr>
               <a:t>单元 / 集成测试</a:t>
             </a:r>
@@ -10562,13 +10329,12 @@
             <a:avLst/>
           </a:prstGeom>
           <a:noFill/>
-          <a:ln/>
-        </p:spPr>
-        <p:txBody>
-          <a:bodyPr wrap="square" lIns="0" tIns="0" rIns="0" bIns="0" rtlCol="0" anchor="ctr"/>
-          <a:lstStyle/>
-          <a:p>
-            <a:pPr algn="ctr" indent="0" marL="0">
+        </p:spPr>
+        <p:txBody>
+          <a:bodyPr wrap="square" lIns="0" tIns="0" rIns="0" bIns="0" rtlCol="0" anchor="ctr"/>
+          <a:lstStyle/>
+          <a:p>
+            <a:pPr marL="0" indent="0" algn="ctr">
               <a:buNone/>
             </a:pPr>
             <a:r>
@@ -10576,9 +10342,9 @@
                 <a:solidFill>
                   <a:srgbClr val="B8421D"/>
                 </a:solidFill>
-                <a:latin typeface="Georgia" pitchFamily="34" charset="0"/>
-                <a:ea typeface="Georgia" pitchFamily="34" charset="-122"/>
-                <a:cs typeface="Georgia" pitchFamily="34" charset="-120"/>
+                <a:latin typeface="Georgia" panose="02040502050405020303" pitchFamily="34" charset="0"/>
+                <a:ea typeface="Georgia" panose="02040502050405020303" pitchFamily="34" charset="-122"/>
+                <a:cs typeface="Georgia" panose="02040502050405020303" pitchFamily="34" charset="-120"/>
               </a:rPr>
               <a:t>41</a:t>
             </a:r>
@@ -10601,13 +10367,12 @@
             <a:avLst/>
           </a:prstGeom>
           <a:noFill/>
-          <a:ln/>
-        </p:spPr>
-        <p:txBody>
-          <a:bodyPr wrap="square" lIns="0" tIns="0" rIns="0" bIns="0" rtlCol="0" anchor="ctr"/>
-          <a:lstStyle/>
-          <a:p>
-            <a:pPr algn="ctr" indent="0" marL="0">
+        </p:spPr>
+        <p:txBody>
+          <a:bodyPr wrap="square" lIns="0" tIns="0" rIns="0" bIns="0" rtlCol="0" anchor="ctr"/>
+          <a:lstStyle/>
+          <a:p>
+            <a:pPr marL="0" indent="0" algn="ctr">
               <a:buNone/>
             </a:pPr>
             <a:r>
@@ -10615,9 +10380,9 @@
                 <a:solidFill>
                   <a:srgbClr val="7A7468"/>
                 </a:solidFill>
-                <a:latin typeface="Microsoft YaHei" pitchFamily="34" charset="0"/>
-                <a:ea typeface="Microsoft YaHei" pitchFamily="34" charset="-122"/>
-                <a:cs typeface="Microsoft YaHei" pitchFamily="34" charset="-120"/>
+                <a:latin typeface="微软雅黑" panose="020B0503020204020204" pitchFamily="34" charset="-122"/>
+                <a:ea typeface="微软雅黑" panose="020B0503020204020204" pitchFamily="34" charset="-122"/>
+                <a:cs typeface="微软雅黑" panose="020B0503020204020204" pitchFamily="34" charset="-120"/>
               </a:rPr>
               <a:t>测试文件</a:t>
             </a:r>
@@ -10667,13 +10432,12 @@
             <a:avLst/>
           </a:prstGeom>
           <a:noFill/>
-          <a:ln/>
-        </p:spPr>
-        <p:txBody>
-          <a:bodyPr wrap="square" lIns="0" tIns="0" rIns="0" bIns="0" rtlCol="0" anchor="ctr"/>
-          <a:lstStyle/>
-          <a:p>
-            <a:pPr algn="ctr" indent="0" marL="0">
+        </p:spPr>
+        <p:txBody>
+          <a:bodyPr wrap="square" lIns="0" tIns="0" rIns="0" bIns="0" rtlCol="0" anchor="ctr"/>
+          <a:lstStyle/>
+          <a:p>
+            <a:pPr marL="0" indent="0" algn="ctr">
               <a:buNone/>
             </a:pPr>
             <a:r>
@@ -10681,9 +10445,9 @@
                 <a:solidFill>
                   <a:srgbClr val="B8421D"/>
                 </a:solidFill>
-                <a:latin typeface="Georgia" pitchFamily="34" charset="0"/>
-                <a:ea typeface="Georgia" pitchFamily="34" charset="-122"/>
-                <a:cs typeface="Georgia" pitchFamily="34" charset="-120"/>
+                <a:latin typeface="Georgia" panose="02040502050405020303" pitchFamily="34" charset="0"/>
+                <a:ea typeface="Georgia" panose="02040502050405020303" pitchFamily="34" charset="-122"/>
+                <a:cs typeface="Georgia" panose="02040502050405020303" pitchFamily="34" charset="-120"/>
               </a:rPr>
               <a:t>0</a:t>
             </a:r>
@@ -10706,13 +10470,12 @@
             <a:avLst/>
           </a:prstGeom>
           <a:noFill/>
-          <a:ln/>
-        </p:spPr>
-        <p:txBody>
-          <a:bodyPr wrap="square" lIns="0" tIns="0" rIns="0" bIns="0" rtlCol="0" anchor="ctr"/>
-          <a:lstStyle/>
-          <a:p>
-            <a:pPr algn="ctr" indent="0" marL="0">
+        </p:spPr>
+        <p:txBody>
+          <a:bodyPr wrap="square" lIns="0" tIns="0" rIns="0" bIns="0" rtlCol="0" anchor="ctr"/>
+          <a:lstStyle/>
+          <a:p>
+            <a:pPr marL="0" indent="0" algn="ctr">
               <a:buNone/>
             </a:pPr>
             <a:r>
@@ -10720,9 +10483,9 @@
                 <a:solidFill>
                   <a:srgbClr val="7A7468"/>
                 </a:solidFill>
-                <a:latin typeface="Microsoft YaHei" pitchFamily="34" charset="0"/>
-                <a:ea typeface="Microsoft YaHei" pitchFamily="34" charset="-122"/>
-                <a:cs typeface="Microsoft YaHei" pitchFamily="34" charset="-120"/>
+                <a:latin typeface="微软雅黑" panose="020B0503020204020204" pitchFamily="34" charset="-122"/>
+                <a:ea typeface="微软雅黑" panose="020B0503020204020204" pitchFamily="34" charset="-122"/>
+                <a:cs typeface="微软雅黑" panose="020B0503020204020204" pitchFamily="34" charset="-120"/>
               </a:rPr>
               <a:t>typecheck 错误</a:t>
             </a:r>
@@ -10772,13 +10535,12 @@
             <a:avLst/>
           </a:prstGeom>
           <a:noFill/>
-          <a:ln/>
-        </p:spPr>
-        <p:txBody>
-          <a:bodyPr wrap="square" lIns="0" tIns="0" rIns="0" bIns="0" rtlCol="0" anchor="ctr"/>
-          <a:lstStyle/>
-          <a:p>
-            <a:pPr algn="ctr" indent="0" marL="0">
+        </p:spPr>
+        <p:txBody>
+          <a:bodyPr wrap="square" lIns="0" tIns="0" rIns="0" bIns="0" rtlCol="0" anchor="ctr"/>
+          <a:lstStyle/>
+          <a:p>
+            <a:pPr marL="0" indent="0" algn="ctr">
               <a:buNone/>
             </a:pPr>
             <a:r>
@@ -10786,9 +10548,9 @@
                 <a:solidFill>
                   <a:srgbClr val="B8421D"/>
                 </a:solidFill>
-                <a:latin typeface="Georgia" pitchFamily="34" charset="0"/>
-                <a:ea typeface="Georgia" pitchFamily="34" charset="-122"/>
-                <a:cs typeface="Georgia" pitchFamily="34" charset="-120"/>
+                <a:latin typeface="Georgia" panose="02040502050405020303" pitchFamily="34" charset="0"/>
+                <a:ea typeface="Georgia" panose="02040502050405020303" pitchFamily="34" charset="-122"/>
+                <a:cs typeface="Georgia" panose="02040502050405020303" pitchFamily="34" charset="-120"/>
               </a:rPr>
               <a:t>6/6</a:t>
             </a:r>
@@ -10811,13 +10573,12 @@
             <a:avLst/>
           </a:prstGeom>
           <a:noFill/>
-          <a:ln/>
-        </p:spPr>
-        <p:txBody>
-          <a:bodyPr wrap="square" lIns="0" tIns="0" rIns="0" bIns="0" rtlCol="0" anchor="ctr"/>
-          <a:lstStyle/>
-          <a:p>
-            <a:pPr algn="ctr" indent="0" marL="0">
+        </p:spPr>
+        <p:txBody>
+          <a:bodyPr wrap="square" lIns="0" tIns="0" rIns="0" bIns="0" rtlCol="0" anchor="ctr"/>
+          <a:lstStyle/>
+          <a:p>
+            <a:pPr marL="0" indent="0" algn="ctr">
               <a:buNone/>
             </a:pPr>
             <a:r>
@@ -10825,9 +10586,9 @@
                 <a:solidFill>
                   <a:srgbClr val="7A7468"/>
                 </a:solidFill>
-                <a:latin typeface="Microsoft YaHei" pitchFamily="34" charset="0"/>
-                <a:ea typeface="Microsoft YaHei" pitchFamily="34" charset="-122"/>
-                <a:cs typeface="Microsoft YaHei" pitchFamily="34" charset="-120"/>
+                <a:latin typeface="微软雅黑" panose="020B0503020204020204" pitchFamily="34" charset="-122"/>
+                <a:ea typeface="微软雅黑" panose="020B0503020204020204" pitchFamily="34" charset="-122"/>
+                <a:cs typeface="微软雅黑" panose="020B0503020204020204" pitchFamily="34" charset="-120"/>
               </a:rPr>
               <a:t>Playwright E2E</a:t>
             </a:r>
@@ -10877,13 +10638,12 @@
             <a:avLst/>
           </a:prstGeom>
           <a:noFill/>
-          <a:ln/>
-        </p:spPr>
-        <p:txBody>
-          <a:bodyPr wrap="square" lIns="0" tIns="0" rIns="0" bIns="0" rtlCol="0" anchor="ctr"/>
-          <a:lstStyle/>
-          <a:p>
-            <a:pPr algn="ctr" indent="0" marL="0">
+        </p:spPr>
+        <p:txBody>
+          <a:bodyPr wrap="square" lIns="0" tIns="0" rIns="0" bIns="0" rtlCol="0" anchor="ctr"/>
+          <a:lstStyle/>
+          <a:p>
+            <a:pPr marL="0" indent="0" algn="ctr">
               <a:buNone/>
             </a:pPr>
             <a:r>
@@ -10891,9 +10651,9 @@
                 <a:solidFill>
                   <a:srgbClr val="B8421D"/>
                 </a:solidFill>
-                <a:latin typeface="Georgia" pitchFamily="34" charset="0"/>
-                <a:ea typeface="Georgia" pitchFamily="34" charset="-122"/>
-                <a:cs typeface="Georgia" pitchFamily="34" charset="-120"/>
+                <a:latin typeface="Georgia" panose="02040502050405020303" pitchFamily="34" charset="0"/>
+                <a:ea typeface="Georgia" panose="02040502050405020303" pitchFamily="34" charset="-122"/>
+                <a:cs typeface="Georgia" panose="02040502050405020303" pitchFamily="34" charset="-120"/>
               </a:rPr>
               <a:t>9/9</a:t>
             </a:r>
@@ -10916,13 +10676,12 @@
             <a:avLst/>
           </a:prstGeom>
           <a:noFill/>
-          <a:ln/>
-        </p:spPr>
-        <p:txBody>
-          <a:bodyPr wrap="square" lIns="0" tIns="0" rIns="0" bIns="0" rtlCol="0" anchor="ctr"/>
-          <a:lstStyle/>
-          <a:p>
-            <a:pPr algn="ctr" indent="0" marL="0">
+        </p:spPr>
+        <p:txBody>
+          <a:bodyPr wrap="square" lIns="0" tIns="0" rIns="0" bIns="0" rtlCol="0" anchor="ctr"/>
+          <a:lstStyle/>
+          <a:p>
+            <a:pPr marL="0" indent="0" algn="ctr">
               <a:buNone/>
             </a:pPr>
             <a:r>
@@ -10930,9 +10689,9 @@
                 <a:solidFill>
                   <a:srgbClr val="7A7468"/>
                 </a:solidFill>
-                <a:latin typeface="Microsoft YaHei" pitchFamily="34" charset="0"/>
-                <a:ea typeface="Microsoft YaHei" pitchFamily="34" charset="-122"/>
-                <a:cs typeface="Microsoft YaHei" pitchFamily="34" charset="-120"/>
+                <a:latin typeface="微软雅黑" panose="020B0503020204020204" pitchFamily="34" charset="-122"/>
+                <a:ea typeface="微软雅黑" panose="020B0503020204020204" pitchFamily="34" charset="-122"/>
+                <a:cs typeface="微软雅黑" panose="020B0503020204020204" pitchFamily="34" charset="-120"/>
               </a:rPr>
               <a:t>RAG hit@3</a:t>
             </a:r>
@@ -10982,13 +10741,12 @@
             <a:avLst/>
           </a:prstGeom>
           <a:noFill/>
-          <a:ln/>
-        </p:spPr>
-        <p:txBody>
-          <a:bodyPr wrap="square" lIns="0" tIns="0" rIns="0" bIns="0" rtlCol="0" anchor="ctr"/>
-          <a:lstStyle/>
-          <a:p>
-            <a:pPr algn="ctr" indent="0" marL="0">
+        </p:spPr>
+        <p:txBody>
+          <a:bodyPr wrap="square" lIns="0" tIns="0" rIns="0" bIns="0" rtlCol="0" anchor="ctr"/>
+          <a:lstStyle/>
+          <a:p>
+            <a:pPr marL="0" indent="0" algn="ctr">
               <a:buNone/>
             </a:pPr>
             <a:r>
@@ -10996,9 +10754,9 @@
                 <a:solidFill>
                   <a:srgbClr val="B8421D"/>
                 </a:solidFill>
-                <a:latin typeface="Georgia" pitchFamily="34" charset="0"/>
-                <a:ea typeface="Georgia" pitchFamily="34" charset="-122"/>
-                <a:cs typeface="Georgia" pitchFamily="34" charset="-120"/>
+                <a:latin typeface="Georgia" panose="02040502050405020303" pitchFamily="34" charset="0"/>
+                <a:ea typeface="Georgia" panose="02040502050405020303" pitchFamily="34" charset="-122"/>
+                <a:cs typeface="Georgia" panose="02040502050405020303" pitchFamily="34" charset="-120"/>
               </a:rPr>
               <a:t>PASS</a:t>
             </a:r>
@@ -11021,13 +10779,12 @@
             <a:avLst/>
           </a:prstGeom>
           <a:noFill/>
-          <a:ln/>
-        </p:spPr>
-        <p:txBody>
-          <a:bodyPr wrap="square" lIns="0" tIns="0" rIns="0" bIns="0" rtlCol="0" anchor="ctr"/>
-          <a:lstStyle/>
-          <a:p>
-            <a:pPr algn="ctr" indent="0" marL="0">
+        </p:spPr>
+        <p:txBody>
+          <a:bodyPr wrap="square" lIns="0" tIns="0" rIns="0" bIns="0" rtlCol="0" anchor="ctr"/>
+          <a:lstStyle/>
+          <a:p>
+            <a:pPr marL="0" indent="0" algn="ctr">
               <a:buNone/>
             </a:pPr>
             <a:r>
@@ -11035,9 +10792,9 @@
                 <a:solidFill>
                   <a:srgbClr val="7A7468"/>
                 </a:solidFill>
-                <a:latin typeface="Microsoft YaHei" pitchFamily="34" charset="0"/>
-                <a:ea typeface="Microsoft YaHei" pitchFamily="34" charset="-122"/>
-                <a:cs typeface="Microsoft YaHei" pitchFamily="34" charset="-120"/>
+                <a:latin typeface="微软雅黑" panose="020B0503020204020204" pitchFamily="34" charset="-122"/>
+                <a:ea typeface="微软雅黑" panose="020B0503020204020204" pitchFamily="34" charset="-122"/>
+                <a:cs typeface="微软雅黑" panose="020B0503020204020204" pitchFamily="34" charset="-120"/>
               </a:rPr>
               <a:t>边界拒答</a:t>
             </a:r>
@@ -11087,13 +10844,12 @@
             <a:avLst/>
           </a:prstGeom>
           <a:noFill/>
-          <a:ln/>
-        </p:spPr>
-        <p:txBody>
-          <a:bodyPr wrap="square" lIns="0" tIns="0" rIns="0" bIns="0" rtlCol="0" anchor="ctr"/>
-          <a:lstStyle/>
-          <a:p>
-            <a:pPr indent="0" marL="0">
+        </p:spPr>
+        <p:txBody>
+          <a:bodyPr wrap="square" lIns="0" tIns="0" rIns="0" bIns="0" rtlCol="0" anchor="ctr"/>
+          <a:lstStyle/>
+          <a:p>
+            <a:pPr marL="0" indent="0">
               <a:buNone/>
             </a:pPr>
             <a:r>
@@ -11101,9 +10857,9 @@
                 <a:solidFill>
                   <a:srgbClr val="F4F1EA"/>
                 </a:solidFill>
-                <a:latin typeface="Microsoft YaHei" pitchFamily="34" charset="0"/>
-                <a:ea typeface="Microsoft YaHei" pitchFamily="34" charset="-122"/>
-                <a:cs typeface="Microsoft YaHei" pitchFamily="34" charset="-120"/>
+                <a:latin typeface="微软雅黑" panose="020B0503020204020204" pitchFamily="34" charset="-122"/>
+                <a:ea typeface="微软雅黑" panose="020B0503020204020204" pitchFamily="34" charset="-122"/>
+                <a:cs typeface="微软雅黑" panose="020B0503020204020204" pitchFamily="34" charset="-120"/>
               </a:rPr>
               <a:t>构建 / 启动</a:t>
             </a:r>
@@ -11126,13 +10882,12 @@
             <a:avLst/>
           </a:prstGeom>
           <a:noFill/>
-          <a:ln/>
         </p:spPr>
         <p:txBody>
           <a:bodyPr wrap="square" lIns="0" tIns="0" rIns="0" bIns="0" rtlCol="0" anchor="t"/>
           <a:lstStyle/>
           <a:p>
-            <a:pPr indent="0" marL="0">
+            <a:pPr marL="0" indent="0">
               <a:buNone/>
             </a:pPr>
             <a:r>
@@ -11140,16 +10895,16 @@
                 <a:solidFill>
                   <a:srgbClr val="C9C2B4"/>
                 </a:solidFill>
-                <a:latin typeface="Microsoft YaHei" pitchFamily="34" charset="0"/>
-                <a:ea typeface="Microsoft YaHei" pitchFamily="34" charset="-122"/>
-                <a:cs typeface="Microsoft YaHei" pitchFamily="34" charset="-120"/>
+                <a:latin typeface="微软雅黑" panose="020B0503020204020204" pitchFamily="34" charset="-122"/>
+                <a:ea typeface="微软雅黑" panose="020B0503020204020204" pitchFamily="34" charset="-122"/>
+                <a:cs typeface="微软雅黑" panose="020B0503020204020204" pitchFamily="34" charset="-120"/>
               </a:rPr>
               <a:t>npm run build  →  server 83.9 KB + web 303.3 KB</a:t>
             </a:r>
             <a:endParaRPr lang="en-US" sz="850" dirty="0"/>
           </a:p>
           <a:p>
-            <a:pPr indent="0" marL="0">
+            <a:pPr marL="0" indent="0">
               <a:buNone/>
             </a:pPr>
             <a:r>
@@ -11157,9 +10912,9 @@
                 <a:solidFill>
                   <a:srgbClr val="C9C2B4"/>
                 </a:solidFill>
-                <a:latin typeface="Microsoft YaHei" pitchFamily="34" charset="0"/>
-                <a:ea typeface="Microsoft YaHei" pitchFamily="34" charset="-122"/>
-                <a:cs typeface="Microsoft YaHei" pitchFamily="34" charset="-120"/>
+                <a:latin typeface="微软雅黑" panose="020B0503020204020204" pitchFamily="34" charset="-122"/>
+                <a:ea typeface="微软雅黑" panose="020B0503020204020204" pitchFamily="34" charset="-122"/>
+                <a:cs typeface="微软雅黑" panose="020B0503020204020204" pitchFamily="34" charset="-120"/>
               </a:rPr>
               <a:t>npm start  →  /api/health ok · / 返回 HTML · /docs 200</a:t>
             </a:r>
@@ -11182,13 +10937,12 @@
             <a:avLst/>
           </a:prstGeom>
           <a:noFill/>
-          <a:ln/>
-        </p:spPr>
-        <p:txBody>
-          <a:bodyPr wrap="square" lIns="0" tIns="0" rIns="0" bIns="0" rtlCol="0" anchor="ctr"/>
-          <a:lstStyle/>
-          <a:p>
-            <a:pPr indent="0" marL="0">
+        </p:spPr>
+        <p:txBody>
+          <a:bodyPr wrap="square" lIns="0" tIns="0" rIns="0" bIns="0" rtlCol="0" anchor="ctr"/>
+          <a:lstStyle/>
+          <a:p>
+            <a:pPr marL="0" indent="0">
               <a:buNone/>
             </a:pPr>
             <a:r>
@@ -11196,9 +10950,9 @@
                 <a:solidFill>
                   <a:srgbClr val="7A7468"/>
                 </a:solidFill>
-                <a:latin typeface="Microsoft YaHei" pitchFamily="34" charset="0"/>
-                <a:ea typeface="Microsoft YaHei" pitchFamily="34" charset="-122"/>
-                <a:cs typeface="Microsoft YaHei" pitchFamily="34" charset="-120"/>
+                <a:latin typeface="微软雅黑" panose="020B0503020204020204" pitchFamily="34" charset="-122"/>
+                <a:ea typeface="微软雅黑" panose="020B0503020204020204" pitchFamily="34" charset="-122"/>
+                <a:cs typeface="微软雅黑" panose="020B0503020204020204" pitchFamily="34" charset="-120"/>
               </a:rPr>
               <a:t>数字来自 docs/TEST-REPORT.md；演示命令 npm run demo → http://127.0.0.1:5173</a:t>
             </a:r>
@@ -11221,13 +10975,12 @@
             <a:avLst/>
           </a:prstGeom>
           <a:noFill/>
-          <a:ln/>
-        </p:spPr>
-        <p:txBody>
-          <a:bodyPr wrap="square" lIns="0" tIns="0" rIns="0" bIns="0" rtlCol="0" anchor="ctr"/>
-          <a:lstStyle/>
-          <a:p>
-            <a:pPr indent="0" marL="0">
+        </p:spPr>
+        <p:txBody>
+          <a:bodyPr wrap="square" lIns="0" tIns="0" rIns="0" bIns="0" rtlCol="0" anchor="ctr"/>
+          <a:lstStyle/>
+          <a:p>
+            <a:pPr marL="0" indent="0">
               <a:buNone/>
             </a:pPr>
             <a:r>
@@ -11235,9 +10988,9 @@
                 <a:solidFill>
                   <a:srgbClr val="7A7468"/>
                 </a:solidFill>
-                <a:latin typeface="Microsoft YaHei" pitchFamily="34" charset="0"/>
-                <a:ea typeface="Microsoft YaHei" pitchFamily="34" charset="-122"/>
-                <a:cs typeface="Microsoft YaHei" pitchFamily="34" charset="-120"/>
+                <a:latin typeface="微软雅黑" panose="020B0503020204020204" pitchFamily="34" charset="-122"/>
+                <a:ea typeface="微软雅黑" panose="020B0503020204020204" pitchFamily="34" charset="-122"/>
+                <a:cs typeface="微软雅黑" panose="020B0503020204020204" pitchFamily="34" charset="-120"/>
               </a:rPr>
               <a:t>OfficePilot · 2026-10-25</a:t>
             </a:r>
@@ -11260,13 +11013,12 @@
             <a:avLst/>
           </a:prstGeom>
           <a:noFill/>
-          <a:ln/>
-        </p:spPr>
-        <p:txBody>
-          <a:bodyPr wrap="square" lIns="0" tIns="0" rIns="0" bIns="0" rtlCol="0" anchor="ctr"/>
-          <a:lstStyle/>
-          <a:p>
-            <a:pPr algn="r" indent="0" marL="0">
+        </p:spPr>
+        <p:txBody>
+          <a:bodyPr wrap="square" lIns="0" tIns="0" rIns="0" bIns="0" rtlCol="0" anchor="ctr"/>
+          <a:lstStyle/>
+          <a:p>
+            <a:pPr marL="0" indent="0" algn="r">
               <a:buNone/>
             </a:pPr>
             <a:r>
@@ -11274,9 +11026,9 @@
                 <a:solidFill>
                   <a:srgbClr val="7A7468"/>
                 </a:solidFill>
-                <a:latin typeface="Georgia" pitchFamily="34" charset="0"/>
-                <a:ea typeface="Georgia" pitchFamily="34" charset="-122"/>
-                <a:cs typeface="Georgia" pitchFamily="34" charset="-120"/>
+                <a:latin typeface="Georgia" panose="02040502050405020303" pitchFamily="34" charset="0"/>
+                <a:ea typeface="Georgia" panose="02040502050405020303" pitchFamily="34" charset="-122"/>
+                <a:cs typeface="Georgia" panose="02040502050405020303" pitchFamily="34" charset="-120"/>
               </a:rPr>
               <a:t>07</a:t>
             </a:r>
@@ -11294,12 +11046,13 @@
 
 <file path=ppt/slides/slide8.xml><?xml version="1.0" encoding="utf-8"?>
 <p:sld xmlns:a="http://schemas.openxmlformats.org/drawingml/2006/main" xmlns:r="http://schemas.openxmlformats.org/officeDocument/2006/relationships" xmlns:p="http://schemas.openxmlformats.org/presentationml/2006/main">
-  <p:cSld name="Slide 8">
+  <p:cSld>
     <p:bg>
       <p:bgPr>
         <a:solidFill>
           <a:srgbClr val="F4F1EA"/>
         </a:solidFill>
+        <a:effectLst/>
       </p:bgPr>
     </p:bg>
     <p:spTree>
@@ -11331,23 +11084,22 @@
             <a:avLst/>
           </a:prstGeom>
           <a:noFill/>
-          <a:ln/>
-        </p:spPr>
-        <p:txBody>
-          <a:bodyPr wrap="square" lIns="0" tIns="0" rIns="0" bIns="0" rtlCol="0" anchor="ctr"/>
-          <a:lstStyle/>
-          <a:p>
-            <a:pPr indent="0" marL="0">
-              <a:buNone/>
-            </a:pPr>
-            <a:r>
-              <a:rPr lang="en-US" sz="900" b="1" spc="120" kern="0" dirty="0">
+        </p:spPr>
+        <p:txBody>
+          <a:bodyPr wrap="square" lIns="0" tIns="0" rIns="0" bIns="0" rtlCol="0" anchor="ctr"/>
+          <a:lstStyle/>
+          <a:p>
+            <a:pPr marL="0" indent="0">
+              <a:buNone/>
+            </a:pPr>
+            <a:r>
+              <a:rPr lang="en-US" sz="900" b="1" kern="0" spc="120" dirty="0">
                 <a:solidFill>
                   <a:srgbClr val="B8421D"/>
                 </a:solidFill>
-                <a:latin typeface="Microsoft YaHei" pitchFamily="34" charset="0"/>
-                <a:ea typeface="Microsoft YaHei" pitchFamily="34" charset="-122"/>
-                <a:cs typeface="Microsoft YaHei" pitchFamily="34" charset="-120"/>
+                <a:latin typeface="微软雅黑" panose="020B0503020204020204" pitchFamily="34" charset="-122"/>
+                <a:ea typeface="微软雅黑" panose="020B0503020204020204" pitchFamily="34" charset="-122"/>
+                <a:cs typeface="微软雅黑" panose="020B0503020204020204" pitchFamily="34" charset="-120"/>
               </a:rPr>
               <a:t>07 / DELIVERY</a:t>
             </a:r>
@@ -11370,13 +11122,12 @@
             <a:avLst/>
           </a:prstGeom>
           <a:noFill/>
-          <a:ln/>
-        </p:spPr>
-        <p:txBody>
-          <a:bodyPr wrap="square" lIns="0" tIns="0" rIns="0" bIns="0" rtlCol="0" anchor="ctr"/>
-          <a:lstStyle/>
-          <a:p>
-            <a:pPr indent="0" marL="0">
+        </p:spPr>
+        <p:txBody>
+          <a:bodyPr wrap="square" lIns="0" tIns="0" rIns="0" bIns="0" rtlCol="0" anchor="ctr"/>
+          <a:lstStyle/>
+          <a:p>
+            <a:pPr marL="0" indent="0">
               <a:buNone/>
             </a:pPr>
             <a:r>
@@ -11384,9 +11135,9 @@
                 <a:solidFill>
                   <a:srgbClr val="1B1A17"/>
                 </a:solidFill>
-                <a:latin typeface="Microsoft YaHei" pitchFamily="34" charset="0"/>
-                <a:ea typeface="Microsoft YaHei" pitchFamily="34" charset="-122"/>
-                <a:cs typeface="Microsoft YaHei" pitchFamily="34" charset="-120"/>
+                <a:latin typeface="微软雅黑" panose="020B0503020204020204" pitchFamily="34" charset="-122"/>
+                <a:ea typeface="微软雅黑" panose="020B0503020204020204" pitchFamily="34" charset="-122"/>
+                <a:cs typeface="微软雅黑" panose="020B0503020204020204" pitchFamily="34" charset="-120"/>
               </a:rPr>
               <a:t>交付清单与边界</a:t>
             </a:r>
@@ -11434,13 +11185,12 @@
             <a:avLst/>
           </a:prstGeom>
           <a:noFill/>
-          <a:ln/>
-        </p:spPr>
-        <p:txBody>
-          <a:bodyPr wrap="square" lIns="0" tIns="0" rIns="0" bIns="0" rtlCol="0" anchor="ctr"/>
-          <a:lstStyle/>
-          <a:p>
-            <a:pPr indent="0" marL="0">
+        </p:spPr>
+        <p:txBody>
+          <a:bodyPr wrap="square" lIns="0" tIns="0" rIns="0" bIns="0" rtlCol="0" anchor="ctr"/>
+          <a:lstStyle/>
+          <a:p>
+            <a:pPr marL="0" indent="0">
               <a:buNone/>
             </a:pPr>
             <a:r>
@@ -11448,9 +11198,9 @@
                 <a:solidFill>
                   <a:srgbClr val="B8421D"/>
                 </a:solidFill>
-                <a:latin typeface="Microsoft YaHei" pitchFamily="34" charset="0"/>
-                <a:ea typeface="Microsoft YaHei" pitchFamily="34" charset="-122"/>
-                <a:cs typeface="Microsoft YaHei" pitchFamily="34" charset="-120"/>
+                <a:latin typeface="微软雅黑" panose="020B0503020204020204" pitchFamily="34" charset="-122"/>
+                <a:ea typeface="微软雅黑" panose="020B0503020204020204" pitchFamily="34" charset="-122"/>
+                <a:cs typeface="微软雅黑" panose="020B0503020204020204" pitchFamily="34" charset="-120"/>
               </a:rPr>
               <a:t>已交付</a:t>
             </a:r>
@@ -11473,13 +11223,12 @@
             <a:avLst/>
           </a:prstGeom>
           <a:noFill/>
-          <a:ln/>
-        </p:spPr>
-        <p:txBody>
-          <a:bodyPr wrap="square" lIns="0" tIns="0" rIns="0" bIns="0" rtlCol="0" anchor="ctr"/>
-          <a:lstStyle/>
-          <a:p>
-            <a:pPr indent="0" marL="0">
+        </p:spPr>
+        <p:txBody>
+          <a:bodyPr wrap="square" lIns="0" tIns="0" rIns="0" bIns="0" rtlCol="0" anchor="ctr"/>
+          <a:lstStyle/>
+          <a:p>
+            <a:pPr marL="0" indent="0">
               <a:buNone/>
             </a:pPr>
             <a:r>
@@ -11487,9 +11236,9 @@
                 <a:solidFill>
                   <a:srgbClr val="B8421D"/>
                 </a:solidFill>
-                <a:latin typeface="Microsoft YaHei" pitchFamily="34" charset="0"/>
-                <a:ea typeface="Microsoft YaHei" pitchFamily="34" charset="-122"/>
-                <a:cs typeface="Microsoft YaHei" pitchFamily="34" charset="-120"/>
+                <a:latin typeface="微软雅黑" panose="020B0503020204020204" pitchFamily="34" charset="-122"/>
+                <a:ea typeface="微软雅黑" panose="020B0503020204020204" pitchFamily="34" charset="-122"/>
+                <a:cs typeface="微软雅黑" panose="020B0503020204020204" pitchFamily="34" charset="-120"/>
               </a:rPr>
               <a:t>·</a:t>
             </a:r>
@@ -11512,13 +11261,12 @@
             <a:avLst/>
           </a:prstGeom>
           <a:noFill/>
-          <a:ln/>
-        </p:spPr>
-        <p:txBody>
-          <a:bodyPr wrap="square" lIns="0" tIns="0" rIns="0" bIns="0" rtlCol="0" anchor="ctr"/>
-          <a:lstStyle/>
-          <a:p>
-            <a:pPr indent="0" marL="0">
+        </p:spPr>
+        <p:txBody>
+          <a:bodyPr wrap="square" lIns="0" tIns="0" rIns="0" bIns="0" rtlCol="0" anchor="ctr"/>
+          <a:lstStyle/>
+          <a:p>
+            <a:pPr marL="0" indent="0">
               <a:buNone/>
             </a:pPr>
             <a:r>
@@ -11526,9 +11274,9 @@
                 <a:solidFill>
                   <a:srgbClr val="1B1A17"/>
                 </a:solidFill>
-                <a:latin typeface="Microsoft YaHei" pitchFamily="34" charset="0"/>
-                <a:ea typeface="Microsoft YaHei" pitchFamily="34" charset="-122"/>
-                <a:cs typeface="Microsoft YaHei" pitchFamily="34" charset="-120"/>
+                <a:latin typeface="微软雅黑" panose="020B0503020204020204" pitchFamily="34" charset="-122"/>
+                <a:ea typeface="微软雅黑" panose="020B0503020204020204" pitchFamily="34" charset="-122"/>
+                <a:cs typeface="微软雅黑" panose="020B0503020204020204" pitchFamily="34" charset="-120"/>
               </a:rPr>
               <a:t>README · 产品说明与快速开始</a:t>
             </a:r>
@@ -11551,13 +11299,12 @@
             <a:avLst/>
           </a:prstGeom>
           <a:noFill/>
-          <a:ln/>
-        </p:spPr>
-        <p:txBody>
-          <a:bodyPr wrap="square" lIns="0" tIns="0" rIns="0" bIns="0" rtlCol="0" anchor="ctr"/>
-          <a:lstStyle/>
-          <a:p>
-            <a:pPr indent="0" marL="0">
+        </p:spPr>
+        <p:txBody>
+          <a:bodyPr wrap="square" lIns="0" tIns="0" rIns="0" bIns="0" rtlCol="0" anchor="ctr"/>
+          <a:lstStyle/>
+          <a:p>
+            <a:pPr marL="0" indent="0">
               <a:buNone/>
             </a:pPr>
             <a:r>
@@ -11565,9 +11312,9 @@
                 <a:solidFill>
                   <a:srgbClr val="B8421D"/>
                 </a:solidFill>
-                <a:latin typeface="Microsoft YaHei" pitchFamily="34" charset="0"/>
-                <a:ea typeface="Microsoft YaHei" pitchFamily="34" charset="-122"/>
-                <a:cs typeface="Microsoft YaHei" pitchFamily="34" charset="-120"/>
+                <a:latin typeface="微软雅黑" panose="020B0503020204020204" pitchFamily="34" charset="-122"/>
+                <a:ea typeface="微软雅黑" panose="020B0503020204020204" pitchFamily="34" charset="-122"/>
+                <a:cs typeface="微软雅黑" panose="020B0503020204020204" pitchFamily="34" charset="-120"/>
               </a:rPr>
               <a:t>·</a:t>
             </a:r>
@@ -11590,13 +11337,12 @@
             <a:avLst/>
           </a:prstGeom>
           <a:noFill/>
-          <a:ln/>
-        </p:spPr>
-        <p:txBody>
-          <a:bodyPr wrap="square" lIns="0" tIns="0" rIns="0" bIns="0" rtlCol="0" anchor="ctr"/>
-          <a:lstStyle/>
-          <a:p>
-            <a:pPr indent="0" marL="0">
+        </p:spPr>
+        <p:txBody>
+          <a:bodyPr wrap="square" lIns="0" tIns="0" rIns="0" bIns="0" rtlCol="0" anchor="ctr"/>
+          <a:lstStyle/>
+          <a:p>
+            <a:pPr marL="0" indent="0">
               <a:buNone/>
             </a:pPr>
             <a:r>
@@ -11604,9 +11350,9 @@
                 <a:solidFill>
                   <a:srgbClr val="1B1A17"/>
                 </a:solidFill>
-                <a:latin typeface="Microsoft YaHei" pitchFamily="34" charset="0"/>
-                <a:ea typeface="Microsoft YaHei" pitchFamily="34" charset="-122"/>
-                <a:cs typeface="Microsoft YaHei" pitchFamily="34" charset="-120"/>
+                <a:latin typeface="微软雅黑" panose="020B0503020204020204" pitchFamily="34" charset="-122"/>
+                <a:ea typeface="微软雅黑" panose="020B0503020204020204" pitchFamily="34" charset="-122"/>
+                <a:cs typeface="微软雅黑" panose="020B0503020204020204" pitchFamily="34" charset="-120"/>
               </a:rPr>
               <a:t>ARCHITECTURE · 组件 / 数据流 / 状态图</a:t>
             </a:r>
@@ -11629,13 +11375,12 @@
             <a:avLst/>
           </a:prstGeom>
           <a:noFill/>
-          <a:ln/>
-        </p:spPr>
-        <p:txBody>
-          <a:bodyPr wrap="square" lIns="0" tIns="0" rIns="0" bIns="0" rtlCol="0" anchor="ctr"/>
-          <a:lstStyle/>
-          <a:p>
-            <a:pPr indent="0" marL="0">
+        </p:spPr>
+        <p:txBody>
+          <a:bodyPr wrap="square" lIns="0" tIns="0" rIns="0" bIns="0" rtlCol="0" anchor="ctr"/>
+          <a:lstStyle/>
+          <a:p>
+            <a:pPr marL="0" indent="0">
               <a:buNone/>
             </a:pPr>
             <a:r>
@@ -11643,9 +11388,9 @@
                 <a:solidFill>
                   <a:srgbClr val="B8421D"/>
                 </a:solidFill>
-                <a:latin typeface="Microsoft YaHei" pitchFamily="34" charset="0"/>
-                <a:ea typeface="Microsoft YaHei" pitchFamily="34" charset="-122"/>
-                <a:cs typeface="Microsoft YaHei" pitchFamily="34" charset="-120"/>
+                <a:latin typeface="微软雅黑" panose="020B0503020204020204" pitchFamily="34" charset="-122"/>
+                <a:ea typeface="微软雅黑" panose="020B0503020204020204" pitchFamily="34" charset="-122"/>
+                <a:cs typeface="微软雅黑" panose="020B0503020204020204" pitchFamily="34" charset="-120"/>
               </a:rPr>
               <a:t>·</a:t>
             </a:r>
@@ -11668,13 +11413,12 @@
             <a:avLst/>
           </a:prstGeom>
           <a:noFill/>
-          <a:ln/>
-        </p:spPr>
-        <p:txBody>
-          <a:bodyPr wrap="square" lIns="0" tIns="0" rIns="0" bIns="0" rtlCol="0" anchor="ctr"/>
-          <a:lstStyle/>
-          <a:p>
-            <a:pPr indent="0" marL="0">
+        </p:spPr>
+        <p:txBody>
+          <a:bodyPr wrap="square" lIns="0" tIns="0" rIns="0" bIns="0" rtlCol="0" anchor="ctr"/>
+          <a:lstStyle/>
+          <a:p>
+            <a:pPr marL="0" indent="0">
               <a:buNone/>
             </a:pPr>
             <a:r>
@@ -11682,9 +11426,9 @@
                 <a:solidFill>
                   <a:srgbClr val="1B1A17"/>
                 </a:solidFill>
-                <a:latin typeface="Microsoft YaHei" pitchFamily="34" charset="0"/>
-                <a:ea typeface="Microsoft YaHei" pitchFamily="34" charset="-122"/>
-                <a:cs typeface="Microsoft YaHei" pitchFamily="34" charset="-120"/>
+                <a:latin typeface="微软雅黑" panose="020B0503020204020204" pitchFamily="34" charset="-122"/>
+                <a:ea typeface="微软雅黑" panose="020B0503020204020204" pitchFamily="34" charset="-122"/>
+                <a:cs typeface="微软雅黑" panose="020B0503020204020204" pitchFamily="34" charset="-120"/>
               </a:rPr>
               <a:t>API · 端点、SSE、错误码</a:t>
             </a:r>
@@ -11707,13 +11451,12 @@
             <a:avLst/>
           </a:prstGeom>
           <a:noFill/>
-          <a:ln/>
-        </p:spPr>
-        <p:txBody>
-          <a:bodyPr wrap="square" lIns="0" tIns="0" rIns="0" bIns="0" rtlCol="0" anchor="ctr"/>
-          <a:lstStyle/>
-          <a:p>
-            <a:pPr indent="0" marL="0">
+        </p:spPr>
+        <p:txBody>
+          <a:bodyPr wrap="square" lIns="0" tIns="0" rIns="0" bIns="0" rtlCol="0" anchor="ctr"/>
+          <a:lstStyle/>
+          <a:p>
+            <a:pPr marL="0" indent="0">
               <a:buNone/>
             </a:pPr>
             <a:r>
@@ -11721,9 +11464,9 @@
                 <a:solidFill>
                   <a:srgbClr val="B8421D"/>
                 </a:solidFill>
-                <a:latin typeface="Microsoft YaHei" pitchFamily="34" charset="0"/>
-                <a:ea typeface="Microsoft YaHei" pitchFamily="34" charset="-122"/>
-                <a:cs typeface="Microsoft YaHei" pitchFamily="34" charset="-120"/>
+                <a:latin typeface="微软雅黑" panose="020B0503020204020204" pitchFamily="34" charset="-122"/>
+                <a:ea typeface="微软雅黑" panose="020B0503020204020204" pitchFamily="34" charset="-122"/>
+                <a:cs typeface="微软雅黑" panose="020B0503020204020204" pitchFamily="34" charset="-120"/>
               </a:rPr>
               <a:t>·</a:t>
             </a:r>
@@ -11746,13 +11489,12 @@
             <a:avLst/>
           </a:prstGeom>
           <a:noFill/>
-          <a:ln/>
-        </p:spPr>
-        <p:txBody>
-          <a:bodyPr wrap="square" lIns="0" tIns="0" rIns="0" bIns="0" rtlCol="0" anchor="ctr"/>
-          <a:lstStyle/>
-          <a:p>
-            <a:pPr indent="0" marL="0">
+        </p:spPr>
+        <p:txBody>
+          <a:bodyPr wrap="square" lIns="0" tIns="0" rIns="0" bIns="0" rtlCol="0" anchor="ctr"/>
+          <a:lstStyle/>
+          <a:p>
+            <a:pPr marL="0" indent="0">
               <a:buNone/>
             </a:pPr>
             <a:r>
@@ -11760,9 +11502,9 @@
                 <a:solidFill>
                   <a:srgbClr val="1B1A17"/>
                 </a:solidFill>
-                <a:latin typeface="Microsoft YaHei" pitchFamily="34" charset="0"/>
-                <a:ea typeface="Microsoft YaHei" pitchFamily="34" charset="-122"/>
-                <a:cs typeface="Microsoft YaHei" pitchFamily="34" charset="-120"/>
+                <a:latin typeface="微软雅黑" panose="020B0503020204020204" pitchFamily="34" charset="-122"/>
+                <a:ea typeface="微软雅黑" panose="020B0503020204020204" pitchFamily="34" charset="-122"/>
+                <a:cs typeface="微软雅黑" panose="020B0503020204020204" pitchFamily="34" charset="-120"/>
               </a:rPr>
               <a:t>RAG-EVAL · 10 题评测明细</a:t>
             </a:r>
@@ -11785,13 +11527,12 @@
             <a:avLst/>
           </a:prstGeom>
           <a:noFill/>
-          <a:ln/>
-        </p:spPr>
-        <p:txBody>
-          <a:bodyPr wrap="square" lIns="0" tIns="0" rIns="0" bIns="0" rtlCol="0" anchor="ctr"/>
-          <a:lstStyle/>
-          <a:p>
-            <a:pPr indent="0" marL="0">
+        </p:spPr>
+        <p:txBody>
+          <a:bodyPr wrap="square" lIns="0" tIns="0" rIns="0" bIns="0" rtlCol="0" anchor="ctr"/>
+          <a:lstStyle/>
+          <a:p>
+            <a:pPr marL="0" indent="0">
               <a:buNone/>
             </a:pPr>
             <a:r>
@@ -11799,9 +11540,9 @@
                 <a:solidFill>
                   <a:srgbClr val="B8421D"/>
                 </a:solidFill>
-                <a:latin typeface="Microsoft YaHei" pitchFamily="34" charset="0"/>
-                <a:ea typeface="Microsoft YaHei" pitchFamily="34" charset="-122"/>
-                <a:cs typeface="Microsoft YaHei" pitchFamily="34" charset="-120"/>
+                <a:latin typeface="微软雅黑" panose="020B0503020204020204" pitchFamily="34" charset="-122"/>
+                <a:ea typeface="微软雅黑" panose="020B0503020204020204" pitchFamily="34" charset="-122"/>
+                <a:cs typeface="微软雅黑" panose="020B0503020204020204" pitchFamily="34" charset="-120"/>
               </a:rPr>
               <a:t>·</a:t>
             </a:r>
@@ -11824,13 +11565,12 @@
             <a:avLst/>
           </a:prstGeom>
           <a:noFill/>
-          <a:ln/>
-        </p:spPr>
-        <p:txBody>
-          <a:bodyPr wrap="square" lIns="0" tIns="0" rIns="0" bIns="0" rtlCol="0" anchor="ctr"/>
-          <a:lstStyle/>
-          <a:p>
-            <a:pPr indent="0" marL="0">
+        </p:spPr>
+        <p:txBody>
+          <a:bodyPr wrap="square" lIns="0" tIns="0" rIns="0" bIns="0" rtlCol="0" anchor="ctr"/>
+          <a:lstStyle/>
+          <a:p>
+            <a:pPr marL="0" indent="0">
               <a:buNone/>
             </a:pPr>
             <a:r>
@@ -11838,9 +11578,9 @@
                 <a:solidFill>
                   <a:srgbClr val="1B1A17"/>
                 </a:solidFill>
-                <a:latin typeface="Microsoft YaHei" pitchFamily="34" charset="0"/>
-                <a:ea typeface="Microsoft YaHei" pitchFamily="34" charset="-122"/>
-                <a:cs typeface="Microsoft YaHei" pitchFamily="34" charset="-120"/>
+                <a:latin typeface="微软雅黑" panose="020B0503020204020204" pitchFamily="34" charset="-122"/>
+                <a:ea typeface="微软雅黑" panose="020B0503020204020204" pitchFamily="34" charset="-122"/>
+                <a:cs typeface="微软雅黑" panose="020B0503020204020204" pitchFamily="34" charset="-120"/>
               </a:rPr>
               <a:t>TEST-REPORT · 162 测试 / E2E / 评测</a:t>
             </a:r>
@@ -11863,13 +11603,12 @@
             <a:avLst/>
           </a:prstGeom>
           <a:noFill/>
-          <a:ln/>
-        </p:spPr>
-        <p:txBody>
-          <a:bodyPr wrap="square" lIns="0" tIns="0" rIns="0" bIns="0" rtlCol="0" anchor="ctr"/>
-          <a:lstStyle/>
-          <a:p>
-            <a:pPr indent="0" marL="0">
+        </p:spPr>
+        <p:txBody>
+          <a:bodyPr wrap="square" lIns="0" tIns="0" rIns="0" bIns="0" rtlCol="0" anchor="ctr"/>
+          <a:lstStyle/>
+          <a:p>
+            <a:pPr marL="0" indent="0">
               <a:buNone/>
             </a:pPr>
             <a:r>
@@ -11877,9 +11616,9 @@
                 <a:solidFill>
                   <a:srgbClr val="B8421D"/>
                 </a:solidFill>
-                <a:latin typeface="Microsoft YaHei" pitchFamily="34" charset="0"/>
-                <a:ea typeface="Microsoft YaHei" pitchFamily="34" charset="-122"/>
-                <a:cs typeface="Microsoft YaHei" pitchFamily="34" charset="-120"/>
+                <a:latin typeface="微软雅黑" panose="020B0503020204020204" pitchFamily="34" charset="-122"/>
+                <a:ea typeface="微软雅黑" panose="020B0503020204020204" pitchFamily="34" charset="-122"/>
+                <a:cs typeface="微软雅黑" panose="020B0503020204020204" pitchFamily="34" charset="-120"/>
               </a:rPr>
               <a:t>·</a:t>
             </a:r>
@@ -11902,13 +11641,12 @@
             <a:avLst/>
           </a:prstGeom>
           <a:noFill/>
-          <a:ln/>
-        </p:spPr>
-        <p:txBody>
-          <a:bodyPr wrap="square" lIns="0" tIns="0" rIns="0" bIns="0" rtlCol="0" anchor="ctr"/>
-          <a:lstStyle/>
-          <a:p>
-            <a:pPr indent="0" marL="0">
+        </p:spPr>
+        <p:txBody>
+          <a:bodyPr wrap="square" lIns="0" tIns="0" rIns="0" bIns="0" rtlCol="0" anchor="ctr"/>
+          <a:lstStyle/>
+          <a:p>
+            <a:pPr marL="0" indent="0">
               <a:buNone/>
             </a:pPr>
             <a:r>
@@ -11916,9 +11654,9 @@
                 <a:solidFill>
                   <a:srgbClr val="1B1A17"/>
                 </a:solidFill>
-                <a:latin typeface="Microsoft YaHei" pitchFamily="34" charset="0"/>
-                <a:ea typeface="Microsoft YaHei" pitchFamily="34" charset="-122"/>
-                <a:cs typeface="Microsoft YaHei" pitchFamily="34" charset="-120"/>
+                <a:latin typeface="微软雅黑" panose="020B0503020204020204" pitchFamily="34" charset="-122"/>
+                <a:ea typeface="微软雅黑" panose="020B0503020204020204" pitchFamily="34" charset="-122"/>
+                <a:cs typeface="微软雅黑" panose="020B0503020204020204" pitchFamily="34" charset="-120"/>
               </a:rPr>
               <a:t>ACCEPTANCE · 12 项验收状态</a:t>
             </a:r>
@@ -11941,13 +11679,12 @@
             <a:avLst/>
           </a:prstGeom>
           <a:noFill/>
-          <a:ln/>
-        </p:spPr>
-        <p:txBody>
-          <a:bodyPr wrap="square" lIns="0" tIns="0" rIns="0" bIns="0" rtlCol="0" anchor="ctr"/>
-          <a:lstStyle/>
-          <a:p>
-            <a:pPr indent="0" marL="0">
+        </p:spPr>
+        <p:txBody>
+          <a:bodyPr wrap="square" lIns="0" tIns="0" rIns="0" bIns="0" rtlCol="0" anchor="ctr"/>
+          <a:lstStyle/>
+          <a:p>
+            <a:pPr marL="0" indent="0">
               <a:buNone/>
             </a:pPr>
             <a:r>
@@ -11955,9 +11692,9 @@
                 <a:solidFill>
                   <a:srgbClr val="B8421D"/>
                 </a:solidFill>
-                <a:latin typeface="Microsoft YaHei" pitchFamily="34" charset="0"/>
-                <a:ea typeface="Microsoft YaHei" pitchFamily="34" charset="-122"/>
-                <a:cs typeface="Microsoft YaHei" pitchFamily="34" charset="-120"/>
+                <a:latin typeface="微软雅黑" panose="020B0503020204020204" pitchFamily="34" charset="-122"/>
+                <a:ea typeface="微软雅黑" panose="020B0503020204020204" pitchFamily="34" charset="-122"/>
+                <a:cs typeface="微软雅黑" panose="020B0503020204020204" pitchFamily="34" charset="-120"/>
               </a:rPr>
               <a:t>·</a:t>
             </a:r>
@@ -11980,13 +11717,12 @@
             <a:avLst/>
           </a:prstGeom>
           <a:noFill/>
-          <a:ln/>
-        </p:spPr>
-        <p:txBody>
-          <a:bodyPr wrap="square" lIns="0" tIns="0" rIns="0" bIns="0" rtlCol="0" anchor="ctr"/>
-          <a:lstStyle/>
-          <a:p>
-            <a:pPr indent="0" marL="0">
+        </p:spPr>
+        <p:txBody>
+          <a:bodyPr wrap="square" lIns="0" tIns="0" rIns="0" bIns="0" rtlCol="0" anchor="ctr"/>
+          <a:lstStyle/>
+          <a:p>
+            <a:pPr marL="0" indent="0">
               <a:buNone/>
             </a:pPr>
             <a:r>
@@ -11994,9 +11730,9 @@
                 <a:solidFill>
                   <a:srgbClr val="1B1A17"/>
                 </a:solidFill>
-                <a:latin typeface="Microsoft YaHei" pitchFamily="34" charset="0"/>
-                <a:ea typeface="Microsoft YaHei" pitchFamily="34" charset="-122"/>
-                <a:cs typeface="Microsoft YaHei" pitchFamily="34" charset="-120"/>
+                <a:latin typeface="微软雅黑" panose="020B0503020204020204" pitchFamily="34" charset="-122"/>
+                <a:ea typeface="微软雅黑" panose="020B0503020204020204" pitchFamily="34" charset="-122"/>
+                <a:cs typeface="微软雅黑" panose="020B0503020204020204" pitchFamily="34" charset="-120"/>
               </a:rPr>
               <a:t>AI-CODING-LOG · 82 个提交与缺陷记录</a:t>
             </a:r>
@@ -12019,13 +11755,12 @@
             <a:avLst/>
           </a:prstGeom>
           <a:noFill/>
-          <a:ln/>
-        </p:spPr>
-        <p:txBody>
-          <a:bodyPr wrap="square" lIns="0" tIns="0" rIns="0" bIns="0" rtlCol="0" anchor="ctr"/>
-          <a:lstStyle/>
-          <a:p>
-            <a:pPr indent="0" marL="0">
+        </p:spPr>
+        <p:txBody>
+          <a:bodyPr wrap="square" lIns="0" tIns="0" rIns="0" bIns="0" rtlCol="0" anchor="ctr"/>
+          <a:lstStyle/>
+          <a:p>
+            <a:pPr marL="0" indent="0">
               <a:buNone/>
             </a:pPr>
             <a:r>
@@ -12033,9 +11768,9 @@
                 <a:solidFill>
                   <a:srgbClr val="B8421D"/>
                 </a:solidFill>
-                <a:latin typeface="Microsoft YaHei" pitchFamily="34" charset="0"/>
-                <a:ea typeface="Microsoft YaHei" pitchFamily="34" charset="-122"/>
-                <a:cs typeface="Microsoft YaHei" pitchFamily="34" charset="-120"/>
+                <a:latin typeface="微软雅黑" panose="020B0503020204020204" pitchFamily="34" charset="-122"/>
+                <a:ea typeface="微软雅黑" panose="020B0503020204020204" pitchFamily="34" charset="-122"/>
+                <a:cs typeface="微软雅黑" panose="020B0503020204020204" pitchFamily="34" charset="-120"/>
               </a:rPr>
               <a:t>·</a:t>
             </a:r>
@@ -12058,13 +11793,12 @@
             <a:avLst/>
           </a:prstGeom>
           <a:noFill/>
-          <a:ln/>
-        </p:spPr>
-        <p:txBody>
-          <a:bodyPr wrap="square" lIns="0" tIns="0" rIns="0" bIns="0" rtlCol="0" anchor="ctr"/>
-          <a:lstStyle/>
-          <a:p>
-            <a:pPr indent="0" marL="0">
+        </p:spPr>
+        <p:txBody>
+          <a:bodyPr wrap="square" lIns="0" tIns="0" rIns="0" bIns="0" rtlCol="0" anchor="ctr"/>
+          <a:lstStyle/>
+          <a:p>
+            <a:pPr marL="0" indent="0">
               <a:buNone/>
             </a:pPr>
             <a:r>
@@ -12072,9 +11806,9 @@
                 <a:solidFill>
                   <a:srgbClr val="1B1A17"/>
                 </a:solidFill>
-                <a:latin typeface="Microsoft YaHei" pitchFamily="34" charset="0"/>
-                <a:ea typeface="Microsoft YaHei" pitchFamily="34" charset="-122"/>
-                <a:cs typeface="Microsoft YaHei" pitchFamily="34" charset="-120"/>
+                <a:latin typeface="微软雅黑" panose="020B0503020204020204" pitchFamily="34" charset="-122"/>
+                <a:ea typeface="微软雅黑" panose="020B0503020204020204" pitchFamily="34" charset="-122"/>
+                <a:cs typeface="微软雅黑" panose="020B0503020204020204" pitchFamily="34" charset="-120"/>
               </a:rPr>
               <a:t>DEMO-SCRIPT · 6 分钟话术与兜底</a:t>
             </a:r>
@@ -12097,13 +11831,12 @@
             <a:avLst/>
           </a:prstGeom>
           <a:noFill/>
-          <a:ln/>
-        </p:spPr>
-        <p:txBody>
-          <a:bodyPr wrap="square" lIns="0" tIns="0" rIns="0" bIns="0" rtlCol="0" anchor="ctr"/>
-          <a:lstStyle/>
-          <a:p>
-            <a:pPr indent="0" marL="0">
+        </p:spPr>
+        <p:txBody>
+          <a:bodyPr wrap="square" lIns="0" tIns="0" rIns="0" bIns="0" rtlCol="0" anchor="ctr"/>
+          <a:lstStyle/>
+          <a:p>
+            <a:pPr marL="0" indent="0">
               <a:buNone/>
             </a:pPr>
             <a:r>
@@ -12111,9 +11844,9 @@
                 <a:solidFill>
                   <a:srgbClr val="B8421D"/>
                 </a:solidFill>
-                <a:latin typeface="Microsoft YaHei" pitchFamily="34" charset="0"/>
-                <a:ea typeface="Microsoft YaHei" pitchFamily="34" charset="-122"/>
-                <a:cs typeface="Microsoft YaHei" pitchFamily="34" charset="-120"/>
+                <a:latin typeface="微软雅黑" panose="020B0503020204020204" pitchFamily="34" charset="-122"/>
+                <a:ea typeface="微软雅黑" panose="020B0503020204020204" pitchFamily="34" charset="-122"/>
+                <a:cs typeface="微软雅黑" panose="020B0503020204020204" pitchFamily="34" charset="-120"/>
               </a:rPr>
               <a:t>·</a:t>
             </a:r>
@@ -12136,13 +11869,12 @@
             <a:avLst/>
           </a:prstGeom>
           <a:noFill/>
-          <a:ln/>
-        </p:spPr>
-        <p:txBody>
-          <a:bodyPr wrap="square" lIns="0" tIns="0" rIns="0" bIns="0" rtlCol="0" anchor="ctr"/>
-          <a:lstStyle/>
-          <a:p>
-            <a:pPr indent="0" marL="0">
+        </p:spPr>
+        <p:txBody>
+          <a:bodyPr wrap="square" lIns="0" tIns="0" rIns="0" bIns="0" rtlCol="0" anchor="ctr"/>
+          <a:lstStyle/>
+          <a:p>
+            <a:pPr marL="0" indent="0">
               <a:buNone/>
             </a:pPr>
             <a:r>
@@ -12150,9 +11882,9 @@
                 <a:solidFill>
                   <a:srgbClr val="1B1A17"/>
                 </a:solidFill>
-                <a:latin typeface="Microsoft YaHei" pitchFamily="34" charset="0"/>
-                <a:ea typeface="Microsoft YaHei" pitchFamily="34" charset="-122"/>
-                <a:cs typeface="Microsoft YaHei" pitchFamily="34" charset="-120"/>
+                <a:latin typeface="微软雅黑" panose="020B0503020204020204" pitchFamily="34" charset="-122"/>
+                <a:ea typeface="微软雅黑" panose="020B0503020204020204" pitchFamily="34" charset="-122"/>
+                <a:cs typeface="微软雅黑" panose="020B0503020204020204" pitchFamily="34" charset="-120"/>
               </a:rPr>
               <a:t>Dockerfile / .dockerignore / DEPLOY</a:t>
             </a:r>
@@ -12175,13 +11907,12 @@
             <a:avLst/>
           </a:prstGeom>
           <a:noFill/>
-          <a:ln/>
-        </p:spPr>
-        <p:txBody>
-          <a:bodyPr wrap="square" lIns="0" tIns="0" rIns="0" bIns="0" rtlCol="0" anchor="ctr"/>
-          <a:lstStyle/>
-          <a:p>
-            <a:pPr indent="0" marL="0">
+        </p:spPr>
+        <p:txBody>
+          <a:bodyPr wrap="square" lIns="0" tIns="0" rIns="0" bIns="0" rtlCol="0" anchor="ctr"/>
+          <a:lstStyle/>
+          <a:p>
+            <a:pPr marL="0" indent="0">
               <a:buNone/>
             </a:pPr>
             <a:r>
@@ -12189,9 +11920,9 @@
                 <a:solidFill>
                   <a:srgbClr val="B8421D"/>
                 </a:solidFill>
-                <a:latin typeface="Microsoft YaHei" pitchFamily="34" charset="0"/>
-                <a:ea typeface="Microsoft YaHei" pitchFamily="34" charset="-122"/>
-                <a:cs typeface="Microsoft YaHei" pitchFamily="34" charset="-120"/>
+                <a:latin typeface="微软雅黑" panose="020B0503020204020204" pitchFamily="34" charset="-122"/>
+                <a:ea typeface="微软雅黑" panose="020B0503020204020204" pitchFamily="34" charset="-122"/>
+                <a:cs typeface="微软雅黑" panose="020B0503020204020204" pitchFamily="34" charset="-120"/>
               </a:rPr>
               <a:t>·</a:t>
             </a:r>
@@ -12214,13 +11945,12 @@
             <a:avLst/>
           </a:prstGeom>
           <a:noFill/>
-          <a:ln/>
-        </p:spPr>
-        <p:txBody>
-          <a:bodyPr wrap="square" lIns="0" tIns="0" rIns="0" bIns="0" rtlCol="0" anchor="ctr"/>
-          <a:lstStyle/>
-          <a:p>
-            <a:pPr indent="0" marL="0">
+        </p:spPr>
+        <p:txBody>
+          <a:bodyPr wrap="square" lIns="0" tIns="0" rIns="0" bIns="0" rtlCol="0" anchor="ctr"/>
+          <a:lstStyle/>
+          <a:p>
+            <a:pPr marL="0" indent="0">
               <a:buNone/>
             </a:pPr>
             <a:r>
@@ -12228,9 +11958,9 @@
                 <a:solidFill>
                   <a:srgbClr val="1B1A17"/>
                 </a:solidFill>
-                <a:latin typeface="Microsoft YaHei" pitchFamily="34" charset="0"/>
-                <a:ea typeface="Microsoft YaHei" pitchFamily="34" charset="-122"/>
-                <a:cs typeface="Microsoft YaHei" pitchFamily="34" charset="-120"/>
+                <a:latin typeface="微软雅黑" panose="020B0503020204020204" pitchFamily="34" charset="-122"/>
+                <a:ea typeface="微软雅黑" panose="020B0503020204020204" pitchFamily="34" charset="-122"/>
+                <a:cs typeface="微软雅黑" panose="020B0503020204020204" pitchFamily="34" charset="-120"/>
               </a:rPr>
               <a:t>作品介绍 PPT（8 页）</a:t>
             </a:r>
@@ -12280,13 +12010,12 @@
             <a:avLst/>
           </a:prstGeom>
           <a:noFill/>
-          <a:ln/>
-        </p:spPr>
-        <p:txBody>
-          <a:bodyPr wrap="square" lIns="0" tIns="0" rIns="0" bIns="0" rtlCol="0" anchor="ctr"/>
-          <a:lstStyle/>
-          <a:p>
-            <a:pPr indent="0" marL="0">
+        </p:spPr>
+        <p:txBody>
+          <a:bodyPr wrap="square" lIns="0" tIns="0" rIns="0" bIns="0" rtlCol="0" anchor="ctr"/>
+          <a:lstStyle/>
+          <a:p>
+            <a:pPr marL="0" indent="0">
               <a:buNone/>
             </a:pPr>
             <a:r>
@@ -12294,9 +12023,9 @@
                 <a:solidFill>
                   <a:srgbClr val="96631B"/>
                 </a:solidFill>
-                <a:latin typeface="Microsoft YaHei" pitchFamily="34" charset="0"/>
-                <a:ea typeface="Microsoft YaHei" pitchFamily="34" charset="-122"/>
-                <a:cs typeface="Microsoft YaHei" pitchFamily="34" charset="-120"/>
+                <a:latin typeface="微软雅黑" panose="020B0503020204020204" pitchFamily="34" charset="-122"/>
+                <a:ea typeface="微软雅黑" panose="020B0503020204020204" pitchFamily="34" charset="-122"/>
+                <a:cs typeface="微软雅黑" panose="020B0503020204020204" pitchFamily="34" charset="-120"/>
               </a:rPr>
               <a:t>边界与未验证</a:t>
             </a:r>
@@ -12319,13 +12048,12 @@
             <a:avLst/>
           </a:prstGeom>
           <a:noFill/>
-          <a:ln/>
-        </p:spPr>
-        <p:txBody>
-          <a:bodyPr wrap="square" lIns="0" tIns="0" rIns="0" bIns="0" rtlCol="0" anchor="ctr"/>
-          <a:lstStyle/>
-          <a:p>
-            <a:pPr indent="0" marL="0">
+        </p:spPr>
+        <p:txBody>
+          <a:bodyPr wrap="square" lIns="0" tIns="0" rIns="0" bIns="0" rtlCol="0" anchor="ctr"/>
+          <a:lstStyle/>
+          <a:p>
+            <a:pPr marL="0" indent="0">
               <a:buNone/>
             </a:pPr>
             <a:r>
@@ -12333,9 +12061,9 @@
                 <a:solidFill>
                   <a:srgbClr val="96631B"/>
                 </a:solidFill>
-                <a:latin typeface="Microsoft YaHei" pitchFamily="34" charset="0"/>
-                <a:ea typeface="Microsoft YaHei" pitchFamily="34" charset="-122"/>
-                <a:cs typeface="Microsoft YaHei" pitchFamily="34" charset="-120"/>
+                <a:latin typeface="微软雅黑" panose="020B0503020204020204" pitchFamily="34" charset="-122"/>
+                <a:ea typeface="微软雅黑" panose="020B0503020204020204" pitchFamily="34" charset="-122"/>
+                <a:cs typeface="微软雅黑" panose="020B0503020204020204" pitchFamily="34" charset="-120"/>
               </a:rPr>
               <a:t>—</a:t>
             </a:r>
@@ -12358,13 +12086,12 @@
             <a:avLst/>
           </a:prstGeom>
           <a:noFill/>
-          <a:ln/>
-        </p:spPr>
-        <p:txBody>
-          <a:bodyPr wrap="square" lIns="0" tIns="0" rIns="0" bIns="0" rtlCol="0" anchor="ctr"/>
-          <a:lstStyle/>
-          <a:p>
-            <a:pPr indent="0" marL="0">
+        </p:spPr>
+        <p:txBody>
+          <a:bodyPr wrap="square" lIns="0" tIns="0" rIns="0" bIns="0" rtlCol="0" anchor="ctr"/>
+          <a:lstStyle/>
+          <a:p>
+            <a:pPr marL="0" indent="0">
               <a:buNone/>
             </a:pPr>
             <a:r>
@@ -12372,9 +12099,9 @@
                 <a:solidFill>
                   <a:srgbClr val="7A7468"/>
                 </a:solidFill>
-                <a:latin typeface="Microsoft YaHei" pitchFamily="34" charset="0"/>
-                <a:ea typeface="Microsoft YaHei" pitchFamily="34" charset="-122"/>
-                <a:cs typeface="Microsoft YaHei" pitchFamily="34" charset="-120"/>
+                <a:latin typeface="微软雅黑" panose="020B0503020204020204" pitchFamily="34" charset="-122"/>
+                <a:ea typeface="微软雅黑" panose="020B0503020204020204" pitchFamily="34" charset="-122"/>
+                <a:cs typeface="微软雅黑" panose="020B0503020204020204" pitchFamily="34" charset="-120"/>
               </a:rPr>
               <a:t>扫描件 PDF 不支持，需先 OCR</a:t>
             </a:r>
@@ -12397,13 +12124,12 @@
             <a:avLst/>
           </a:prstGeom>
           <a:noFill/>
-          <a:ln/>
-        </p:spPr>
-        <p:txBody>
-          <a:bodyPr wrap="square" lIns="0" tIns="0" rIns="0" bIns="0" rtlCol="0" anchor="ctr"/>
-          <a:lstStyle/>
-          <a:p>
-            <a:pPr indent="0" marL="0">
+        </p:spPr>
+        <p:txBody>
+          <a:bodyPr wrap="square" lIns="0" tIns="0" rIns="0" bIns="0" rtlCol="0" anchor="ctr"/>
+          <a:lstStyle/>
+          <a:p>
+            <a:pPr marL="0" indent="0">
               <a:buNone/>
             </a:pPr>
             <a:r>
@@ -12411,9 +12137,9 @@
                 <a:solidFill>
                   <a:srgbClr val="96631B"/>
                 </a:solidFill>
-                <a:latin typeface="Microsoft YaHei" pitchFamily="34" charset="0"/>
-                <a:ea typeface="Microsoft YaHei" pitchFamily="34" charset="-122"/>
-                <a:cs typeface="Microsoft YaHei" pitchFamily="34" charset="-120"/>
+                <a:latin typeface="微软雅黑" panose="020B0503020204020204" pitchFamily="34" charset="-122"/>
+                <a:ea typeface="微软雅黑" panose="020B0503020204020204" pitchFamily="34" charset="-122"/>
+                <a:cs typeface="微软雅黑" panose="020B0503020204020204" pitchFamily="34" charset="-120"/>
               </a:rPr>
               <a:t>—</a:t>
             </a:r>
@@ -12436,13 +12162,12 @@
             <a:avLst/>
           </a:prstGeom>
           <a:noFill/>
-          <a:ln/>
-        </p:spPr>
-        <p:txBody>
-          <a:bodyPr wrap="square" lIns="0" tIns="0" rIns="0" bIns="0" rtlCol="0" anchor="ctr"/>
-          <a:lstStyle/>
-          <a:p>
-            <a:pPr indent="0" marL="0">
+        </p:spPr>
+        <p:txBody>
+          <a:bodyPr wrap="square" lIns="0" tIns="0" rIns="0" bIns="0" rtlCol="0" anchor="ctr"/>
+          <a:lstStyle/>
+          <a:p>
+            <a:pPr marL="0" indent="0">
               <a:buNone/>
             </a:pPr>
             <a:r>
@@ -12450,9 +12175,9 @@
                 <a:solidFill>
                   <a:srgbClr val="7A7468"/>
                 </a:solidFill>
-                <a:latin typeface="Microsoft YaHei" pitchFamily="34" charset="0"/>
-                <a:ea typeface="Microsoft YaHei" pitchFamily="34" charset="-122"/>
-                <a:cs typeface="Microsoft YaHei" pitchFamily="34" charset="-120"/>
+                <a:latin typeface="微软雅黑" panose="020B0503020204020204" pitchFamily="34" charset="-122"/>
+                <a:ea typeface="微软雅黑" panose="020B0503020204020204" pitchFamily="34" charset="-122"/>
+                <a:cs typeface="微软雅黑" panose="020B0503020204020204" pitchFamily="34" charset="-120"/>
               </a:rPr>
               <a:t>无鉴权 / 单用户，默认只监听 127.0.0.1</a:t>
             </a:r>
@@ -12475,13 +12200,12 @@
             <a:avLst/>
           </a:prstGeom>
           <a:noFill/>
-          <a:ln/>
-        </p:spPr>
-        <p:txBody>
-          <a:bodyPr wrap="square" lIns="0" tIns="0" rIns="0" bIns="0" rtlCol="0" anchor="ctr"/>
-          <a:lstStyle/>
-          <a:p>
-            <a:pPr indent="0" marL="0">
+        </p:spPr>
+        <p:txBody>
+          <a:bodyPr wrap="square" lIns="0" tIns="0" rIns="0" bIns="0" rtlCol="0" anchor="ctr"/>
+          <a:lstStyle/>
+          <a:p>
+            <a:pPr marL="0" indent="0">
               <a:buNone/>
             </a:pPr>
             <a:r>
@@ -12489,9 +12213,9 @@
                 <a:solidFill>
                   <a:srgbClr val="96631B"/>
                 </a:solidFill>
-                <a:latin typeface="Microsoft YaHei" pitchFamily="34" charset="0"/>
-                <a:ea typeface="Microsoft YaHei" pitchFamily="34" charset="-122"/>
-                <a:cs typeface="Microsoft YaHei" pitchFamily="34" charset="-120"/>
+                <a:latin typeface="微软雅黑" panose="020B0503020204020204" pitchFamily="34" charset="-122"/>
+                <a:ea typeface="微软雅黑" panose="020B0503020204020204" pitchFamily="34" charset="-122"/>
+                <a:cs typeface="微软雅黑" panose="020B0503020204020204" pitchFamily="34" charset="-120"/>
               </a:rPr>
               <a:t>—</a:t>
             </a:r>
@@ -12514,13 +12238,12 @@
             <a:avLst/>
           </a:prstGeom>
           <a:noFill/>
-          <a:ln/>
-        </p:spPr>
-        <p:txBody>
-          <a:bodyPr wrap="square" lIns="0" tIns="0" rIns="0" bIns="0" rtlCol="0" anchor="ctr"/>
-          <a:lstStyle/>
-          <a:p>
-            <a:pPr indent="0" marL="0">
+        </p:spPr>
+        <p:txBody>
+          <a:bodyPr wrap="square" lIns="0" tIns="0" rIns="0" bIns="0" rtlCol="0" anchor="ctr"/>
+          <a:lstStyle/>
+          <a:p>
+            <a:pPr marL="0" indent="0">
               <a:buNone/>
             </a:pPr>
             <a:r>
@@ -12528,9 +12251,9 @@
                 <a:solidFill>
                   <a:srgbClr val="7A7468"/>
                 </a:solidFill>
-                <a:latin typeface="Microsoft YaHei" pitchFamily="34" charset="0"/>
-                <a:ea typeface="Microsoft YaHei" pitchFamily="34" charset="-122"/>
-                <a:cs typeface="Microsoft YaHei" pitchFamily="34" charset="-120"/>
+                <a:latin typeface="微软雅黑" panose="020B0503020204020204" pitchFamily="34" charset="-122"/>
+                <a:ea typeface="微软雅黑" panose="020B0503020204020204" pitchFamily="34" charset="-122"/>
+                <a:cs typeface="微软雅黑" panose="020B0503020204020204" pitchFamily="34" charset="-120"/>
               </a:rPr>
               <a:t>mock / demo provider 与真实模型质量不同</a:t>
             </a:r>
@@ -12553,13 +12276,12 @@
             <a:avLst/>
           </a:prstGeom>
           <a:noFill/>
-          <a:ln/>
-        </p:spPr>
-        <p:txBody>
-          <a:bodyPr wrap="square" lIns="0" tIns="0" rIns="0" bIns="0" rtlCol="0" anchor="ctr"/>
-          <a:lstStyle/>
-          <a:p>
-            <a:pPr indent="0" marL="0">
+        </p:spPr>
+        <p:txBody>
+          <a:bodyPr wrap="square" lIns="0" tIns="0" rIns="0" bIns="0" rtlCol="0" anchor="ctr"/>
+          <a:lstStyle/>
+          <a:p>
+            <a:pPr marL="0" indent="0">
               <a:buNone/>
             </a:pPr>
             <a:r>
@@ -12567,9 +12289,9 @@
                 <a:solidFill>
                   <a:srgbClr val="96631B"/>
                 </a:solidFill>
-                <a:latin typeface="Microsoft YaHei" pitchFamily="34" charset="0"/>
-                <a:ea typeface="Microsoft YaHei" pitchFamily="34" charset="-122"/>
-                <a:cs typeface="Microsoft YaHei" pitchFamily="34" charset="-120"/>
+                <a:latin typeface="微软雅黑" panose="020B0503020204020204" pitchFamily="34" charset="-122"/>
+                <a:ea typeface="微软雅黑" panose="020B0503020204020204" pitchFamily="34" charset="-122"/>
+                <a:cs typeface="微软雅黑" panose="020B0503020204020204" pitchFamily="34" charset="-120"/>
               </a:rPr>
               <a:t>—</a:t>
             </a:r>
@@ -12592,13 +12314,12 @@
             <a:avLst/>
           </a:prstGeom>
           <a:noFill/>
-          <a:ln/>
-        </p:spPr>
-        <p:txBody>
-          <a:bodyPr wrap="square" lIns="0" tIns="0" rIns="0" bIns="0" rtlCol="0" anchor="ctr"/>
-          <a:lstStyle/>
-          <a:p>
-            <a:pPr indent="0" marL="0">
+        </p:spPr>
+        <p:txBody>
+          <a:bodyPr wrap="square" lIns="0" tIns="0" rIns="0" bIns="0" rtlCol="0" anchor="ctr"/>
+          <a:lstStyle/>
+          <a:p>
+            <a:pPr marL="0" indent="0">
               <a:buNone/>
             </a:pPr>
             <a:r>
@@ -12606,9 +12327,9 @@
                 <a:solidFill>
                   <a:srgbClr val="7A7468"/>
                 </a:solidFill>
-                <a:latin typeface="Microsoft YaHei" pitchFamily="34" charset="0"/>
-                <a:ea typeface="Microsoft YaHei" pitchFamily="34" charset="-122"/>
-                <a:cs typeface="Microsoft YaHei" pitchFamily="34" charset="-120"/>
+                <a:latin typeface="微软雅黑" panose="020B0503020204020204" pitchFamily="34" charset="-122"/>
+                <a:ea typeface="微软雅黑" panose="020B0503020204020204" pitchFamily="34" charset="-122"/>
+                <a:cs typeface="微软雅黑" panose="020B0503020204020204" pitchFamily="34" charset="-120"/>
               </a:rPr>
               <a:t>演示阈值 0.1，真实默认 0.55</a:t>
             </a:r>
@@ -12631,13 +12352,12 @@
             <a:avLst/>
           </a:prstGeom>
           <a:noFill/>
-          <a:ln/>
-        </p:spPr>
-        <p:txBody>
-          <a:bodyPr wrap="square" lIns="0" tIns="0" rIns="0" bIns="0" rtlCol="0" anchor="ctr"/>
-          <a:lstStyle/>
-          <a:p>
-            <a:pPr indent="0" marL="0">
+        </p:spPr>
+        <p:txBody>
+          <a:bodyPr wrap="square" lIns="0" tIns="0" rIns="0" bIns="0" rtlCol="0" anchor="ctr"/>
+          <a:lstStyle/>
+          <a:p>
+            <a:pPr marL="0" indent="0">
               <a:buNone/>
             </a:pPr>
             <a:r>
@@ -12645,9 +12365,9 @@
                 <a:solidFill>
                   <a:srgbClr val="96631B"/>
                 </a:solidFill>
-                <a:latin typeface="Microsoft YaHei" pitchFamily="34" charset="0"/>
-                <a:ea typeface="Microsoft YaHei" pitchFamily="34" charset="-122"/>
-                <a:cs typeface="Microsoft YaHei" pitchFamily="34" charset="-120"/>
+                <a:latin typeface="微软雅黑" panose="020B0503020204020204" pitchFamily="34" charset="-122"/>
+                <a:ea typeface="微软雅黑" panose="020B0503020204020204" pitchFamily="34" charset="-122"/>
+                <a:cs typeface="微软雅黑" panose="020B0503020204020204" pitchFamily="34" charset="-120"/>
               </a:rPr>
               <a:t>—</a:t>
             </a:r>
@@ -12670,13 +12390,12 @@
             <a:avLst/>
           </a:prstGeom>
           <a:noFill/>
-          <a:ln/>
-        </p:spPr>
-        <p:txBody>
-          <a:bodyPr wrap="square" lIns="0" tIns="0" rIns="0" bIns="0" rtlCol="0" anchor="ctr"/>
-          <a:lstStyle/>
-          <a:p>
-            <a:pPr indent="0" marL="0">
+        </p:spPr>
+        <p:txBody>
+          <a:bodyPr wrap="square" lIns="0" tIns="0" rIns="0" bIns="0" rtlCol="0" anchor="ctr"/>
+          <a:lstStyle/>
+          <a:p>
+            <a:pPr marL="0" indent="0">
               <a:buNone/>
             </a:pPr>
             <a:r>
@@ -12684,9 +12403,9 @@
                 <a:solidFill>
                   <a:srgbClr val="7A7468"/>
                 </a:solidFill>
-                <a:latin typeface="Microsoft YaHei" pitchFamily="34" charset="0"/>
-                <a:ea typeface="Microsoft YaHei" pitchFamily="34" charset="-122"/>
-                <a:cs typeface="Microsoft YaHei" pitchFamily="34" charset="-120"/>
+                <a:latin typeface="微软雅黑" panose="020B0503020204020204" pitchFamily="34" charset="-122"/>
+                <a:ea typeface="微软雅黑" panose="020B0503020204020204" pitchFamily="34" charset="-122"/>
+                <a:cs typeface="微软雅黑" panose="020B0503020204020204" pitchFamily="34" charset="-120"/>
               </a:rPr>
               <a:t>Docker 本机未安装，未构建 / 未运行</a:t>
             </a:r>
@@ -12709,13 +12428,12 @@
             <a:avLst/>
           </a:prstGeom>
           <a:noFill/>
-          <a:ln/>
-        </p:spPr>
-        <p:txBody>
-          <a:bodyPr wrap="square" lIns="0" tIns="0" rIns="0" bIns="0" rtlCol="0" anchor="ctr"/>
-          <a:lstStyle/>
-          <a:p>
-            <a:pPr indent="0" marL="0">
+        </p:spPr>
+        <p:txBody>
+          <a:bodyPr wrap="square" lIns="0" tIns="0" rIns="0" bIns="0" rtlCol="0" anchor="ctr"/>
+          <a:lstStyle/>
+          <a:p>
+            <a:pPr marL="0" indent="0">
               <a:buNone/>
             </a:pPr>
             <a:r>
@@ -12723,9 +12441,9 @@
                 <a:solidFill>
                   <a:srgbClr val="96631B"/>
                 </a:solidFill>
-                <a:latin typeface="Microsoft YaHei" pitchFamily="34" charset="0"/>
-                <a:ea typeface="Microsoft YaHei" pitchFamily="34" charset="-122"/>
-                <a:cs typeface="Microsoft YaHei" pitchFamily="34" charset="-120"/>
+                <a:latin typeface="微软雅黑" panose="020B0503020204020204" pitchFamily="34" charset="-122"/>
+                <a:ea typeface="微软雅黑" panose="020B0503020204020204" pitchFamily="34" charset="-122"/>
+                <a:cs typeface="微软雅黑" panose="020B0503020204020204" pitchFamily="34" charset="-120"/>
               </a:rPr>
               <a:t>—</a:t>
             </a:r>
@@ -12748,13 +12466,12 @@
             <a:avLst/>
           </a:prstGeom>
           <a:noFill/>
-          <a:ln/>
-        </p:spPr>
-        <p:txBody>
-          <a:bodyPr wrap="square" lIns="0" tIns="0" rIns="0" bIns="0" rtlCol="0" anchor="ctr"/>
-          <a:lstStyle/>
-          <a:p>
-            <a:pPr indent="0" marL="0">
+        </p:spPr>
+        <p:txBody>
+          <a:bodyPr wrap="square" lIns="0" tIns="0" rIns="0" bIns="0" rtlCol="0" anchor="ctr"/>
+          <a:lstStyle/>
+          <a:p>
+            <a:pPr marL="0" indent="0">
               <a:buNone/>
             </a:pPr>
             <a:r>
@@ -12762,9 +12479,9 @@
                 <a:solidFill>
                   <a:srgbClr val="7A7468"/>
                 </a:solidFill>
-                <a:latin typeface="Microsoft YaHei" pitchFamily="34" charset="0"/>
-                <a:ea typeface="Microsoft YaHei" pitchFamily="34" charset="-122"/>
-                <a:cs typeface="Microsoft YaHei" pitchFamily="34" charset="-120"/>
+                <a:latin typeface="微软雅黑" panose="020B0503020204020204" pitchFamily="34" charset="-122"/>
+                <a:ea typeface="微软雅黑" panose="020B0503020204020204" pitchFamily="34" charset="-122"/>
+                <a:cs typeface="微软雅黑" panose="020B0503020204020204" pitchFamily="34" charset="-120"/>
               </a:rPr>
               <a:t>现场彩排：E2E 6/6 覆盖主流程；录屏未录制（可选）</a:t>
             </a:r>
@@ -12814,13 +12531,12 @@
             <a:avLst/>
           </a:prstGeom>
           <a:noFill/>
-          <a:ln/>
-        </p:spPr>
-        <p:txBody>
-          <a:bodyPr wrap="square" lIns="0" tIns="0" rIns="0" bIns="0" rtlCol="0" anchor="ctr"/>
-          <a:lstStyle/>
-          <a:p>
-            <a:pPr indent="0" marL="0">
+        </p:spPr>
+        <p:txBody>
+          <a:bodyPr wrap="square" lIns="0" tIns="0" rIns="0" bIns="0" rtlCol="0" anchor="ctr"/>
+          <a:lstStyle/>
+          <a:p>
+            <a:pPr marL="0" indent="0">
               <a:buNone/>
             </a:pPr>
             <a:r>
@@ -12828,9 +12544,9 @@
                 <a:solidFill>
                   <a:srgbClr val="F4F1EA"/>
                 </a:solidFill>
-                <a:latin typeface="Microsoft YaHei" pitchFamily="34" charset="0"/>
-                <a:ea typeface="Microsoft YaHei" pitchFamily="34" charset="-122"/>
-                <a:cs typeface="Microsoft YaHei" pitchFamily="34" charset="-120"/>
+                <a:latin typeface="微软雅黑" panose="020B0503020204020204" pitchFamily="34" charset="-122"/>
+                <a:ea typeface="微软雅黑" panose="020B0503020204020204" pitchFamily="34" charset="-122"/>
+                <a:cs typeface="微软雅黑" panose="020B0503020204020204" pitchFamily="34" charset="-120"/>
               </a:rPr>
               <a:t>AI 输出不是结论</a:t>
             </a:r>
@@ -12853,13 +12569,12 @@
             <a:avLst/>
           </a:prstGeom>
           <a:noFill/>
-          <a:ln/>
         </p:spPr>
         <p:txBody>
           <a:bodyPr wrap="square" lIns="0" tIns="0" rIns="0" bIns="0" rtlCol="0" anchor="t"/>
           <a:lstStyle/>
           <a:p>
-            <a:pPr indent="0" marL="0">
+            <a:pPr marL="0" indent="0">
               <a:buNone/>
             </a:pPr>
             <a:r>
@@ -12867,9 +12582,9 @@
                 <a:solidFill>
                   <a:srgbClr val="C9C2B4"/>
                 </a:solidFill>
-                <a:latin typeface="Microsoft YaHei" pitchFamily="34" charset="0"/>
-                <a:ea typeface="Microsoft YaHei" pitchFamily="34" charset="-122"/>
-                <a:cs typeface="Microsoft YaHei" pitchFamily="34" charset="-120"/>
+                <a:latin typeface="微软雅黑" panose="020B0503020204020204" pitchFamily="34" charset="-122"/>
+                <a:ea typeface="微软雅黑" panose="020B0503020204020204" pitchFamily="34" charset="-122"/>
+                <a:cs typeface="微软雅黑" panose="020B0503020204020204" pitchFamily="34" charset="-120"/>
               </a:rPr>
               <a:t>测试、typecheck、构建、E2E、评测、真实启动共同验收；缺陷被抓到并记录。</a:t>
             </a:r>
@@ -12892,13 +12607,12 @@
             <a:avLst/>
           </a:prstGeom>
           <a:noFill/>
-          <a:ln/>
-        </p:spPr>
-        <p:txBody>
-          <a:bodyPr wrap="square" lIns="0" tIns="0" rIns="0" bIns="0" rtlCol="0" anchor="ctr"/>
-          <a:lstStyle/>
-          <a:p>
-            <a:pPr indent="0" marL="0">
+        </p:spPr>
+        <p:txBody>
+          <a:bodyPr wrap="square" lIns="0" tIns="0" rIns="0" bIns="0" rtlCol="0" anchor="ctr"/>
+          <a:lstStyle/>
+          <a:p>
+            <a:pPr marL="0" indent="0">
               <a:buNone/>
             </a:pPr>
             <a:r>
@@ -12906,9 +12620,9 @@
                 <a:solidFill>
                   <a:srgbClr val="B8421D"/>
                 </a:solidFill>
-                <a:latin typeface="Microsoft YaHei" pitchFamily="34" charset="0"/>
-                <a:ea typeface="Microsoft YaHei" pitchFamily="34" charset="-122"/>
-                <a:cs typeface="Microsoft YaHei" pitchFamily="34" charset="-120"/>
+                <a:latin typeface="微软雅黑" panose="020B0503020204020204" pitchFamily="34" charset="-122"/>
+                <a:ea typeface="微软雅黑" panose="020B0503020204020204" pitchFamily="34" charset="-122"/>
+                <a:cs typeface="微软雅黑" panose="020B0503020204020204" pitchFamily="34" charset="-120"/>
               </a:rPr>
               <a:t>“让模型有依据地说；说错能发现；没依据就拒答。”</a:t>
             </a:r>
@@ -12931,13 +12645,12 @@
             <a:avLst/>
           </a:prstGeom>
           <a:noFill/>
-          <a:ln/>
-        </p:spPr>
-        <p:txBody>
-          <a:bodyPr wrap="square" lIns="0" tIns="0" rIns="0" bIns="0" rtlCol="0" anchor="ctr"/>
-          <a:lstStyle/>
-          <a:p>
-            <a:pPr indent="0" marL="0">
+        </p:spPr>
+        <p:txBody>
+          <a:bodyPr wrap="square" lIns="0" tIns="0" rIns="0" bIns="0" rtlCol="0" anchor="ctr"/>
+          <a:lstStyle/>
+          <a:p>
+            <a:pPr marL="0" indent="0">
               <a:buNone/>
             </a:pPr>
             <a:r>
@@ -12945,9 +12658,9 @@
                 <a:solidFill>
                   <a:srgbClr val="7A7468"/>
                 </a:solidFill>
-                <a:latin typeface="Microsoft YaHei" pitchFamily="34" charset="0"/>
-                <a:ea typeface="Microsoft YaHei" pitchFamily="34" charset="-122"/>
-                <a:cs typeface="Microsoft YaHei" pitchFamily="34" charset="-120"/>
+                <a:latin typeface="微软雅黑" panose="020B0503020204020204" pitchFamily="34" charset="-122"/>
+                <a:ea typeface="微软雅黑" panose="020B0503020204020204" pitchFamily="34" charset="-122"/>
+                <a:cs typeface="微软雅黑" panose="020B0503020204020204" pitchFamily="34" charset="-120"/>
               </a:rPr>
               <a:t>OfficePilot · 星海科技办公工作台 · 2026-10-25</a:t>
             </a:r>
@@ -12970,13 +12683,12 @@
             <a:avLst/>
           </a:prstGeom>
           <a:noFill/>
-          <a:ln/>
-        </p:spPr>
-        <p:txBody>
-          <a:bodyPr wrap="square" lIns="0" tIns="0" rIns="0" bIns="0" rtlCol="0" anchor="ctr"/>
-          <a:lstStyle/>
-          <a:p>
-            <a:pPr indent="0" marL="0">
+        </p:spPr>
+        <p:txBody>
+          <a:bodyPr wrap="square" lIns="0" tIns="0" rIns="0" bIns="0" rtlCol="0" anchor="ctr"/>
+          <a:lstStyle/>
+          <a:p>
+            <a:pPr marL="0" indent="0">
               <a:buNone/>
             </a:pPr>
             <a:endParaRPr lang="en-US" sz="800" dirty="0"/>
@@ -12998,13 +12710,12 @@
             <a:avLst/>
           </a:prstGeom>
           <a:noFill/>
-          <a:ln/>
-        </p:spPr>
-        <p:txBody>
-          <a:bodyPr wrap="square" lIns="0" tIns="0" rIns="0" bIns="0" rtlCol="0" anchor="ctr"/>
-          <a:lstStyle/>
-          <a:p>
-            <a:pPr algn="r" indent="0" marL="0">
+        </p:spPr>
+        <p:txBody>
+          <a:bodyPr wrap="square" lIns="0" tIns="0" rIns="0" bIns="0" rtlCol="0" anchor="ctr"/>
+          <a:lstStyle/>
+          <a:p>
+            <a:pPr marL="0" indent="0" algn="r">
               <a:buNone/>
             </a:pPr>
             <a:r>
@@ -13012,9 +12723,9 @@
                 <a:solidFill>
                   <a:srgbClr val="7A7468"/>
                 </a:solidFill>
-                <a:latin typeface="Georgia" pitchFamily="34" charset="0"/>
-                <a:ea typeface="Georgia" pitchFamily="34" charset="-122"/>
-                <a:cs typeface="Georgia" pitchFamily="34" charset="-120"/>
+                <a:latin typeface="Georgia" panose="02040502050405020303" pitchFamily="34" charset="0"/>
+                <a:ea typeface="Georgia" panose="02040502050405020303" pitchFamily="34" charset="-122"/>
+                <a:cs typeface="Georgia" panose="02040502050405020303" pitchFamily="34" charset="-120"/>
               </a:rPr>
               <a:t>08</a:t>
             </a:r>
@@ -13073,7 +12784,7 @@
     </a:clrScheme>
     <a:fontScheme name="Office">
       <a:majorFont>
-        <a:latin typeface="Calibri Light" panose="020F0302020204030204"/>
+        <a:latin typeface="Calibri Light"/>
         <a:ea typeface=""/>
         <a:cs typeface=""/>
         <a:font script="Jpan" typeface="游ゴシック Light"/>
@@ -13106,26 +12817,9 @@
         <a:font script="Viet" typeface="Times New Roman"/>
         <a:font script="Uigh" typeface="Microsoft Uighur"/>
         <a:font script="Geor" typeface="Sylfaen"/>
-        <a:font script="Armn" typeface="Arial"/>
-        <a:font script="Bugi" typeface="Leelawadee UI"/>
-        <a:font script="Bopo" typeface="Microsoft JhengHei"/>
-        <a:font script="Java" typeface="Javanese Text"/>
-        <a:font script="Lisu" typeface="Segoe UI"/>
-        <a:font script="Mymr" typeface="Myanmar Text"/>
-        <a:font script="Nkoo" typeface="Ebrima"/>
-        <a:font script="Olck" typeface="Nirmala UI"/>
-        <a:font script="Osma" typeface="Ebrima"/>
-        <a:font script="Phag" typeface="Phagspa"/>
-        <a:font script="Syrn" typeface="Estrangelo Edessa"/>
-        <a:font script="Syrj" typeface="Estrangelo Edessa"/>
-        <a:font script="Syre" typeface="Estrangelo Edessa"/>
-        <a:font script="Sora" typeface="Nirmala UI"/>
-        <a:font script="Tale" typeface="Microsoft Tai Le"/>
-        <a:font script="Talu" typeface="Microsoft New Tai Lue"/>
-        <a:font script="Tfng" typeface="Ebrima"/>
       </a:majorFont>
       <a:minorFont>
-        <a:latin typeface="Calibri" panose="020F0502020204030204"/>
+        <a:latin typeface="Calibri"/>
         <a:ea typeface=""/>
         <a:cs typeface=""/>
         <a:font script="Jpan" typeface="游ゴシック"/>
@@ -13158,23 +12852,6 @@
         <a:font script="Viet" typeface="Arial"/>
         <a:font script="Uigh" typeface="Microsoft Uighur"/>
         <a:font script="Geor" typeface="Sylfaen"/>
-        <a:font script="Armn" typeface="Arial"/>
-        <a:font script="Bugi" typeface="Leelawadee UI"/>
-        <a:font script="Bopo" typeface="Microsoft JhengHei"/>
-        <a:font script="Java" typeface="Javanese Text"/>
-        <a:font script="Lisu" typeface="Segoe UI"/>
-        <a:font script="Mymr" typeface="Myanmar Text"/>
-        <a:font script="Nkoo" typeface="Ebrima"/>
-        <a:font script="Olck" typeface="Nirmala UI"/>
-        <a:font script="Osma" typeface="Ebrima"/>
-        <a:font script="Phag" typeface="Phagspa"/>
-        <a:font script="Syrn" typeface="Estrangelo Edessa"/>
-        <a:font script="Syrj" typeface="Estrangelo Edessa"/>
-        <a:font script="Syre" typeface="Estrangelo Edessa"/>
-        <a:font script="Sora" typeface="Nirmala UI"/>
-        <a:font script="Tale" typeface="Microsoft Tai Le"/>
-        <a:font script="Talu" typeface="Microsoft New Tai Lue"/>
-        <a:font script="Tfng" typeface="Ebrima"/>
       </a:minorFont>
     </a:fontScheme>
     <a:fmtScheme name="Office">
@@ -13315,8 +12992,265 @@
       </a:bgFillStyleLst>
     </a:fmtScheme>
   </a:themeElements>
-  <a:objectDefaults/>
-  <a:extraClrSchemeLst/>
+  <a:extLst>
+    <a:ext uri="{05A4C25C-085E-4340-85A3-A5531E510DB2}">
+      <thm15:themeFamily xmlns:thm15="http://schemas.microsoft.com/office/thememl/2012/main" name="Office Theme" id="{62F939B6-93AF-4DB8-9C6B-D6C7DFDC589F}" vid="{4A3C46E8-61CC-4603-A589-7422A47A8E4A}"/>
+    </a:ext>
+  </a:extLst>
+</a:theme>
+</file>
+
+<file path=ppt/theme/theme2.xml><?xml version="1.0" encoding="utf-8"?>
+<a:theme xmlns:a="http://schemas.openxmlformats.org/drawingml/2006/main" name="Office Theme">
+  <a:themeElements>
+    <a:clrScheme name="Office">
+      <a:dk1>
+        <a:sysClr val="windowText" lastClr="000000"/>
+      </a:dk1>
+      <a:lt1>
+        <a:sysClr val="window" lastClr="FFFFFF"/>
+      </a:lt1>
+      <a:dk2>
+        <a:srgbClr val="44546A"/>
+      </a:dk2>
+      <a:lt2>
+        <a:srgbClr val="E7E6E6"/>
+      </a:lt2>
+      <a:accent1>
+        <a:srgbClr val="4472C4"/>
+      </a:accent1>
+      <a:accent2>
+        <a:srgbClr val="ED7D31"/>
+      </a:accent2>
+      <a:accent3>
+        <a:srgbClr val="A5A5A5"/>
+      </a:accent3>
+      <a:accent4>
+        <a:srgbClr val="FFC000"/>
+      </a:accent4>
+      <a:accent5>
+        <a:srgbClr val="5B9BD5"/>
+      </a:accent5>
+      <a:accent6>
+        <a:srgbClr val="70AD47"/>
+      </a:accent6>
+      <a:hlink>
+        <a:srgbClr val="0563C1"/>
+      </a:hlink>
+      <a:folHlink>
+        <a:srgbClr val="954F72"/>
+      </a:folHlink>
+    </a:clrScheme>
+    <a:fontScheme name="Office">
+      <a:majorFont>
+        <a:latin typeface="Calibri Light"/>
+        <a:ea typeface=""/>
+        <a:cs typeface=""/>
+        <a:font script="Jpan" typeface="游ゴシック Light"/>
+        <a:font script="Hang" typeface="맑은 고딕"/>
+        <a:font script="Hans" typeface="等线 Light"/>
+        <a:font script="Hant" typeface="新細明體"/>
+        <a:font script="Arab" typeface="Times New Roman"/>
+        <a:font script="Hebr" typeface="Times New Roman"/>
+        <a:font script="Thai" typeface="Angsana New"/>
+        <a:font script="Ethi" typeface="Nyala"/>
+        <a:font script="Beng" typeface="Vrinda"/>
+        <a:font script="Gujr" typeface="Shruti"/>
+        <a:font script="Khmr" typeface="MoolBoran"/>
+        <a:font script="Knda" typeface="Tunga"/>
+        <a:font script="Guru" typeface="Raavi"/>
+        <a:font script="Cans" typeface="Euphemia"/>
+        <a:font script="Cher" typeface="Plantagenet Cherokee"/>
+        <a:font script="Yiii" typeface="Microsoft Yi Baiti"/>
+        <a:font script="Tibt" typeface="Microsoft Himalaya"/>
+        <a:font script="Thaa" typeface="MV Boli"/>
+        <a:font script="Deva" typeface="Mangal"/>
+        <a:font script="Telu" typeface="Gautami"/>
+        <a:font script="Taml" typeface="Latha"/>
+        <a:font script="Syrc" typeface="Estrangelo Edessa"/>
+        <a:font script="Orya" typeface="Kalinga"/>
+        <a:font script="Mlym" typeface="Kartika"/>
+        <a:font script="Laoo" typeface="DokChampa"/>
+        <a:font script="Sinh" typeface="Iskoola Pota"/>
+        <a:font script="Mong" typeface="Mongolian Baiti"/>
+        <a:font script="Viet" typeface="Times New Roman"/>
+        <a:font script="Uigh" typeface="Microsoft Uighur"/>
+        <a:font script="Geor" typeface="Sylfaen"/>
+      </a:majorFont>
+      <a:minorFont>
+        <a:latin typeface="Calibri"/>
+        <a:ea typeface=""/>
+        <a:cs typeface=""/>
+        <a:font script="Jpan" typeface="游ゴシック"/>
+        <a:font script="Hang" typeface="맑은 고딕"/>
+        <a:font script="Hans" typeface="等线"/>
+        <a:font script="Hant" typeface="新細明體"/>
+        <a:font script="Arab" typeface="Arial"/>
+        <a:font script="Hebr" typeface="Arial"/>
+        <a:font script="Thai" typeface="Cordia New"/>
+        <a:font script="Ethi" typeface="Nyala"/>
+        <a:font script="Beng" typeface="Vrinda"/>
+        <a:font script="Gujr" typeface="Shruti"/>
+        <a:font script="Khmr" typeface="DaunPenh"/>
+        <a:font script="Knda" typeface="Tunga"/>
+        <a:font script="Guru" typeface="Raavi"/>
+        <a:font script="Cans" typeface="Euphemia"/>
+        <a:font script="Cher" typeface="Plantagenet Cherokee"/>
+        <a:font script="Yiii" typeface="Microsoft Yi Baiti"/>
+        <a:font script="Tibt" typeface="Microsoft Himalaya"/>
+        <a:font script="Thaa" typeface="MV Boli"/>
+        <a:font script="Deva" typeface="Mangal"/>
+        <a:font script="Telu" typeface="Gautami"/>
+        <a:font script="Taml" typeface="Latha"/>
+        <a:font script="Syrc" typeface="Estrangelo Edessa"/>
+        <a:font script="Orya" typeface="Kalinga"/>
+        <a:font script="Mlym" typeface="Kartika"/>
+        <a:font script="Laoo" typeface="DokChampa"/>
+        <a:font script="Sinh" typeface="Iskoola Pota"/>
+        <a:font script="Mong" typeface="Mongolian Baiti"/>
+        <a:font script="Viet" typeface="Arial"/>
+        <a:font script="Uigh" typeface="Microsoft Uighur"/>
+        <a:font script="Geor" typeface="Sylfaen"/>
+      </a:minorFont>
+    </a:fontScheme>
+    <a:fmtScheme name="Office">
+      <a:fillStyleLst>
+        <a:solidFill>
+          <a:schemeClr val="phClr"/>
+        </a:solidFill>
+        <a:gradFill rotWithShape="1">
+          <a:gsLst>
+            <a:gs pos="0">
+              <a:schemeClr val="phClr">
+                <a:lumMod val="110000"/>
+                <a:satMod val="105000"/>
+                <a:tint val="67000"/>
+              </a:schemeClr>
+            </a:gs>
+            <a:gs pos="50000">
+              <a:schemeClr val="phClr">
+                <a:lumMod val="105000"/>
+                <a:satMod val="103000"/>
+                <a:tint val="73000"/>
+              </a:schemeClr>
+            </a:gs>
+            <a:gs pos="100000">
+              <a:schemeClr val="phClr">
+                <a:lumMod val="105000"/>
+                <a:satMod val="109000"/>
+                <a:tint val="81000"/>
+              </a:schemeClr>
+            </a:gs>
+          </a:gsLst>
+          <a:lin ang="5400000" scaled="0"/>
+        </a:gradFill>
+        <a:gradFill rotWithShape="1">
+          <a:gsLst>
+            <a:gs pos="0">
+              <a:schemeClr val="phClr">
+                <a:satMod val="103000"/>
+                <a:lumMod val="102000"/>
+                <a:tint val="94000"/>
+              </a:schemeClr>
+            </a:gs>
+            <a:gs pos="50000">
+              <a:schemeClr val="phClr">
+                <a:satMod val="110000"/>
+                <a:lumMod val="100000"/>
+                <a:shade val="100000"/>
+              </a:schemeClr>
+            </a:gs>
+            <a:gs pos="100000">
+              <a:schemeClr val="phClr">
+                <a:lumMod val="99000"/>
+                <a:satMod val="120000"/>
+                <a:shade val="78000"/>
+              </a:schemeClr>
+            </a:gs>
+          </a:gsLst>
+          <a:lin ang="5400000" scaled="0"/>
+        </a:gradFill>
+      </a:fillStyleLst>
+      <a:lnStyleLst>
+        <a:ln w="6350" cap="flat" cmpd="sng" algn="ctr">
+          <a:solidFill>
+            <a:schemeClr val="phClr"/>
+          </a:solidFill>
+          <a:prstDash val="solid"/>
+          <a:miter lim="800000"/>
+        </a:ln>
+        <a:ln w="12700" cap="flat" cmpd="sng" algn="ctr">
+          <a:solidFill>
+            <a:schemeClr val="phClr"/>
+          </a:solidFill>
+          <a:prstDash val="solid"/>
+          <a:miter lim="800000"/>
+        </a:ln>
+        <a:ln w="19050" cap="flat" cmpd="sng" algn="ctr">
+          <a:solidFill>
+            <a:schemeClr val="phClr"/>
+          </a:solidFill>
+          <a:prstDash val="solid"/>
+          <a:miter lim="800000"/>
+        </a:ln>
+      </a:lnStyleLst>
+      <a:effectStyleLst>
+        <a:effectStyle>
+          <a:effectLst/>
+        </a:effectStyle>
+        <a:effectStyle>
+          <a:effectLst/>
+        </a:effectStyle>
+        <a:effectStyle>
+          <a:effectLst>
+            <a:outerShdw blurRad="57150" dist="19050" dir="5400000" algn="ctr" rotWithShape="0">
+              <a:srgbClr val="000000">
+                <a:alpha val="63000"/>
+              </a:srgbClr>
+            </a:outerShdw>
+          </a:effectLst>
+        </a:effectStyle>
+      </a:effectStyleLst>
+      <a:bgFillStyleLst>
+        <a:solidFill>
+          <a:schemeClr val="phClr"/>
+        </a:solidFill>
+        <a:solidFill>
+          <a:schemeClr val="phClr">
+            <a:tint val="95000"/>
+            <a:satMod val="170000"/>
+          </a:schemeClr>
+        </a:solidFill>
+        <a:gradFill rotWithShape="1">
+          <a:gsLst>
+            <a:gs pos="0">
+              <a:schemeClr val="phClr">
+                <a:tint val="93000"/>
+                <a:satMod val="150000"/>
+                <a:shade val="98000"/>
+                <a:lumMod val="102000"/>
+              </a:schemeClr>
+            </a:gs>
+            <a:gs pos="50000">
+              <a:schemeClr val="phClr">
+                <a:tint val="98000"/>
+                <a:satMod val="130000"/>
+                <a:shade val="90000"/>
+                <a:lumMod val="103000"/>
+              </a:schemeClr>
+            </a:gs>
+            <a:gs pos="100000">
+              <a:schemeClr val="phClr">
+                <a:shade val="63000"/>
+                <a:satMod val="120000"/>
+              </a:schemeClr>
+            </a:gs>
+          </a:gsLst>
+          <a:lin ang="5400000" scaled="0"/>
+        </a:gradFill>
+      </a:bgFillStyleLst>
+    </a:fmtScheme>
+  </a:themeElements>
   <a:extLst>
     <a:ext uri="{05A4C25C-085E-4340-85A3-A5531E510DB2}">
       <thm15:themeFamily xmlns:thm15="http://schemas.microsoft.com/office/thememl/2012/main" name="Office Theme" id="{62F939B6-93AF-4DB8-9C6B-D6C7DFDC589F}" vid="{4A3C46E8-61CC-4603-A589-7422A47A8E4A}"/>
